--- a/SummerSchool16/slides/hu.pptx
+++ b/SummerSchool16/slides/hu.pptx
@@ -5,10 +5,10 @@
     <p:sldMasterId id="2147485124" r:id="rId1"/>
   </p:sldMasterIdLst>
   <p:notesMasterIdLst>
-    <p:notesMasterId r:id="rId60"/>
+    <p:notesMasterId r:id="rId61"/>
   </p:notesMasterIdLst>
   <p:handoutMasterIdLst>
-    <p:handoutMasterId r:id="rId61"/>
+    <p:handoutMasterId r:id="rId62"/>
   </p:handoutMasterIdLst>
   <p:sldIdLst>
     <p:sldId id="559" r:id="rId2"/>
@@ -53,22 +53,23 @@
     <p:sldId id="678" r:id="rId41"/>
     <p:sldId id="679" r:id="rId42"/>
     <p:sldId id="680" r:id="rId43"/>
-    <p:sldId id="681" r:id="rId44"/>
-    <p:sldId id="682" r:id="rId45"/>
-    <p:sldId id="683" r:id="rId46"/>
-    <p:sldId id="684" r:id="rId47"/>
-    <p:sldId id="685" r:id="rId48"/>
-    <p:sldId id="686" r:id="rId49"/>
-    <p:sldId id="687" r:id="rId50"/>
-    <p:sldId id="688" r:id="rId51"/>
-    <p:sldId id="689" r:id="rId52"/>
-    <p:sldId id="690" r:id="rId53"/>
-    <p:sldId id="691" r:id="rId54"/>
-    <p:sldId id="692" r:id="rId55"/>
-    <p:sldId id="693" r:id="rId56"/>
-    <p:sldId id="694" r:id="rId57"/>
-    <p:sldId id="695" r:id="rId58"/>
-    <p:sldId id="696" r:id="rId59"/>
+    <p:sldId id="682" r:id="rId44"/>
+    <p:sldId id="683" r:id="rId45"/>
+    <p:sldId id="684" r:id="rId46"/>
+    <p:sldId id="685" r:id="rId47"/>
+    <p:sldId id="686" r:id="rId48"/>
+    <p:sldId id="687" r:id="rId49"/>
+    <p:sldId id="688" r:id="rId50"/>
+    <p:sldId id="689" r:id="rId51"/>
+    <p:sldId id="690" r:id="rId52"/>
+    <p:sldId id="691" r:id="rId53"/>
+    <p:sldId id="692" r:id="rId54"/>
+    <p:sldId id="693" r:id="rId55"/>
+    <p:sldId id="694" r:id="rId56"/>
+    <p:sldId id="695" r:id="rId57"/>
+    <p:sldId id="696" r:id="rId58"/>
+    <p:sldId id="697" r:id="rId59"/>
+    <p:sldId id="698" r:id="rId60"/>
   </p:sldIdLst>
   <p:sldSz cx="9144000" cy="6858000" type="screen4x3"/>
   <p:notesSz cx="6858000" cy="9144000"/>
@@ -253,7 +254,7 @@
             <a:fld id="{13E93697-C8A9-9B49-BE2A-924B569EB904}" type="datetimeFigureOut">
               <a:rPr lang="ja-JP" altLang="en-US" smtClean="0"/>
               <a:pPr/>
-              <a:t>16/07/25</a:t>
+              <a:t>16/07/27</a:t>
             </a:fld>
             <a:endParaRPr lang="ja-JP" altLang="en-US"/>
           </a:p>
@@ -421,7 +422,7 @@
             <a:fld id="{56DBB2EE-6F08-0F40-84F7-F95277EBA770}" type="datetimeFigureOut">
               <a:rPr lang="ja-JP" altLang="en-US" smtClean="0"/>
               <a:pPr/>
-              <a:t>16/07/25</a:t>
+              <a:t>16/07/27</a:t>
             </a:fld>
             <a:endParaRPr lang="ja-JP" altLang="en-US"/>
           </a:p>
@@ -5664,11 +5665,7 @@
             <a:pPr algn="ctr"/>
             <a:r>
               <a:rPr lang="en-US" altLang="ja-JP" dirty="0" smtClean="0"/>
-              <a:t>Relational </a:t>
-            </a:r>
-            <a:r>
-              <a:rPr lang="en-US" altLang="ja-JP" dirty="0" smtClean="0"/>
-              <a:t>Lenses </a:t>
+              <a:t>Relational Lenses </a:t>
             </a:r>
           </a:p>
           <a:p>
@@ -5686,19 +5683,7 @@
             </a:r>
             <a:r>
               <a:rPr lang="en-US" altLang="ja-JP" dirty="0" smtClean="0"/>
-              <a:t>PO</a:t>
-            </a:r>
-            <a:r>
-              <a:rPr lang="en-US" altLang="ja-JP" dirty="0" smtClean="0"/>
-              <a:t>DS</a:t>
-            </a:r>
-            <a:r>
-              <a:rPr lang="en-US" altLang="ja-JP" dirty="0" smtClean="0"/>
-              <a:t>’</a:t>
-            </a:r>
-            <a:r>
-              <a:rPr lang="en-US" altLang="ja-JP" dirty="0" smtClean="0"/>
-              <a:t>06</a:t>
+              <a:t>PODS’06</a:t>
             </a:r>
             <a:r>
               <a:rPr kumimoji="1" lang="en-US" altLang="ja-JP" dirty="0" smtClean="0"/>
@@ -10158,15 +10143,7 @@
             </a:r>
             <a:r>
               <a:rPr kumimoji="1" lang="en-US" altLang="ja-JP" sz="2400" dirty="0" smtClean="0"/>
-              <a:t>following </a:t>
-            </a:r>
-            <a:r>
-              <a:rPr kumimoji="1" lang="en-US" altLang="ja-JP" sz="2400" dirty="0" smtClean="0"/>
-              <a:t>put</a:t>
-            </a:r>
-            <a:r>
-              <a:rPr kumimoji="1" lang="en-US" altLang="ja-JP" sz="2400" dirty="0" smtClean="0"/>
-              <a:t>s</a:t>
+              <a:t>following puts</a:t>
             </a:r>
             <a:r>
               <a:rPr kumimoji="1" lang="ja-JP" altLang="en-US" sz="2400" dirty="0" smtClean="0"/>
@@ -10178,11 +10155,7 @@
             </a:r>
             <a:r>
               <a:rPr kumimoji="1" lang="en-US" altLang="ja-JP" sz="2400" dirty="0" smtClean="0"/>
-              <a:t> </a:t>
-            </a:r>
-            <a:r>
-              <a:rPr kumimoji="1" lang="en-US" altLang="ja-JP" sz="2400" dirty="0" smtClean="0"/>
-              <a:t>well-behaved?</a:t>
+              <a:t> well-behaved?</a:t>
             </a:r>
           </a:p>
           <a:p>
@@ -10698,7 +10671,6 @@
               <a:rPr lang="en-US" altLang="ja-JP" dirty="0" smtClean="0"/>
               <a:t>?</a:t>
             </a:r>
-            <a:endParaRPr lang="en-US" altLang="ja-JP" dirty="0" smtClean="0"/>
           </a:p>
           <a:p>
             <a:r>
@@ -10737,11 +10709,7 @@
           <a:p>
             <a:r>
               <a:rPr kumimoji="1" lang="en-US" altLang="ja-JP" dirty="0" smtClean="0"/>
-              <a:t>Lecture </a:t>
-            </a:r>
-            <a:r>
-              <a:rPr kumimoji="1" lang="en-US" altLang="ja-JP" dirty="0" smtClean="0"/>
-              <a:t>3: Three Applications using </a:t>
+              <a:t>Lecture 3: Three Applications using </a:t>
             </a:r>
             <a:r>
               <a:rPr kumimoji="1" lang="en-US" altLang="ja-JP" dirty="0" err="1" smtClean="0"/>
@@ -10853,15 +10821,7 @@
             </a:r>
             <a:r>
               <a:rPr lang="en-US" altLang="ja-JP" sz="2400" b="1" dirty="0" smtClean="0"/>
-              <a:t>MdJeyk</a:t>
-            </a:r>
-            <a:r>
-              <a:rPr lang="en-US" altLang="ja-JP" sz="2400" b="1" dirty="0" smtClean="0"/>
-              <a:t>: lecture notes and codes</a:t>
-            </a:r>
-            <a:r>
-              <a:rPr lang="en-US" altLang="ja-JP" sz="2400" b="1" dirty="0" smtClean="0"/>
-              <a:t> </a:t>
+              <a:t>MdJeyk: lecture notes and codes </a:t>
             </a:r>
             <a:endParaRPr lang="ja-JP" altLang="en-US" sz="2400" b="1" dirty="0"/>
           </a:p>
@@ -11702,7 +11662,6 @@
               <a:rPr kumimoji="1" lang="en-US" altLang="ja-JP" sz="2000" dirty="0" smtClean="0"/>
               <a:t>ehavior</a:t>
             </a:r>
-            <a:endParaRPr kumimoji="1" lang="en-US" altLang="ja-JP" sz="2000" dirty="0" smtClean="0"/>
           </a:p>
           <a:p>
             <a:pPr marL="342900" indent="-342900" algn="l">
@@ -18058,15 +18017,7 @@
             </a:r>
             <a:r>
               <a:rPr lang="en-US" altLang="ja-JP" sz="2000" dirty="0" smtClean="0"/>
-              <a:t>(</a:t>
-            </a:r>
-            <a:r>
-              <a:rPr lang="en-US" altLang="ja-JP" sz="2000" dirty="0" smtClean="0"/>
-              <a:t>s</a:t>
-            </a:r>
-            <a:r>
-              <a:rPr lang="en-US" altLang="ja-JP" sz="2000" dirty="0" smtClean="0"/>
-              <a:t>,</a:t>
+              <a:t>(s,</a:t>
             </a:r>
             <a:r>
               <a:rPr lang="en-US" altLang="ja-JP" sz="2000" dirty="0"/>
@@ -18090,11 +18041,7 @@
             </a:r>
             <a:r>
               <a:rPr lang="en-US" altLang="ja-JP" sz="2000" dirty="0" smtClean="0"/>
-              <a:t>s</a:t>
-            </a:r>
-            <a:r>
-              <a:rPr lang="en-US" altLang="ja-JP" sz="2000" dirty="0" smtClean="0"/>
-              <a:t> </a:t>
+              <a:t>s </a:t>
             </a:r>
             <a:r>
               <a:rPr lang="en-US" altLang="ja-JP" sz="2000" dirty="0"/>
@@ -18128,11 +18075,7 @@
             </a:r>
             <a:r>
               <a:rPr lang="en-US" altLang="ja-JP" sz="2000" dirty="0" smtClean="0"/>
-              <a:t>_</a:t>
-            </a:r>
-            <a:r>
-              <a:rPr lang="en-US" altLang="ja-JP" sz="2000" dirty="0" smtClean="0"/>
-              <a:t> </a:t>
+              <a:t>_ </a:t>
             </a:r>
             <a:r>
               <a:rPr lang="en-US" altLang="ja-JP" sz="2000" dirty="0"/>
@@ -18146,11 +18089,7 @@
             </a:r>
             <a:r>
               <a:rPr lang="en-US" altLang="ja-JP" sz="2000" dirty="0" smtClean="0"/>
-              <a:t> </a:t>
-            </a:r>
-            <a:r>
-              <a:rPr lang="en-US" altLang="ja-JP" sz="2000" dirty="0" smtClean="0"/>
-              <a:t>,  </a:t>
+              <a:t> ,  </a:t>
             </a:r>
             <a:r>
               <a:rPr lang="en-US" altLang="ja-JP" sz="2000" dirty="0"/>
@@ -18184,11 +18123,7 @@
             </a:r>
             <a:r>
               <a:rPr lang="en-US" altLang="ja-JP" sz="2000" dirty="0" smtClean="0"/>
-              <a:t> </a:t>
-            </a:r>
-            <a:r>
-              <a:rPr lang="en-US" altLang="ja-JP" sz="2000" dirty="0" smtClean="0"/>
-              <a:t>,  </a:t>
+              <a:t> ,  </a:t>
             </a:r>
             <a:r>
               <a:rPr lang="en-US" altLang="ja-JP" sz="2000" dirty="0"/>
@@ -18981,7 +18916,7 @@
             <a:spLocks noGrp="1"/>
           </p:cNvSpPr>
           <p:nvPr>
-            <p:ph type="title"/>
+            <p:ph type="ctrTitle"/>
           </p:nvPr>
         </p:nvSpPr>
         <p:spPr/>
@@ -18989,18 +18924,30 @@
           <a:bodyPr/>
           <a:lstStyle/>
           <a:p>
-            <a:endParaRPr kumimoji="1" lang="ja-JP" altLang="en-US"/>
-          </a:p>
-        </p:txBody>
-      </p:sp>
-      <p:sp>
-        <p:nvSpPr>
-          <p:cNvPr id="3" name="コンテンツ プレースホルダー 2"/>
+            <a:r>
+              <a:rPr lang="en-US" altLang="ja-JP" dirty="0" err="1"/>
+              <a:t>Bidirectionalizing</a:t>
+            </a:r>
+            <a:r>
+              <a:rPr lang="en-US" altLang="ja-JP" dirty="0"/>
+              <a:t> relational queries with </a:t>
+            </a:r>
+            <a:r>
+              <a:rPr lang="en-US" altLang="ja-JP" dirty="0" err="1"/>
+              <a:t>BiGUL</a:t>
+            </a:r>
+            <a:endParaRPr kumimoji="1" lang="ja-JP" altLang="en-US" dirty="0"/>
+          </a:p>
+        </p:txBody>
+      </p:sp>
+      <p:sp>
+        <p:nvSpPr>
+          <p:cNvPr id="3" name="サブタイトル 2"/>
           <p:cNvSpPr>
             <a:spLocks noGrp="1"/>
           </p:cNvSpPr>
           <p:nvPr>
-            <p:ph idx="1"/>
+            <p:ph type="subTitle" idx="1"/>
           </p:nvPr>
         </p:nvSpPr>
         <p:spPr/>
@@ -19027,19 +18974,19 @@
           <a:bodyPr/>
           <a:lstStyle/>
           <a:p>
-            <a:fld id="{F96F1464-7F58-8745-A325-E585E650CEFA}" type="slidenum">
-              <a:rPr lang="ja-JP" altLang="en-US" smtClean="0"/>
+            <a:fld id="{EA7C8D44-3667-46F6-9772-CC52308E2A7F}" type="slidenum">
+              <a:rPr kumimoji="0" lang="en-US" smtClean="0"/>
               <a:pPr/>
               <a:t>43</a:t>
             </a:fld>
-            <a:endParaRPr lang="ja-JP" altLang="en-US"/>
+            <a:endParaRPr kumimoji="0" lang="en-US" dirty="0"/>
           </a:p>
         </p:txBody>
       </p:sp>
     </p:spTree>
     <p:extLst>
       <p:ext uri="{BB962C8B-B14F-4D97-AF65-F5344CB8AC3E}">
-        <p14:creationId xmlns:p14="http://schemas.microsoft.com/office/powerpoint/2010/main" val="1685088199"/>
+        <p14:creationId xmlns:p14="http://schemas.microsoft.com/office/powerpoint/2010/main" val="3330549403"/>
       </p:ext>
     </p:extLst>
   </p:cSld>
@@ -19080,7 +19027,7 @@
             <a:spLocks noGrp="1"/>
           </p:cNvSpPr>
           <p:nvPr>
-            <p:ph type="ctrTitle"/>
+            <p:ph type="title"/>
           </p:nvPr>
         </p:nvSpPr>
         <p:spPr/>
@@ -19089,37 +19036,18 @@
           <a:lstStyle/>
           <a:p>
             <a:r>
-              <a:rPr lang="en-US" altLang="ja-JP" dirty="0" err="1"/>
-              <a:t>Bidirectionalizing</a:t>
-            </a:r>
-            <a:r>
-              <a:rPr lang="en-US" altLang="ja-JP" dirty="0"/>
-              <a:t> relational queries with </a:t>
-            </a:r>
-            <a:r>
-              <a:rPr lang="en-US" altLang="ja-JP" dirty="0" err="1"/>
-              <a:t>BiGUL</a:t>
+              <a:rPr kumimoji="1" lang="en-US" altLang="ja-JP" dirty="0" smtClean="0"/>
+              <a:t>View</a:t>
+            </a:r>
+            <a:r>
+              <a:rPr kumimoji="1" lang="ja-JP" altLang="en-US" dirty="0" smtClean="0"/>
+              <a:t> </a:t>
+            </a:r>
+            <a:r>
+              <a:rPr kumimoji="1" lang="en-US" altLang="ja-JP" dirty="0" smtClean="0"/>
+              <a:t>Updating for Relational Database</a:t>
             </a:r>
             <a:endParaRPr kumimoji="1" lang="ja-JP" altLang="en-US" dirty="0"/>
-          </a:p>
-        </p:txBody>
-      </p:sp>
-      <p:sp>
-        <p:nvSpPr>
-          <p:cNvPr id="3" name="サブタイトル 2"/>
-          <p:cNvSpPr>
-            <a:spLocks noGrp="1"/>
-          </p:cNvSpPr>
-          <p:nvPr>
-            <p:ph type="subTitle" idx="1"/>
-          </p:nvPr>
-        </p:nvSpPr>
-        <p:spPr/>
-        <p:txBody>
-          <a:bodyPr/>
-          <a:lstStyle/>
-          <a:p>
-            <a:endParaRPr kumimoji="1" lang="ja-JP" altLang="en-US"/>
           </a:p>
         </p:txBody>
       </p:sp>
@@ -19138,102 +19066,10 @@
           <a:bodyPr/>
           <a:lstStyle/>
           <a:p>
-            <a:fld id="{EA7C8D44-3667-46F6-9772-CC52308E2A7F}" type="slidenum">
-              <a:rPr kumimoji="0" lang="en-US" smtClean="0"/>
-              <a:pPr/>
-              <a:t>44</a:t>
-            </a:fld>
-            <a:endParaRPr kumimoji="0" lang="en-US" dirty="0"/>
-          </a:p>
-        </p:txBody>
-      </p:sp>
-    </p:spTree>
-    <p:extLst>
-      <p:ext uri="{BB962C8B-B14F-4D97-AF65-F5344CB8AC3E}">
-        <p14:creationId xmlns:p14="http://schemas.microsoft.com/office/powerpoint/2010/main" val="3330549403"/>
-      </p:ext>
-    </p:extLst>
-  </p:cSld>
-  <p:clrMapOvr>
-    <a:masterClrMapping/>
-  </p:clrMapOvr>
-  <p:timing>
-    <p:tnLst>
-      <p:par>
-        <p:cTn xmlns:p14="http://schemas.microsoft.com/office/powerpoint/2010/main" id="1" dur="indefinite" restart="never" nodeType="tmRoot"/>
-      </p:par>
-    </p:tnLst>
-  </p:timing>
-</p:sld>
-</file>
-
-<file path=ppt/slides/slide45.xml><?xml version="1.0" encoding="utf-8"?>
-<p:sld xmlns:a="http://schemas.openxmlformats.org/drawingml/2006/main" xmlns:r="http://schemas.openxmlformats.org/officeDocument/2006/relationships" xmlns:p="http://schemas.openxmlformats.org/presentationml/2006/main">
-  <p:cSld>
-    <p:spTree>
-      <p:nvGrpSpPr>
-        <p:cNvPr id="1" name=""/>
-        <p:cNvGrpSpPr/>
-        <p:nvPr/>
-      </p:nvGrpSpPr>
-      <p:grpSpPr>
-        <a:xfrm>
-          <a:off x="0" y="0"/>
-          <a:ext cx="0" cy="0"/>
-          <a:chOff x="0" y="0"/>
-          <a:chExt cx="0" cy="0"/>
-        </a:xfrm>
-      </p:grpSpPr>
-      <p:sp>
-        <p:nvSpPr>
-          <p:cNvPr id="2" name="タイトル 1"/>
-          <p:cNvSpPr>
-            <a:spLocks noGrp="1"/>
-          </p:cNvSpPr>
-          <p:nvPr>
-            <p:ph type="title"/>
-          </p:nvPr>
-        </p:nvSpPr>
-        <p:spPr/>
-        <p:txBody>
-          <a:bodyPr/>
-          <a:lstStyle/>
-          <a:p>
-            <a:r>
-              <a:rPr kumimoji="1" lang="en-US" altLang="ja-JP" dirty="0" smtClean="0"/>
-              <a:t>View</a:t>
-            </a:r>
-            <a:r>
-              <a:rPr kumimoji="1" lang="ja-JP" altLang="en-US" dirty="0" smtClean="0"/>
-              <a:t> </a:t>
-            </a:r>
-            <a:r>
-              <a:rPr kumimoji="1" lang="en-US" altLang="ja-JP" dirty="0" smtClean="0"/>
-              <a:t>Updating for Relational Database</a:t>
-            </a:r>
-            <a:endParaRPr kumimoji="1" lang="ja-JP" altLang="en-US" dirty="0"/>
-          </a:p>
-        </p:txBody>
-      </p:sp>
-      <p:sp>
-        <p:nvSpPr>
-          <p:cNvPr id="4" name="スライド番号プレースホルダー 3"/>
-          <p:cNvSpPr>
-            <a:spLocks noGrp="1"/>
-          </p:cNvSpPr>
-          <p:nvPr>
-            <p:ph type="sldNum" sz="quarter" idx="11"/>
-          </p:nvPr>
-        </p:nvSpPr>
-        <p:spPr/>
-        <p:txBody>
-          <a:bodyPr/>
-          <a:lstStyle/>
-          <a:p>
             <a:fld id="{F96F1464-7F58-8745-A325-E585E650CEFA}" type="slidenum">
               <a:rPr lang="ja-JP" altLang="en-US" smtClean="0"/>
               <a:pPr/>
-              <a:t>45</a:t>
+              <a:t>44</a:t>
             </a:fld>
             <a:endParaRPr lang="ja-JP" altLang="en-US"/>
           </a:p>
@@ -19784,7 +19620,7 @@
 </p:sld>
 </file>
 
-<file path=ppt/slides/slide46.xml><?xml version="1.0" encoding="utf-8"?>
+<file path=ppt/slides/slide45.xml><?xml version="1.0" encoding="utf-8"?>
 <p:sld xmlns:a="http://schemas.openxmlformats.org/drawingml/2006/main" xmlns:r="http://schemas.openxmlformats.org/officeDocument/2006/relationships" xmlns:p="http://schemas.openxmlformats.org/presentationml/2006/main">
   <p:cSld>
     <p:spTree>
@@ -19936,7 +19772,7 @@
             <a:fld id="{F96F1464-7F58-8745-A325-E585E650CEFA}" type="slidenum">
               <a:rPr lang="ja-JP" altLang="en-US" smtClean="0"/>
               <a:pPr/>
-              <a:t>46</a:t>
+              <a:t>45</a:t>
             </a:fld>
             <a:endParaRPr lang="ja-JP" altLang="en-US"/>
           </a:p>
@@ -20076,6 +19912,547 @@
 </p:sld>
 </file>
 
+<file path=ppt/slides/slide46.xml><?xml version="1.0" encoding="utf-8"?>
+<p:sld xmlns:a="http://schemas.openxmlformats.org/drawingml/2006/main" xmlns:r="http://schemas.openxmlformats.org/officeDocument/2006/relationships" xmlns:p="http://schemas.openxmlformats.org/presentationml/2006/main">
+  <p:cSld>
+    <p:spTree>
+      <p:nvGrpSpPr>
+        <p:cNvPr id="1" name=""/>
+        <p:cNvGrpSpPr/>
+        <p:nvPr/>
+      </p:nvGrpSpPr>
+      <p:grpSpPr>
+        <a:xfrm>
+          <a:off x="0" y="0"/>
+          <a:ext cx="0" cy="0"/>
+          <a:chOff x="0" y="0"/>
+          <a:chExt cx="0" cy="0"/>
+        </a:xfrm>
+      </p:grpSpPr>
+      <p:sp>
+        <p:nvSpPr>
+          <p:cNvPr id="2" name="タイトル 1"/>
+          <p:cNvSpPr>
+            <a:spLocks noGrp="1"/>
+          </p:cNvSpPr>
+          <p:nvPr>
+            <p:ph type="title"/>
+          </p:nvPr>
+        </p:nvSpPr>
+        <p:spPr/>
+        <p:txBody>
+          <a:bodyPr/>
+          <a:lstStyle/>
+          <a:p>
+            <a:r>
+              <a:rPr lang="en-US" altLang="ja-JP" dirty="0" smtClean="0"/>
+              <a:t>Relational Table</a:t>
+            </a:r>
+            <a:endParaRPr kumimoji="1" lang="ja-JP" altLang="en-US" dirty="0"/>
+          </a:p>
+        </p:txBody>
+      </p:sp>
+      <p:sp>
+        <p:nvSpPr>
+          <p:cNvPr id="4" name="スライド番号プレースホルダー 3"/>
+          <p:cNvSpPr>
+            <a:spLocks noGrp="1"/>
+          </p:cNvSpPr>
+          <p:nvPr>
+            <p:ph type="sldNum" sz="quarter" idx="11"/>
+          </p:nvPr>
+        </p:nvSpPr>
+        <p:spPr/>
+        <p:txBody>
+          <a:bodyPr/>
+          <a:lstStyle/>
+          <a:p>
+            <a:fld id="{F96F1464-7F58-8745-A325-E585E650CEFA}" type="slidenum">
+              <a:rPr lang="ja-JP" altLang="en-US" smtClean="0"/>
+              <a:pPr/>
+              <a:t>46</a:t>
+            </a:fld>
+            <a:endParaRPr lang="ja-JP" altLang="en-US"/>
+          </a:p>
+        </p:txBody>
+      </p:sp>
+      <p:sp>
+        <p:nvSpPr>
+          <p:cNvPr id="5" name="正方形/長方形 4"/>
+          <p:cNvSpPr/>
+          <p:nvPr/>
+        </p:nvSpPr>
+        <p:spPr>
+          <a:xfrm>
+            <a:off x="719723" y="1484784"/>
+            <a:ext cx="7802984" cy="1754327"/>
+          </a:xfrm>
+          <a:prstGeom prst="rect">
+            <a:avLst/>
+          </a:prstGeom>
+          <a:ln>
+            <a:solidFill>
+              <a:srgbClr val="FF6600"/>
+            </a:solidFill>
+          </a:ln>
+        </p:spPr>
+        <p:txBody>
+          <a:bodyPr wrap="square">
+            <a:spAutoFit/>
+          </a:bodyPr>
+          <a:lstStyle/>
+          <a:p>
+            <a:r>
+              <a:rPr lang="en-US" altLang="ja-JP" dirty="0"/>
+              <a:t>type RT = [Record]</a:t>
+            </a:r>
+          </a:p>
+          <a:p>
+            <a:r>
+              <a:rPr lang="en-US" altLang="ja-JP" dirty="0"/>
+              <a:t>type Record = [</a:t>
+            </a:r>
+            <a:r>
+              <a:rPr lang="en-US" altLang="ja-JP" dirty="0" err="1"/>
+              <a:t>RType</a:t>
+            </a:r>
+            <a:r>
+              <a:rPr lang="en-US" altLang="ja-JP" dirty="0"/>
+              <a:t>]</a:t>
+            </a:r>
+          </a:p>
+          <a:p>
+            <a:r>
+              <a:rPr lang="en-US" altLang="ja-JP" dirty="0"/>
+              <a:t>data </a:t>
+            </a:r>
+            <a:r>
+              <a:rPr lang="en-US" altLang="ja-JP" dirty="0" err="1"/>
+              <a:t>RType</a:t>
+            </a:r>
+            <a:r>
+              <a:rPr lang="en-US" altLang="ja-JP" dirty="0"/>
+              <a:t> = </a:t>
+            </a:r>
+            <a:r>
+              <a:rPr lang="en-US" altLang="ja-JP" dirty="0" err="1"/>
+              <a:t>RInt</a:t>
+            </a:r>
+            <a:r>
+              <a:rPr lang="en-US" altLang="ja-JP" dirty="0"/>
+              <a:t> </a:t>
+            </a:r>
+            <a:r>
+              <a:rPr lang="en-US" altLang="ja-JP" dirty="0" err="1"/>
+              <a:t>Int</a:t>
+            </a:r>
+            <a:r>
+              <a:rPr lang="en-US" altLang="ja-JP" dirty="0"/>
+              <a:t> </a:t>
+            </a:r>
+            <a:r>
+              <a:rPr lang="en-US" altLang="ja-JP" dirty="0" smtClean="0"/>
+              <a:t>| </a:t>
+            </a:r>
+            <a:r>
+              <a:rPr lang="en-US" altLang="ja-JP" dirty="0" err="1"/>
+              <a:t>RString</a:t>
+            </a:r>
+            <a:r>
+              <a:rPr lang="en-US" altLang="ja-JP" dirty="0"/>
+              <a:t> </a:t>
+            </a:r>
+            <a:r>
+              <a:rPr lang="en-US" altLang="ja-JP" dirty="0" smtClean="0"/>
+              <a:t>String </a:t>
+            </a:r>
+            <a:r>
+              <a:rPr lang="en-US" altLang="ja-JP" dirty="0"/>
+              <a:t>| </a:t>
+            </a:r>
+            <a:r>
+              <a:rPr lang="en-US" altLang="ja-JP" dirty="0" err="1"/>
+              <a:t>RFloat</a:t>
+            </a:r>
+            <a:r>
+              <a:rPr lang="en-US" altLang="ja-JP" dirty="0"/>
+              <a:t> </a:t>
+            </a:r>
+            <a:r>
+              <a:rPr lang="en-US" altLang="ja-JP" dirty="0" smtClean="0"/>
+              <a:t>Float </a:t>
+            </a:r>
+            <a:r>
+              <a:rPr lang="en-US" altLang="ja-JP" dirty="0"/>
+              <a:t>| </a:t>
+            </a:r>
+            <a:r>
+              <a:rPr lang="en-US" altLang="ja-JP" dirty="0" err="1"/>
+              <a:t>RDouble</a:t>
+            </a:r>
+            <a:r>
+              <a:rPr lang="en-US" altLang="ja-JP" dirty="0"/>
+              <a:t> Double</a:t>
+            </a:r>
+          </a:p>
+          <a:p>
+            <a:r>
+              <a:rPr lang="en-US" altLang="ja-JP" dirty="0"/>
+              <a:t>      deriving (Show, </a:t>
+            </a:r>
+            <a:r>
+              <a:rPr lang="en-US" altLang="ja-JP" dirty="0" err="1"/>
+              <a:t>Eq</a:t>
+            </a:r>
+            <a:r>
+              <a:rPr lang="en-US" altLang="ja-JP" dirty="0"/>
+              <a:t>, </a:t>
+            </a:r>
+            <a:r>
+              <a:rPr lang="en-US" altLang="ja-JP" dirty="0" err="1"/>
+              <a:t>Ord</a:t>
+            </a:r>
+            <a:r>
+              <a:rPr lang="en-US" altLang="ja-JP" dirty="0" smtClean="0"/>
+              <a:t>)</a:t>
+            </a:r>
+          </a:p>
+          <a:p>
+            <a:endParaRPr lang="en-US" altLang="ja-JP" dirty="0"/>
+          </a:p>
+          <a:p>
+            <a:r>
+              <a:rPr lang="en-US" altLang="ja-JP" dirty="0" err="1">
+                <a:solidFill>
+                  <a:srgbClr val="FF0000"/>
+                </a:solidFill>
+              </a:rPr>
+              <a:t>deriveBiGULGeneric</a:t>
+            </a:r>
+            <a:r>
+              <a:rPr lang="en-US" altLang="ja-JP" dirty="0">
+                <a:solidFill>
+                  <a:srgbClr val="FF0000"/>
+                </a:solidFill>
+              </a:rPr>
+              <a:t>  ''</a:t>
+            </a:r>
+            <a:r>
+              <a:rPr lang="en-US" altLang="ja-JP" dirty="0" err="1">
+                <a:solidFill>
+                  <a:srgbClr val="FF0000"/>
+                </a:solidFill>
+              </a:rPr>
+              <a:t>RType</a:t>
+            </a:r>
+            <a:endParaRPr lang="ja-JP" altLang="en-US" dirty="0">
+              <a:solidFill>
+                <a:srgbClr val="FF0000"/>
+              </a:solidFill>
+            </a:endParaRPr>
+          </a:p>
+        </p:txBody>
+      </p:sp>
+      <p:sp>
+        <p:nvSpPr>
+          <p:cNvPr id="6" name="正方形/長方形 5"/>
+          <p:cNvSpPr/>
+          <p:nvPr/>
+        </p:nvSpPr>
+        <p:spPr>
+          <a:xfrm>
+            <a:off x="144017" y="3652975"/>
+            <a:ext cx="8892479" cy="1754327"/>
+          </a:xfrm>
+          <a:prstGeom prst="rect">
+            <a:avLst/>
+          </a:prstGeom>
+          <a:ln>
+            <a:solidFill>
+              <a:schemeClr val="accent1"/>
+            </a:solidFill>
+          </a:ln>
+        </p:spPr>
+        <p:txBody>
+          <a:bodyPr wrap="square">
+            <a:spAutoFit/>
+          </a:bodyPr>
+          <a:lstStyle/>
+          <a:p>
+            <a:r>
+              <a:rPr lang="en-US" altLang="ja-JP" dirty="0"/>
+              <a:t>s  =  [ [</a:t>
+            </a:r>
+            <a:r>
+              <a:rPr lang="en-US" altLang="ja-JP" dirty="0" err="1"/>
+              <a:t>RString</a:t>
+            </a:r>
+            <a:r>
+              <a:rPr lang="en-US" altLang="ja-JP" dirty="0"/>
+              <a:t> "Lullaby",  </a:t>
+            </a:r>
+            <a:r>
+              <a:rPr lang="en-US" altLang="ja-JP" dirty="0" err="1"/>
+              <a:t>RInt</a:t>
+            </a:r>
+            <a:r>
+              <a:rPr lang="en-US" altLang="ja-JP" dirty="0"/>
+              <a:t> 1989, </a:t>
+            </a:r>
+            <a:r>
+              <a:rPr lang="en-US" altLang="ja-JP" dirty="0" err="1"/>
+              <a:t>RInt</a:t>
+            </a:r>
+            <a:r>
+              <a:rPr lang="en-US" altLang="ja-JP" dirty="0"/>
+              <a:t> 3, </a:t>
+            </a:r>
+            <a:r>
+              <a:rPr lang="en-US" altLang="ja-JP" dirty="0" err="1"/>
+              <a:t>RString</a:t>
+            </a:r>
+            <a:r>
+              <a:rPr lang="en-US" altLang="ja-JP" dirty="0"/>
+              <a:t> "Galore", </a:t>
+            </a:r>
+            <a:r>
+              <a:rPr lang="en-US" altLang="ja-JP" dirty="0" err="1"/>
+              <a:t>RInt</a:t>
+            </a:r>
+            <a:r>
+              <a:rPr lang="en-US" altLang="ja-JP" dirty="0"/>
+              <a:t> 1]</a:t>
+            </a:r>
+          </a:p>
+          <a:p>
+            <a:r>
+              <a:rPr lang="en-US" altLang="ja-JP" dirty="0"/>
+              <a:t>      , [</a:t>
+            </a:r>
+            <a:r>
+              <a:rPr lang="en-US" altLang="ja-JP" dirty="0" err="1"/>
+              <a:t>RString</a:t>
+            </a:r>
+            <a:r>
+              <a:rPr lang="en-US" altLang="ja-JP" dirty="0"/>
+              <a:t> "Lullaby",  </a:t>
+            </a:r>
+            <a:r>
+              <a:rPr lang="en-US" altLang="ja-JP" dirty="0" err="1"/>
+              <a:t>RInt</a:t>
+            </a:r>
+            <a:r>
+              <a:rPr lang="en-US" altLang="ja-JP" dirty="0"/>
+              <a:t> 1989, </a:t>
+            </a:r>
+            <a:r>
+              <a:rPr lang="en-US" altLang="ja-JP" dirty="0" err="1"/>
+              <a:t>RInt</a:t>
+            </a:r>
+            <a:r>
+              <a:rPr lang="en-US" altLang="ja-JP" dirty="0"/>
+              <a:t> 3, </a:t>
+            </a:r>
+            <a:r>
+              <a:rPr lang="en-US" altLang="ja-JP" dirty="0" err="1"/>
+              <a:t>RString</a:t>
+            </a:r>
+            <a:r>
+              <a:rPr lang="en-US" altLang="ja-JP" dirty="0"/>
+              <a:t> "Show"  , </a:t>
+            </a:r>
+            <a:r>
+              <a:rPr lang="en-US" altLang="ja-JP" dirty="0" err="1"/>
+              <a:t>RInt</a:t>
+            </a:r>
+            <a:r>
+              <a:rPr lang="en-US" altLang="ja-JP" dirty="0"/>
+              <a:t> 3]</a:t>
+            </a:r>
+          </a:p>
+          <a:p>
+            <a:r>
+              <a:rPr lang="en-US" altLang="ja-JP" dirty="0"/>
+              <a:t>      , [</a:t>
+            </a:r>
+            <a:r>
+              <a:rPr lang="en-US" altLang="ja-JP" dirty="0" err="1"/>
+              <a:t>RString</a:t>
+            </a:r>
+            <a:r>
+              <a:rPr lang="en-US" altLang="ja-JP" dirty="0"/>
+              <a:t> "</a:t>
+            </a:r>
+            <a:r>
+              <a:rPr lang="en-US" altLang="ja-JP" dirty="0" err="1"/>
+              <a:t>Lovesong</a:t>
+            </a:r>
+            <a:r>
+              <a:rPr lang="en-US" altLang="ja-JP" dirty="0"/>
+              <a:t>", </a:t>
+            </a:r>
+            <a:r>
+              <a:rPr lang="en-US" altLang="ja-JP" dirty="0" err="1"/>
+              <a:t>RInt</a:t>
+            </a:r>
+            <a:r>
+              <a:rPr lang="en-US" altLang="ja-JP" dirty="0"/>
+              <a:t> 1989, </a:t>
+            </a:r>
+            <a:r>
+              <a:rPr lang="en-US" altLang="ja-JP" dirty="0" err="1"/>
+              <a:t>RInt</a:t>
+            </a:r>
+            <a:r>
+              <a:rPr lang="en-US" altLang="ja-JP" dirty="0"/>
+              <a:t> 5, </a:t>
+            </a:r>
+            <a:r>
+              <a:rPr lang="en-US" altLang="ja-JP" dirty="0" err="1"/>
+              <a:t>RString</a:t>
+            </a:r>
+            <a:r>
+              <a:rPr lang="en-US" altLang="ja-JP" dirty="0"/>
+              <a:t> "Galore", </a:t>
+            </a:r>
+            <a:r>
+              <a:rPr lang="en-US" altLang="ja-JP" dirty="0" err="1"/>
+              <a:t>RInt</a:t>
+            </a:r>
+            <a:r>
+              <a:rPr lang="en-US" altLang="ja-JP" dirty="0"/>
+              <a:t> 1]</a:t>
+            </a:r>
+          </a:p>
+          <a:p>
+            <a:r>
+              <a:rPr lang="en-US" altLang="ja-JP" dirty="0"/>
+              <a:t>      , [</a:t>
+            </a:r>
+            <a:r>
+              <a:rPr lang="en-US" altLang="ja-JP" dirty="0" err="1"/>
+              <a:t>RString</a:t>
+            </a:r>
+            <a:r>
+              <a:rPr lang="en-US" altLang="ja-JP" dirty="0"/>
+              <a:t> "</a:t>
+            </a:r>
+            <a:r>
+              <a:rPr lang="en-US" altLang="ja-JP" dirty="0" err="1"/>
+              <a:t>Lovesong</a:t>
+            </a:r>
+            <a:r>
+              <a:rPr lang="en-US" altLang="ja-JP" dirty="0"/>
+              <a:t>", </a:t>
+            </a:r>
+            <a:r>
+              <a:rPr lang="en-US" altLang="ja-JP" dirty="0" err="1"/>
+              <a:t>RInt</a:t>
+            </a:r>
+            <a:r>
+              <a:rPr lang="en-US" altLang="ja-JP" dirty="0"/>
+              <a:t> 1989, </a:t>
+            </a:r>
+            <a:r>
+              <a:rPr lang="en-US" altLang="ja-JP" dirty="0" err="1"/>
+              <a:t>RInt</a:t>
+            </a:r>
+            <a:r>
+              <a:rPr lang="en-US" altLang="ja-JP" dirty="0"/>
+              <a:t> 5, </a:t>
+            </a:r>
+            <a:r>
+              <a:rPr lang="en-US" altLang="ja-JP" dirty="0" err="1"/>
+              <a:t>RString</a:t>
+            </a:r>
+            <a:r>
+              <a:rPr lang="en-US" altLang="ja-JP" dirty="0"/>
+              <a:t> "Disintegration" , </a:t>
+            </a:r>
+            <a:r>
+              <a:rPr lang="en-US" altLang="ja-JP" dirty="0" err="1"/>
+              <a:t>RInt</a:t>
+            </a:r>
+            <a:r>
+              <a:rPr lang="en-US" altLang="ja-JP" dirty="0"/>
+              <a:t> 4]</a:t>
+            </a:r>
+          </a:p>
+          <a:p>
+            <a:r>
+              <a:rPr lang="en-US" altLang="ja-JP" dirty="0"/>
+              <a:t>      , [</a:t>
+            </a:r>
+            <a:r>
+              <a:rPr lang="en-US" altLang="ja-JP" dirty="0" err="1"/>
+              <a:t>RString</a:t>
+            </a:r>
+            <a:r>
+              <a:rPr lang="en-US" altLang="ja-JP" dirty="0"/>
+              <a:t> "Trust",    </a:t>
+            </a:r>
+            <a:r>
+              <a:rPr lang="en-US" altLang="ja-JP" dirty="0" err="1"/>
+              <a:t>RInt</a:t>
+            </a:r>
+            <a:r>
+              <a:rPr lang="en-US" altLang="ja-JP" dirty="0"/>
+              <a:t> 1992, </a:t>
+            </a:r>
+            <a:r>
+              <a:rPr lang="en-US" altLang="ja-JP" dirty="0" err="1"/>
+              <a:t>RInt</a:t>
+            </a:r>
+            <a:r>
+              <a:rPr lang="en-US" altLang="ja-JP" dirty="0"/>
+              <a:t> 4, </a:t>
+            </a:r>
+            <a:r>
+              <a:rPr lang="en-US" altLang="ja-JP" dirty="0" err="1"/>
+              <a:t>RString</a:t>
+            </a:r>
+            <a:r>
+              <a:rPr lang="en-US" altLang="ja-JP" dirty="0"/>
+              <a:t> "Wish"  , </a:t>
+            </a:r>
+            <a:r>
+              <a:rPr lang="en-US" altLang="ja-JP" dirty="0" err="1"/>
+              <a:t>RInt</a:t>
+            </a:r>
+            <a:r>
+              <a:rPr lang="en-US" altLang="ja-JP" dirty="0"/>
+              <a:t> 5]</a:t>
+            </a:r>
+          </a:p>
+          <a:p>
+            <a:r>
+              <a:rPr lang="en-US" altLang="ja-JP" dirty="0"/>
+              <a:t>      ]</a:t>
+            </a:r>
+            <a:endParaRPr lang="ja-JP" altLang="en-US" dirty="0"/>
+          </a:p>
+        </p:txBody>
+      </p:sp>
+    </p:spTree>
+    <p:extLst>
+      <p:ext uri="{BB962C8B-B14F-4D97-AF65-F5344CB8AC3E}">
+        <p14:creationId xmlns:p14="http://schemas.microsoft.com/office/powerpoint/2010/main" val="1832001926"/>
+      </p:ext>
+    </p:extLst>
+  </p:cSld>
+  <p:clrMapOvr>
+    <a:masterClrMapping/>
+  </p:clrMapOvr>
+  <p:timing>
+    <p:tnLst>
+      <p:par>
+        <p:cTn xmlns:p14="http://schemas.microsoft.com/office/powerpoint/2010/main" id="1" dur="indefinite" restart="never" nodeType="tmRoot"/>
+      </p:par>
+    </p:tnLst>
+  </p:timing>
+</p:sld>
+</file>
+
 <file path=ppt/slides/slide47.xml><?xml version="1.0" encoding="utf-8"?>
 <p:sld xmlns:a="http://schemas.openxmlformats.org/drawingml/2006/main" xmlns:r="http://schemas.openxmlformats.org/officeDocument/2006/relationships" xmlns:p="http://schemas.openxmlformats.org/presentationml/2006/main">
   <p:cSld>
@@ -20109,8 +20486,16 @@
           <a:lstStyle/>
           <a:p>
             <a:r>
-              <a:rPr lang="en-US" altLang="ja-JP" dirty="0" smtClean="0"/>
-              <a:t>Relational Table</a:t>
+              <a:rPr kumimoji="1" lang="en-US" altLang="ja-JP" dirty="0" smtClean="0"/>
+              <a:t>Functional</a:t>
+            </a:r>
+            <a:r>
+              <a:rPr kumimoji="1" lang="ja-JP" altLang="en-US" dirty="0" smtClean="0"/>
+              <a:t> </a:t>
+            </a:r>
+            <a:r>
+              <a:rPr kumimoji="1" lang="en-US" altLang="ja-JP" dirty="0" smtClean="0"/>
+              <a:t>Dependency</a:t>
             </a:r>
             <a:endParaRPr kumimoji="1" lang="ja-JP" altLang="en-US" dirty="0"/>
           </a:p>
@@ -20140,16 +20525,82 @@
           </a:p>
         </p:txBody>
       </p:sp>
-      <p:sp>
-        <p:nvSpPr>
-          <p:cNvPr id="5" name="正方形/長方形 4"/>
+      <p:pic>
+        <p:nvPicPr>
+          <p:cNvPr id="5" name="図 4"/>
+          <p:cNvPicPr>
+            <a:picLocks noChangeAspect="1"/>
+          </p:cNvPicPr>
+          <p:nvPr/>
+        </p:nvPicPr>
+        <p:blipFill>
+          <a:blip r:embed="rId2"/>
+          <a:stretch>
+            <a:fillRect/>
+          </a:stretch>
+        </p:blipFill>
+        <p:spPr>
+          <a:xfrm>
+            <a:off x="1619672" y="1340768"/>
+            <a:ext cx="5832648" cy="2164694"/>
+          </a:xfrm>
+          <a:prstGeom prst="rect">
+            <a:avLst/>
+          </a:prstGeom>
+        </p:spPr>
+      </p:pic>
+      <p:sp>
+        <p:nvSpPr>
+          <p:cNvPr id="6" name="テキスト ボックス 5"/>
+          <p:cNvSpPr txBox="1"/>
+          <p:nvPr/>
+        </p:nvSpPr>
+        <p:spPr>
+          <a:xfrm>
+            <a:off x="2123728" y="3602390"/>
+            <a:ext cx="4968027" cy="369332"/>
+          </a:xfrm>
+          <a:prstGeom prst="rect">
+            <a:avLst/>
+          </a:prstGeom>
+          <a:noFill/>
+        </p:spPr>
+        <p:txBody>
+          <a:bodyPr wrap="none" rtlCol="0">
+            <a:spAutoFit/>
+          </a:bodyPr>
+          <a:lstStyle/>
+          <a:p>
+            <a:r>
+              <a:rPr kumimoji="1" lang="en-US" altLang="ja-JP" dirty="0" smtClean="0"/>
+              <a:t>Track </a:t>
+            </a:r>
+            <a:r>
+              <a:rPr kumimoji="1" lang="en-US" altLang="ja-JP" dirty="0" smtClean="0">
+                <a:sym typeface="Wingdings"/>
+              </a:rPr>
+              <a:t> Data, Rating       </a:t>
+            </a:r>
+            <a:r>
+              <a:rPr lang="en-US" altLang="ja-JP" dirty="0" smtClean="0">
+                <a:sym typeface="Wingdings"/>
+              </a:rPr>
+              <a:t>Album  Quantity</a:t>
+            </a:r>
+            <a:endParaRPr kumimoji="1" lang="ja-JP" altLang="en-US" dirty="0"/>
+          </a:p>
+        </p:txBody>
+      </p:sp>
+      <p:sp>
+        <p:nvSpPr>
+          <p:cNvPr id="7" name="正方形/長方形 6"/>
           <p:cNvSpPr/>
           <p:nvPr/>
         </p:nvSpPr>
         <p:spPr>
           <a:xfrm>
-            <a:off x="719723" y="1484784"/>
-            <a:ext cx="7802984" cy="1754327"/>
+            <a:off x="2123728" y="4509120"/>
+            <a:ext cx="4717336" cy="1323439"/>
           </a:xfrm>
           <a:prstGeom prst="rect">
             <a:avLst/>
@@ -20161,446 +20612,95 @@
           </a:ln>
         </p:spPr>
         <p:txBody>
-          <a:bodyPr wrap="square">
+          <a:bodyPr wrap="none">
             <a:spAutoFit/>
           </a:bodyPr>
           <a:lstStyle/>
           <a:p>
             <a:r>
-              <a:rPr lang="en-US" altLang="ja-JP" dirty="0"/>
-              <a:t>type RT = [Record]</a:t>
-            </a:r>
-          </a:p>
-          <a:p>
-            <a:r>
-              <a:rPr lang="en-US" altLang="ja-JP" dirty="0"/>
-              <a:t>type Record = [</a:t>
-            </a:r>
-            <a:r>
-              <a:rPr lang="en-US" altLang="ja-JP" dirty="0" err="1"/>
-              <a:t>RType</a:t>
-            </a:r>
-            <a:r>
-              <a:rPr lang="en-US" altLang="ja-JP" dirty="0"/>
+              <a:rPr lang="en-US" altLang="ja-JP" sz="2000" dirty="0"/>
+              <a:t>type </a:t>
+            </a:r>
+            <a:r>
+              <a:rPr lang="en-US" altLang="ja-JP" sz="2000" dirty="0" err="1"/>
+              <a:t>FDMap</a:t>
+            </a:r>
+            <a:r>
+              <a:rPr lang="en-US" altLang="ja-JP" sz="2000" dirty="0"/>
+              <a:t> = </a:t>
+            </a:r>
+            <a:r>
+              <a:rPr lang="en-US" altLang="ja-JP" sz="2000" dirty="0" err="1"/>
+              <a:t>Map.Map</a:t>
+            </a:r>
+            <a:r>
+              <a:rPr lang="en-US" altLang="ja-JP" sz="2000" dirty="0"/>
+              <a:t> </a:t>
+            </a:r>
+            <a:r>
+              <a:rPr lang="en-US" altLang="ja-JP" sz="2000" dirty="0" err="1"/>
+              <a:t>Int</a:t>
+            </a:r>
+            <a:r>
+              <a:rPr lang="en-US" altLang="ja-JP" sz="2000" dirty="0"/>
+              <a:t> [</a:t>
+            </a:r>
+            <a:r>
+              <a:rPr lang="en-US" altLang="ja-JP" sz="2000" dirty="0" err="1"/>
+              <a:t>Int</a:t>
+            </a:r>
+            <a:r>
+              <a:rPr lang="en-US" altLang="ja-JP" sz="2000" dirty="0" smtClean="0"/>
               <a:t>]</a:t>
             </a:r>
           </a:p>
           <a:p>
-            <a:r>
-              <a:rPr lang="en-US" altLang="ja-JP" dirty="0"/>
-              <a:t>data </a:t>
-            </a:r>
-            <a:r>
-              <a:rPr lang="en-US" altLang="ja-JP" dirty="0" err="1"/>
-              <a:t>RType</a:t>
-            </a:r>
-            <a:r>
-              <a:rPr lang="en-US" altLang="ja-JP" dirty="0"/>
+            <a:endParaRPr lang="en-US" altLang="ja-JP" sz="2000" dirty="0" smtClean="0"/>
+          </a:p>
+          <a:p>
+            <a:r>
+              <a:rPr lang="pt-BR" altLang="ja-JP" sz="2000" dirty="0" err="1"/>
+              <a:t>sfdMap</a:t>
+            </a:r>
+            <a:r>
+              <a:rPr lang="pt-BR" altLang="ja-JP" sz="2000" dirty="0"/>
+              <a:t> :: </a:t>
+            </a:r>
+            <a:r>
+              <a:rPr lang="pt-BR" altLang="ja-JP" sz="2000" dirty="0" err="1"/>
+              <a:t>FDMap</a:t>
+            </a:r>
+            <a:endParaRPr lang="pt-BR" altLang="ja-JP" sz="2000" dirty="0"/>
+          </a:p>
+          <a:p>
+            <a:r>
+              <a:rPr lang="pt-BR" altLang="ja-JP" sz="2000" dirty="0" err="1"/>
+              <a:t>sfdMap</a:t>
+            </a:r>
+            <a:r>
+              <a:rPr lang="pt-BR" altLang="ja-JP" sz="2000" dirty="0"/>
               <a:t> = </a:t>
             </a:r>
             <a:r>
-              <a:rPr lang="en-US" altLang="ja-JP" dirty="0" err="1"/>
-              <a:t>RInt</a:t>
-            </a:r>
-            <a:r>
-              <a:rPr lang="en-US" altLang="ja-JP" dirty="0"/>
-              <a:t> </a:t>
-            </a:r>
-            <a:r>
-              <a:rPr lang="en-US" altLang="ja-JP" dirty="0" err="1"/>
-              <a:t>Int</a:t>
-            </a:r>
-            <a:r>
-              <a:rPr lang="en-US" altLang="ja-JP" dirty="0"/>
-              <a:t> </a:t>
-            </a:r>
-            <a:r>
-              <a:rPr lang="en-US" altLang="ja-JP" dirty="0" smtClean="0"/>
-              <a:t>| </a:t>
-            </a:r>
-            <a:r>
-              <a:rPr lang="en-US" altLang="ja-JP" dirty="0" err="1"/>
-              <a:t>RString</a:t>
-            </a:r>
-            <a:r>
-              <a:rPr lang="en-US" altLang="ja-JP" dirty="0"/>
-              <a:t> </a:t>
-            </a:r>
-            <a:r>
-              <a:rPr lang="en-US" altLang="ja-JP" dirty="0" smtClean="0"/>
-              <a:t>String </a:t>
-            </a:r>
-            <a:r>
-              <a:rPr lang="en-US" altLang="ja-JP" dirty="0"/>
-              <a:t>| </a:t>
-            </a:r>
-            <a:r>
-              <a:rPr lang="en-US" altLang="ja-JP" dirty="0" err="1"/>
-              <a:t>RFloat</a:t>
-            </a:r>
-            <a:r>
-              <a:rPr lang="en-US" altLang="ja-JP" dirty="0"/>
-              <a:t> </a:t>
-            </a:r>
-            <a:r>
-              <a:rPr lang="en-US" altLang="ja-JP" dirty="0" smtClean="0"/>
-              <a:t>Float </a:t>
-            </a:r>
-            <a:r>
-              <a:rPr lang="en-US" altLang="ja-JP" dirty="0"/>
-              <a:t>| </a:t>
-            </a:r>
-            <a:r>
-              <a:rPr lang="en-US" altLang="ja-JP" dirty="0" err="1"/>
-              <a:t>RDouble</a:t>
-            </a:r>
-            <a:r>
-              <a:rPr lang="en-US" altLang="ja-JP" dirty="0"/>
-              <a:t> Double</a:t>
-            </a:r>
-          </a:p>
-          <a:p>
-            <a:r>
-              <a:rPr lang="en-US" altLang="ja-JP" dirty="0"/>
-              <a:t>      deriving (Show, </a:t>
-            </a:r>
-            <a:r>
-              <a:rPr lang="en-US" altLang="ja-JP" dirty="0" err="1"/>
-              <a:t>Eq</a:t>
-            </a:r>
-            <a:r>
-              <a:rPr lang="en-US" altLang="ja-JP" dirty="0"/>
-              <a:t>, </a:t>
-            </a:r>
-            <a:r>
-              <a:rPr lang="en-US" altLang="ja-JP" dirty="0" err="1"/>
-              <a:t>Ord</a:t>
-            </a:r>
-            <a:r>
-              <a:rPr lang="en-US" altLang="ja-JP" dirty="0" smtClean="0"/>
-              <a:t>)</a:t>
-            </a:r>
-          </a:p>
-          <a:p>
-            <a:endParaRPr lang="en-US" altLang="ja-JP" dirty="0"/>
-          </a:p>
-          <a:p>
-            <a:r>
-              <a:rPr lang="en-US" altLang="ja-JP" dirty="0" err="1">
-                <a:solidFill>
-                  <a:srgbClr val="FF0000"/>
-                </a:solidFill>
-              </a:rPr>
-              <a:t>deriveBiGULGeneric</a:t>
-            </a:r>
-            <a:r>
-              <a:rPr lang="en-US" altLang="ja-JP" dirty="0">
-                <a:solidFill>
-                  <a:srgbClr val="FF0000"/>
-                </a:solidFill>
-              </a:rPr>
-              <a:t>  ''</a:t>
-            </a:r>
-            <a:r>
-              <a:rPr lang="en-US" altLang="ja-JP" dirty="0" err="1">
-                <a:solidFill>
-                  <a:srgbClr val="FF0000"/>
-                </a:solidFill>
-              </a:rPr>
-              <a:t>RType</a:t>
-            </a:r>
-            <a:endParaRPr lang="ja-JP" altLang="en-US" dirty="0">
-              <a:solidFill>
-                <a:srgbClr val="FF0000"/>
-              </a:solidFill>
-            </a:endParaRPr>
-          </a:p>
-        </p:txBody>
-      </p:sp>
-      <p:sp>
-        <p:nvSpPr>
-          <p:cNvPr id="6" name="正方形/長方形 5"/>
-          <p:cNvSpPr/>
-          <p:nvPr/>
-        </p:nvSpPr>
-        <p:spPr>
-          <a:xfrm>
-            <a:off x="144017" y="3652975"/>
-            <a:ext cx="8892479" cy="1754327"/>
-          </a:xfrm>
-          <a:prstGeom prst="rect">
-            <a:avLst/>
-          </a:prstGeom>
-          <a:ln>
-            <a:solidFill>
-              <a:schemeClr val="accent1"/>
-            </a:solidFill>
-          </a:ln>
-        </p:spPr>
-        <p:txBody>
-          <a:bodyPr wrap="square">
-            <a:spAutoFit/>
-          </a:bodyPr>
-          <a:lstStyle/>
-          <a:p>
-            <a:r>
-              <a:rPr lang="en-US" altLang="ja-JP" dirty="0"/>
-              <a:t>s  =  [ [</a:t>
-            </a:r>
-            <a:r>
-              <a:rPr lang="en-US" altLang="ja-JP" dirty="0" err="1"/>
-              <a:t>RString</a:t>
-            </a:r>
-            <a:r>
-              <a:rPr lang="en-US" altLang="ja-JP" dirty="0"/>
-              <a:t> "Lullaby",  </a:t>
-            </a:r>
-            <a:r>
-              <a:rPr lang="en-US" altLang="ja-JP" dirty="0" err="1"/>
-              <a:t>RInt</a:t>
-            </a:r>
-            <a:r>
-              <a:rPr lang="en-US" altLang="ja-JP" dirty="0"/>
-              <a:t> 1989, </a:t>
-            </a:r>
-            <a:r>
-              <a:rPr lang="en-US" altLang="ja-JP" dirty="0" err="1"/>
-              <a:t>RInt</a:t>
-            </a:r>
-            <a:r>
-              <a:rPr lang="en-US" altLang="ja-JP" dirty="0"/>
-              <a:t> 3, </a:t>
-            </a:r>
-            <a:r>
-              <a:rPr lang="en-US" altLang="ja-JP" dirty="0" err="1"/>
-              <a:t>RString</a:t>
-            </a:r>
-            <a:r>
-              <a:rPr lang="en-US" altLang="ja-JP" dirty="0"/>
-              <a:t> "Galore", </a:t>
-            </a:r>
-            <a:r>
-              <a:rPr lang="en-US" altLang="ja-JP" dirty="0" err="1"/>
-              <a:t>RInt</a:t>
-            </a:r>
-            <a:r>
-              <a:rPr lang="en-US" altLang="ja-JP" dirty="0"/>
-              <a:t> 1]</a:t>
-            </a:r>
-          </a:p>
-          <a:p>
-            <a:r>
-              <a:rPr lang="en-US" altLang="ja-JP" dirty="0"/>
-              <a:t>      , [</a:t>
-            </a:r>
-            <a:r>
-              <a:rPr lang="en-US" altLang="ja-JP" dirty="0" err="1"/>
-              <a:t>RString</a:t>
-            </a:r>
-            <a:r>
-              <a:rPr lang="en-US" altLang="ja-JP" dirty="0"/>
-              <a:t> "Lullaby",  </a:t>
-            </a:r>
-            <a:r>
-              <a:rPr lang="en-US" altLang="ja-JP" dirty="0" err="1"/>
-              <a:t>RInt</a:t>
-            </a:r>
-            <a:r>
-              <a:rPr lang="en-US" altLang="ja-JP" dirty="0"/>
-              <a:t> 1989, </a:t>
-            </a:r>
-            <a:r>
-              <a:rPr lang="en-US" altLang="ja-JP" dirty="0" err="1"/>
-              <a:t>RInt</a:t>
-            </a:r>
-            <a:r>
-              <a:rPr lang="en-US" altLang="ja-JP" dirty="0"/>
-              <a:t> 3, </a:t>
-            </a:r>
-            <a:r>
-              <a:rPr lang="en-US" altLang="ja-JP" dirty="0" err="1"/>
-              <a:t>RString</a:t>
-            </a:r>
-            <a:r>
-              <a:rPr lang="en-US" altLang="ja-JP" dirty="0"/>
-              <a:t> "Show"  , </a:t>
-            </a:r>
-            <a:r>
-              <a:rPr lang="en-US" altLang="ja-JP" dirty="0" err="1"/>
-              <a:t>RInt</a:t>
-            </a:r>
-            <a:r>
-              <a:rPr lang="en-US" altLang="ja-JP" dirty="0"/>
-              <a:t> 3]</a:t>
-            </a:r>
-          </a:p>
-          <a:p>
-            <a:r>
-              <a:rPr lang="en-US" altLang="ja-JP" dirty="0"/>
-              <a:t>      , [</a:t>
-            </a:r>
-            <a:r>
-              <a:rPr lang="en-US" altLang="ja-JP" dirty="0" err="1"/>
-              <a:t>RString</a:t>
-            </a:r>
-            <a:r>
-              <a:rPr lang="en-US" altLang="ja-JP" dirty="0"/>
-              <a:t> "</a:t>
-            </a:r>
-            <a:r>
-              <a:rPr lang="en-US" altLang="ja-JP" dirty="0" err="1"/>
-              <a:t>Lovesong</a:t>
-            </a:r>
-            <a:r>
-              <a:rPr lang="en-US" altLang="ja-JP" dirty="0"/>
-              <a:t>", </a:t>
-            </a:r>
-            <a:r>
-              <a:rPr lang="en-US" altLang="ja-JP" dirty="0" err="1"/>
-              <a:t>RInt</a:t>
-            </a:r>
-            <a:r>
-              <a:rPr lang="en-US" altLang="ja-JP" dirty="0"/>
-              <a:t> 1989, </a:t>
-            </a:r>
-            <a:r>
-              <a:rPr lang="en-US" altLang="ja-JP" dirty="0" err="1"/>
-              <a:t>RInt</a:t>
-            </a:r>
-            <a:r>
-              <a:rPr lang="en-US" altLang="ja-JP" dirty="0"/>
-              <a:t> 5, </a:t>
-            </a:r>
-            <a:r>
-              <a:rPr lang="en-US" altLang="ja-JP" dirty="0" err="1"/>
-              <a:t>RString</a:t>
-            </a:r>
-            <a:r>
-              <a:rPr lang="en-US" altLang="ja-JP" dirty="0"/>
-              <a:t> "Galore", </a:t>
-            </a:r>
-            <a:r>
-              <a:rPr lang="en-US" altLang="ja-JP" dirty="0" err="1"/>
-              <a:t>RInt</a:t>
-            </a:r>
-            <a:r>
-              <a:rPr lang="en-US" altLang="ja-JP" dirty="0"/>
-              <a:t> 1]</a:t>
-            </a:r>
-          </a:p>
-          <a:p>
-            <a:r>
-              <a:rPr lang="en-US" altLang="ja-JP" dirty="0"/>
-              <a:t>      , [</a:t>
-            </a:r>
-            <a:r>
-              <a:rPr lang="en-US" altLang="ja-JP" dirty="0" err="1"/>
-              <a:t>RString</a:t>
-            </a:r>
-            <a:r>
-              <a:rPr lang="en-US" altLang="ja-JP" dirty="0"/>
-              <a:t> "</a:t>
-            </a:r>
-            <a:r>
-              <a:rPr lang="en-US" altLang="ja-JP" dirty="0" err="1"/>
-              <a:t>Lovesong</a:t>
-            </a:r>
-            <a:r>
-              <a:rPr lang="en-US" altLang="ja-JP" dirty="0"/>
-              <a:t>", </a:t>
-            </a:r>
-            <a:r>
-              <a:rPr lang="en-US" altLang="ja-JP" dirty="0" err="1"/>
-              <a:t>RInt</a:t>
-            </a:r>
-            <a:r>
-              <a:rPr lang="en-US" altLang="ja-JP" dirty="0"/>
-              <a:t> 1989, </a:t>
-            </a:r>
-            <a:r>
-              <a:rPr lang="en-US" altLang="ja-JP" dirty="0" err="1"/>
-              <a:t>RInt</a:t>
-            </a:r>
-            <a:r>
-              <a:rPr lang="en-US" altLang="ja-JP" dirty="0"/>
-              <a:t> 5, </a:t>
-            </a:r>
-            <a:r>
-              <a:rPr lang="en-US" altLang="ja-JP" dirty="0" err="1"/>
-              <a:t>RString</a:t>
-            </a:r>
-            <a:r>
-              <a:rPr lang="en-US" altLang="ja-JP" dirty="0"/>
-              <a:t> "Disintegration" , </a:t>
-            </a:r>
-            <a:r>
-              <a:rPr lang="en-US" altLang="ja-JP" dirty="0" err="1"/>
-              <a:t>RInt</a:t>
-            </a:r>
-            <a:r>
-              <a:rPr lang="en-US" altLang="ja-JP" dirty="0"/>
-              <a:t> 4]</a:t>
-            </a:r>
-          </a:p>
-          <a:p>
-            <a:r>
-              <a:rPr lang="en-US" altLang="ja-JP" dirty="0"/>
-              <a:t>      , [</a:t>
-            </a:r>
-            <a:r>
-              <a:rPr lang="en-US" altLang="ja-JP" dirty="0" err="1"/>
-              <a:t>RString</a:t>
-            </a:r>
-            <a:r>
-              <a:rPr lang="en-US" altLang="ja-JP" dirty="0"/>
-              <a:t> "Trust",    </a:t>
-            </a:r>
-            <a:r>
-              <a:rPr lang="en-US" altLang="ja-JP" dirty="0" err="1"/>
-              <a:t>RInt</a:t>
-            </a:r>
-            <a:r>
-              <a:rPr lang="en-US" altLang="ja-JP" dirty="0"/>
-              <a:t> 1992, </a:t>
-            </a:r>
-            <a:r>
-              <a:rPr lang="en-US" altLang="ja-JP" dirty="0" err="1"/>
-              <a:t>RInt</a:t>
-            </a:r>
-            <a:r>
-              <a:rPr lang="en-US" altLang="ja-JP" dirty="0"/>
-              <a:t> 4, </a:t>
-            </a:r>
-            <a:r>
-              <a:rPr lang="en-US" altLang="ja-JP" dirty="0" err="1"/>
-              <a:t>RString</a:t>
-            </a:r>
-            <a:r>
-              <a:rPr lang="en-US" altLang="ja-JP" dirty="0"/>
-              <a:t> "Wish"  , </a:t>
-            </a:r>
-            <a:r>
-              <a:rPr lang="en-US" altLang="ja-JP" dirty="0" err="1"/>
-              <a:t>RInt</a:t>
-            </a:r>
-            <a:r>
-              <a:rPr lang="en-US" altLang="ja-JP" dirty="0"/>
-              <a:t> 5]</a:t>
-            </a:r>
-          </a:p>
-          <a:p>
-            <a:r>
-              <a:rPr lang="en-US" altLang="ja-JP" dirty="0"/>
-              <a:t>      ]</a:t>
-            </a:r>
-            <a:endParaRPr lang="ja-JP" altLang="en-US" dirty="0"/>
+              <a:rPr lang="pt-BR" altLang="ja-JP" sz="2000" dirty="0" err="1"/>
+              <a:t>Map.fromList</a:t>
+            </a:r>
+            <a:r>
+              <a:rPr lang="pt-BR" altLang="ja-JP" sz="2000" dirty="0"/>
+              <a:t> [(0,[1,2]), (3,[4])</a:t>
+            </a:r>
+            <a:r>
+              <a:rPr lang="pt-BR" altLang="ja-JP" sz="2000" dirty="0" smtClean="0"/>
+              <a:t>]</a:t>
+            </a:r>
+            <a:endParaRPr lang="en-US" altLang="ja-JP" sz="2000" dirty="0"/>
           </a:p>
         </p:txBody>
       </p:sp>
     </p:spTree>
     <p:extLst>
       <p:ext uri="{BB962C8B-B14F-4D97-AF65-F5344CB8AC3E}">
-        <p14:creationId xmlns:p14="http://schemas.microsoft.com/office/powerpoint/2010/main" val="1832001926"/>
+        <p14:creationId xmlns:p14="http://schemas.microsoft.com/office/powerpoint/2010/main" val="850591312"/>
       </p:ext>
     </p:extLst>
   </p:cSld>
@@ -20651,15 +20751,102 @@
           <a:p>
             <a:r>
               <a:rPr kumimoji="1" lang="en-US" altLang="ja-JP" dirty="0" smtClean="0"/>
-              <a:t>Functional</a:t>
-            </a:r>
-            <a:r>
-              <a:rPr kumimoji="1" lang="ja-JP" altLang="en-US" dirty="0" smtClean="0"/>
-              <a:t> </a:t>
+              <a:t>From </a:t>
+            </a:r>
+            <a:r>
+              <a:rPr kumimoji="1" lang="en-US" altLang="ja-JP" dirty="0" err="1" smtClean="0"/>
+              <a:t>keyAlign</a:t>
             </a:r>
             <a:r>
               <a:rPr kumimoji="1" lang="en-US" altLang="ja-JP" dirty="0" smtClean="0"/>
-              <a:t>Dependency</a:t>
+              <a:t> to </a:t>
+            </a:r>
+            <a:r>
+              <a:rPr kumimoji="1" lang="en-US" altLang="ja-JP" dirty="0" err="1" smtClean="0"/>
+              <a:t>relAlign</a:t>
+            </a:r>
+            <a:endParaRPr kumimoji="1" lang="ja-JP" altLang="en-US" dirty="0"/>
+          </a:p>
+        </p:txBody>
+      </p:sp>
+      <p:sp>
+        <p:nvSpPr>
+          <p:cNvPr id="3" name="コンテンツ プレースホルダー 2"/>
+          <p:cNvSpPr>
+            <a:spLocks noGrp="1"/>
+          </p:cNvSpPr>
+          <p:nvPr>
+            <p:ph idx="1"/>
+          </p:nvPr>
+        </p:nvSpPr>
+        <p:spPr/>
+        <p:txBody>
+          <a:bodyPr/>
+          <a:lstStyle/>
+          <a:p>
+            <a:r>
+              <a:rPr kumimoji="1" lang="en-US" altLang="ja-JP" dirty="0" err="1" smtClean="0"/>
+              <a:t>relAlign</a:t>
+            </a:r>
+            <a:r>
+              <a:rPr kumimoji="1" lang="en-US" altLang="ja-JP" dirty="0" smtClean="0"/>
+              <a:t> is similar </a:t>
+            </a:r>
+            <a:r>
+              <a:rPr lang="en-US" altLang="ja-JP" dirty="0" smtClean="0"/>
+              <a:t>to </a:t>
+            </a:r>
+            <a:r>
+              <a:rPr lang="en-US" altLang="ja-JP" dirty="0" err="1" smtClean="0"/>
+              <a:t>keyAlign</a:t>
+            </a:r>
+            <a:r>
+              <a:rPr lang="en-US" altLang="ja-JP" dirty="0" smtClean="0"/>
+              <a:t> except that</a:t>
+            </a:r>
+          </a:p>
+          <a:p>
+            <a:pPr marL="0" indent="0">
+              <a:buNone/>
+            </a:pPr>
+            <a:endParaRPr lang="en-US" altLang="ja-JP" dirty="0" smtClean="0"/>
+          </a:p>
+          <a:p>
+            <a:pPr lvl="1"/>
+            <a:r>
+              <a:rPr lang="en-US" altLang="ja-JP" dirty="0" smtClean="0"/>
+              <a:t>We need to consider </a:t>
+            </a:r>
+            <a:r>
+              <a:rPr lang="en-US" altLang="ja-JP" dirty="0" smtClean="0">
+                <a:solidFill>
+                  <a:srgbClr val="FF0000"/>
+                </a:solidFill>
+              </a:rPr>
+              <a:t>filtering of source elements</a:t>
+            </a:r>
+          </a:p>
+          <a:p>
+            <a:pPr lvl="1"/>
+            <a:endParaRPr lang="en-US" altLang="ja-JP" dirty="0" smtClean="0"/>
+          </a:p>
+          <a:p>
+            <a:pPr lvl="1"/>
+            <a:r>
+              <a:rPr kumimoji="1" lang="en-US" altLang="ja-JP" dirty="0" smtClean="0"/>
+              <a:t>We need to </a:t>
+            </a:r>
+            <a:r>
+              <a:rPr kumimoji="1" lang="en-US" altLang="ja-JP" dirty="0" smtClean="0">
+                <a:solidFill>
+                  <a:srgbClr val="FF0000"/>
+                </a:solidFill>
+              </a:rPr>
+              <a:t>recover function dependency </a:t>
+            </a:r>
+            <a:r>
+              <a:rPr kumimoji="1" lang="en-US" altLang="ja-JP" dirty="0" smtClean="0"/>
+              <a:t>when updates happen</a:t>
             </a:r>
             <a:endParaRPr kumimoji="1" lang="ja-JP" altLang="en-US" dirty="0"/>
           </a:p>
@@ -20684,357 +20871,6 @@
               <a:rPr lang="ja-JP" altLang="en-US" smtClean="0"/>
               <a:pPr/>
               <a:t>48</a:t>
-            </a:fld>
-            <a:endParaRPr lang="ja-JP" altLang="en-US"/>
-          </a:p>
-        </p:txBody>
-      </p:sp>
-      <p:pic>
-        <p:nvPicPr>
-          <p:cNvPr id="5" name="図 4"/>
-          <p:cNvPicPr>
-            <a:picLocks noChangeAspect="1"/>
-          </p:cNvPicPr>
-          <p:nvPr/>
-        </p:nvPicPr>
-        <p:blipFill>
-          <a:blip r:embed="rId2"/>
-          <a:stretch>
-            <a:fillRect/>
-          </a:stretch>
-        </p:blipFill>
-        <p:spPr>
-          <a:xfrm>
-            <a:off x="1619672" y="1340768"/>
-            <a:ext cx="5832648" cy="2164694"/>
-          </a:xfrm>
-          <a:prstGeom prst="rect">
-            <a:avLst/>
-          </a:prstGeom>
-        </p:spPr>
-      </p:pic>
-      <p:sp>
-        <p:nvSpPr>
-          <p:cNvPr id="6" name="テキスト ボックス 5"/>
-          <p:cNvSpPr txBox="1"/>
-          <p:nvPr/>
-        </p:nvSpPr>
-        <p:spPr>
-          <a:xfrm>
-            <a:off x="2123728" y="3602390"/>
-            <a:ext cx="4968027" cy="369332"/>
-          </a:xfrm>
-          <a:prstGeom prst="rect">
-            <a:avLst/>
-          </a:prstGeom>
-          <a:noFill/>
-        </p:spPr>
-        <p:txBody>
-          <a:bodyPr wrap="none" rtlCol="0">
-            <a:spAutoFit/>
-          </a:bodyPr>
-          <a:lstStyle/>
-          <a:p>
-            <a:r>
-              <a:rPr kumimoji="1" lang="en-US" altLang="ja-JP" dirty="0" smtClean="0"/>
-              <a:t>Track </a:t>
-            </a:r>
-            <a:r>
-              <a:rPr kumimoji="1" lang="en-US" altLang="ja-JP" dirty="0" smtClean="0">
-                <a:sym typeface="Wingdings"/>
-              </a:rPr>
-              <a:t> Data, Rating       </a:t>
-            </a:r>
-            <a:r>
-              <a:rPr lang="en-US" altLang="ja-JP" dirty="0" smtClean="0">
-                <a:sym typeface="Wingdings"/>
-              </a:rPr>
-              <a:t>Album  Quantity</a:t>
-            </a:r>
-            <a:endParaRPr kumimoji="1" lang="ja-JP" altLang="en-US" dirty="0"/>
-          </a:p>
-        </p:txBody>
-      </p:sp>
-      <p:sp>
-        <p:nvSpPr>
-          <p:cNvPr id="7" name="正方形/長方形 6"/>
-          <p:cNvSpPr/>
-          <p:nvPr/>
-        </p:nvSpPr>
-        <p:spPr>
-          <a:xfrm>
-            <a:off x="2123728" y="4509120"/>
-            <a:ext cx="4717336" cy="1323439"/>
-          </a:xfrm>
-          <a:prstGeom prst="rect">
-            <a:avLst/>
-          </a:prstGeom>
-          <a:ln>
-            <a:solidFill>
-              <a:srgbClr val="FF6600"/>
-            </a:solidFill>
-          </a:ln>
-        </p:spPr>
-        <p:txBody>
-          <a:bodyPr wrap="none">
-            <a:spAutoFit/>
-          </a:bodyPr>
-          <a:lstStyle/>
-          <a:p>
-            <a:r>
-              <a:rPr lang="en-US" altLang="ja-JP" sz="2000" dirty="0"/>
-              <a:t>type </a:t>
-            </a:r>
-            <a:r>
-              <a:rPr lang="en-US" altLang="ja-JP" sz="2000" dirty="0" err="1"/>
-              <a:t>FDMap</a:t>
-            </a:r>
-            <a:r>
-              <a:rPr lang="en-US" altLang="ja-JP" sz="2000" dirty="0"/>
-              <a:t> = </a:t>
-            </a:r>
-            <a:r>
-              <a:rPr lang="en-US" altLang="ja-JP" sz="2000" dirty="0" err="1"/>
-              <a:t>Map.Map</a:t>
-            </a:r>
-            <a:r>
-              <a:rPr lang="en-US" altLang="ja-JP" sz="2000" dirty="0"/>
-              <a:t> </a:t>
-            </a:r>
-            <a:r>
-              <a:rPr lang="en-US" altLang="ja-JP" sz="2000" dirty="0" err="1"/>
-              <a:t>Int</a:t>
-            </a:r>
-            <a:r>
-              <a:rPr lang="en-US" altLang="ja-JP" sz="2000" dirty="0"/>
-              <a:t> [</a:t>
-            </a:r>
-            <a:r>
-              <a:rPr lang="en-US" altLang="ja-JP" sz="2000" dirty="0" err="1"/>
-              <a:t>Int</a:t>
-            </a:r>
-            <a:r>
-              <a:rPr lang="en-US" altLang="ja-JP" sz="2000" dirty="0" smtClean="0"/>
-              <a:t>]</a:t>
-            </a:r>
-          </a:p>
-          <a:p>
-            <a:endParaRPr lang="en-US" altLang="ja-JP" sz="2000" dirty="0" smtClean="0"/>
-          </a:p>
-          <a:p>
-            <a:r>
-              <a:rPr lang="pt-BR" altLang="ja-JP" sz="2000" dirty="0" err="1"/>
-              <a:t>sfdMap</a:t>
-            </a:r>
-            <a:r>
-              <a:rPr lang="pt-BR" altLang="ja-JP" sz="2000" dirty="0"/>
-              <a:t> :: </a:t>
-            </a:r>
-            <a:r>
-              <a:rPr lang="pt-BR" altLang="ja-JP" sz="2000" dirty="0" err="1"/>
-              <a:t>FDMap</a:t>
-            </a:r>
-            <a:endParaRPr lang="pt-BR" altLang="ja-JP" sz="2000" dirty="0"/>
-          </a:p>
-          <a:p>
-            <a:r>
-              <a:rPr lang="pt-BR" altLang="ja-JP" sz="2000" dirty="0" err="1"/>
-              <a:t>sfdMap</a:t>
-            </a:r>
-            <a:r>
-              <a:rPr lang="pt-BR" altLang="ja-JP" sz="2000" dirty="0"/>
-              <a:t> = </a:t>
-            </a:r>
-            <a:r>
-              <a:rPr lang="pt-BR" altLang="ja-JP" sz="2000" dirty="0" err="1"/>
-              <a:t>Map.fromList</a:t>
-            </a:r>
-            <a:r>
-              <a:rPr lang="pt-BR" altLang="ja-JP" sz="2000" dirty="0"/>
-              <a:t> [(0,[1,2]), (3,[4])</a:t>
-            </a:r>
-            <a:r>
-              <a:rPr lang="pt-BR" altLang="ja-JP" sz="2000" dirty="0" smtClean="0"/>
-              <a:t>]</a:t>
-            </a:r>
-            <a:endParaRPr lang="en-US" altLang="ja-JP" sz="2000" dirty="0"/>
-          </a:p>
-        </p:txBody>
-      </p:sp>
-    </p:spTree>
-    <p:extLst>
-      <p:ext uri="{BB962C8B-B14F-4D97-AF65-F5344CB8AC3E}">
-        <p14:creationId xmlns:p14="http://schemas.microsoft.com/office/powerpoint/2010/main" val="850591312"/>
-      </p:ext>
-    </p:extLst>
-  </p:cSld>
-  <p:clrMapOvr>
-    <a:masterClrMapping/>
-  </p:clrMapOvr>
-  <p:timing>
-    <p:tnLst>
-      <p:par>
-        <p:cTn xmlns:p14="http://schemas.microsoft.com/office/powerpoint/2010/main" id="1" dur="indefinite" restart="never" nodeType="tmRoot"/>
-      </p:par>
-    </p:tnLst>
-  </p:timing>
-</p:sld>
-</file>
-
-<file path=ppt/slides/slide49.xml><?xml version="1.0" encoding="utf-8"?>
-<p:sld xmlns:a="http://schemas.openxmlformats.org/drawingml/2006/main" xmlns:r="http://schemas.openxmlformats.org/officeDocument/2006/relationships" xmlns:p="http://schemas.openxmlformats.org/presentationml/2006/main">
-  <p:cSld>
-    <p:spTree>
-      <p:nvGrpSpPr>
-        <p:cNvPr id="1" name=""/>
-        <p:cNvGrpSpPr/>
-        <p:nvPr/>
-      </p:nvGrpSpPr>
-      <p:grpSpPr>
-        <a:xfrm>
-          <a:off x="0" y="0"/>
-          <a:ext cx="0" cy="0"/>
-          <a:chOff x="0" y="0"/>
-          <a:chExt cx="0" cy="0"/>
-        </a:xfrm>
-      </p:grpSpPr>
-      <p:sp>
-        <p:nvSpPr>
-          <p:cNvPr id="2" name="タイトル 1"/>
-          <p:cNvSpPr>
-            <a:spLocks noGrp="1"/>
-          </p:cNvSpPr>
-          <p:nvPr>
-            <p:ph type="title"/>
-          </p:nvPr>
-        </p:nvSpPr>
-        <p:spPr/>
-        <p:txBody>
-          <a:bodyPr/>
-          <a:lstStyle/>
-          <a:p>
-            <a:r>
-              <a:rPr kumimoji="1" lang="en-US" altLang="ja-JP" dirty="0" smtClean="0"/>
-              <a:t>From </a:t>
-            </a:r>
-            <a:r>
-              <a:rPr kumimoji="1" lang="en-US" altLang="ja-JP" dirty="0" err="1" smtClean="0"/>
-              <a:t>keyAlign</a:t>
-            </a:r>
-            <a:r>
-              <a:rPr kumimoji="1" lang="en-US" altLang="ja-JP" dirty="0" smtClean="0"/>
-              <a:t> to </a:t>
-            </a:r>
-            <a:r>
-              <a:rPr kumimoji="1" lang="en-US" altLang="ja-JP" dirty="0" err="1" smtClean="0"/>
-              <a:t>relAlign</a:t>
-            </a:r>
-            <a:endParaRPr kumimoji="1" lang="ja-JP" altLang="en-US" dirty="0"/>
-          </a:p>
-        </p:txBody>
-      </p:sp>
-      <p:sp>
-        <p:nvSpPr>
-          <p:cNvPr id="3" name="コンテンツ プレースホルダー 2"/>
-          <p:cNvSpPr>
-            <a:spLocks noGrp="1"/>
-          </p:cNvSpPr>
-          <p:nvPr>
-            <p:ph idx="1"/>
-          </p:nvPr>
-        </p:nvSpPr>
-        <p:spPr/>
-        <p:txBody>
-          <a:bodyPr/>
-          <a:lstStyle/>
-          <a:p>
-            <a:r>
-              <a:rPr kumimoji="1" lang="en-US" altLang="ja-JP" dirty="0" err="1" smtClean="0"/>
-              <a:t>relAlign</a:t>
-            </a:r>
-            <a:r>
-              <a:rPr kumimoji="1" lang="en-US" altLang="ja-JP" dirty="0" smtClean="0"/>
-              <a:t> is similar </a:t>
-            </a:r>
-            <a:r>
-              <a:rPr lang="en-US" altLang="ja-JP" dirty="0" smtClean="0"/>
-              <a:t>to </a:t>
-            </a:r>
-            <a:r>
-              <a:rPr lang="en-US" altLang="ja-JP" dirty="0" err="1" smtClean="0"/>
-              <a:t>keyAlign</a:t>
-            </a:r>
-            <a:r>
-              <a:rPr lang="en-US" altLang="ja-JP" dirty="0" smtClean="0"/>
-              <a:t> except that</a:t>
-            </a:r>
-          </a:p>
-          <a:p>
-            <a:pPr marL="0" indent="0">
-              <a:buNone/>
-            </a:pPr>
-            <a:endParaRPr lang="en-US" altLang="ja-JP" dirty="0" smtClean="0"/>
-          </a:p>
-          <a:p>
-            <a:pPr lvl="1"/>
-            <a:r>
-              <a:rPr lang="en-US" altLang="ja-JP" dirty="0" smtClean="0"/>
-              <a:t>We need to consider </a:t>
-            </a:r>
-            <a:r>
-              <a:rPr lang="en-US" altLang="ja-JP" dirty="0" smtClean="0">
-                <a:solidFill>
-                  <a:srgbClr val="FF0000"/>
-                </a:solidFill>
-              </a:rPr>
-              <a:t>filtering of source elements</a:t>
-            </a:r>
-          </a:p>
-          <a:p>
-            <a:pPr lvl="1"/>
-            <a:endParaRPr lang="en-US" altLang="ja-JP" dirty="0" smtClean="0"/>
-          </a:p>
-          <a:p>
-            <a:pPr lvl="1"/>
-            <a:r>
-              <a:rPr kumimoji="1" lang="en-US" altLang="ja-JP" dirty="0" smtClean="0"/>
-              <a:t>We need to </a:t>
-            </a:r>
-            <a:r>
-              <a:rPr kumimoji="1" lang="en-US" altLang="ja-JP" dirty="0" smtClean="0">
-                <a:solidFill>
-                  <a:srgbClr val="FF0000"/>
-                </a:solidFill>
-              </a:rPr>
-              <a:t>recover function dependency </a:t>
-            </a:r>
-            <a:r>
-              <a:rPr kumimoji="1" lang="en-US" altLang="ja-JP" dirty="0" smtClean="0"/>
-              <a:t>when updates happen</a:t>
-            </a:r>
-            <a:endParaRPr kumimoji="1" lang="ja-JP" altLang="en-US" dirty="0"/>
-          </a:p>
-        </p:txBody>
-      </p:sp>
-      <p:sp>
-        <p:nvSpPr>
-          <p:cNvPr id="4" name="スライド番号プレースホルダー 3"/>
-          <p:cNvSpPr>
-            <a:spLocks noGrp="1"/>
-          </p:cNvSpPr>
-          <p:nvPr>
-            <p:ph type="sldNum" sz="quarter" idx="11"/>
-          </p:nvPr>
-        </p:nvSpPr>
-        <p:spPr/>
-        <p:txBody>
-          <a:bodyPr/>
-          <a:lstStyle/>
-          <a:p>
-            <a:fld id="{F96F1464-7F58-8745-A325-E585E650CEFA}" type="slidenum">
-              <a:rPr lang="ja-JP" altLang="en-US" smtClean="0"/>
-              <a:pPr/>
-              <a:t>49</a:t>
             </a:fld>
             <a:endParaRPr lang="ja-JP" altLang="en-US"/>
           </a:p>
@@ -21204,6 +21040,485 @@
 </p:sld>
 </file>
 
+<file path=ppt/slides/slide49.xml><?xml version="1.0" encoding="utf-8"?>
+<p:sld xmlns:a="http://schemas.openxmlformats.org/drawingml/2006/main" xmlns:r="http://schemas.openxmlformats.org/officeDocument/2006/relationships" xmlns:p="http://schemas.openxmlformats.org/presentationml/2006/main">
+  <p:cSld>
+    <p:spTree>
+      <p:nvGrpSpPr>
+        <p:cNvPr id="1" name=""/>
+        <p:cNvGrpSpPr/>
+        <p:nvPr/>
+      </p:nvGrpSpPr>
+      <p:grpSpPr>
+        <a:xfrm>
+          <a:off x="0" y="0"/>
+          <a:ext cx="0" cy="0"/>
+          <a:chOff x="0" y="0"/>
+          <a:chExt cx="0" cy="0"/>
+        </a:xfrm>
+      </p:grpSpPr>
+      <p:sp>
+        <p:nvSpPr>
+          <p:cNvPr id="2" name="タイトル 1"/>
+          <p:cNvSpPr>
+            <a:spLocks noGrp="1"/>
+          </p:cNvSpPr>
+          <p:nvPr>
+            <p:ph type="title"/>
+          </p:nvPr>
+        </p:nvSpPr>
+        <p:spPr/>
+        <p:txBody>
+          <a:bodyPr/>
+          <a:lstStyle/>
+          <a:p>
+            <a:r>
+              <a:rPr kumimoji="1" lang="en-US" altLang="ja-JP" dirty="0" smtClean="0"/>
+              <a:t>Review: </a:t>
+            </a:r>
+            <a:r>
+              <a:rPr kumimoji="1" lang="en-US" altLang="ja-JP" dirty="0" err="1" smtClean="0"/>
+              <a:t>keyAlign</a:t>
+            </a:r>
+            <a:endParaRPr kumimoji="1" lang="ja-JP" altLang="en-US" dirty="0"/>
+          </a:p>
+        </p:txBody>
+      </p:sp>
+      <p:sp>
+        <p:nvSpPr>
+          <p:cNvPr id="4" name="スライド番号プレースホルダー 3"/>
+          <p:cNvSpPr>
+            <a:spLocks noGrp="1"/>
+          </p:cNvSpPr>
+          <p:nvPr>
+            <p:ph type="sldNum" sz="quarter" idx="11"/>
+          </p:nvPr>
+        </p:nvSpPr>
+        <p:spPr/>
+        <p:txBody>
+          <a:bodyPr/>
+          <a:lstStyle/>
+          <a:p>
+            <a:fld id="{F96F1464-7F58-8745-A325-E585E650CEFA}" type="slidenum">
+              <a:rPr lang="ja-JP" altLang="en-US" smtClean="0"/>
+              <a:pPr/>
+              <a:t>49</a:t>
+            </a:fld>
+            <a:endParaRPr lang="ja-JP" altLang="en-US"/>
+          </a:p>
+        </p:txBody>
+      </p:sp>
+      <p:sp>
+        <p:nvSpPr>
+          <p:cNvPr id="5" name="正方形/長方形 4"/>
+          <p:cNvSpPr/>
+          <p:nvPr/>
+        </p:nvSpPr>
+        <p:spPr>
+          <a:xfrm>
+            <a:off x="672845" y="1484784"/>
+            <a:ext cx="8122706" cy="4247317"/>
+          </a:xfrm>
+          <a:prstGeom prst="rect">
+            <a:avLst/>
+          </a:prstGeom>
+          <a:ln>
+            <a:solidFill>
+              <a:srgbClr val="FF6600"/>
+            </a:solidFill>
+          </a:ln>
+        </p:spPr>
+        <p:txBody>
+          <a:bodyPr wrap="square">
+            <a:spAutoFit/>
+          </a:bodyPr>
+          <a:lstStyle/>
+          <a:p>
+            <a:r>
+              <a:rPr lang="en-US" altLang="ja-JP" dirty="0" err="1"/>
+              <a:t>keyAlign</a:t>
+            </a:r>
+            <a:r>
+              <a:rPr lang="en-US" altLang="ja-JP" dirty="0"/>
+              <a:t>  ::  </a:t>
+            </a:r>
+            <a:r>
+              <a:rPr lang="en-US" altLang="ja-JP" dirty="0" err="1"/>
+              <a:t>forall</a:t>
+            </a:r>
+            <a:r>
+              <a:rPr lang="en-US" altLang="ja-JP" dirty="0"/>
+              <a:t> s v k. (Show s, Show v, </a:t>
+            </a:r>
+            <a:r>
+              <a:rPr lang="en-US" altLang="ja-JP" dirty="0" err="1"/>
+              <a:t>Eq</a:t>
+            </a:r>
+            <a:r>
+              <a:rPr lang="en-US" altLang="ja-JP" dirty="0"/>
+              <a:t> k)</a:t>
+            </a:r>
+          </a:p>
+          <a:p>
+            <a:r>
+              <a:rPr lang="en-US" altLang="ja-JP" dirty="0"/>
+              <a:t>          =&gt;  (s -&gt; k) -&gt; (v -&gt; k) -&gt; </a:t>
+            </a:r>
+            <a:r>
+              <a:rPr lang="en-US" altLang="ja-JP" dirty="0" err="1"/>
+              <a:t>BiGUL</a:t>
+            </a:r>
+            <a:r>
+              <a:rPr lang="en-US" altLang="ja-JP" dirty="0"/>
+              <a:t> s v -&gt; (v -&gt; s) -&gt; </a:t>
+            </a:r>
+            <a:r>
+              <a:rPr lang="en-US" altLang="ja-JP" dirty="0" err="1"/>
+              <a:t>BiGUL</a:t>
+            </a:r>
+            <a:r>
+              <a:rPr lang="en-US" altLang="ja-JP" dirty="0"/>
+              <a:t> [s] [v]</a:t>
+            </a:r>
+          </a:p>
+          <a:p>
+            <a:r>
+              <a:rPr lang="en-US" altLang="ja-JP" dirty="0" err="1"/>
+              <a:t>keyAlign</a:t>
+            </a:r>
+            <a:r>
+              <a:rPr lang="en-US" altLang="ja-JP" dirty="0"/>
+              <a:t> </a:t>
+            </a:r>
+            <a:r>
+              <a:rPr lang="en-US" altLang="ja-JP" dirty="0" err="1"/>
+              <a:t>ks</a:t>
+            </a:r>
+            <a:r>
+              <a:rPr lang="en-US" altLang="ja-JP" dirty="0"/>
+              <a:t> </a:t>
+            </a:r>
+            <a:r>
+              <a:rPr lang="en-US" altLang="ja-JP" dirty="0" err="1"/>
+              <a:t>kv</a:t>
+            </a:r>
+            <a:r>
+              <a:rPr lang="en-US" altLang="ja-JP" dirty="0"/>
+              <a:t> b c = Case</a:t>
+            </a:r>
+          </a:p>
+          <a:p>
+            <a:r>
+              <a:rPr lang="en-US" altLang="ja-JP" dirty="0"/>
+              <a:t>  [ $(</a:t>
+            </a:r>
+            <a:r>
+              <a:rPr lang="en-US" altLang="ja-JP" dirty="0" err="1"/>
+              <a:t>normalSV</a:t>
+            </a:r>
+            <a:r>
+              <a:rPr lang="en-US" altLang="ja-JP" dirty="0"/>
+              <a:t> [p| [] |] [p| [] |] [p| [] |])</a:t>
+            </a:r>
+          </a:p>
+          <a:p>
+            <a:r>
+              <a:rPr lang="en-US" altLang="ja-JP" dirty="0"/>
+              <a:t>    ==&gt; $(update [p| [] |] [p| [] |] [d| |])</a:t>
+            </a:r>
+          </a:p>
+          <a:p>
+            <a:r>
+              <a:rPr lang="en-US" altLang="ja-JP" dirty="0"/>
+              <a:t>  , $(normal [| \(</a:t>
+            </a:r>
+            <a:r>
+              <a:rPr lang="en-US" altLang="ja-JP" dirty="0" err="1"/>
+              <a:t>s:ss</a:t>
+            </a:r>
+            <a:r>
+              <a:rPr lang="en-US" altLang="ja-JP" dirty="0"/>
+              <a:t>) (</a:t>
+            </a:r>
+            <a:r>
+              <a:rPr lang="en-US" altLang="ja-JP" dirty="0" err="1"/>
+              <a:t>v:vs</a:t>
+            </a:r>
+            <a:r>
+              <a:rPr lang="en-US" altLang="ja-JP" dirty="0"/>
+              <a:t>) -&gt; </a:t>
+            </a:r>
+            <a:r>
+              <a:rPr lang="en-US" altLang="ja-JP" dirty="0" err="1"/>
+              <a:t>ks</a:t>
+            </a:r>
+            <a:r>
+              <a:rPr lang="en-US" altLang="ja-JP" dirty="0"/>
+              <a:t> s == </a:t>
+            </a:r>
+            <a:r>
+              <a:rPr lang="en-US" altLang="ja-JP" dirty="0" err="1"/>
+              <a:t>kv</a:t>
+            </a:r>
+            <a:r>
+              <a:rPr lang="en-US" altLang="ja-JP" dirty="0"/>
+              <a:t> v |] [p| _ : _ |])</a:t>
+            </a:r>
+          </a:p>
+          <a:p>
+            <a:r>
+              <a:rPr lang="en-US" altLang="ja-JP" dirty="0"/>
+              <a:t>    ==&gt; $(update [p| </a:t>
+            </a:r>
+            <a:r>
+              <a:rPr lang="en-US" altLang="ja-JP" dirty="0" err="1"/>
+              <a:t>x:xs</a:t>
+            </a:r>
+            <a:r>
+              <a:rPr lang="en-US" altLang="ja-JP" dirty="0"/>
+              <a:t> |]  [p| </a:t>
+            </a:r>
+            <a:r>
+              <a:rPr lang="en-US" altLang="ja-JP" dirty="0" err="1"/>
+              <a:t>x:xs</a:t>
+            </a:r>
+            <a:r>
+              <a:rPr lang="en-US" altLang="ja-JP" dirty="0"/>
+              <a:t> |]</a:t>
+            </a:r>
+          </a:p>
+          <a:p>
+            <a:r>
+              <a:rPr lang="en-US" altLang="ja-JP" dirty="0"/>
+              <a:t>                              [d| x = b; </a:t>
+            </a:r>
+            <a:r>
+              <a:rPr lang="en-US" altLang="ja-JP" dirty="0" err="1"/>
+              <a:t>xs</a:t>
+            </a:r>
+            <a:r>
+              <a:rPr lang="en-US" altLang="ja-JP" dirty="0"/>
+              <a:t> = </a:t>
+            </a:r>
+            <a:r>
+              <a:rPr lang="en-US" altLang="ja-JP" dirty="0" err="1"/>
+              <a:t>keyAlign</a:t>
+            </a:r>
+            <a:r>
+              <a:rPr lang="en-US" altLang="ja-JP" dirty="0"/>
+              <a:t> </a:t>
+            </a:r>
+            <a:r>
+              <a:rPr lang="en-US" altLang="ja-JP" dirty="0" err="1"/>
+              <a:t>ks</a:t>
+            </a:r>
+            <a:r>
+              <a:rPr lang="en-US" altLang="ja-JP" dirty="0"/>
+              <a:t> </a:t>
+            </a:r>
+            <a:r>
+              <a:rPr lang="en-US" altLang="ja-JP" dirty="0" err="1"/>
+              <a:t>kv</a:t>
+            </a:r>
+            <a:r>
+              <a:rPr lang="en-US" altLang="ja-JP" dirty="0"/>
+              <a:t> b c |])</a:t>
+            </a:r>
+          </a:p>
+          <a:p>
+            <a:r>
+              <a:rPr lang="en-US" altLang="ja-JP" dirty="0"/>
+              <a:t>  , </a:t>
+            </a:r>
+            <a:r>
+              <a:rPr lang="en-US" altLang="ja-JP" dirty="0">
+                <a:solidFill>
+                  <a:srgbClr val="000000"/>
+                </a:solidFill>
+              </a:rPr>
+              <a:t>$(</a:t>
+            </a:r>
+            <a:r>
+              <a:rPr lang="en-US" altLang="ja-JP" dirty="0" err="1">
+                <a:solidFill>
+                  <a:srgbClr val="000000"/>
+                </a:solidFill>
+              </a:rPr>
+              <a:t>adaptiveSV</a:t>
+            </a:r>
+            <a:r>
+              <a:rPr lang="en-US" altLang="ja-JP" dirty="0">
+                <a:solidFill>
+                  <a:srgbClr val="000000"/>
+                </a:solidFill>
+              </a:rPr>
+              <a:t> [p| _ : _ |] [p| [] |])</a:t>
+            </a:r>
+          </a:p>
+          <a:p>
+            <a:r>
+              <a:rPr lang="en-US" altLang="ja-JP" dirty="0">
+                <a:solidFill>
+                  <a:srgbClr val="000000"/>
+                </a:solidFill>
+              </a:rPr>
+              <a:t>    ==&gt; \ _ _ -&gt; []</a:t>
+            </a:r>
+          </a:p>
+          <a:p>
+            <a:r>
+              <a:rPr lang="en-US" altLang="ja-JP" dirty="0"/>
+              <a:t>  , $(adaptive [| \</a:t>
+            </a:r>
+            <a:r>
+              <a:rPr lang="en-US" altLang="ja-JP" dirty="0" err="1"/>
+              <a:t>ss</a:t>
+            </a:r>
+            <a:r>
+              <a:rPr lang="en-US" altLang="ja-JP" dirty="0"/>
+              <a:t> (</a:t>
+            </a:r>
+            <a:r>
+              <a:rPr lang="en-US" altLang="ja-JP" dirty="0" err="1"/>
+              <a:t>v:vs</a:t>
+            </a:r>
+            <a:r>
+              <a:rPr lang="en-US" altLang="ja-JP" dirty="0"/>
+              <a:t>) -&gt; </a:t>
+            </a:r>
+            <a:r>
+              <a:rPr lang="en-US" altLang="ja-JP" dirty="0" err="1"/>
+              <a:t>kv</a:t>
+            </a:r>
+            <a:r>
+              <a:rPr lang="en-US" altLang="ja-JP" dirty="0"/>
+              <a:t> v `</a:t>
+            </a:r>
+            <a:r>
+              <a:rPr lang="en-US" altLang="ja-JP" dirty="0" err="1"/>
+              <a:t>elem</a:t>
+            </a:r>
+            <a:r>
+              <a:rPr lang="en-US" altLang="ja-JP" dirty="0"/>
+              <a:t>` map </a:t>
+            </a:r>
+            <a:r>
+              <a:rPr lang="en-US" altLang="ja-JP" dirty="0" err="1"/>
+              <a:t>ks</a:t>
+            </a:r>
+            <a:r>
+              <a:rPr lang="en-US" altLang="ja-JP" dirty="0"/>
+              <a:t> </a:t>
+            </a:r>
+            <a:r>
+              <a:rPr lang="en-US" altLang="ja-JP" dirty="0" err="1"/>
+              <a:t>ss</a:t>
+            </a:r>
+            <a:r>
+              <a:rPr lang="en-US" altLang="ja-JP" dirty="0"/>
+              <a:t> |])</a:t>
+            </a:r>
+          </a:p>
+          <a:p>
+            <a:r>
+              <a:rPr lang="en-US" altLang="ja-JP" dirty="0"/>
+              <a:t>    ==&gt; \</a:t>
+            </a:r>
+            <a:r>
+              <a:rPr lang="en-US" altLang="ja-JP" dirty="0" err="1"/>
+              <a:t>ss</a:t>
+            </a:r>
+            <a:r>
+              <a:rPr lang="en-US" altLang="ja-JP" dirty="0"/>
+              <a:t> (v : _) -&gt; </a:t>
+            </a:r>
+            <a:r>
+              <a:rPr lang="en-US" altLang="ja-JP" dirty="0" err="1"/>
+              <a:t>uncurry</a:t>
+            </a:r>
+            <a:r>
+              <a:rPr lang="en-US" altLang="ja-JP" dirty="0"/>
+              <a:t> (:) (extract (</a:t>
+            </a:r>
+            <a:r>
+              <a:rPr lang="en-US" altLang="ja-JP" dirty="0" err="1"/>
+              <a:t>kv</a:t>
+            </a:r>
+            <a:r>
+              <a:rPr lang="en-US" altLang="ja-JP" dirty="0"/>
+              <a:t> v) </a:t>
+            </a:r>
+            <a:r>
+              <a:rPr lang="en-US" altLang="ja-JP" dirty="0" err="1"/>
+              <a:t>ss</a:t>
+            </a:r>
+            <a:r>
+              <a:rPr lang="en-US" altLang="ja-JP" dirty="0"/>
+              <a:t>)</a:t>
+            </a:r>
+          </a:p>
+          <a:p>
+            <a:r>
+              <a:rPr lang="en-US" altLang="ja-JP" dirty="0"/>
+              <a:t>  , $(</a:t>
+            </a:r>
+            <a:r>
+              <a:rPr lang="en-US" altLang="ja-JP" dirty="0" err="1"/>
+              <a:t>adaptiveSV</a:t>
+            </a:r>
+            <a:r>
+              <a:rPr lang="en-US" altLang="ja-JP" dirty="0"/>
+              <a:t> [p| _ |] [p| _ : _ |])</a:t>
+            </a:r>
+          </a:p>
+          <a:p>
+            <a:r>
+              <a:rPr lang="en-US" altLang="ja-JP" dirty="0"/>
+              <a:t>    ==&gt; \</a:t>
+            </a:r>
+            <a:r>
+              <a:rPr lang="en-US" altLang="ja-JP" dirty="0" err="1"/>
+              <a:t>ss</a:t>
+            </a:r>
+            <a:r>
+              <a:rPr lang="en-US" altLang="ja-JP" dirty="0"/>
+              <a:t> (v : _) -&gt; c v : </a:t>
+            </a:r>
+            <a:r>
+              <a:rPr lang="en-US" altLang="ja-JP" dirty="0" err="1"/>
+              <a:t>ss</a:t>
+            </a:r>
+            <a:endParaRPr lang="en-US" altLang="ja-JP" dirty="0"/>
+          </a:p>
+          <a:p>
+            <a:r>
+              <a:rPr lang="en-US" altLang="ja-JP" dirty="0"/>
+              <a:t>  ]</a:t>
+            </a:r>
+            <a:endParaRPr lang="ja-JP" altLang="en-US" dirty="0"/>
+          </a:p>
+        </p:txBody>
+      </p:sp>
+    </p:spTree>
+    <p:extLst>
+      <p:ext uri="{BB962C8B-B14F-4D97-AF65-F5344CB8AC3E}">
+        <p14:creationId xmlns:p14="http://schemas.microsoft.com/office/powerpoint/2010/main" val="434836503"/>
+      </p:ext>
+    </p:extLst>
+  </p:cSld>
+  <p:clrMapOvr>
+    <a:masterClrMapping/>
+  </p:clrMapOvr>
+  <p:timing>
+    <p:tnLst>
+      <p:par>
+        <p:cTn xmlns:p14="http://schemas.microsoft.com/office/powerpoint/2010/main" id="1" dur="indefinite" restart="never" nodeType="tmRoot"/>
+      </p:par>
+    </p:tnLst>
+  </p:timing>
+</p:sld>
+</file>
+
 <file path=ppt/slides/slide5.xml><?xml version="1.0" encoding="utf-8"?>
 <p:sld xmlns:a="http://schemas.openxmlformats.org/drawingml/2006/main" xmlns:r="http://schemas.openxmlformats.org/officeDocument/2006/relationships" xmlns:p="http://schemas.openxmlformats.org/presentationml/2006/main">
   <p:cSld>
@@ -21468,11 +21783,19 @@
           <a:p>
             <a:r>
               <a:rPr kumimoji="1" lang="en-US" altLang="ja-JP" dirty="0" smtClean="0"/>
-              <a:t>Review: </a:t>
+              <a:t>From </a:t>
             </a:r>
             <a:r>
               <a:rPr kumimoji="1" lang="en-US" altLang="ja-JP" dirty="0" err="1" smtClean="0"/>
               <a:t>keyAlign</a:t>
+            </a:r>
+            <a:r>
+              <a:rPr kumimoji="1" lang="en-US" altLang="ja-JP" dirty="0" smtClean="0"/>
+              <a:t> to </a:t>
+            </a:r>
+            <a:r>
+              <a:rPr kumimoji="1" lang="en-US" altLang="ja-JP" dirty="0" err="1" smtClean="0"/>
+              <a:t>pAlign</a:t>
             </a:r>
             <a:endParaRPr kumimoji="1" lang="ja-JP" altLang="en-US" dirty="0"/>
           </a:p>
@@ -21510,17 +21833,12 @@
         </p:nvSpPr>
         <p:spPr>
           <a:xfrm>
-            <a:off x="672845" y="1484784"/>
-            <a:ext cx="8122706" cy="4247317"/>
+            <a:off x="426726" y="1029252"/>
+            <a:ext cx="8177722" cy="5355313"/>
           </a:xfrm>
           <a:prstGeom prst="rect">
             <a:avLst/>
           </a:prstGeom>
-          <a:ln>
-            <a:solidFill>
-              <a:srgbClr val="FF6600"/>
-            </a:solidFill>
-          </a:ln>
         </p:spPr>
         <p:txBody>
           <a:bodyPr wrap="square">
@@ -21530,11 +21848,11 @@
           <a:p>
             <a:r>
               <a:rPr lang="en-US" altLang="ja-JP" dirty="0" err="1"/>
-              <a:t>keyAlign</a:t>
-            </a:r>
-            <a:r>
-              <a:rPr lang="en-US" altLang="ja-JP" dirty="0"/>
-              <a:t>  ::  </a:t>
+              <a:t>pAlign</a:t>
+            </a:r>
+            <a:r>
+              <a:rPr lang="en-US" altLang="ja-JP" dirty="0"/>
+              <a:t> :: </a:t>
             </a:r>
             <a:r>
               <a:rPr lang="en-US" altLang="ja-JP" dirty="0" err="1"/>
@@ -21556,207 +21874,368 @@
           <a:p>
             <a:r>
               <a:rPr lang="en-US" altLang="ja-JP" dirty="0"/>
-              <a:t>          =&gt;  (s -&gt; k) -&gt; (v -&gt; k) -&gt; </a:t>
-            </a:r>
-            <a:r>
-              <a:rPr lang="en-US" altLang="ja-JP" dirty="0" err="1"/>
-              <a:t>BiGUL</a:t>
-            </a:r>
-            <a:r>
-              <a:rPr lang="en-US" altLang="ja-JP" dirty="0"/>
-              <a:t> s v -&gt; (v -&gt; s) -&gt; </a:t>
-            </a:r>
-            <a:r>
-              <a:rPr lang="en-US" altLang="ja-JP" dirty="0" err="1"/>
-              <a:t>BiGUL</a:t>
-            </a:r>
-            <a:r>
-              <a:rPr lang="en-US" altLang="ja-JP" dirty="0"/>
-              <a:t> [s] [v]</a:t>
-            </a:r>
-          </a:p>
-          <a:p>
-            <a:r>
-              <a:rPr lang="en-US" altLang="ja-JP" dirty="0" err="1"/>
-              <a:t>keyAlign</a:t>
-            </a:r>
-            <a:r>
-              <a:rPr lang="en-US" altLang="ja-JP" dirty="0"/>
-              <a:t> </a:t>
-            </a:r>
-            <a:r>
-              <a:rPr lang="en-US" altLang="ja-JP" dirty="0" err="1"/>
-              <a:t>ks</a:t>
-            </a:r>
-            <a:r>
-              <a:rPr lang="en-US" altLang="ja-JP" dirty="0"/>
-              <a:t> </a:t>
-            </a:r>
-            <a:r>
-              <a:rPr lang="en-US" altLang="ja-JP" dirty="0" err="1"/>
-              <a:t>kv</a:t>
-            </a:r>
-            <a:r>
-              <a:rPr lang="en-US" altLang="ja-JP" dirty="0"/>
-              <a:t> b c = Case</a:t>
-            </a:r>
-          </a:p>
-          <a:p>
-            <a:r>
-              <a:rPr lang="en-US" altLang="ja-JP" dirty="0"/>
-              <a:t>  [ $(</a:t>
-            </a:r>
-            <a:r>
-              <a:rPr lang="en-US" altLang="ja-JP" dirty="0" err="1"/>
-              <a:t>normalSV</a:t>
-            </a:r>
-            <a:r>
-              <a:rPr lang="en-US" altLang="ja-JP" dirty="0"/>
-              <a:t> [p| [] |] [p| [] |] [p| [] |])</a:t>
-            </a:r>
-          </a:p>
-          <a:p>
-            <a:r>
-              <a:rPr lang="en-US" altLang="ja-JP" dirty="0"/>
-              <a:t>    ==&gt; $(update [p| [] |] [p| [] |] [d| |])</a:t>
-            </a:r>
-          </a:p>
-          <a:p>
-            <a:r>
-              <a:rPr lang="en-US" altLang="ja-JP" dirty="0"/>
-              <a:t>  , $(normal [| \(</a:t>
-            </a:r>
-            <a:r>
-              <a:rPr lang="en-US" altLang="ja-JP" dirty="0" err="1"/>
-              <a:t>s:ss</a:t>
-            </a:r>
-            <a:r>
-              <a:rPr lang="en-US" altLang="ja-JP" dirty="0"/>
-              <a:t>) (</a:t>
-            </a:r>
-            <a:r>
-              <a:rPr lang="en-US" altLang="ja-JP" dirty="0" err="1"/>
-              <a:t>v:vs</a:t>
-            </a:r>
-            <a:r>
-              <a:rPr lang="en-US" altLang="ja-JP" dirty="0"/>
-              <a:t>) -&gt; </a:t>
-            </a:r>
-            <a:r>
-              <a:rPr lang="en-US" altLang="ja-JP" dirty="0" err="1"/>
-              <a:t>ks</a:t>
-            </a:r>
-            <a:r>
-              <a:rPr lang="en-US" altLang="ja-JP" dirty="0"/>
-              <a:t> s == </a:t>
-            </a:r>
-            <a:r>
-              <a:rPr lang="en-US" altLang="ja-JP" dirty="0" err="1"/>
-              <a:t>kv</a:t>
-            </a:r>
-            <a:r>
-              <a:rPr lang="en-US" altLang="ja-JP" dirty="0"/>
-              <a:t> v |] [p| _ : _ |])</a:t>
-            </a:r>
-          </a:p>
-          <a:p>
-            <a:r>
-              <a:rPr lang="en-US" altLang="ja-JP" dirty="0"/>
-              <a:t>    ==&gt; $(update [p| </a:t>
-            </a:r>
-            <a:r>
-              <a:rPr lang="en-US" altLang="ja-JP" dirty="0" err="1"/>
-              <a:t>x:xs</a:t>
-            </a:r>
-            <a:r>
-              <a:rPr lang="en-US" altLang="ja-JP" dirty="0"/>
-              <a:t> |]  [p| </a:t>
-            </a:r>
-            <a:r>
-              <a:rPr lang="en-US" altLang="ja-JP" dirty="0" err="1"/>
-              <a:t>x:xs</a:t>
-            </a:r>
-            <a:r>
-              <a:rPr lang="en-US" altLang="ja-JP" dirty="0"/>
-              <a:t> |]</a:t>
-            </a:r>
-          </a:p>
-          <a:p>
-            <a:r>
-              <a:rPr lang="en-US" altLang="ja-JP" dirty="0"/>
-              <a:t>                              [d| x = b; </a:t>
-            </a:r>
-            <a:r>
-              <a:rPr lang="en-US" altLang="ja-JP" dirty="0" err="1"/>
-              <a:t>xs</a:t>
-            </a:r>
-            <a:r>
-              <a:rPr lang="en-US" altLang="ja-JP" dirty="0"/>
-              <a:t> = </a:t>
-            </a:r>
-            <a:r>
-              <a:rPr lang="en-US" altLang="ja-JP" dirty="0" err="1"/>
-              <a:t>keyAlign</a:t>
-            </a:r>
-            <a:r>
-              <a:rPr lang="en-US" altLang="ja-JP" dirty="0"/>
-              <a:t> </a:t>
-            </a:r>
-            <a:r>
-              <a:rPr lang="en-US" altLang="ja-JP" dirty="0" err="1"/>
-              <a:t>ks</a:t>
-            </a:r>
-            <a:r>
-              <a:rPr lang="en-US" altLang="ja-JP" dirty="0"/>
-              <a:t> </a:t>
-            </a:r>
-            <a:r>
-              <a:rPr lang="en-US" altLang="ja-JP" dirty="0" err="1"/>
-              <a:t>kv</a:t>
-            </a:r>
-            <a:r>
-              <a:rPr lang="en-US" altLang="ja-JP" dirty="0"/>
-              <a:t> b c |])</a:t>
-            </a:r>
-          </a:p>
-          <a:p>
-            <a:r>
-              <a:rPr lang="en-US" altLang="ja-JP" dirty="0"/>
-              <a:t>  , </a:t>
+              <a:t>         =&gt; </a:t>
             </a:r>
             <a:r>
               <a:rPr lang="en-US" altLang="ja-JP" dirty="0">
                 <a:solidFill>
-                  <a:srgbClr val="000000"/>
+                  <a:srgbClr val="FF0000"/>
                 </a:solidFill>
               </a:rPr>
-              <a:t>$(</a:t>
+              <a:t>(s -&gt; </a:t>
             </a:r>
             <a:r>
               <a:rPr lang="en-US" altLang="ja-JP" dirty="0" err="1">
                 <a:solidFill>
-                  <a:srgbClr val="000000"/>
+                  <a:srgbClr val="FF0000"/>
                 </a:solidFill>
               </a:rPr>
-              <a:t>adaptiveSV</a:t>
+              <a:t>Bool</a:t>
             </a:r>
             <a:r>
               <a:rPr lang="en-US" altLang="ja-JP" dirty="0">
                 <a:solidFill>
-                  <a:srgbClr val="000000"/>
+                  <a:srgbClr val="FF0000"/>
                 </a:solidFill>
               </a:rPr>
-              <a:t> [p| _ : _ |] [p| [] |])</a:t>
-            </a:r>
-          </a:p>
-          <a:p>
+              <a:t>) {- predicate -}</a:t>
+            </a:r>
+          </a:p>
+          <a:p>
+            <a:r>
+              <a:rPr lang="en-US" altLang="ja-JP" dirty="0"/>
+              <a:t>            -&gt; (s -&gt; k) -&gt; (v -&gt; k) -&gt; </a:t>
+            </a:r>
+            <a:r>
+              <a:rPr lang="en-US" altLang="ja-JP" dirty="0" err="1"/>
+              <a:t>BiGUL</a:t>
+            </a:r>
+            <a:r>
+              <a:rPr lang="en-US" altLang="ja-JP" dirty="0"/>
+              <a:t> s v -&gt; (v -&gt; s) </a:t>
+            </a:r>
+          </a:p>
+          <a:p>
+            <a:r>
+              <a:rPr lang="en-US" altLang="ja-JP" dirty="0"/>
+              <a:t>            -&gt; </a:t>
+            </a:r>
             <a:r>
               <a:rPr lang="en-US" altLang="ja-JP" dirty="0">
                 <a:solidFill>
-                  <a:srgbClr val="000000"/>
+                  <a:srgbClr val="FF0000"/>
                 </a:solidFill>
               </a:rPr>
-              <a:t>    ==&gt; \ _ _ -&gt; []</a:t>
+              <a:t>(s -&gt; Maybe s) {- </a:t>
+            </a:r>
+            <a:r>
+              <a:rPr lang="en-US" altLang="ja-JP" dirty="0" smtClean="0">
+                <a:solidFill>
+                  <a:srgbClr val="FF0000"/>
+                </a:solidFill>
+              </a:rPr>
+              <a:t>conceal/hide </a:t>
+            </a:r>
+            <a:r>
+              <a:rPr lang="en-US" altLang="ja-JP" dirty="0">
+                <a:solidFill>
+                  <a:srgbClr val="FF0000"/>
+                </a:solidFill>
+              </a:rPr>
+              <a:t>function -}</a:t>
+            </a:r>
+          </a:p>
+          <a:p>
+            <a:r>
+              <a:rPr lang="en-US" altLang="ja-JP" dirty="0"/>
+              <a:t>            -&gt; </a:t>
+            </a:r>
+            <a:r>
+              <a:rPr lang="en-US" altLang="ja-JP" dirty="0" err="1"/>
+              <a:t>BiGUL</a:t>
+            </a:r>
+            <a:r>
+              <a:rPr lang="en-US" altLang="ja-JP" dirty="0"/>
+              <a:t> [s] [v]</a:t>
+            </a:r>
+          </a:p>
+          <a:p>
+            <a:r>
+              <a:rPr lang="en-US" altLang="ja-JP" dirty="0" err="1"/>
+              <a:t>pAlign</a:t>
+            </a:r>
+            <a:r>
+              <a:rPr lang="en-US" altLang="ja-JP" dirty="0"/>
+              <a:t> </a:t>
+            </a:r>
+            <a:r>
+              <a:rPr lang="en-US" altLang="ja-JP" dirty="0">
+                <a:solidFill>
+                  <a:srgbClr val="FF0000"/>
+                </a:solidFill>
+              </a:rPr>
+              <a:t>p</a:t>
+            </a:r>
+            <a:r>
+              <a:rPr lang="en-US" altLang="ja-JP" dirty="0"/>
+              <a:t> </a:t>
+            </a:r>
+            <a:r>
+              <a:rPr lang="en-US" altLang="ja-JP" dirty="0" err="1"/>
+              <a:t>ks</a:t>
+            </a:r>
+            <a:r>
+              <a:rPr lang="en-US" altLang="ja-JP" dirty="0"/>
+              <a:t> </a:t>
+            </a:r>
+            <a:r>
+              <a:rPr lang="en-US" altLang="ja-JP" dirty="0" err="1"/>
+              <a:t>kv</a:t>
+            </a:r>
+            <a:r>
+              <a:rPr lang="en-US" altLang="ja-JP" dirty="0"/>
+              <a:t> b c </a:t>
+            </a:r>
+            <a:r>
+              <a:rPr lang="en-US" altLang="ja-JP" dirty="0">
+                <a:solidFill>
+                  <a:srgbClr val="FF0000"/>
+                </a:solidFill>
+              </a:rPr>
+              <a:t>h</a:t>
+            </a:r>
+            <a:r>
+              <a:rPr lang="en-US" altLang="ja-JP" dirty="0"/>
+              <a:t> = Case</a:t>
+            </a:r>
+          </a:p>
+          <a:p>
+            <a:r>
+              <a:rPr lang="en-US" altLang="ja-JP" dirty="0"/>
+              <a:t>  [ $(</a:t>
+            </a:r>
+            <a:r>
+              <a:rPr lang="en-US" altLang="ja-JP" dirty="0" err="1"/>
+              <a:t>normalSV</a:t>
+            </a:r>
+            <a:r>
+              <a:rPr lang="en-US" altLang="ja-JP" dirty="0"/>
+              <a:t> [p| [] |] [p| [] |] [p| [] |])</a:t>
+            </a:r>
+          </a:p>
+          <a:p>
+            <a:r>
+              <a:rPr lang="en-US" altLang="ja-JP" dirty="0"/>
+              <a:t>    ==&gt; $(update [p| [] |] [p| [] |] [d| |])</a:t>
+            </a:r>
+          </a:p>
+          <a:p>
+            <a:r>
+              <a:rPr lang="en-US" altLang="ja-JP" dirty="0"/>
+              <a:t>  , $(normal [| \(</a:t>
+            </a:r>
+            <a:r>
+              <a:rPr lang="en-US" altLang="ja-JP" dirty="0" err="1"/>
+              <a:t>s:ss</a:t>
+            </a:r>
+            <a:r>
+              <a:rPr lang="en-US" altLang="ja-JP" dirty="0"/>
+              <a:t>) (</a:t>
+            </a:r>
+            <a:r>
+              <a:rPr lang="en-US" altLang="ja-JP" dirty="0" err="1"/>
+              <a:t>v:vs</a:t>
+            </a:r>
+            <a:r>
+              <a:rPr lang="en-US" altLang="ja-JP" dirty="0"/>
+              <a:t>) -&gt; p s &amp;&amp; </a:t>
+            </a:r>
+            <a:r>
+              <a:rPr lang="en-US" altLang="ja-JP" dirty="0" err="1"/>
+              <a:t>ks</a:t>
+            </a:r>
+            <a:r>
+              <a:rPr lang="en-US" altLang="ja-JP" dirty="0"/>
+              <a:t> s == </a:t>
+            </a:r>
+            <a:r>
+              <a:rPr lang="en-US" altLang="ja-JP" dirty="0" err="1"/>
+              <a:t>kv</a:t>
+            </a:r>
+            <a:r>
+              <a:rPr lang="en-US" altLang="ja-JP" dirty="0"/>
+              <a:t> v |] [| \(</a:t>
+            </a:r>
+            <a:r>
+              <a:rPr lang="en-US" altLang="ja-JP" dirty="0" err="1"/>
+              <a:t>s:ss</a:t>
+            </a:r>
+            <a:r>
+              <a:rPr lang="en-US" altLang="ja-JP" dirty="0"/>
+              <a:t>) -&gt; p s |])</a:t>
+            </a:r>
+          </a:p>
+          <a:p>
+            <a:r>
+              <a:rPr lang="en-US" altLang="ja-JP" dirty="0"/>
+              <a:t>    ==&gt; $(update [p| </a:t>
+            </a:r>
+            <a:r>
+              <a:rPr lang="en-US" altLang="ja-JP" dirty="0" err="1"/>
+              <a:t>x:xs</a:t>
+            </a:r>
+            <a:r>
+              <a:rPr lang="en-US" altLang="ja-JP" dirty="0"/>
+              <a:t> |] [p| </a:t>
+            </a:r>
+            <a:r>
+              <a:rPr lang="en-US" altLang="ja-JP" dirty="0" err="1"/>
+              <a:t>x:xs</a:t>
+            </a:r>
+            <a:r>
+              <a:rPr lang="en-US" altLang="ja-JP" dirty="0"/>
+              <a:t> |] [d| x = b; </a:t>
+            </a:r>
+            <a:r>
+              <a:rPr lang="en-US" altLang="ja-JP" dirty="0" err="1"/>
+              <a:t>xs</a:t>
+            </a:r>
+            <a:r>
+              <a:rPr lang="en-US" altLang="ja-JP" dirty="0"/>
+              <a:t> = </a:t>
+            </a:r>
+            <a:r>
+              <a:rPr lang="en-US" altLang="ja-JP" dirty="0" err="1"/>
+              <a:t>pAlign</a:t>
+            </a:r>
+            <a:r>
+              <a:rPr lang="en-US" altLang="ja-JP" dirty="0"/>
+              <a:t> p </a:t>
+            </a:r>
+            <a:r>
+              <a:rPr lang="en-US" altLang="ja-JP" dirty="0" err="1"/>
+              <a:t>ks</a:t>
+            </a:r>
+            <a:r>
+              <a:rPr lang="en-US" altLang="ja-JP" dirty="0"/>
+              <a:t> </a:t>
+            </a:r>
+            <a:r>
+              <a:rPr lang="en-US" altLang="ja-JP" dirty="0" err="1"/>
+              <a:t>kv</a:t>
+            </a:r>
+            <a:r>
+              <a:rPr lang="en-US" altLang="ja-JP" dirty="0"/>
+              <a:t> b c h |])</a:t>
+            </a:r>
+          </a:p>
+          <a:p>
+            <a:r>
+              <a:rPr lang="en-US" altLang="ja-JP" dirty="0"/>
+              <a:t>  , $(adaptive [| \(</a:t>
+            </a:r>
+            <a:r>
+              <a:rPr lang="en-US" altLang="ja-JP" dirty="0" err="1"/>
+              <a:t>s:ss</a:t>
+            </a:r>
+            <a:r>
+              <a:rPr lang="en-US" altLang="ja-JP" dirty="0"/>
+              <a:t>) v -&gt; p s &amp;&amp; null v|])</a:t>
+            </a:r>
+          </a:p>
+          <a:p>
+            <a:r>
+              <a:rPr lang="en-US" altLang="ja-JP" dirty="0"/>
+              <a:t>    ==&gt; \(</a:t>
+            </a:r>
+            <a:r>
+              <a:rPr lang="en-US" altLang="ja-JP" dirty="0" err="1"/>
+              <a:t>s:ss</a:t>
+            </a:r>
+            <a:r>
+              <a:rPr lang="en-US" altLang="ja-JP" dirty="0"/>
+              <a:t>) v -&gt; maybe [] (:[]) (h s) ++ </a:t>
+            </a:r>
+            <a:r>
+              <a:rPr lang="en-US" altLang="ja-JP" dirty="0" err="1"/>
+              <a:t>ss</a:t>
+            </a:r>
+            <a:endParaRPr lang="en-US" altLang="ja-JP" dirty="0"/>
+          </a:p>
+          <a:p>
+            <a:r>
+              <a:rPr lang="en-US" altLang="ja-JP" dirty="0"/>
+              <a:t>  , $(normal [| \(</a:t>
+            </a:r>
+            <a:r>
+              <a:rPr lang="en-US" altLang="ja-JP" dirty="0" err="1"/>
+              <a:t>s:ss</a:t>
+            </a:r>
+            <a:r>
+              <a:rPr lang="en-US" altLang="ja-JP" dirty="0"/>
+              <a:t>) v -&gt; not (p s) |] [| \(</a:t>
+            </a:r>
+            <a:r>
+              <a:rPr lang="en-US" altLang="ja-JP" dirty="0" err="1"/>
+              <a:t>s:ss</a:t>
+            </a:r>
+            <a:r>
+              <a:rPr lang="en-US" altLang="ja-JP" dirty="0"/>
+              <a:t>) -&gt; not (p s) |])</a:t>
+            </a:r>
+          </a:p>
+          <a:p>
+            <a:r>
+              <a:rPr lang="en-US" altLang="ja-JP" dirty="0"/>
+              <a:t>    ==&gt; $(update [p| _:</a:t>
+            </a:r>
+            <a:r>
+              <a:rPr lang="en-US" altLang="ja-JP" dirty="0" err="1"/>
+              <a:t>xs</a:t>
+            </a:r>
+            <a:r>
+              <a:rPr lang="en-US" altLang="ja-JP" dirty="0"/>
+              <a:t> |] [p| </a:t>
+            </a:r>
+            <a:r>
+              <a:rPr lang="en-US" altLang="ja-JP" dirty="0" err="1"/>
+              <a:t>xs</a:t>
+            </a:r>
+            <a:r>
+              <a:rPr lang="en-US" altLang="ja-JP" dirty="0"/>
+              <a:t> |] [d| </a:t>
+            </a:r>
+            <a:r>
+              <a:rPr lang="en-US" altLang="ja-JP" dirty="0" err="1"/>
+              <a:t>xs</a:t>
+            </a:r>
+            <a:r>
+              <a:rPr lang="en-US" altLang="ja-JP" dirty="0"/>
+              <a:t> = </a:t>
+            </a:r>
+            <a:r>
+              <a:rPr lang="en-US" altLang="ja-JP" dirty="0" err="1"/>
+              <a:t>pAlign</a:t>
+            </a:r>
+            <a:r>
+              <a:rPr lang="en-US" altLang="ja-JP" dirty="0"/>
+              <a:t> p </a:t>
+            </a:r>
+            <a:r>
+              <a:rPr lang="en-US" altLang="ja-JP" dirty="0" err="1"/>
+              <a:t>ks</a:t>
+            </a:r>
+            <a:r>
+              <a:rPr lang="en-US" altLang="ja-JP" dirty="0"/>
+              <a:t> </a:t>
+            </a:r>
+            <a:r>
+              <a:rPr lang="en-US" altLang="ja-JP" dirty="0" err="1"/>
+              <a:t>kv</a:t>
+            </a:r>
+            <a:r>
+              <a:rPr lang="en-US" altLang="ja-JP" dirty="0"/>
+              <a:t> b c h |])</a:t>
             </a:r>
           </a:p>
           <a:p>
@@ -21802,7 +22281,7 @@
             </a:r>
             <a:r>
               <a:rPr lang="en-US" altLang="ja-JP" dirty="0"/>
-              <a:t> </a:t>
+              <a:t> (filter p </a:t>
             </a:r>
             <a:r>
               <a:rPr lang="en-US" altLang="ja-JP" dirty="0" err="1"/>
@@ -21810,7 +22289,7 @@
             </a:r>
             <a:r>
               <a:rPr lang="en-US" altLang="ja-JP" dirty="0"/>
-              <a:t> |])</a:t>
+              <a:t>) |])</a:t>
             </a:r>
           </a:p>
           <a:p>
@@ -21824,7 +22303,7 @@
             </a:r>
             <a:r>
               <a:rPr lang="en-US" altLang="ja-JP" dirty="0"/>
-              <a:t> (v : _) -&gt; </a:t>
+              <a:t> (v:_) -&gt; </a:t>
             </a:r>
             <a:r>
               <a:rPr lang="en-US" altLang="ja-JP" dirty="0" err="1"/>
@@ -21862,7 +22341,7 @@
             </a:r>
             <a:r>
               <a:rPr lang="en-US" altLang="ja-JP" dirty="0"/>
-              <a:t> [p| _ |] [p| _ : _ |])</a:t>
+              <a:t> [p| _ |] [p| _:_ |])</a:t>
             </a:r>
           </a:p>
           <a:p>
@@ -21876,7 +22355,15 @@
             </a:r>
             <a:r>
               <a:rPr lang="en-US" altLang="ja-JP" dirty="0"/>
-              <a:t> (v : _) -&gt; c v : </a:t>
+              <a:t> (v:_) -&gt; </a:t>
+            </a:r>
+            <a:r>
+              <a:rPr lang="en-US" altLang="ja-JP" dirty="0" err="1"/>
+              <a:t>filterCheck</a:t>
+            </a:r>
+            <a:r>
+              <a:rPr lang="en-US" altLang="ja-JP" dirty="0"/>
+              <a:t> p (c v) : </a:t>
             </a:r>
             <a:r>
               <a:rPr lang="en-US" altLang="ja-JP" dirty="0" err="1"/>
@@ -21890,13 +22377,106 @@
               <a:t>  ]</a:t>
             </a:r>
             <a:endParaRPr lang="ja-JP" altLang="en-US" dirty="0"/>
+          </a:p>
+        </p:txBody>
+      </p:sp>
+      <p:sp>
+        <p:nvSpPr>
+          <p:cNvPr id="6" name="円形吹き出し 5"/>
+          <p:cNvSpPr/>
+          <p:nvPr/>
+        </p:nvSpPr>
+        <p:spPr bwMode="auto">
+          <a:xfrm>
+            <a:off x="6372200" y="1268760"/>
+            <a:ext cx="2592288" cy="1152128"/>
+          </a:xfrm>
+          <a:prstGeom prst="wedgeEllipseCallout">
+            <a:avLst>
+              <a:gd name="adj1" fmla="val -82209"/>
+              <a:gd name="adj2" fmla="val -36046"/>
+            </a:avLst>
+          </a:prstGeom>
+          <a:ln>
+            <a:solidFill>
+              <a:schemeClr val="accent1"/>
+            </a:solidFill>
+            <a:headEnd type="none" w="med" len="med"/>
+            <a:tailEnd type="none" w="med" len="med"/>
+          </a:ln>
+        </p:spPr>
+        <p:style>
+          <a:lnRef idx="1">
+            <a:schemeClr val="accent3"/>
+          </a:lnRef>
+          <a:fillRef idx="2">
+            <a:schemeClr val="accent3"/>
+          </a:fillRef>
+          <a:effectRef idx="1">
+            <a:schemeClr val="accent3"/>
+          </a:effectRef>
+          <a:fontRef idx="minor">
+            <a:schemeClr val="dk1"/>
+          </a:fontRef>
+        </p:style>
+        <p:txBody>
+          <a:bodyPr vert="horz" wrap="square" lIns="91440" tIns="45720" rIns="91440" bIns="45720" numCol="1" rtlCol="0" anchor="t" anchorCtr="0" compatLnSpc="1">
+            <a:prstTxWarp prst="textNoShape">
+              <a:avLst/>
+            </a:prstTxWarp>
+          </a:bodyPr>
+          <a:lstStyle/>
+          <a:p>
+            <a:pPr marL="0" marR="0" indent="0" algn="l" defTabSz="914400" rtl="0" eaLnBrk="1" fontAlgn="base" latinLnBrk="0" hangingPunct="1">
+              <a:lnSpc>
+                <a:spcPct val="100000"/>
+              </a:lnSpc>
+              <a:spcBef>
+                <a:spcPct val="0"/>
+              </a:spcBef>
+              <a:spcAft>
+                <a:spcPct val="0"/>
+              </a:spcAft>
+              <a:buClrTx/>
+              <a:buSzTx/>
+              <a:buFontTx/>
+              <a:buNone/>
+              <a:tabLst/>
+            </a:pPr>
+            <a:r>
+              <a:rPr kumimoji="1" lang="en-US" altLang="ja-JP" sz="2400" b="0" i="0" u="none" strike="noStrike" cap="none" normalizeH="0" baseline="0" dirty="0" smtClean="0">
+                <a:ln>
+                  <a:noFill/>
+                </a:ln>
+                <a:solidFill>
+                  <a:schemeClr val="tx1"/>
+                </a:solidFill>
+                <a:effectLst/>
+                <a:latin typeface="Arial" pitchFamily="-111" charset="0"/>
+                <a:ea typeface="ＭＳ Ｐゴシック" pitchFamily="-111" charset="-128"/>
+                <a:cs typeface="ＭＳ Ｐゴシック" pitchFamily="-111" charset="-128"/>
+              </a:rPr>
+              <a:t>Add 2 new parameters</a:t>
+            </a:r>
+            <a:endParaRPr kumimoji="1" lang="ja-JP" altLang="en-US" sz="2400" b="0" i="0" u="none" strike="noStrike" cap="none" normalizeH="0" baseline="0" dirty="0" smtClean="0">
+              <a:ln>
+                <a:noFill/>
+              </a:ln>
+              <a:solidFill>
+                <a:schemeClr val="tx1"/>
+              </a:solidFill>
+              <a:effectLst/>
+              <a:latin typeface="Arial" pitchFamily="-111" charset="0"/>
+              <a:ea typeface="ＭＳ Ｐゴシック" pitchFamily="-111" charset="-128"/>
+              <a:cs typeface="ＭＳ Ｐゴシック" pitchFamily="-111" charset="-128"/>
+            </a:endParaRPr>
           </a:p>
         </p:txBody>
       </p:sp>
     </p:spTree>
     <p:extLst>
       <p:ext uri="{BB962C8B-B14F-4D97-AF65-F5344CB8AC3E}">
-        <p14:creationId xmlns:p14="http://schemas.microsoft.com/office/powerpoint/2010/main" val="434836503"/>
+        <p14:creationId xmlns:p14="http://schemas.microsoft.com/office/powerpoint/2010/main" val="1266265471"/>
       </p:ext>
     </p:extLst>
   </p:cSld>
@@ -22038,7 +22618,201 @@
           <a:p>
             <a:r>
               <a:rPr lang="en-US" altLang="ja-JP" dirty="0"/>
-              <a:t>         =&gt; </a:t>
+              <a:t>         =</a:t>
+            </a:r>
+            <a:r>
+              <a:rPr lang="en-US" altLang="ja-JP" dirty="0">
+                <a:solidFill>
+                  <a:srgbClr val="000000"/>
+                </a:solidFill>
+              </a:rPr>
+              <a:t>&gt; (s -&gt; </a:t>
+            </a:r>
+            <a:r>
+              <a:rPr lang="en-US" altLang="ja-JP" dirty="0" err="1">
+                <a:solidFill>
+                  <a:srgbClr val="000000"/>
+                </a:solidFill>
+              </a:rPr>
+              <a:t>Bool</a:t>
+            </a:r>
+            <a:r>
+              <a:rPr lang="en-US" altLang="ja-JP" dirty="0">
+                <a:solidFill>
+                  <a:srgbClr val="000000"/>
+                </a:solidFill>
+              </a:rPr>
+              <a:t>) {- predicate -}</a:t>
+            </a:r>
+          </a:p>
+          <a:p>
+            <a:r>
+              <a:rPr lang="en-US" altLang="ja-JP" dirty="0">
+                <a:solidFill>
+                  <a:srgbClr val="000000"/>
+                </a:solidFill>
+              </a:rPr>
+              <a:t>            -&gt; (s -&gt; k) -&gt; (v -&gt; k) -&gt; </a:t>
+            </a:r>
+            <a:r>
+              <a:rPr lang="en-US" altLang="ja-JP" dirty="0" err="1">
+                <a:solidFill>
+                  <a:srgbClr val="000000"/>
+                </a:solidFill>
+              </a:rPr>
+              <a:t>BiGUL</a:t>
+            </a:r>
+            <a:r>
+              <a:rPr lang="en-US" altLang="ja-JP" dirty="0">
+                <a:solidFill>
+                  <a:srgbClr val="000000"/>
+                </a:solidFill>
+              </a:rPr>
+              <a:t> s v -&gt; (v -&gt; s) </a:t>
+            </a:r>
+          </a:p>
+          <a:p>
+            <a:r>
+              <a:rPr lang="en-US" altLang="ja-JP" dirty="0">
+                <a:solidFill>
+                  <a:srgbClr val="000000"/>
+                </a:solidFill>
+              </a:rPr>
+              <a:t>            -&gt; (s -&gt; Maybe s) {- </a:t>
+            </a:r>
+            <a:r>
+              <a:rPr lang="en-US" altLang="ja-JP" dirty="0" smtClean="0">
+                <a:solidFill>
+                  <a:srgbClr val="000000"/>
+                </a:solidFill>
+              </a:rPr>
+              <a:t>conceal/hide </a:t>
+            </a:r>
+            <a:r>
+              <a:rPr lang="en-US" altLang="ja-JP" dirty="0">
+                <a:solidFill>
+                  <a:srgbClr val="000000"/>
+                </a:solidFill>
+              </a:rPr>
+              <a:t>function -}</a:t>
+            </a:r>
+          </a:p>
+          <a:p>
+            <a:r>
+              <a:rPr lang="en-US" altLang="ja-JP" dirty="0">
+                <a:solidFill>
+                  <a:srgbClr val="000000"/>
+                </a:solidFill>
+              </a:rPr>
+              <a:t>            -&gt; </a:t>
+            </a:r>
+            <a:r>
+              <a:rPr lang="en-US" altLang="ja-JP" dirty="0" err="1">
+                <a:solidFill>
+                  <a:srgbClr val="000000"/>
+                </a:solidFill>
+              </a:rPr>
+              <a:t>BiGUL</a:t>
+            </a:r>
+            <a:r>
+              <a:rPr lang="en-US" altLang="ja-JP" dirty="0">
+                <a:solidFill>
+                  <a:srgbClr val="000000"/>
+                </a:solidFill>
+              </a:rPr>
+              <a:t> [s] [v]</a:t>
+            </a:r>
+          </a:p>
+          <a:p>
+            <a:r>
+              <a:rPr lang="en-US" altLang="ja-JP" dirty="0" err="1">
+                <a:solidFill>
+                  <a:srgbClr val="000000"/>
+                </a:solidFill>
+              </a:rPr>
+              <a:t>pAlign</a:t>
+            </a:r>
+            <a:r>
+              <a:rPr lang="en-US" altLang="ja-JP" dirty="0">
+                <a:solidFill>
+                  <a:srgbClr val="000000"/>
+                </a:solidFill>
+              </a:rPr>
+              <a:t> p </a:t>
+            </a:r>
+            <a:r>
+              <a:rPr lang="en-US" altLang="ja-JP" dirty="0" err="1">
+                <a:solidFill>
+                  <a:srgbClr val="000000"/>
+                </a:solidFill>
+              </a:rPr>
+              <a:t>ks</a:t>
+            </a:r>
+            <a:r>
+              <a:rPr lang="en-US" altLang="ja-JP" dirty="0">
+                <a:solidFill>
+                  <a:srgbClr val="000000"/>
+                </a:solidFill>
+              </a:rPr>
+              <a:t> </a:t>
+            </a:r>
+            <a:r>
+              <a:rPr lang="en-US" altLang="ja-JP" dirty="0" err="1">
+                <a:solidFill>
+                  <a:srgbClr val="000000"/>
+                </a:solidFill>
+              </a:rPr>
+              <a:t>kv</a:t>
+            </a:r>
+            <a:r>
+              <a:rPr lang="en-US" altLang="ja-JP" dirty="0">
+                <a:solidFill>
+                  <a:srgbClr val="000000"/>
+                </a:solidFill>
+              </a:rPr>
+              <a:t> b c h = Case</a:t>
+            </a:r>
+          </a:p>
+          <a:p>
+            <a:r>
+              <a:rPr lang="en-US" altLang="ja-JP" dirty="0"/>
+              <a:t>  [ $(</a:t>
+            </a:r>
+            <a:r>
+              <a:rPr lang="en-US" altLang="ja-JP" dirty="0" err="1"/>
+              <a:t>normalSV</a:t>
+            </a:r>
+            <a:r>
+              <a:rPr lang="en-US" altLang="ja-JP" dirty="0"/>
+              <a:t> [p| [] |] [p| [] |] [p| [] |])</a:t>
+            </a:r>
+          </a:p>
+          <a:p>
+            <a:r>
+              <a:rPr lang="en-US" altLang="ja-JP" dirty="0"/>
+              <a:t>    ==&gt; $(update [p| [] |] [p| [] |] [d| |])</a:t>
+            </a:r>
+          </a:p>
+          <a:p>
+            <a:r>
+              <a:rPr lang="en-US" altLang="ja-JP" dirty="0"/>
+              <a:t>  , $(normal [| \(</a:t>
+            </a:r>
+            <a:r>
+              <a:rPr lang="en-US" altLang="ja-JP" dirty="0" err="1"/>
+              <a:t>s:ss</a:t>
+            </a:r>
+            <a:r>
+              <a:rPr lang="en-US" altLang="ja-JP" dirty="0"/>
+              <a:t>) (</a:t>
+            </a:r>
+            <a:r>
+              <a:rPr lang="en-US" altLang="ja-JP" dirty="0" err="1"/>
+              <a:t>v:vs</a:t>
+            </a:r>
+            <a:r>
+              <a:rPr lang="en-US" altLang="ja-JP" dirty="0"/>
+              <a:t>) -</a:t>
             </a:r>
             <a:r>
               <a:rPr lang="en-US" altLang="ja-JP" dirty="0">
@@ -22046,15 +22820,35 @@
                   <a:srgbClr val="FF0000"/>
                 </a:solidFill>
               </a:rPr>
-              <a:t>(s -&gt; </a:t>
-            </a:r>
-            <a:r>
-              <a:rPr lang="en-US" altLang="ja-JP" dirty="0" err="1">
-                <a:solidFill>
-                  <a:srgbClr val="FF0000"/>
-                </a:solidFill>
-              </a:rPr>
-              <a:t>Bool</a:t>
+              <a:t>&gt; p s </a:t>
+            </a:r>
+            <a:r>
+              <a:rPr lang="en-US" altLang="ja-JP" dirty="0"/>
+              <a:t>&amp;&amp; </a:t>
+            </a:r>
+            <a:r>
+              <a:rPr lang="en-US" altLang="ja-JP" dirty="0" err="1"/>
+              <a:t>ks</a:t>
+            </a:r>
+            <a:r>
+              <a:rPr lang="en-US" altLang="ja-JP" dirty="0"/>
+              <a:t> s == </a:t>
+            </a:r>
+            <a:r>
+              <a:rPr lang="en-US" altLang="ja-JP" dirty="0" err="1"/>
+              <a:t>kv</a:t>
+            </a:r>
+            <a:r>
+              <a:rPr lang="en-US" altLang="ja-JP" dirty="0"/>
+              <a:t> v |] [| \(</a:t>
+            </a:r>
+            <a:r>
+              <a:rPr lang="en-US" altLang="ja-JP" dirty="0" err="1"/>
+              <a:t>s:ss</a:t>
+            </a:r>
+            <a:r>
+              <a:rPr lang="en-US" altLang="ja-JP" dirty="0"/>
+              <a:t>) -</a:t>
             </a:r>
             <a:r>
               <a:rPr lang="en-US" altLang="ja-JP" dirty="0">
@@ -22062,343 +22856,321 @@
                   <a:srgbClr val="FF0000"/>
                 </a:solidFill>
               </a:rPr>
-              <a:t>) {- predicate -}</a:t>
-            </a:r>
-          </a:p>
-          <a:p>
-            <a:r>
-              <a:rPr lang="en-US" altLang="ja-JP" dirty="0"/>
-              <a:t>            -&gt; (s -&gt; k) -&gt; (v -&gt; k) -&gt; </a:t>
-            </a:r>
-            <a:r>
-              <a:rPr lang="en-US" altLang="ja-JP" dirty="0" err="1"/>
-              <a:t>BiGUL</a:t>
-            </a:r>
-            <a:r>
-              <a:rPr lang="en-US" altLang="ja-JP" dirty="0"/>
-              <a:t> s v -&gt; (v -&gt; s) </a:t>
-            </a:r>
-          </a:p>
-          <a:p>
-            <a:r>
-              <a:rPr lang="en-US" altLang="ja-JP" dirty="0"/>
-              <a:t>            -&gt; </a:t>
+              <a:t>&gt; p s </a:t>
+            </a:r>
+            <a:r>
+              <a:rPr lang="en-US" altLang="ja-JP" dirty="0"/>
+              <a:t>|])</a:t>
+            </a:r>
+          </a:p>
+          <a:p>
+            <a:r>
+              <a:rPr lang="en-US" altLang="ja-JP" dirty="0"/>
+              <a:t>    ==&gt; $(update [p| </a:t>
+            </a:r>
+            <a:r>
+              <a:rPr lang="en-US" altLang="ja-JP" dirty="0" err="1"/>
+              <a:t>x:xs</a:t>
+            </a:r>
+            <a:r>
+              <a:rPr lang="en-US" altLang="ja-JP" dirty="0"/>
+              <a:t> |] [p| </a:t>
+            </a:r>
+            <a:r>
+              <a:rPr lang="en-US" altLang="ja-JP" dirty="0" err="1"/>
+              <a:t>x:xs</a:t>
+            </a:r>
+            <a:r>
+              <a:rPr lang="en-US" altLang="ja-JP" dirty="0"/>
+              <a:t> |] [d| x = b; </a:t>
+            </a:r>
+            <a:r>
+              <a:rPr lang="en-US" altLang="ja-JP" dirty="0" err="1"/>
+              <a:t>xs</a:t>
+            </a:r>
+            <a:r>
+              <a:rPr lang="en-US" altLang="ja-JP" dirty="0"/>
+              <a:t> = </a:t>
+            </a:r>
+            <a:r>
+              <a:rPr lang="en-US" altLang="ja-JP" dirty="0" err="1"/>
+              <a:t>pAlign</a:t>
+            </a:r>
+            <a:r>
+              <a:rPr lang="en-US" altLang="ja-JP" dirty="0"/>
+              <a:t> p </a:t>
+            </a:r>
+            <a:r>
+              <a:rPr lang="en-US" altLang="ja-JP" dirty="0" err="1"/>
+              <a:t>ks</a:t>
+            </a:r>
+            <a:r>
+              <a:rPr lang="en-US" altLang="ja-JP" dirty="0"/>
+              <a:t> </a:t>
+            </a:r>
+            <a:r>
+              <a:rPr lang="en-US" altLang="ja-JP" dirty="0" err="1"/>
+              <a:t>kv</a:t>
+            </a:r>
+            <a:r>
+              <a:rPr lang="en-US" altLang="ja-JP" dirty="0"/>
+              <a:t> b c h |])</a:t>
+            </a:r>
+          </a:p>
+          <a:p>
+            <a:r>
+              <a:rPr lang="en-US" altLang="ja-JP" dirty="0"/>
+              <a:t>  </a:t>
+            </a:r>
+            <a:r>
+              <a:rPr lang="en-US" altLang="ja-JP" b="1" dirty="0">
+                <a:solidFill>
+                  <a:srgbClr val="000000"/>
+                </a:solidFill>
+              </a:rPr>
+              <a:t>, </a:t>
             </a:r>
             <a:r>
               <a:rPr lang="en-US" altLang="ja-JP" dirty="0">
                 <a:solidFill>
-                  <a:srgbClr val="FF0000"/>
+                  <a:schemeClr val="accent2"/>
                 </a:solidFill>
               </a:rPr>
-              <a:t>(s -&gt; Maybe s) {- </a:t>
-            </a:r>
-            <a:r>
-              <a:rPr lang="en-US" altLang="ja-JP" dirty="0" smtClean="0">
+              <a:t>$(adaptive [| \(</a:t>
+            </a:r>
+            <a:r>
+              <a:rPr lang="en-US" altLang="ja-JP" dirty="0" err="1">
                 <a:solidFill>
-                  <a:srgbClr val="FF0000"/>
+                  <a:schemeClr val="accent2"/>
                 </a:solidFill>
               </a:rPr>
-              <a:t>conceal/hide </a:t>
+              <a:t>s:ss</a:t>
             </a:r>
             <a:r>
               <a:rPr lang="en-US" altLang="ja-JP" dirty="0">
                 <a:solidFill>
-                  <a:srgbClr val="FF0000"/>
+                  <a:schemeClr val="accent2"/>
                 </a:solidFill>
               </a:rPr>
-              <a:t>function -}</a:t>
-            </a:r>
-          </a:p>
-          <a:p>
-            <a:r>
-              <a:rPr lang="en-US" altLang="ja-JP" dirty="0"/>
-              <a:t>            -&gt; </a:t>
-            </a:r>
-            <a:r>
-              <a:rPr lang="en-US" altLang="ja-JP" dirty="0" err="1"/>
-              <a:t>BiGUL</a:t>
-            </a:r>
-            <a:r>
-              <a:rPr lang="en-US" altLang="ja-JP" dirty="0"/>
-              <a:t> [s] [v]</a:t>
-            </a:r>
-          </a:p>
-          <a:p>
-            <a:r>
-              <a:rPr lang="en-US" altLang="ja-JP" dirty="0" err="1"/>
-              <a:t>pAlign</a:t>
-            </a:r>
-            <a:r>
-              <a:rPr lang="en-US" altLang="ja-JP" dirty="0"/>
-              <a:t> </a:t>
-            </a:r>
+              <a:t>) v -&gt; p s &amp;&amp; null v|])</a:t>
+            </a:r>
+          </a:p>
+          <a:p>
             <a:r>
               <a:rPr lang="en-US" altLang="ja-JP" dirty="0">
                 <a:solidFill>
-                  <a:srgbClr val="FF0000"/>
+                  <a:schemeClr val="accent2"/>
                 </a:solidFill>
               </a:rPr>
-              <a:t>p</a:t>
-            </a:r>
-            <a:r>
-              <a:rPr lang="en-US" altLang="ja-JP" dirty="0"/>
-              <a:t> </a:t>
-            </a:r>
-            <a:r>
-              <a:rPr lang="en-US" altLang="ja-JP" dirty="0" err="1"/>
-              <a:t>ks</a:t>
-            </a:r>
-            <a:r>
-              <a:rPr lang="en-US" altLang="ja-JP" dirty="0"/>
-              <a:t> </a:t>
-            </a:r>
-            <a:r>
-              <a:rPr lang="en-US" altLang="ja-JP" dirty="0" err="1"/>
-              <a:t>kv</a:t>
-            </a:r>
-            <a:r>
-              <a:rPr lang="en-US" altLang="ja-JP" dirty="0"/>
-              <a:t> b c </a:t>
+              <a:t>    ==&gt; \(</a:t>
+            </a:r>
+            <a:r>
+              <a:rPr lang="en-US" altLang="ja-JP" dirty="0" err="1">
+                <a:solidFill>
+                  <a:schemeClr val="accent2"/>
+                </a:solidFill>
+              </a:rPr>
+              <a:t>s:ss</a:t>
             </a:r>
             <a:r>
               <a:rPr lang="en-US" altLang="ja-JP" dirty="0">
                 <a:solidFill>
-                  <a:srgbClr val="FF0000"/>
+                  <a:schemeClr val="accent2"/>
                 </a:solidFill>
               </a:rPr>
-              <a:t>h</a:t>
-            </a:r>
-            <a:r>
-              <a:rPr lang="en-US" altLang="ja-JP" dirty="0"/>
-              <a:t> = Case</a:t>
-            </a:r>
-          </a:p>
-          <a:p>
-            <a:r>
-              <a:rPr lang="en-US" altLang="ja-JP" dirty="0"/>
-              <a:t>  [ $(</a:t>
-            </a:r>
-            <a:r>
-              <a:rPr lang="en-US" altLang="ja-JP" dirty="0" err="1"/>
-              <a:t>normalSV</a:t>
-            </a:r>
-            <a:r>
-              <a:rPr lang="en-US" altLang="ja-JP" dirty="0"/>
-              <a:t> [p| [] |] [p| [] |] [p| [] |])</a:t>
-            </a:r>
-          </a:p>
-          <a:p>
-            <a:r>
-              <a:rPr lang="en-US" altLang="ja-JP" dirty="0"/>
-              <a:t>    ==&gt; $(update [p| [] |] [p| [] |] [d| |])</a:t>
-            </a:r>
-          </a:p>
-          <a:p>
-            <a:r>
-              <a:rPr lang="en-US" altLang="ja-JP" dirty="0"/>
+              <a:t>) v -&gt; maybe [] (:[]) (</a:t>
+            </a:r>
+            <a:r>
+              <a:rPr lang="en-US" altLang="ja-JP" dirty="0">
+                <a:solidFill>
+                  <a:srgbClr val="FF6600"/>
+                </a:solidFill>
+              </a:rPr>
+              <a:t>h s</a:t>
+            </a:r>
+            <a:r>
+              <a:rPr lang="en-US" altLang="ja-JP" dirty="0">
+                <a:solidFill>
+                  <a:schemeClr val="accent2"/>
+                </a:solidFill>
+              </a:rPr>
+              <a:t>) ++ </a:t>
+            </a:r>
+            <a:r>
+              <a:rPr lang="en-US" altLang="ja-JP" dirty="0" err="1">
+                <a:solidFill>
+                  <a:schemeClr val="accent2"/>
+                </a:solidFill>
+              </a:rPr>
+              <a:t>ss</a:t>
+            </a:r>
+            <a:endParaRPr lang="en-US" altLang="ja-JP" dirty="0">
+              <a:solidFill>
+                <a:schemeClr val="accent2"/>
+              </a:solidFill>
+            </a:endParaRPr>
+          </a:p>
+          <a:p>
+            <a:r>
+              <a:rPr lang="en-US" altLang="ja-JP" dirty="0">
+                <a:solidFill>
+                  <a:schemeClr val="accent2"/>
+                </a:solidFill>
+              </a:rPr>
               <a:t>  , $(normal [| \(</a:t>
             </a:r>
             <a:r>
-              <a:rPr lang="en-US" altLang="ja-JP" dirty="0" err="1"/>
+              <a:rPr lang="en-US" altLang="ja-JP" dirty="0" err="1">
+                <a:solidFill>
+                  <a:schemeClr val="accent2"/>
+                </a:solidFill>
+              </a:rPr>
               <a:t>s:ss</a:t>
             </a:r>
             <a:r>
-              <a:rPr lang="en-US" altLang="ja-JP" dirty="0"/>
-              <a:t>) (</a:t>
-            </a:r>
-            <a:r>
-              <a:rPr lang="en-US" altLang="ja-JP" dirty="0" err="1"/>
-              <a:t>v:vs</a:t>
-            </a:r>
-            <a:r>
-              <a:rPr lang="en-US" altLang="ja-JP" dirty="0"/>
-              <a:t>) -&gt; p s &amp;&amp; </a:t>
-            </a:r>
-            <a:r>
-              <a:rPr lang="en-US" altLang="ja-JP" dirty="0" err="1"/>
+              <a:rPr lang="en-US" altLang="ja-JP" dirty="0">
+                <a:solidFill>
+                  <a:schemeClr val="accent2"/>
+                </a:solidFill>
+              </a:rPr>
+              <a:t>) v -&gt; </a:t>
+            </a:r>
+            <a:r>
+              <a:rPr lang="en-US" altLang="ja-JP" dirty="0">
+                <a:solidFill>
+                  <a:srgbClr val="FF6600"/>
+                </a:solidFill>
+              </a:rPr>
+              <a:t>not (p s) </a:t>
+            </a:r>
+            <a:r>
+              <a:rPr lang="en-US" altLang="ja-JP" dirty="0">
+                <a:solidFill>
+                  <a:schemeClr val="accent2"/>
+                </a:solidFill>
+              </a:rPr>
+              <a:t>|] [| \(</a:t>
+            </a:r>
+            <a:r>
+              <a:rPr lang="en-US" altLang="ja-JP" dirty="0" err="1">
+                <a:solidFill>
+                  <a:schemeClr val="accent2"/>
+                </a:solidFill>
+              </a:rPr>
+              <a:t>s:ss</a:t>
+            </a:r>
+            <a:r>
+              <a:rPr lang="en-US" altLang="ja-JP" dirty="0">
+                <a:solidFill>
+                  <a:schemeClr val="accent2"/>
+                </a:solidFill>
+              </a:rPr>
+              <a:t>) -&gt; not (p s) |])</a:t>
+            </a:r>
+          </a:p>
+          <a:p>
+            <a:r>
+              <a:rPr lang="en-US" altLang="ja-JP" dirty="0">
+                <a:solidFill>
+                  <a:schemeClr val="accent2"/>
+                </a:solidFill>
+              </a:rPr>
+              <a:t>    ==&gt; $(update [p| _:</a:t>
+            </a:r>
+            <a:r>
+              <a:rPr lang="en-US" altLang="ja-JP" dirty="0" err="1">
+                <a:solidFill>
+                  <a:schemeClr val="accent2"/>
+                </a:solidFill>
+              </a:rPr>
+              <a:t>xs</a:t>
+            </a:r>
+            <a:r>
+              <a:rPr lang="en-US" altLang="ja-JP" dirty="0">
+                <a:solidFill>
+                  <a:schemeClr val="accent2"/>
+                </a:solidFill>
+              </a:rPr>
+              <a:t> |] [p| </a:t>
+            </a:r>
+            <a:r>
+              <a:rPr lang="en-US" altLang="ja-JP" dirty="0" err="1">
+                <a:solidFill>
+                  <a:schemeClr val="accent2"/>
+                </a:solidFill>
+              </a:rPr>
+              <a:t>xs</a:t>
+            </a:r>
+            <a:r>
+              <a:rPr lang="en-US" altLang="ja-JP" dirty="0">
+                <a:solidFill>
+                  <a:schemeClr val="accent2"/>
+                </a:solidFill>
+              </a:rPr>
+              <a:t> |] [d| </a:t>
+            </a:r>
+            <a:r>
+              <a:rPr lang="en-US" altLang="ja-JP" dirty="0" err="1">
+                <a:solidFill>
+                  <a:schemeClr val="accent2"/>
+                </a:solidFill>
+              </a:rPr>
+              <a:t>xs</a:t>
+            </a:r>
+            <a:r>
+              <a:rPr lang="en-US" altLang="ja-JP" dirty="0">
+                <a:solidFill>
+                  <a:schemeClr val="accent2"/>
+                </a:solidFill>
+              </a:rPr>
+              <a:t> = </a:t>
+            </a:r>
+            <a:r>
+              <a:rPr lang="en-US" altLang="ja-JP" dirty="0" err="1">
+                <a:solidFill>
+                  <a:schemeClr val="accent2"/>
+                </a:solidFill>
+              </a:rPr>
+              <a:t>pAlign</a:t>
+            </a:r>
+            <a:r>
+              <a:rPr lang="en-US" altLang="ja-JP" dirty="0">
+                <a:solidFill>
+                  <a:schemeClr val="accent2"/>
+                </a:solidFill>
+              </a:rPr>
+              <a:t> p </a:t>
+            </a:r>
+            <a:r>
+              <a:rPr lang="en-US" altLang="ja-JP" dirty="0" err="1">
+                <a:solidFill>
+                  <a:schemeClr val="accent2"/>
+                </a:solidFill>
+              </a:rPr>
               <a:t>ks</a:t>
             </a:r>
             <a:r>
-              <a:rPr lang="en-US" altLang="ja-JP" dirty="0"/>
-              <a:t> s == </a:t>
-            </a:r>
-            <a:r>
-              <a:rPr lang="en-US" altLang="ja-JP" dirty="0" err="1"/>
+              <a:rPr lang="en-US" altLang="ja-JP" dirty="0">
+                <a:solidFill>
+                  <a:schemeClr val="accent2"/>
+                </a:solidFill>
+              </a:rPr>
+              <a:t> </a:t>
+            </a:r>
+            <a:r>
+              <a:rPr lang="en-US" altLang="ja-JP" dirty="0" err="1">
+                <a:solidFill>
+                  <a:schemeClr val="accent2"/>
+                </a:solidFill>
+              </a:rPr>
               <a:t>kv</a:t>
             </a:r>
             <a:r>
-              <a:rPr lang="en-US" altLang="ja-JP" dirty="0"/>
-              <a:t> v |] [| \(</a:t>
-            </a:r>
-            <a:r>
-              <a:rPr lang="en-US" altLang="ja-JP" dirty="0" err="1"/>
-              <a:t>s:ss</a:t>
-            </a:r>
-            <a:r>
-              <a:rPr lang="en-US" altLang="ja-JP" dirty="0"/>
-              <a:t>) -&gt; p s |])</a:t>
-            </a:r>
-          </a:p>
-          <a:p>
-            <a:r>
-              <a:rPr lang="en-US" altLang="ja-JP" dirty="0"/>
-              <a:t>    ==&gt; $(update [p| </a:t>
-            </a:r>
-            <a:r>
-              <a:rPr lang="en-US" altLang="ja-JP" dirty="0" err="1"/>
-              <a:t>x:xs</a:t>
-            </a:r>
-            <a:r>
-              <a:rPr lang="en-US" altLang="ja-JP" dirty="0"/>
-              <a:t> |] [p| </a:t>
-            </a:r>
-            <a:r>
-              <a:rPr lang="en-US" altLang="ja-JP" dirty="0" err="1"/>
-              <a:t>x:xs</a:t>
-            </a:r>
-            <a:r>
-              <a:rPr lang="en-US" altLang="ja-JP" dirty="0"/>
-              <a:t> |] [d| x = b; </a:t>
-            </a:r>
-            <a:r>
-              <a:rPr lang="en-US" altLang="ja-JP" dirty="0" err="1"/>
-              <a:t>xs</a:t>
-            </a:r>
-            <a:r>
-              <a:rPr lang="en-US" altLang="ja-JP" dirty="0"/>
-              <a:t> = </a:t>
-            </a:r>
-            <a:r>
-              <a:rPr lang="en-US" altLang="ja-JP" dirty="0" err="1"/>
-              <a:t>pAlign</a:t>
-            </a:r>
-            <a:r>
-              <a:rPr lang="en-US" altLang="ja-JP" dirty="0"/>
-              <a:t> p </a:t>
-            </a:r>
-            <a:r>
-              <a:rPr lang="en-US" altLang="ja-JP" dirty="0" err="1"/>
-              <a:t>ks</a:t>
-            </a:r>
-            <a:r>
-              <a:rPr lang="en-US" altLang="ja-JP" dirty="0"/>
-              <a:t> </a:t>
-            </a:r>
-            <a:r>
-              <a:rPr lang="en-US" altLang="ja-JP" dirty="0" err="1"/>
-              <a:t>kv</a:t>
-            </a:r>
-            <a:r>
-              <a:rPr lang="en-US" altLang="ja-JP" dirty="0"/>
-              <a:t> b c h |])</a:t>
-            </a:r>
-          </a:p>
-          <a:p>
-            <a:r>
-              <a:rPr lang="en-US" altLang="ja-JP" dirty="0"/>
-              <a:t>  , $(adaptive [| \(</a:t>
-            </a:r>
-            <a:r>
-              <a:rPr lang="en-US" altLang="ja-JP" dirty="0" err="1"/>
-              <a:t>s:ss</a:t>
-            </a:r>
-            <a:r>
-              <a:rPr lang="en-US" altLang="ja-JP" dirty="0"/>
-              <a:t>) v -&gt; p s &amp;&amp; null v|])</a:t>
-            </a:r>
-          </a:p>
-          <a:p>
-            <a:r>
-              <a:rPr lang="en-US" altLang="ja-JP" dirty="0"/>
-              <a:t>    ==&gt; \(</a:t>
-            </a:r>
-            <a:r>
-              <a:rPr lang="en-US" altLang="ja-JP" dirty="0" err="1"/>
-              <a:t>s:ss</a:t>
-            </a:r>
-            <a:r>
-              <a:rPr lang="en-US" altLang="ja-JP" dirty="0"/>
-              <a:t>) v -&gt; maybe [] (:[]) (h s) ++ </a:t>
-            </a:r>
-            <a:r>
-              <a:rPr lang="en-US" altLang="ja-JP" dirty="0" err="1"/>
-              <a:t>ss</a:t>
-            </a:r>
-            <a:endParaRPr lang="en-US" altLang="ja-JP" dirty="0"/>
-          </a:p>
-          <a:p>
-            <a:r>
-              <a:rPr lang="en-US" altLang="ja-JP" dirty="0"/>
-              <a:t>  , $(normal [| \(</a:t>
-            </a:r>
-            <a:r>
-              <a:rPr lang="en-US" altLang="ja-JP" dirty="0" err="1"/>
-              <a:t>s:ss</a:t>
-            </a:r>
-            <a:r>
-              <a:rPr lang="en-US" altLang="ja-JP" dirty="0"/>
-              <a:t>) v -&gt; not (p s) |] [| \(</a:t>
-            </a:r>
-            <a:r>
-              <a:rPr lang="en-US" altLang="ja-JP" dirty="0" err="1"/>
-              <a:t>s:ss</a:t>
-            </a:r>
-            <a:r>
-              <a:rPr lang="en-US" altLang="ja-JP" dirty="0"/>
-              <a:t>) -&gt; not (p s) |])</a:t>
-            </a:r>
-          </a:p>
-          <a:p>
-            <a:r>
-              <a:rPr lang="en-US" altLang="ja-JP" dirty="0"/>
-              <a:t>    ==&gt; $(update [p| _:</a:t>
-            </a:r>
-            <a:r>
-              <a:rPr lang="en-US" altLang="ja-JP" dirty="0" err="1"/>
-              <a:t>xs</a:t>
-            </a:r>
-            <a:r>
-              <a:rPr lang="en-US" altLang="ja-JP" dirty="0"/>
-              <a:t> |] [p| </a:t>
-            </a:r>
-            <a:r>
-              <a:rPr lang="en-US" altLang="ja-JP" dirty="0" err="1"/>
-              <a:t>xs</a:t>
-            </a:r>
-            <a:r>
-              <a:rPr lang="en-US" altLang="ja-JP" dirty="0"/>
-              <a:t> |] [d| </a:t>
-            </a:r>
-            <a:r>
-              <a:rPr lang="en-US" altLang="ja-JP" dirty="0" err="1"/>
-              <a:t>xs</a:t>
-            </a:r>
-            <a:r>
-              <a:rPr lang="en-US" altLang="ja-JP" dirty="0"/>
-              <a:t> = </a:t>
-            </a:r>
-            <a:r>
-              <a:rPr lang="en-US" altLang="ja-JP" dirty="0" err="1"/>
-              <a:t>pAlign</a:t>
-            </a:r>
-            <a:r>
-              <a:rPr lang="en-US" altLang="ja-JP" dirty="0"/>
-              <a:t> p </a:t>
-            </a:r>
-            <a:r>
-              <a:rPr lang="en-US" altLang="ja-JP" dirty="0" err="1"/>
-              <a:t>ks</a:t>
-            </a:r>
-            <a:r>
-              <a:rPr lang="en-US" altLang="ja-JP" dirty="0"/>
-              <a:t> </a:t>
-            </a:r>
-            <a:r>
-              <a:rPr lang="en-US" altLang="ja-JP" dirty="0" err="1"/>
-              <a:t>kv</a:t>
-            </a:r>
-            <a:r>
-              <a:rPr lang="en-US" altLang="ja-JP" dirty="0"/>
+              <a:rPr lang="en-US" altLang="ja-JP" dirty="0">
+                <a:solidFill>
+                  <a:schemeClr val="accent2"/>
+                </a:solidFill>
+              </a:rPr>
               <a:t> b c h |])</a:t>
             </a:r>
           </a:p>
@@ -22552,13 +23324,13 @@
         </p:nvSpPr>
         <p:spPr bwMode="auto">
           <a:xfrm>
-            <a:off x="6372200" y="1268760"/>
-            <a:ext cx="2592288" cy="1152128"/>
+            <a:off x="5796136" y="1268760"/>
+            <a:ext cx="3168352" cy="1800200"/>
           </a:xfrm>
           <a:prstGeom prst="wedgeEllipseCallout">
             <a:avLst>
-              <a:gd name="adj1" fmla="val -82209"/>
-              <a:gd name="adj2" fmla="val -36046"/>
+              <a:gd name="adj1" fmla="val -105083"/>
+              <a:gd name="adj2" fmla="val 61446"/>
             </a:avLst>
           </a:prstGeom>
           <a:ln>
@@ -22608,21 +23380,17 @@
               <a:tabLst/>
             </a:pPr>
             <a:r>
-              <a:rPr kumimoji="1" lang="en-US" altLang="ja-JP" sz="2400" b="0" i="0" u="none" strike="noStrike" cap="none" normalizeH="0" baseline="0" dirty="0" smtClean="0">
-                <a:ln>
-                  <a:noFill/>
-                </a:ln>
+              <a:rPr lang="en-US" altLang="ja-JP" sz="2000" dirty="0" smtClean="0">
                 <a:solidFill>
                   <a:schemeClr val="tx1"/>
                 </a:solidFill>
-                <a:effectLst/>
                 <a:latin typeface="Arial" pitchFamily="-111" charset="0"/>
                 <a:ea typeface="ＭＳ Ｐゴシック" pitchFamily="-111" charset="-128"/>
                 <a:cs typeface="ＭＳ Ｐゴシック" pitchFamily="-111" charset="-128"/>
               </a:rPr>
-              <a:t>Add 2 new parameters</a:t>
-            </a:r>
-            <a:endParaRPr kumimoji="1" lang="ja-JP" altLang="en-US" sz="2400" b="0" i="0" u="none" strike="noStrike" cap="none" normalizeH="0" baseline="0" dirty="0" smtClean="0">
+              <a:t>Consider  the cases according to “p on source elements”</a:t>
+            </a:r>
+            <a:endParaRPr kumimoji="1" lang="ja-JP" altLang="en-US" sz="2000" b="0" i="0" u="none" strike="noStrike" cap="none" normalizeH="0" baseline="0" dirty="0" smtClean="0">
               <a:ln>
                 <a:noFill/>
               </a:ln>
@@ -22640,7 +23408,7 @@
     </p:spTree>
     <p:extLst>
       <p:ext uri="{BB962C8B-B14F-4D97-AF65-F5344CB8AC3E}">
-        <p14:creationId xmlns:p14="http://schemas.microsoft.com/office/powerpoint/2010/main" val="1266265471"/>
+        <p14:creationId xmlns:p14="http://schemas.microsoft.com/office/powerpoint/2010/main" val="3587244128"/>
       </p:ext>
     </p:extLst>
   </p:cSld>
@@ -22782,158 +23550,82 @@
           <a:p>
             <a:r>
               <a:rPr lang="en-US" altLang="ja-JP" dirty="0"/>
-              <a:t>         =</a:t>
-            </a:r>
-            <a:r>
-              <a:rPr lang="en-US" altLang="ja-JP" dirty="0">
-                <a:solidFill>
-                  <a:srgbClr val="000000"/>
-                </a:solidFill>
-              </a:rPr>
-              <a:t>&gt; (s -&gt; </a:t>
-            </a:r>
-            <a:r>
-              <a:rPr lang="en-US" altLang="ja-JP" dirty="0" err="1">
-                <a:solidFill>
-                  <a:srgbClr val="000000"/>
-                </a:solidFill>
-              </a:rPr>
+              <a:t>         =&gt; (s -&gt; </a:t>
+            </a:r>
+            <a:r>
+              <a:rPr lang="en-US" altLang="ja-JP" dirty="0" err="1"/>
               <a:t>Bool</a:t>
             </a:r>
             <a:r>
-              <a:rPr lang="en-US" altLang="ja-JP" dirty="0">
-                <a:solidFill>
-                  <a:srgbClr val="000000"/>
-                </a:solidFill>
-              </a:rPr>
+              <a:rPr lang="en-US" altLang="ja-JP" dirty="0"/>
               <a:t>) {- predicate -}</a:t>
             </a:r>
           </a:p>
           <a:p>
             <a:r>
-              <a:rPr lang="en-US" altLang="ja-JP" dirty="0">
-                <a:solidFill>
-                  <a:srgbClr val="000000"/>
-                </a:solidFill>
-              </a:rPr>
+              <a:rPr lang="en-US" altLang="ja-JP" dirty="0"/>
               <a:t>            -&gt; (s -&gt; k) -&gt; (v -&gt; k) -&gt; </a:t>
             </a:r>
             <a:r>
-              <a:rPr lang="en-US" altLang="ja-JP" dirty="0" err="1">
-                <a:solidFill>
-                  <a:srgbClr val="000000"/>
-                </a:solidFill>
-              </a:rPr>
+              <a:rPr lang="en-US" altLang="ja-JP" dirty="0" err="1"/>
               <a:t>BiGUL</a:t>
             </a:r>
             <a:r>
-              <a:rPr lang="en-US" altLang="ja-JP" dirty="0">
-                <a:solidFill>
-                  <a:srgbClr val="000000"/>
-                </a:solidFill>
-              </a:rPr>
+              <a:rPr lang="en-US" altLang="ja-JP" dirty="0"/>
               <a:t> s v -&gt; (v -&gt; s) </a:t>
             </a:r>
           </a:p>
           <a:p>
             <a:r>
-              <a:rPr lang="en-US" altLang="ja-JP" dirty="0">
-                <a:solidFill>
-                  <a:srgbClr val="000000"/>
-                </a:solidFill>
-              </a:rPr>
+              <a:rPr lang="en-US" altLang="ja-JP" dirty="0"/>
               <a:t>            -&gt; (s -&gt; Maybe s) {- </a:t>
             </a:r>
             <a:r>
-              <a:rPr lang="en-US" altLang="ja-JP" dirty="0" smtClean="0">
-                <a:solidFill>
-                  <a:srgbClr val="000000"/>
-                </a:solidFill>
-              </a:rPr>
+              <a:rPr lang="en-US" altLang="ja-JP" dirty="0" smtClean="0"/>
               <a:t>conceal/hide </a:t>
             </a:r>
             <a:r>
-              <a:rPr lang="en-US" altLang="ja-JP" dirty="0">
-                <a:solidFill>
-                  <a:srgbClr val="000000"/>
-                </a:solidFill>
-              </a:rPr>
+              <a:rPr lang="en-US" altLang="ja-JP" dirty="0"/>
               <a:t>function -}</a:t>
             </a:r>
           </a:p>
           <a:p>
             <a:r>
-              <a:rPr lang="en-US" altLang="ja-JP" dirty="0">
-                <a:solidFill>
-                  <a:srgbClr val="000000"/>
-                </a:solidFill>
-              </a:rPr>
+              <a:rPr lang="en-US" altLang="ja-JP" dirty="0"/>
               <a:t>            -&gt; </a:t>
             </a:r>
             <a:r>
-              <a:rPr lang="en-US" altLang="ja-JP" dirty="0" err="1">
-                <a:solidFill>
-                  <a:srgbClr val="000000"/>
-                </a:solidFill>
-              </a:rPr>
+              <a:rPr lang="en-US" altLang="ja-JP" dirty="0" err="1"/>
               <a:t>BiGUL</a:t>
             </a:r>
             <a:r>
-              <a:rPr lang="en-US" altLang="ja-JP" dirty="0">
-                <a:solidFill>
-                  <a:srgbClr val="000000"/>
-                </a:solidFill>
-              </a:rPr>
+              <a:rPr lang="en-US" altLang="ja-JP" dirty="0"/>
               <a:t> [s] [v]</a:t>
             </a:r>
           </a:p>
           <a:p>
             <a:r>
-              <a:rPr lang="en-US" altLang="ja-JP" dirty="0" err="1">
-                <a:solidFill>
-                  <a:srgbClr val="000000"/>
-                </a:solidFill>
-              </a:rPr>
+              <a:rPr lang="en-US" altLang="ja-JP" dirty="0" err="1"/>
               <a:t>pAlign</a:t>
             </a:r>
             <a:r>
-              <a:rPr lang="en-US" altLang="ja-JP" dirty="0">
-                <a:solidFill>
-                  <a:srgbClr val="000000"/>
-                </a:solidFill>
-              </a:rPr>
+              <a:rPr lang="en-US" altLang="ja-JP" dirty="0"/>
               <a:t> p </a:t>
             </a:r>
             <a:r>
-              <a:rPr lang="en-US" altLang="ja-JP" dirty="0" err="1">
-                <a:solidFill>
-                  <a:srgbClr val="000000"/>
-                </a:solidFill>
-              </a:rPr>
+              <a:rPr lang="en-US" altLang="ja-JP" dirty="0" err="1"/>
               <a:t>ks</a:t>
             </a:r>
             <a:r>
-              <a:rPr lang="en-US" altLang="ja-JP" dirty="0">
-                <a:solidFill>
-                  <a:srgbClr val="000000"/>
-                </a:solidFill>
-              </a:rPr>
+              <a:rPr lang="en-US" altLang="ja-JP" dirty="0"/>
               <a:t> </a:t>
             </a:r>
             <a:r>
-              <a:rPr lang="en-US" altLang="ja-JP" dirty="0" err="1">
-                <a:solidFill>
-                  <a:srgbClr val="000000"/>
-                </a:solidFill>
-              </a:rPr>
+              <a:rPr lang="en-US" altLang="ja-JP" dirty="0" err="1"/>
               <a:t>kv</a:t>
             </a:r>
             <a:r>
-              <a:rPr lang="en-US" altLang="ja-JP" dirty="0">
-                <a:solidFill>
-                  <a:srgbClr val="000000"/>
-                </a:solidFill>
-              </a:rPr>
+              <a:rPr lang="en-US" altLang="ja-JP" dirty="0"/>
               <a:t> b c h = Case</a:t>
             </a:r>
           </a:p>
@@ -22976,7 +23668,240 @@
             </a:r>
             <a:r>
               <a:rPr lang="en-US" altLang="ja-JP" dirty="0"/>
-              <a:t>) -</a:t>
+              <a:t>) -&gt; p s &amp;&amp; </a:t>
+            </a:r>
+            <a:r>
+              <a:rPr lang="en-US" altLang="ja-JP" dirty="0" err="1"/>
+              <a:t>ks</a:t>
+            </a:r>
+            <a:r>
+              <a:rPr lang="en-US" altLang="ja-JP" dirty="0"/>
+              <a:t> s == </a:t>
+            </a:r>
+            <a:r>
+              <a:rPr lang="en-US" altLang="ja-JP" dirty="0" err="1"/>
+              <a:t>kv</a:t>
+            </a:r>
+            <a:r>
+              <a:rPr lang="en-US" altLang="ja-JP" dirty="0"/>
+              <a:t> v |] [| \(</a:t>
+            </a:r>
+            <a:r>
+              <a:rPr lang="en-US" altLang="ja-JP" dirty="0" err="1"/>
+              <a:t>s:ss</a:t>
+            </a:r>
+            <a:r>
+              <a:rPr lang="en-US" altLang="ja-JP" dirty="0"/>
+              <a:t>) -&gt; p s |])</a:t>
+            </a:r>
+          </a:p>
+          <a:p>
+            <a:r>
+              <a:rPr lang="en-US" altLang="ja-JP" dirty="0"/>
+              <a:t>    ==&gt; $(update [p| </a:t>
+            </a:r>
+            <a:r>
+              <a:rPr lang="en-US" altLang="ja-JP" dirty="0" err="1"/>
+              <a:t>x:xs</a:t>
+            </a:r>
+            <a:r>
+              <a:rPr lang="en-US" altLang="ja-JP" dirty="0"/>
+              <a:t> |] [p| </a:t>
+            </a:r>
+            <a:r>
+              <a:rPr lang="en-US" altLang="ja-JP" dirty="0" err="1"/>
+              <a:t>x:xs</a:t>
+            </a:r>
+            <a:r>
+              <a:rPr lang="en-US" altLang="ja-JP" dirty="0"/>
+              <a:t> |] [d| x = b; </a:t>
+            </a:r>
+            <a:r>
+              <a:rPr lang="en-US" altLang="ja-JP" dirty="0" err="1"/>
+              <a:t>xs</a:t>
+            </a:r>
+            <a:r>
+              <a:rPr lang="en-US" altLang="ja-JP" dirty="0"/>
+              <a:t> = </a:t>
+            </a:r>
+            <a:r>
+              <a:rPr lang="en-US" altLang="ja-JP" dirty="0" err="1"/>
+              <a:t>pAlign</a:t>
+            </a:r>
+            <a:r>
+              <a:rPr lang="en-US" altLang="ja-JP" dirty="0"/>
+              <a:t> p </a:t>
+            </a:r>
+            <a:r>
+              <a:rPr lang="en-US" altLang="ja-JP" dirty="0" err="1"/>
+              <a:t>ks</a:t>
+            </a:r>
+            <a:r>
+              <a:rPr lang="en-US" altLang="ja-JP" dirty="0"/>
+              <a:t> </a:t>
+            </a:r>
+            <a:r>
+              <a:rPr lang="en-US" altLang="ja-JP" dirty="0" err="1"/>
+              <a:t>kv</a:t>
+            </a:r>
+            <a:r>
+              <a:rPr lang="en-US" altLang="ja-JP" dirty="0"/>
+              <a:t> b c h |])</a:t>
+            </a:r>
+          </a:p>
+          <a:p>
+            <a:r>
+              <a:rPr lang="en-US" altLang="ja-JP" dirty="0"/>
+              <a:t>  , $(adaptive [| \(</a:t>
+            </a:r>
+            <a:r>
+              <a:rPr lang="en-US" altLang="ja-JP" dirty="0" err="1"/>
+              <a:t>s:ss</a:t>
+            </a:r>
+            <a:r>
+              <a:rPr lang="en-US" altLang="ja-JP" dirty="0"/>
+              <a:t>) v -&gt; p s &amp;&amp; null v|])</a:t>
+            </a:r>
+          </a:p>
+          <a:p>
+            <a:r>
+              <a:rPr lang="en-US" altLang="ja-JP" dirty="0"/>
+              <a:t>    ==&gt; \(</a:t>
+            </a:r>
+            <a:r>
+              <a:rPr lang="en-US" altLang="ja-JP" dirty="0" err="1"/>
+              <a:t>s:ss</a:t>
+            </a:r>
+            <a:r>
+              <a:rPr lang="en-US" altLang="ja-JP" dirty="0"/>
+              <a:t>) v -&gt; maybe [] (:[]) (h s) ++ </a:t>
+            </a:r>
+            <a:r>
+              <a:rPr lang="en-US" altLang="ja-JP" dirty="0" err="1"/>
+              <a:t>ss</a:t>
+            </a:r>
+            <a:endParaRPr lang="en-US" altLang="ja-JP" dirty="0"/>
+          </a:p>
+          <a:p>
+            <a:r>
+              <a:rPr lang="en-US" altLang="ja-JP" dirty="0"/>
+              <a:t>  , $(normal [| \(</a:t>
+            </a:r>
+            <a:r>
+              <a:rPr lang="en-US" altLang="ja-JP" dirty="0" err="1"/>
+              <a:t>s:ss</a:t>
+            </a:r>
+            <a:r>
+              <a:rPr lang="en-US" altLang="ja-JP" dirty="0"/>
+              <a:t>) v -&gt; not (p s) |] [| \(</a:t>
+            </a:r>
+            <a:r>
+              <a:rPr lang="en-US" altLang="ja-JP" dirty="0" err="1"/>
+              <a:t>s:ss</a:t>
+            </a:r>
+            <a:r>
+              <a:rPr lang="en-US" altLang="ja-JP" dirty="0"/>
+              <a:t>) -&gt; not (p s) |])</a:t>
+            </a:r>
+          </a:p>
+          <a:p>
+            <a:r>
+              <a:rPr lang="en-US" altLang="ja-JP" dirty="0"/>
+              <a:t>    ==&gt; $(update [p| _:</a:t>
+            </a:r>
+            <a:r>
+              <a:rPr lang="en-US" altLang="ja-JP" dirty="0" err="1"/>
+              <a:t>xs</a:t>
+            </a:r>
+            <a:r>
+              <a:rPr lang="en-US" altLang="ja-JP" dirty="0"/>
+              <a:t> |] [p| </a:t>
+            </a:r>
+            <a:r>
+              <a:rPr lang="en-US" altLang="ja-JP" dirty="0" err="1"/>
+              <a:t>xs</a:t>
+            </a:r>
+            <a:r>
+              <a:rPr lang="en-US" altLang="ja-JP" dirty="0"/>
+              <a:t> |] [d| </a:t>
+            </a:r>
+            <a:r>
+              <a:rPr lang="en-US" altLang="ja-JP" dirty="0" err="1"/>
+              <a:t>xs</a:t>
+            </a:r>
+            <a:r>
+              <a:rPr lang="en-US" altLang="ja-JP" dirty="0"/>
+              <a:t> = </a:t>
+            </a:r>
+            <a:r>
+              <a:rPr lang="en-US" altLang="ja-JP" dirty="0" err="1"/>
+              <a:t>pAlign</a:t>
+            </a:r>
+            <a:r>
+              <a:rPr lang="en-US" altLang="ja-JP" dirty="0"/>
+              <a:t> p </a:t>
+            </a:r>
+            <a:r>
+              <a:rPr lang="en-US" altLang="ja-JP" dirty="0" err="1"/>
+              <a:t>ks</a:t>
+            </a:r>
+            <a:r>
+              <a:rPr lang="en-US" altLang="ja-JP" dirty="0"/>
+              <a:t> </a:t>
+            </a:r>
+            <a:r>
+              <a:rPr lang="en-US" altLang="ja-JP" dirty="0" err="1"/>
+              <a:t>kv</a:t>
+            </a:r>
+            <a:r>
+              <a:rPr lang="en-US" altLang="ja-JP" dirty="0"/>
+              <a:t> b c h |])</a:t>
+            </a:r>
+          </a:p>
+          <a:p>
+            <a:r>
+              <a:rPr lang="en-US" altLang="ja-JP" dirty="0"/>
+              <a:t>  , $(adaptive [| \</a:t>
+            </a:r>
+            <a:r>
+              <a:rPr lang="en-US" altLang="ja-JP" dirty="0" err="1"/>
+              <a:t>ss</a:t>
+            </a:r>
+            <a:r>
+              <a:rPr lang="en-US" altLang="ja-JP" dirty="0"/>
+              <a:t> (</a:t>
+            </a:r>
+            <a:r>
+              <a:rPr lang="en-US" altLang="ja-JP" dirty="0" err="1"/>
+              <a:t>v:vs</a:t>
+            </a:r>
+            <a:r>
+              <a:rPr lang="en-US" altLang="ja-JP" dirty="0"/>
+              <a:t>) -&gt; </a:t>
+            </a:r>
+            <a:r>
+              <a:rPr lang="en-US" altLang="ja-JP" dirty="0" err="1"/>
+              <a:t>kv</a:t>
+            </a:r>
+            <a:r>
+              <a:rPr lang="en-US" altLang="ja-JP" dirty="0"/>
+              <a:t> v `</a:t>
+            </a:r>
+            <a:r>
+              <a:rPr lang="en-US" altLang="ja-JP" dirty="0" err="1"/>
+              <a:t>elem</a:t>
+            </a:r>
+            <a:r>
+              <a:rPr lang="en-US" altLang="ja-JP" dirty="0"/>
+              <a:t>` map </a:t>
+            </a:r>
+            <a:r>
+              <a:rPr lang="en-US" altLang="ja-JP" dirty="0" err="1"/>
+              <a:t>ks</a:t>
+            </a:r>
+            <a:r>
+              <a:rPr lang="en-US" altLang="ja-JP" dirty="0"/>
+              <a:t> (</a:t>
             </a:r>
             <a:r>
               <a:rPr lang="en-US" altLang="ja-JP" dirty="0">
@@ -22984,19 +23909,41 @@
                   <a:srgbClr val="FF0000"/>
                 </a:solidFill>
               </a:rPr>
-              <a:t>&gt; p s </a:t>
-            </a:r>
-            <a:r>
-              <a:rPr lang="en-US" altLang="ja-JP" dirty="0"/>
-              <a:t>&amp;&amp; </a:t>
-            </a:r>
-            <a:r>
-              <a:rPr lang="en-US" altLang="ja-JP" dirty="0" err="1"/>
-              <a:t>ks</a:t>
-            </a:r>
-            <a:r>
-              <a:rPr lang="en-US" altLang="ja-JP" dirty="0"/>
-              <a:t> s == </a:t>
+              <a:t>filter p </a:t>
+            </a:r>
+            <a:r>
+              <a:rPr lang="en-US" altLang="ja-JP" dirty="0" err="1">
+                <a:solidFill>
+                  <a:srgbClr val="FF0000"/>
+                </a:solidFill>
+              </a:rPr>
+              <a:t>ss</a:t>
+            </a:r>
+            <a:r>
+              <a:rPr lang="en-US" altLang="ja-JP" dirty="0"/>
+              <a:t>) |])</a:t>
+            </a:r>
+          </a:p>
+          <a:p>
+            <a:r>
+              <a:rPr lang="en-US" altLang="ja-JP" dirty="0"/>
+              <a:t>    ==&gt; \</a:t>
+            </a:r>
+            <a:r>
+              <a:rPr lang="en-US" altLang="ja-JP" dirty="0" err="1"/>
+              <a:t>ss</a:t>
+            </a:r>
+            <a:r>
+              <a:rPr lang="en-US" altLang="ja-JP" dirty="0"/>
+              <a:t> (v:_) -&gt; </a:t>
+            </a:r>
+            <a:r>
+              <a:rPr lang="en-US" altLang="ja-JP" dirty="0" err="1"/>
+              <a:t>uncurry</a:t>
+            </a:r>
+            <a:r>
+              <a:rPr lang="en-US" altLang="ja-JP" dirty="0"/>
+              <a:t> (:) (extract (</a:t>
             </a:r>
             <a:r>
               <a:rPr lang="en-US" altLang="ja-JP" dirty="0" err="1"/>
@@ -23004,15 +23951,43 @@
             </a:r>
             <a:r>
               <a:rPr lang="en-US" altLang="ja-JP" dirty="0"/>
-              <a:t> v |] [| \(</a:t>
-            </a:r>
-            <a:r>
-              <a:rPr lang="en-US" altLang="ja-JP" dirty="0" err="1"/>
-              <a:t>s:ss</a:t>
-            </a:r>
-            <a:r>
-              <a:rPr lang="en-US" altLang="ja-JP" dirty="0"/>
-              <a:t>) -</a:t>
+              <a:t> v) </a:t>
+            </a:r>
+            <a:r>
+              <a:rPr lang="en-US" altLang="ja-JP" dirty="0" err="1"/>
+              <a:t>ss</a:t>
+            </a:r>
+            <a:r>
+              <a:rPr lang="en-US" altLang="ja-JP" dirty="0"/>
+              <a:t>)</a:t>
+            </a:r>
+          </a:p>
+          <a:p>
+            <a:r>
+              <a:rPr lang="en-US" altLang="ja-JP" dirty="0"/>
+              <a:t>  , $(</a:t>
+            </a:r>
+            <a:r>
+              <a:rPr lang="en-US" altLang="ja-JP" dirty="0" err="1"/>
+              <a:t>adaptiveSV</a:t>
+            </a:r>
+            <a:r>
+              <a:rPr lang="en-US" altLang="ja-JP" dirty="0"/>
+              <a:t> [p| _ |] [p| _:_ |])</a:t>
+            </a:r>
+          </a:p>
+          <a:p>
+            <a:r>
+              <a:rPr lang="en-US" altLang="ja-JP" dirty="0"/>
+              <a:t>    ==&gt; \</a:t>
+            </a:r>
+            <a:r>
+              <a:rPr lang="en-US" altLang="ja-JP" dirty="0" err="1"/>
+              <a:t>ss</a:t>
+            </a:r>
+            <a:r>
+              <a:rPr lang="en-US" altLang="ja-JP" dirty="0"/>
+              <a:t> (v:_) -</a:t>
             </a:r>
             <a:r>
               <a:rPr lang="en-US" altLang="ja-JP" dirty="0">
@@ -23020,450 +23995,27 @@
                   <a:srgbClr val="FF0000"/>
                 </a:solidFill>
               </a:rPr>
-              <a:t>&gt; p s </a:t>
-            </a:r>
-            <a:r>
-              <a:rPr lang="en-US" altLang="ja-JP" dirty="0"/>
-              <a:t>|])</a:t>
-            </a:r>
-          </a:p>
-          <a:p>
-            <a:r>
-              <a:rPr lang="en-US" altLang="ja-JP" dirty="0"/>
-              <a:t>    ==&gt; $(update [p| </a:t>
-            </a:r>
-            <a:r>
-              <a:rPr lang="en-US" altLang="ja-JP" dirty="0" err="1"/>
-              <a:t>x:xs</a:t>
-            </a:r>
-            <a:r>
-              <a:rPr lang="en-US" altLang="ja-JP" dirty="0"/>
-              <a:t> |] [p| </a:t>
-            </a:r>
-            <a:r>
-              <a:rPr lang="en-US" altLang="ja-JP" dirty="0" err="1"/>
-              <a:t>x:xs</a:t>
-            </a:r>
-            <a:r>
-              <a:rPr lang="en-US" altLang="ja-JP" dirty="0"/>
-              <a:t> |] [d| x = b; </a:t>
-            </a:r>
-            <a:r>
-              <a:rPr lang="en-US" altLang="ja-JP" dirty="0" err="1"/>
-              <a:t>xs</a:t>
-            </a:r>
-            <a:r>
-              <a:rPr lang="en-US" altLang="ja-JP" dirty="0"/>
-              <a:t> = </a:t>
-            </a:r>
-            <a:r>
-              <a:rPr lang="en-US" altLang="ja-JP" dirty="0" err="1"/>
-              <a:t>pAlign</a:t>
-            </a:r>
-            <a:r>
-              <a:rPr lang="en-US" altLang="ja-JP" dirty="0"/>
-              <a:t> p </a:t>
-            </a:r>
-            <a:r>
-              <a:rPr lang="en-US" altLang="ja-JP" dirty="0" err="1"/>
-              <a:t>ks</a:t>
-            </a:r>
-            <a:r>
-              <a:rPr lang="en-US" altLang="ja-JP" dirty="0"/>
-              <a:t> </a:t>
-            </a:r>
-            <a:r>
-              <a:rPr lang="en-US" altLang="ja-JP" dirty="0" err="1"/>
-              <a:t>kv</a:t>
-            </a:r>
-            <a:r>
-              <a:rPr lang="en-US" altLang="ja-JP" dirty="0"/>
-              <a:t> b c h |])</a:t>
-            </a:r>
-          </a:p>
-          <a:p>
-            <a:r>
-              <a:rPr lang="en-US" altLang="ja-JP" dirty="0"/>
-              <a:t>  </a:t>
-            </a:r>
-            <a:r>
-              <a:rPr lang="en-US" altLang="ja-JP" b="1" dirty="0">
+              <a:t>&gt; </a:t>
+            </a:r>
+            <a:r>
+              <a:rPr lang="en-US" altLang="ja-JP" dirty="0" err="1">
                 <a:solidFill>
-                  <a:srgbClr val="000000"/>
+                  <a:srgbClr val="FF0000"/>
                 </a:solidFill>
               </a:rPr>
-              <a:t>, </a:t>
+              <a:t>filterCheck</a:t>
             </a:r>
             <a:r>
               <a:rPr lang="en-US" altLang="ja-JP" dirty="0">
                 <a:solidFill>
-                  <a:schemeClr val="accent2"/>
-                </a:solidFill>
-              </a:rPr>
-              <a:t>$(adaptive [| \(</a:t>
-            </a:r>
-            <a:r>
-              <a:rPr lang="en-US" altLang="ja-JP" dirty="0" err="1">
-                <a:solidFill>
-                  <a:schemeClr val="accent2"/>
-                </a:solidFill>
-              </a:rPr>
-              <a:t>s:ss</a:t>
-            </a:r>
-            <a:r>
-              <a:rPr lang="en-US" altLang="ja-JP" dirty="0">
-                <a:solidFill>
-                  <a:schemeClr val="accent2"/>
-                </a:solidFill>
-              </a:rPr>
-              <a:t>) v -&gt; p s &amp;&amp; null v|])</a:t>
-            </a:r>
-          </a:p>
-          <a:p>
-            <a:r>
-              <a:rPr lang="en-US" altLang="ja-JP" dirty="0">
-                <a:solidFill>
-                  <a:schemeClr val="accent2"/>
-                </a:solidFill>
-              </a:rPr>
-              <a:t>    ==&gt; \(</a:t>
-            </a:r>
-            <a:r>
-              <a:rPr lang="en-US" altLang="ja-JP" dirty="0" err="1">
-                <a:solidFill>
-                  <a:schemeClr val="accent2"/>
-                </a:solidFill>
-              </a:rPr>
-              <a:t>s:ss</a:t>
-            </a:r>
-            <a:r>
-              <a:rPr lang="en-US" altLang="ja-JP" dirty="0">
-                <a:solidFill>
-                  <a:schemeClr val="accent2"/>
-                </a:solidFill>
-              </a:rPr>
-              <a:t>) v -&gt; maybe [] (:[]) (</a:t>
-            </a:r>
-            <a:r>
-              <a:rPr lang="en-US" altLang="ja-JP" dirty="0">
-                <a:solidFill>
-                  <a:srgbClr val="FF6600"/>
-                </a:solidFill>
-              </a:rPr>
-              <a:t>h s</a:t>
-            </a:r>
-            <a:r>
-              <a:rPr lang="en-US" altLang="ja-JP" dirty="0">
-                <a:solidFill>
-                  <a:schemeClr val="accent2"/>
-                </a:solidFill>
-              </a:rPr>
-              <a:t>) ++ </a:t>
-            </a:r>
-            <a:r>
-              <a:rPr lang="en-US" altLang="ja-JP" dirty="0" err="1">
-                <a:solidFill>
-                  <a:schemeClr val="accent2"/>
-                </a:solidFill>
-              </a:rPr>
-              <a:t>ss</a:t>
-            </a:r>
-            <a:endParaRPr lang="en-US" altLang="ja-JP" dirty="0">
-              <a:solidFill>
-                <a:schemeClr val="accent2"/>
-              </a:solidFill>
-            </a:endParaRPr>
-          </a:p>
-          <a:p>
-            <a:r>
-              <a:rPr lang="en-US" altLang="ja-JP" dirty="0">
-                <a:solidFill>
-                  <a:schemeClr val="accent2"/>
-                </a:solidFill>
-              </a:rPr>
-              <a:t>  , $(normal [| \(</a:t>
-            </a:r>
-            <a:r>
-              <a:rPr lang="en-US" altLang="ja-JP" dirty="0" err="1">
-                <a:solidFill>
-                  <a:schemeClr val="accent2"/>
-                </a:solidFill>
-              </a:rPr>
-              <a:t>s:ss</a:t>
-            </a:r>
-            <a:r>
-              <a:rPr lang="en-US" altLang="ja-JP" dirty="0">
-                <a:solidFill>
-                  <a:schemeClr val="accent2"/>
-                </a:solidFill>
-              </a:rPr>
-              <a:t>) v -&gt; </a:t>
-            </a:r>
-            <a:r>
-              <a:rPr lang="en-US" altLang="ja-JP" dirty="0">
-                <a:solidFill>
-                  <a:srgbClr val="FF6600"/>
-                </a:solidFill>
-              </a:rPr>
-              <a:t>not (p s) </a:t>
-            </a:r>
-            <a:r>
-              <a:rPr lang="en-US" altLang="ja-JP" dirty="0">
-                <a:solidFill>
-                  <a:schemeClr val="accent2"/>
-                </a:solidFill>
-              </a:rPr>
-              <a:t>|] [| \(</a:t>
-            </a:r>
-            <a:r>
-              <a:rPr lang="en-US" altLang="ja-JP" dirty="0" err="1">
-                <a:solidFill>
-                  <a:schemeClr val="accent2"/>
-                </a:solidFill>
-              </a:rPr>
-              <a:t>s:ss</a:t>
-            </a:r>
-            <a:r>
-              <a:rPr lang="en-US" altLang="ja-JP" dirty="0">
-                <a:solidFill>
-                  <a:schemeClr val="accent2"/>
-                </a:solidFill>
-              </a:rPr>
-              <a:t>) -&gt; not (p s) |])</a:t>
-            </a:r>
-          </a:p>
-          <a:p>
-            <a:r>
-              <a:rPr lang="en-US" altLang="ja-JP" dirty="0">
-                <a:solidFill>
-                  <a:schemeClr val="accent2"/>
-                </a:solidFill>
-              </a:rPr>
-              <a:t>    ==&gt; $(update [p| _:</a:t>
-            </a:r>
-            <a:r>
-              <a:rPr lang="en-US" altLang="ja-JP" dirty="0" err="1">
-                <a:solidFill>
-                  <a:schemeClr val="accent2"/>
-                </a:solidFill>
-              </a:rPr>
-              <a:t>xs</a:t>
-            </a:r>
-            <a:r>
-              <a:rPr lang="en-US" altLang="ja-JP" dirty="0">
-                <a:solidFill>
-                  <a:schemeClr val="accent2"/>
-                </a:solidFill>
-              </a:rPr>
-              <a:t> |] [p| </a:t>
-            </a:r>
-            <a:r>
-              <a:rPr lang="en-US" altLang="ja-JP" dirty="0" err="1">
-                <a:solidFill>
-                  <a:schemeClr val="accent2"/>
-                </a:solidFill>
-              </a:rPr>
-              <a:t>xs</a:t>
-            </a:r>
-            <a:r>
-              <a:rPr lang="en-US" altLang="ja-JP" dirty="0">
-                <a:solidFill>
-                  <a:schemeClr val="accent2"/>
-                </a:solidFill>
-              </a:rPr>
-              <a:t> |] [d| </a:t>
-            </a:r>
-            <a:r>
-              <a:rPr lang="en-US" altLang="ja-JP" dirty="0" err="1">
-                <a:solidFill>
-                  <a:schemeClr val="accent2"/>
-                </a:solidFill>
-              </a:rPr>
-              <a:t>xs</a:t>
-            </a:r>
-            <a:r>
-              <a:rPr lang="en-US" altLang="ja-JP" dirty="0">
-                <a:solidFill>
-                  <a:schemeClr val="accent2"/>
-                </a:solidFill>
-              </a:rPr>
-              <a:t> = </a:t>
-            </a:r>
-            <a:r>
-              <a:rPr lang="en-US" altLang="ja-JP" dirty="0" err="1">
-                <a:solidFill>
-                  <a:schemeClr val="accent2"/>
-                </a:solidFill>
-              </a:rPr>
-              <a:t>pAlign</a:t>
-            </a:r>
-            <a:r>
-              <a:rPr lang="en-US" altLang="ja-JP" dirty="0">
-                <a:solidFill>
-                  <a:schemeClr val="accent2"/>
+                  <a:srgbClr val="FF0000"/>
                 </a:solidFill>
               </a:rPr>
               <a:t> p </a:t>
             </a:r>
             <a:r>
-              <a:rPr lang="en-US" altLang="ja-JP" dirty="0" err="1">
-                <a:solidFill>
-                  <a:schemeClr val="accent2"/>
-                </a:solidFill>
-              </a:rPr>
-              <a:t>ks</a:t>
-            </a:r>
-            <a:r>
-              <a:rPr lang="en-US" altLang="ja-JP" dirty="0">
-                <a:solidFill>
-                  <a:schemeClr val="accent2"/>
-                </a:solidFill>
-              </a:rPr>
-              <a:t> </a:t>
-            </a:r>
-            <a:r>
-              <a:rPr lang="en-US" altLang="ja-JP" dirty="0" err="1">
-                <a:solidFill>
-                  <a:schemeClr val="accent2"/>
-                </a:solidFill>
-              </a:rPr>
-              <a:t>kv</a:t>
-            </a:r>
-            <a:r>
-              <a:rPr lang="en-US" altLang="ja-JP" dirty="0">
-                <a:solidFill>
-                  <a:schemeClr val="accent2"/>
-                </a:solidFill>
-              </a:rPr>
-              <a:t> b c h |])</a:t>
-            </a:r>
-          </a:p>
-          <a:p>
-            <a:r>
-              <a:rPr lang="en-US" altLang="ja-JP" dirty="0"/>
-              <a:t>  , $(adaptive [| \</a:t>
-            </a:r>
-            <a:r>
-              <a:rPr lang="en-US" altLang="ja-JP" dirty="0" err="1"/>
-              <a:t>ss</a:t>
-            </a:r>
-            <a:r>
-              <a:rPr lang="en-US" altLang="ja-JP" dirty="0"/>
-              <a:t> (</a:t>
-            </a:r>
-            <a:r>
-              <a:rPr lang="en-US" altLang="ja-JP" dirty="0" err="1"/>
-              <a:t>v:vs</a:t>
-            </a:r>
-            <a:r>
-              <a:rPr lang="en-US" altLang="ja-JP" dirty="0"/>
-              <a:t>) -&gt; </a:t>
-            </a:r>
-            <a:r>
-              <a:rPr lang="en-US" altLang="ja-JP" dirty="0" err="1"/>
-              <a:t>kv</a:t>
-            </a:r>
-            <a:r>
-              <a:rPr lang="en-US" altLang="ja-JP" dirty="0"/>
-              <a:t> v `</a:t>
-            </a:r>
-            <a:r>
-              <a:rPr lang="en-US" altLang="ja-JP" dirty="0" err="1"/>
-              <a:t>elem</a:t>
-            </a:r>
-            <a:r>
-              <a:rPr lang="en-US" altLang="ja-JP" dirty="0"/>
-              <a:t>` map </a:t>
-            </a:r>
-            <a:r>
-              <a:rPr lang="en-US" altLang="ja-JP" dirty="0" err="1"/>
-              <a:t>ks</a:t>
-            </a:r>
-            <a:r>
-              <a:rPr lang="en-US" altLang="ja-JP" dirty="0"/>
-              <a:t> (filter p </a:t>
-            </a:r>
-            <a:r>
-              <a:rPr lang="en-US" altLang="ja-JP" dirty="0" err="1"/>
-              <a:t>ss</a:t>
-            </a:r>
-            <a:r>
-              <a:rPr lang="en-US" altLang="ja-JP" dirty="0"/>
-              <a:t>) |])</a:t>
-            </a:r>
-          </a:p>
-          <a:p>
-            <a:r>
-              <a:rPr lang="en-US" altLang="ja-JP" dirty="0"/>
-              <a:t>    ==&gt; \</a:t>
-            </a:r>
-            <a:r>
-              <a:rPr lang="en-US" altLang="ja-JP" dirty="0" err="1"/>
-              <a:t>ss</a:t>
-            </a:r>
-            <a:r>
-              <a:rPr lang="en-US" altLang="ja-JP" dirty="0"/>
-              <a:t> (v:_) -&gt; </a:t>
-            </a:r>
-            <a:r>
-              <a:rPr lang="en-US" altLang="ja-JP" dirty="0" err="1"/>
-              <a:t>uncurry</a:t>
-            </a:r>
-            <a:r>
-              <a:rPr lang="en-US" altLang="ja-JP" dirty="0"/>
-              <a:t> (:) (extract (</a:t>
-            </a:r>
-            <a:r>
-              <a:rPr lang="en-US" altLang="ja-JP" dirty="0" err="1"/>
-              <a:t>kv</a:t>
-            </a:r>
-            <a:r>
-              <a:rPr lang="en-US" altLang="ja-JP" dirty="0"/>
-              <a:t> v) </a:t>
-            </a:r>
-            <a:r>
-              <a:rPr lang="en-US" altLang="ja-JP" dirty="0" err="1"/>
-              <a:t>ss</a:t>
-            </a:r>
-            <a:r>
-              <a:rPr lang="en-US" altLang="ja-JP" dirty="0"/>
-              <a:t>)</a:t>
-            </a:r>
-          </a:p>
-          <a:p>
-            <a:r>
-              <a:rPr lang="en-US" altLang="ja-JP" dirty="0"/>
-              <a:t>  , $(</a:t>
-            </a:r>
-            <a:r>
-              <a:rPr lang="en-US" altLang="ja-JP" dirty="0" err="1"/>
-              <a:t>adaptiveSV</a:t>
-            </a:r>
-            <a:r>
-              <a:rPr lang="en-US" altLang="ja-JP" dirty="0"/>
-              <a:t> [p| _ |] [p| _:_ |])</a:t>
-            </a:r>
-          </a:p>
-          <a:p>
-            <a:r>
-              <a:rPr lang="en-US" altLang="ja-JP" dirty="0"/>
-              <a:t>    ==&gt; \</a:t>
-            </a:r>
-            <a:r>
-              <a:rPr lang="en-US" altLang="ja-JP" dirty="0" err="1"/>
-              <a:t>ss</a:t>
-            </a:r>
-            <a:r>
-              <a:rPr lang="en-US" altLang="ja-JP" dirty="0"/>
-              <a:t> (v:_) -&gt; </a:t>
-            </a:r>
-            <a:r>
-              <a:rPr lang="en-US" altLang="ja-JP" dirty="0" err="1"/>
-              <a:t>filterCheck</a:t>
-            </a:r>
-            <a:r>
-              <a:rPr lang="en-US" altLang="ja-JP" dirty="0"/>
-              <a:t> p (c v) : </a:t>
+              <a:rPr lang="en-US" altLang="ja-JP" dirty="0"/>
+              <a:t>(c v) : </a:t>
             </a:r>
             <a:r>
               <a:rPr lang="en-US" altLang="ja-JP" dirty="0" err="1"/>
@@ -23493,8 +24045,8 @@
           </a:xfrm>
           <a:prstGeom prst="wedgeEllipseCallout">
             <a:avLst>
-              <a:gd name="adj1" fmla="val -105083"/>
-              <a:gd name="adj2" fmla="val 61446"/>
+              <a:gd name="adj1" fmla="val -119050"/>
+              <a:gd name="adj2" fmla="val 187586"/>
             </a:avLst>
           </a:prstGeom>
           <a:ln>
@@ -23544,15 +24096,19 @@
               <a:tabLst/>
             </a:pPr>
             <a:r>
-              <a:rPr lang="en-US" altLang="ja-JP" sz="2000" dirty="0" smtClean="0">
+              <a:rPr kumimoji="1" lang="en-US" altLang="ja-JP" sz="2000" b="0" i="0" u="none" strike="noStrike" cap="none" normalizeH="0" baseline="0" dirty="0" smtClean="0">
+                <a:ln>
+                  <a:noFill/>
+                </a:ln>
                 <a:solidFill>
                   <a:schemeClr val="tx1"/>
                 </a:solidFill>
+                <a:effectLst/>
                 <a:latin typeface="Arial" pitchFamily="-111" charset="0"/>
                 <a:ea typeface="ＭＳ Ｐゴシック" pitchFamily="-111" charset="-128"/>
                 <a:cs typeface="ＭＳ Ｐゴシック" pitchFamily="-111" charset="-128"/>
               </a:rPr>
-              <a:t>Consider  the cases according to “p on source elements”</a:t>
+              <a:t>Guarantee the new source elements satisfying p.</a:t>
             </a:r>
             <a:endParaRPr kumimoji="1" lang="ja-JP" altLang="en-US" sz="2000" b="0" i="0" u="none" strike="noStrike" cap="none" normalizeH="0" baseline="0" dirty="0" smtClean="0">
               <a:ln>
@@ -23572,7 +24128,7 @@
     </p:spTree>
     <p:extLst>
       <p:ext uri="{BB962C8B-B14F-4D97-AF65-F5344CB8AC3E}">
-        <p14:creationId xmlns:p14="http://schemas.microsoft.com/office/powerpoint/2010/main" val="3587244128"/>
+        <p14:creationId xmlns:p14="http://schemas.microsoft.com/office/powerpoint/2010/main" val="2568127772"/>
       </p:ext>
     </p:extLst>
   </p:cSld>
@@ -23623,19 +24179,35 @@
           <a:p>
             <a:r>
               <a:rPr kumimoji="1" lang="en-US" altLang="ja-JP" dirty="0" smtClean="0"/>
-              <a:t>From </a:t>
-            </a:r>
-            <a:r>
-              <a:rPr kumimoji="1" lang="en-US" altLang="ja-JP" dirty="0" err="1" smtClean="0"/>
-              <a:t>keyAlign</a:t>
-            </a:r>
-            <a:r>
-              <a:rPr kumimoji="1" lang="en-US" altLang="ja-JP" dirty="0" smtClean="0"/>
-              <a:t> to </a:t>
+              <a:t>From</a:t>
+            </a:r>
+            <a:r>
+              <a:rPr kumimoji="1" lang="ja-JP" altLang="en-US" dirty="0" smtClean="0"/>
+              <a:t> </a:t>
             </a:r>
             <a:r>
               <a:rPr kumimoji="1" lang="en-US" altLang="ja-JP" dirty="0" err="1" smtClean="0"/>
               <a:t>pAlign</a:t>
+            </a:r>
+            <a:r>
+              <a:rPr kumimoji="1" lang="ja-JP" altLang="en-US" dirty="0" smtClean="0"/>
+              <a:t> </a:t>
+            </a:r>
+            <a:r>
+              <a:rPr kumimoji="1" lang="en-US" altLang="ja-JP" dirty="0" smtClean="0"/>
+              <a:t>to</a:t>
+            </a:r>
+            <a:r>
+              <a:rPr kumimoji="1" lang="ja-JP" altLang="en-US" dirty="0" smtClean="0"/>
+              <a:t> </a:t>
+            </a:r>
+            <a:r>
+              <a:rPr lang="ja-JP" altLang="ja-JP" dirty="0" smtClean="0"/>
+              <a:t>r</a:t>
+            </a:r>
+            <a:r>
+              <a:rPr lang="en-US" altLang="ja-JP" dirty="0" err="1" smtClean="0"/>
+              <a:t>elAlign</a:t>
             </a:r>
             <a:endParaRPr kumimoji="1" lang="ja-JP" altLang="en-US" dirty="0"/>
           </a:p>
@@ -23673,8 +24245,8 @@
         </p:nvSpPr>
         <p:spPr>
           <a:xfrm>
-            <a:off x="426726" y="1029252"/>
-            <a:ext cx="8177722" cy="5355313"/>
+            <a:off x="446541" y="1196752"/>
+            <a:ext cx="8460432" cy="4247317"/>
           </a:xfrm>
           <a:prstGeom prst="rect">
             <a:avLst/>
@@ -23688,483 +24260,162 @@
           <a:p>
             <a:r>
               <a:rPr lang="en-US" altLang="ja-JP" dirty="0" err="1"/>
-              <a:t>pAlign</a:t>
-            </a:r>
-            <a:r>
-              <a:rPr lang="en-US" altLang="ja-JP" dirty="0"/>
-              <a:t> :: </a:t>
-            </a:r>
-            <a:r>
-              <a:rPr lang="en-US" altLang="ja-JP" dirty="0" err="1"/>
-              <a:t>forall</a:t>
-            </a:r>
-            <a:r>
-              <a:rPr lang="en-US" altLang="ja-JP" dirty="0"/>
-              <a:t> s v k. (Show s, Show v, </a:t>
-            </a:r>
-            <a:r>
-              <a:rPr lang="en-US" altLang="ja-JP" dirty="0" err="1"/>
-              <a:t>Eq</a:t>
-            </a:r>
-            <a:r>
-              <a:rPr lang="en-US" altLang="ja-JP" dirty="0"/>
-              <a:t> k)</a:t>
-            </a:r>
-          </a:p>
-          <a:p>
-            <a:r>
-              <a:rPr lang="en-US" altLang="ja-JP" dirty="0"/>
-              <a:t>         =&gt; (s -&gt; </a:t>
-            </a:r>
-            <a:r>
-              <a:rPr lang="en-US" altLang="ja-JP" dirty="0" err="1"/>
-              <a:t>Bool</a:t>
-            </a:r>
-            <a:r>
-              <a:rPr lang="en-US" altLang="ja-JP" dirty="0"/>
-              <a:t>) {- predicate -}</a:t>
-            </a:r>
-          </a:p>
-          <a:p>
-            <a:r>
-              <a:rPr lang="en-US" altLang="ja-JP" dirty="0"/>
-              <a:t>            -&gt; (s -&gt; k) -&gt; (v -&gt; k) -&gt; </a:t>
-            </a:r>
-            <a:r>
-              <a:rPr lang="en-US" altLang="ja-JP" dirty="0" err="1"/>
-              <a:t>BiGUL</a:t>
-            </a:r>
-            <a:r>
-              <a:rPr lang="en-US" altLang="ja-JP" dirty="0"/>
-              <a:t> s v -&gt; (v -&gt; s) </a:t>
-            </a:r>
-          </a:p>
-          <a:p>
-            <a:r>
-              <a:rPr lang="en-US" altLang="ja-JP" dirty="0"/>
-              <a:t>            -&gt; (s -&gt; Maybe s) {- </a:t>
+              <a:t>relAlign</a:t>
+            </a:r>
+            <a:r>
+              <a:rPr lang="en-US" altLang="ja-JP" dirty="0"/>
+              <a:t> :</a:t>
+            </a:r>
+            <a:r>
+              <a:rPr lang="en-US" altLang="ja-JP" sz="1400" dirty="0"/>
+              <a:t>: </a:t>
+            </a:r>
+            <a:r>
+              <a:rPr lang="en-US" altLang="ja-JP" sz="1400" dirty="0" smtClean="0"/>
+              <a:t> </a:t>
+            </a:r>
+            <a:r>
+              <a:rPr lang="is-IS" altLang="ja-JP" sz="1400" dirty="0" smtClean="0"/>
+              <a:t>…</a:t>
             </a:r>
             <a:r>
               <a:rPr lang="en-US" altLang="ja-JP" dirty="0" smtClean="0"/>
-              <a:t>conceal/hide </a:t>
-            </a:r>
-            <a:r>
-              <a:rPr lang="en-US" altLang="ja-JP" dirty="0"/>
-              <a:t>function -}</a:t>
-            </a:r>
-          </a:p>
-          <a:p>
-            <a:r>
-              <a:rPr lang="en-US" altLang="ja-JP" dirty="0"/>
-              <a:t>            -&gt; </a:t>
-            </a:r>
-            <a:r>
-              <a:rPr lang="en-US" altLang="ja-JP" dirty="0" err="1"/>
-              <a:t>BiGUL</a:t>
-            </a:r>
-            <a:r>
-              <a:rPr lang="en-US" altLang="ja-JP" dirty="0"/>
-              <a:t> [s] [v]</a:t>
-            </a:r>
-          </a:p>
-          <a:p>
-            <a:r>
-              <a:rPr lang="en-US" altLang="ja-JP" dirty="0" err="1"/>
-              <a:t>pAlign</a:t>
-            </a:r>
-            <a:r>
-              <a:rPr lang="en-US" altLang="ja-JP" dirty="0"/>
-              <a:t> p </a:t>
-            </a:r>
-            <a:r>
-              <a:rPr lang="en-US" altLang="ja-JP" dirty="0" err="1"/>
-              <a:t>ks</a:t>
-            </a:r>
-            <a:r>
-              <a:rPr lang="en-US" altLang="ja-JP" dirty="0"/>
-              <a:t> </a:t>
-            </a:r>
-            <a:r>
-              <a:rPr lang="en-US" altLang="ja-JP" dirty="0" err="1"/>
-              <a:t>kv</a:t>
-            </a:r>
-            <a:r>
-              <a:rPr lang="en-US" altLang="ja-JP" dirty="0"/>
-              <a:t> b c h = Case</a:t>
-            </a:r>
-          </a:p>
-          <a:p>
-            <a:r>
-              <a:rPr lang="en-US" altLang="ja-JP" dirty="0"/>
-              <a:t>  [ $(</a:t>
-            </a:r>
-            <a:r>
-              <a:rPr lang="en-US" altLang="ja-JP" dirty="0" err="1"/>
-              <a:t>normalSV</a:t>
-            </a:r>
-            <a:r>
-              <a:rPr lang="en-US" altLang="ja-JP" dirty="0"/>
-              <a:t> [p| [] |] [p| [] |] [p| [] |])</a:t>
-            </a:r>
-          </a:p>
-          <a:p>
-            <a:r>
-              <a:rPr lang="en-US" altLang="ja-JP" dirty="0"/>
-              <a:t>    ==&gt; $(update [p| [] |] [p| [] |] [d| |])</a:t>
-            </a:r>
-          </a:p>
-          <a:p>
-            <a:r>
-              <a:rPr lang="en-US" altLang="ja-JP" dirty="0"/>
-              <a:t>  , $(normal [| \(</a:t>
-            </a:r>
-            <a:r>
-              <a:rPr lang="en-US" altLang="ja-JP" dirty="0" err="1"/>
-              <a:t>s:ss</a:t>
-            </a:r>
-            <a:r>
-              <a:rPr lang="en-US" altLang="ja-JP" dirty="0"/>
-              <a:t>) (</a:t>
-            </a:r>
-            <a:r>
-              <a:rPr lang="en-US" altLang="ja-JP" dirty="0" err="1"/>
-              <a:t>v:vs</a:t>
-            </a:r>
-            <a:r>
-              <a:rPr lang="en-US" altLang="ja-JP" dirty="0"/>
-              <a:t>) -&gt; p s &amp;&amp; </a:t>
-            </a:r>
-            <a:r>
-              <a:rPr lang="en-US" altLang="ja-JP" dirty="0" err="1"/>
-              <a:t>ks</a:t>
-            </a:r>
-            <a:r>
-              <a:rPr lang="en-US" altLang="ja-JP" dirty="0"/>
-              <a:t> s == </a:t>
-            </a:r>
-            <a:r>
-              <a:rPr lang="en-US" altLang="ja-JP" dirty="0" err="1"/>
-              <a:t>kv</a:t>
-            </a:r>
-            <a:r>
-              <a:rPr lang="en-US" altLang="ja-JP" dirty="0"/>
-              <a:t> v |] [| \(</a:t>
-            </a:r>
-            <a:r>
-              <a:rPr lang="en-US" altLang="ja-JP" dirty="0" err="1"/>
-              <a:t>s:ss</a:t>
-            </a:r>
-            <a:r>
-              <a:rPr lang="en-US" altLang="ja-JP" dirty="0"/>
-              <a:t>) -&gt; p s |])</a:t>
-            </a:r>
-          </a:p>
-          <a:p>
-            <a:r>
-              <a:rPr lang="en-US" altLang="ja-JP" dirty="0"/>
-              <a:t>    ==&gt; $(update [p| </a:t>
-            </a:r>
-            <a:r>
-              <a:rPr lang="en-US" altLang="ja-JP" dirty="0" err="1"/>
-              <a:t>x:xs</a:t>
-            </a:r>
-            <a:r>
-              <a:rPr lang="en-US" altLang="ja-JP" dirty="0"/>
-              <a:t> |] [p| </a:t>
-            </a:r>
-            <a:r>
-              <a:rPr lang="en-US" altLang="ja-JP" dirty="0" err="1"/>
-              <a:t>x:xs</a:t>
-            </a:r>
-            <a:r>
-              <a:rPr lang="en-US" altLang="ja-JP" dirty="0"/>
-              <a:t> |] [d| x = b; </a:t>
-            </a:r>
-            <a:r>
-              <a:rPr lang="en-US" altLang="ja-JP" dirty="0" err="1"/>
-              <a:t>xs</a:t>
-            </a:r>
-            <a:r>
-              <a:rPr lang="en-US" altLang="ja-JP" dirty="0"/>
-              <a:t> = </a:t>
-            </a:r>
-            <a:r>
-              <a:rPr lang="en-US" altLang="ja-JP" dirty="0" err="1"/>
-              <a:t>pAlign</a:t>
-            </a:r>
-            <a:r>
-              <a:rPr lang="en-US" altLang="ja-JP" dirty="0"/>
-              <a:t> p </a:t>
-            </a:r>
-            <a:r>
-              <a:rPr lang="en-US" altLang="ja-JP" dirty="0" err="1"/>
-              <a:t>ks</a:t>
-            </a:r>
-            <a:r>
-              <a:rPr lang="en-US" altLang="ja-JP" dirty="0"/>
-              <a:t> </a:t>
-            </a:r>
-            <a:r>
-              <a:rPr lang="en-US" altLang="ja-JP" dirty="0" err="1"/>
-              <a:t>kv</a:t>
-            </a:r>
-            <a:r>
-              <a:rPr lang="en-US" altLang="ja-JP" dirty="0"/>
-              <a:t> b c h |])</a:t>
-            </a:r>
-          </a:p>
-          <a:p>
-            <a:r>
-              <a:rPr lang="en-US" altLang="ja-JP" dirty="0"/>
-              <a:t>  , $(adaptive [| \(</a:t>
-            </a:r>
-            <a:r>
-              <a:rPr lang="en-US" altLang="ja-JP" dirty="0" err="1"/>
-              <a:t>s:ss</a:t>
-            </a:r>
-            <a:r>
-              <a:rPr lang="en-US" altLang="ja-JP" dirty="0"/>
-              <a:t>) v -&gt; p s &amp;&amp; null v|])</a:t>
-            </a:r>
-          </a:p>
-          <a:p>
-            <a:r>
-              <a:rPr lang="en-US" altLang="ja-JP" dirty="0"/>
-              <a:t>    ==&gt; \(</a:t>
-            </a:r>
-            <a:r>
-              <a:rPr lang="en-US" altLang="ja-JP" dirty="0" err="1"/>
-              <a:t>s:ss</a:t>
-            </a:r>
-            <a:r>
-              <a:rPr lang="en-US" altLang="ja-JP" dirty="0"/>
-              <a:t>) v -&gt; maybe [] (:[]) (h s) ++ </a:t>
-            </a:r>
-            <a:r>
-              <a:rPr lang="en-US" altLang="ja-JP" dirty="0" err="1"/>
-              <a:t>ss</a:t>
-            </a:r>
-            <a:endParaRPr lang="en-US" altLang="ja-JP" dirty="0"/>
-          </a:p>
-          <a:p>
-            <a:r>
-              <a:rPr lang="en-US" altLang="ja-JP" dirty="0"/>
-              <a:t>  , $(normal [| \(</a:t>
-            </a:r>
-            <a:r>
-              <a:rPr lang="en-US" altLang="ja-JP" dirty="0" err="1"/>
-              <a:t>s:ss</a:t>
-            </a:r>
-            <a:r>
-              <a:rPr lang="en-US" altLang="ja-JP" dirty="0"/>
-              <a:t>) v -&gt; not (p s) |] [| \(</a:t>
-            </a:r>
-            <a:r>
-              <a:rPr lang="en-US" altLang="ja-JP" dirty="0" err="1"/>
-              <a:t>s:ss</a:t>
-            </a:r>
-            <a:r>
-              <a:rPr lang="en-US" altLang="ja-JP" dirty="0"/>
-              <a:t>) -&gt; not (p s) |])</a:t>
-            </a:r>
-          </a:p>
-          <a:p>
-            <a:r>
-              <a:rPr lang="en-US" altLang="ja-JP" dirty="0"/>
-              <a:t>    ==&gt; $(update [p| _:</a:t>
-            </a:r>
-            <a:r>
-              <a:rPr lang="en-US" altLang="ja-JP" dirty="0" err="1"/>
-              <a:t>xs</a:t>
-            </a:r>
-            <a:r>
-              <a:rPr lang="en-US" altLang="ja-JP" dirty="0"/>
-              <a:t> |] [p| </a:t>
-            </a:r>
-            <a:r>
-              <a:rPr lang="en-US" altLang="ja-JP" dirty="0" err="1"/>
-              <a:t>xs</a:t>
-            </a:r>
-            <a:r>
-              <a:rPr lang="en-US" altLang="ja-JP" dirty="0"/>
-              <a:t> |] [d| </a:t>
-            </a:r>
-            <a:r>
-              <a:rPr lang="en-US" altLang="ja-JP" dirty="0" err="1"/>
-              <a:t>xs</a:t>
-            </a:r>
-            <a:r>
-              <a:rPr lang="en-US" altLang="ja-JP" dirty="0"/>
-              <a:t> = </a:t>
-            </a:r>
-            <a:r>
-              <a:rPr lang="en-US" altLang="ja-JP" dirty="0" err="1"/>
-              <a:t>pAlign</a:t>
-            </a:r>
-            <a:r>
-              <a:rPr lang="en-US" altLang="ja-JP" dirty="0"/>
-              <a:t> p </a:t>
-            </a:r>
-            <a:r>
-              <a:rPr lang="en-US" altLang="ja-JP" dirty="0" err="1"/>
-              <a:t>ks</a:t>
-            </a:r>
-            <a:r>
-              <a:rPr lang="en-US" altLang="ja-JP" dirty="0"/>
-              <a:t> </a:t>
-            </a:r>
-            <a:r>
-              <a:rPr lang="en-US" altLang="ja-JP" dirty="0" err="1"/>
-              <a:t>kv</a:t>
-            </a:r>
-            <a:r>
-              <a:rPr lang="en-US" altLang="ja-JP" dirty="0"/>
-              <a:t> b c h |])</a:t>
-            </a:r>
-          </a:p>
-          <a:p>
-            <a:r>
-              <a:rPr lang="en-US" altLang="ja-JP" dirty="0"/>
-              <a:t>  , $(adaptive [| \</a:t>
-            </a:r>
-            <a:r>
-              <a:rPr lang="en-US" altLang="ja-JP" dirty="0" err="1"/>
-              <a:t>ss</a:t>
-            </a:r>
-            <a:r>
-              <a:rPr lang="en-US" altLang="ja-JP" dirty="0"/>
-              <a:t> (</a:t>
-            </a:r>
-            <a:r>
-              <a:rPr lang="en-US" altLang="ja-JP" dirty="0" err="1"/>
-              <a:t>v:vs</a:t>
-            </a:r>
-            <a:r>
-              <a:rPr lang="en-US" altLang="ja-JP" dirty="0"/>
-              <a:t>) -&gt; </a:t>
-            </a:r>
-            <a:r>
-              <a:rPr lang="en-US" altLang="ja-JP" dirty="0" err="1"/>
-              <a:t>kv</a:t>
-            </a:r>
-            <a:r>
-              <a:rPr lang="en-US" altLang="ja-JP" dirty="0"/>
-              <a:t> v `</a:t>
-            </a:r>
-            <a:r>
-              <a:rPr lang="en-US" altLang="ja-JP" dirty="0" err="1"/>
-              <a:t>elem</a:t>
-            </a:r>
-            <a:r>
-              <a:rPr lang="en-US" altLang="ja-JP" dirty="0"/>
-              <a:t>` map </a:t>
-            </a:r>
-            <a:r>
-              <a:rPr lang="en-US" altLang="ja-JP" dirty="0" err="1"/>
-              <a:t>ks</a:t>
-            </a:r>
-            <a:r>
-              <a:rPr lang="en-US" altLang="ja-JP" dirty="0"/>
-              <a:t> (</a:t>
-            </a:r>
-            <a:r>
-              <a:rPr lang="en-US" altLang="ja-JP" dirty="0">
+              <a:t> -</a:t>
+            </a:r>
+            <a:r>
+              <a:rPr lang="en-US" altLang="ja-JP" dirty="0" smtClean="0">
                 <a:solidFill>
-                  <a:srgbClr val="FF0000"/>
-                </a:solidFill>
-              </a:rPr>
-              <a:t>filter p </a:t>
-            </a:r>
-            <a:r>
-              <a:rPr lang="en-US" altLang="ja-JP" dirty="0" err="1">
-                <a:solidFill>
-                  <a:srgbClr val="FF0000"/>
-                </a:solidFill>
-              </a:rPr>
-              <a:t>ss</a:t>
-            </a:r>
-            <a:r>
-              <a:rPr lang="en-US" altLang="ja-JP" dirty="0"/>
-              <a:t>) |])</a:t>
-            </a:r>
-          </a:p>
-          <a:p>
-            <a:r>
-              <a:rPr lang="en-US" altLang="ja-JP" dirty="0"/>
-              <a:t>    ==&gt; \</a:t>
-            </a:r>
-            <a:r>
-              <a:rPr lang="en-US" altLang="ja-JP" dirty="0" err="1"/>
-              <a:t>ss</a:t>
-            </a:r>
-            <a:r>
-              <a:rPr lang="en-US" altLang="ja-JP" dirty="0"/>
-              <a:t> (v:_) -&gt; </a:t>
-            </a:r>
-            <a:r>
-              <a:rPr lang="en-US" altLang="ja-JP" dirty="0" err="1"/>
-              <a:t>uncurry</a:t>
-            </a:r>
-            <a:r>
-              <a:rPr lang="en-US" altLang="ja-JP" dirty="0"/>
-              <a:t> (:) (extract (</a:t>
-            </a:r>
-            <a:r>
-              <a:rPr lang="en-US" altLang="ja-JP" dirty="0" err="1"/>
-              <a:t>kv</a:t>
-            </a:r>
-            <a:r>
-              <a:rPr lang="en-US" altLang="ja-JP" dirty="0"/>
-              <a:t> v) </a:t>
-            </a:r>
-            <a:r>
-              <a:rPr lang="en-US" altLang="ja-JP" dirty="0" err="1"/>
-              <a:t>ss</a:t>
-            </a:r>
-            <a:r>
-              <a:rPr lang="en-US" altLang="ja-JP" dirty="0"/>
-              <a:t>)</a:t>
-            </a:r>
-          </a:p>
-          <a:p>
-            <a:r>
-              <a:rPr lang="en-US" altLang="ja-JP" dirty="0"/>
-              <a:t>  , $(</a:t>
-            </a:r>
-            <a:r>
-              <a:rPr lang="en-US" altLang="ja-JP" dirty="0" err="1"/>
-              <a:t>adaptiveSV</a:t>
-            </a:r>
-            <a:r>
-              <a:rPr lang="en-US" altLang="ja-JP" dirty="0"/>
-              <a:t> [p| _ |] [p| _:_ |])</a:t>
-            </a:r>
-          </a:p>
-          <a:p>
-            <a:r>
-              <a:rPr lang="en-US" altLang="ja-JP" dirty="0"/>
-              <a:t>    ==&gt; \</a:t>
-            </a:r>
-            <a:r>
-              <a:rPr lang="en-US" altLang="ja-JP" dirty="0" err="1"/>
-              <a:t>ss</a:t>
-            </a:r>
-            <a:r>
-              <a:rPr lang="en-US" altLang="ja-JP" dirty="0"/>
-              <a:t> (v:_) -</a:t>
-            </a:r>
-            <a:r>
-              <a:rPr lang="en-US" altLang="ja-JP" dirty="0">
-                <a:solidFill>
-                  <a:srgbClr val="FF0000"/>
+                  <a:srgbClr val="FF6600"/>
                 </a:solidFill>
               </a:rPr>
               <a:t>&gt; </a:t>
             </a:r>
             <a:r>
+              <a:rPr lang="en-US" altLang="ja-JP" dirty="0">
+                <a:solidFill>
+                  <a:srgbClr val="FF6600"/>
+                </a:solidFill>
+              </a:rPr>
+              <a:t>(s -&gt; s) {- dependency maintaining function -}</a:t>
+            </a:r>
+          </a:p>
+          <a:p>
+            <a:r>
+              <a:rPr lang="en-US" altLang="ja-JP" dirty="0"/>
+              <a:t>            -&gt; </a:t>
+            </a:r>
+            <a:r>
+              <a:rPr lang="en-US" altLang="ja-JP" dirty="0" err="1"/>
+              <a:t>BiGUL</a:t>
+            </a:r>
+            <a:r>
+              <a:rPr lang="en-US" altLang="ja-JP" dirty="0"/>
+              <a:t> [s] [v]</a:t>
+            </a:r>
+          </a:p>
+          <a:p>
+            <a:r>
+              <a:rPr lang="en-US" altLang="ja-JP" dirty="0" err="1"/>
+              <a:t>relAlign</a:t>
+            </a:r>
+            <a:r>
+              <a:rPr lang="en-US" altLang="ja-JP" dirty="0"/>
+              <a:t> p </a:t>
+            </a:r>
+            <a:r>
+              <a:rPr lang="en-US" altLang="ja-JP" dirty="0" err="1"/>
+              <a:t>ks</a:t>
+            </a:r>
+            <a:r>
+              <a:rPr lang="en-US" altLang="ja-JP" dirty="0"/>
+              <a:t> </a:t>
+            </a:r>
+            <a:r>
+              <a:rPr lang="en-US" altLang="ja-JP" dirty="0" err="1"/>
+              <a:t>kv</a:t>
+            </a:r>
+            <a:r>
+              <a:rPr lang="en-US" altLang="ja-JP" dirty="0"/>
+              <a:t> b c h </a:t>
+            </a:r>
+            <a:r>
+              <a:rPr lang="en-US" altLang="ja-JP" dirty="0" err="1"/>
+              <a:t>fd</a:t>
+            </a:r>
+            <a:r>
+              <a:rPr lang="en-US" altLang="ja-JP" dirty="0"/>
+              <a:t> = Case</a:t>
+            </a:r>
+          </a:p>
+          <a:p>
+            <a:r>
+              <a:rPr lang="en-US" altLang="ja-JP" dirty="0"/>
+              <a:t>  </a:t>
+            </a:r>
+            <a:r>
+              <a:rPr lang="en-US" altLang="ja-JP" dirty="0" smtClean="0"/>
+              <a:t>[</a:t>
+            </a:r>
+            <a:r>
+              <a:rPr lang="ja-JP" altLang="en-US" dirty="0" smtClean="0"/>
+              <a:t> </a:t>
+            </a:r>
+            <a:r>
+              <a:rPr lang="is-IS" altLang="ja-JP" dirty="0" smtClean="0"/>
+              <a:t>…</a:t>
+            </a:r>
+          </a:p>
+          <a:p>
+            <a:r>
+              <a:rPr lang="ja-JP" altLang="ja-JP" sz="1400" dirty="0"/>
+              <a:t> </a:t>
+            </a:r>
+            <a:r>
+              <a:rPr lang="ja-JP" altLang="en-US" sz="1400" dirty="0" smtClean="0"/>
+              <a:t>   </a:t>
+            </a:r>
+            <a:r>
+              <a:rPr lang="en-US" altLang="ja-JP" sz="1400" dirty="0" smtClean="0"/>
+              <a:t>, </a:t>
+            </a:r>
+            <a:r>
+              <a:rPr lang="en-US" altLang="ja-JP" dirty="0"/>
+              <a:t>$(adaptive [| \(</a:t>
+            </a:r>
+            <a:r>
+              <a:rPr lang="en-US" altLang="ja-JP" dirty="0" err="1"/>
+              <a:t>s:ss</a:t>
+            </a:r>
+            <a:r>
+              <a:rPr lang="en-US" altLang="ja-JP" dirty="0"/>
+              <a:t>) v -&gt; p s &amp;&amp; null v|])</a:t>
+            </a:r>
+          </a:p>
+          <a:p>
+            <a:r>
+              <a:rPr lang="en-US" altLang="ja-JP" dirty="0"/>
+              <a:t>    ==&gt; \(</a:t>
+            </a:r>
+            <a:r>
+              <a:rPr lang="en-US" altLang="ja-JP" dirty="0" err="1"/>
+              <a:t>s:ss</a:t>
+            </a:r>
+            <a:r>
+              <a:rPr lang="en-US" altLang="ja-JP" dirty="0"/>
+              <a:t>) v -&gt; </a:t>
+            </a:r>
+            <a:r>
+              <a:rPr lang="en-US" altLang="ja-JP" dirty="0">
+                <a:solidFill>
+                  <a:srgbClr val="FF6600"/>
+                </a:solidFill>
+              </a:rPr>
+              <a:t>maybe [] ((:[]) . </a:t>
+            </a:r>
+            <a:r>
               <a:rPr lang="en-US" altLang="ja-JP" dirty="0" err="1">
                 <a:solidFill>
-                  <a:srgbClr val="FF0000"/>
+                  <a:srgbClr val="FF6600"/>
                 </a:solidFill>
               </a:rPr>
               <a:t>filterCheck</a:t>
@@ -24172,25 +24423,266 @@
             <a:r>
               <a:rPr lang="en-US" altLang="ja-JP" dirty="0">
                 <a:solidFill>
-                  <a:srgbClr val="FF0000"/>
+                  <a:srgbClr val="FF6600"/>
                 </a:solidFill>
               </a:rPr>
+              <a:t> p . </a:t>
+            </a:r>
+            <a:r>
+              <a:rPr lang="en-US" altLang="ja-JP" dirty="0" err="1">
+                <a:solidFill>
+                  <a:srgbClr val="FF6600"/>
+                </a:solidFill>
+              </a:rPr>
+              <a:t>fd</a:t>
+            </a:r>
+            <a:r>
+              <a:rPr lang="en-US" altLang="ja-JP" dirty="0">
+                <a:solidFill>
+                  <a:srgbClr val="FF6600"/>
+                </a:solidFill>
+              </a:rPr>
+              <a:t>) (h s) </a:t>
+            </a:r>
+            <a:r>
+              <a:rPr lang="en-US" altLang="ja-JP" dirty="0"/>
+              <a:t>++ </a:t>
+            </a:r>
+            <a:r>
+              <a:rPr lang="en-US" altLang="ja-JP" dirty="0" err="1"/>
+              <a:t>ss</a:t>
+            </a:r>
+            <a:endParaRPr lang="en-US" altLang="ja-JP" dirty="0"/>
+          </a:p>
+          <a:p>
+            <a:r>
+              <a:rPr lang="en-US" altLang="ja-JP" dirty="0"/>
+              <a:t>  , $(normal [| \(</a:t>
+            </a:r>
+            <a:r>
+              <a:rPr lang="en-US" altLang="ja-JP" dirty="0" err="1"/>
+              <a:t>s:ss</a:t>
+            </a:r>
+            <a:r>
+              <a:rPr lang="en-US" altLang="ja-JP" dirty="0"/>
+              <a:t>) v -&gt; not (p s) |] [| \(</a:t>
+            </a:r>
+            <a:r>
+              <a:rPr lang="en-US" altLang="ja-JP" dirty="0" err="1"/>
+              <a:t>s:ss</a:t>
+            </a:r>
+            <a:r>
+              <a:rPr lang="en-US" altLang="ja-JP" dirty="0"/>
+              <a:t>) -&gt; not (p s) |])</a:t>
+            </a:r>
+          </a:p>
+          <a:p>
+            <a:r>
+              <a:rPr lang="en-US" altLang="ja-JP" dirty="0"/>
+              <a:t>    ==&gt; Case</a:t>
+            </a:r>
+          </a:p>
+          <a:p>
+            <a:r>
+              <a:rPr lang="en-US" altLang="ja-JP" dirty="0"/>
+              <a:t>     [ $(adaptive [| \(s:_) _ -&gt; </a:t>
+            </a:r>
+            <a:r>
+              <a:rPr lang="en-US" altLang="ja-JP" dirty="0" err="1">
+                <a:solidFill>
+                  <a:srgbClr val="FF6600"/>
+                </a:solidFill>
+              </a:rPr>
+              <a:t>fd</a:t>
+            </a:r>
+            <a:r>
+              <a:rPr lang="en-US" altLang="ja-JP" dirty="0">
+                <a:solidFill>
+                  <a:srgbClr val="FF6600"/>
+                </a:solidFill>
+              </a:rPr>
+              <a:t> s /= s </a:t>
+            </a:r>
+            <a:r>
+              <a:rPr lang="en-US" altLang="ja-JP" dirty="0"/>
+              <a:t>|])</a:t>
+            </a:r>
+          </a:p>
+          <a:p>
+            <a:r>
+              <a:rPr lang="en-US" altLang="ja-JP" dirty="0"/>
+              <a:t>        ==&gt; \(</a:t>
+            </a:r>
+            <a:r>
+              <a:rPr lang="en-US" altLang="ja-JP" dirty="0" err="1"/>
+              <a:t>s:ss</a:t>
+            </a:r>
+            <a:r>
+              <a:rPr lang="en-US" altLang="ja-JP" dirty="0"/>
+              <a:t>) _ -</a:t>
+            </a:r>
+            <a:r>
+              <a:rPr lang="en-US" altLang="ja-JP" dirty="0">
+                <a:solidFill>
+                  <a:srgbClr val="FF6600"/>
+                </a:solidFill>
+              </a:rPr>
+              <a:t>&gt; </a:t>
+            </a:r>
+            <a:r>
+              <a:rPr lang="en-US" altLang="ja-JP" dirty="0" err="1">
+                <a:solidFill>
+                  <a:srgbClr val="FF6600"/>
+                </a:solidFill>
+              </a:rPr>
+              <a:t>filterCheck</a:t>
+            </a:r>
+            <a:r>
+              <a:rPr lang="en-US" altLang="ja-JP" dirty="0">
+                <a:solidFill>
+                  <a:srgbClr val="FF6600"/>
+                </a:solidFill>
+              </a:rPr>
+              <a:t> (</a:t>
+            </a:r>
+            <a:r>
+              <a:rPr lang="en-US" altLang="ja-JP" dirty="0" err="1">
+                <a:solidFill>
+                  <a:srgbClr val="FF6600"/>
+                </a:solidFill>
+              </a:rPr>
+              <a:t>not.p</a:t>
+            </a:r>
+            <a:r>
+              <a:rPr lang="en-US" altLang="ja-JP" dirty="0">
+                <a:solidFill>
+                  <a:srgbClr val="FF6600"/>
+                </a:solidFill>
+              </a:rPr>
+              <a:t>) (</a:t>
+            </a:r>
+            <a:r>
+              <a:rPr lang="en-US" altLang="ja-JP" dirty="0" err="1">
+                <a:solidFill>
+                  <a:srgbClr val="FF6600"/>
+                </a:solidFill>
+              </a:rPr>
+              <a:t>fd</a:t>
+            </a:r>
+            <a:r>
+              <a:rPr lang="en-US" altLang="ja-JP" dirty="0">
+                <a:solidFill>
+                  <a:srgbClr val="FF6600"/>
+                </a:solidFill>
+              </a:rPr>
+              <a:t> s) </a:t>
+            </a:r>
+            <a:r>
+              <a:rPr lang="en-US" altLang="ja-JP" dirty="0"/>
+              <a:t>: </a:t>
+            </a:r>
+            <a:r>
+              <a:rPr lang="en-US" altLang="ja-JP" dirty="0" err="1"/>
+              <a:t>ss</a:t>
+            </a:r>
+            <a:endParaRPr lang="en-US" altLang="ja-JP" dirty="0"/>
+          </a:p>
+          <a:p>
+            <a:r>
+              <a:rPr lang="en-US" altLang="ja-JP" dirty="0"/>
+              <a:t>     , $(normal [|\_ _ -&gt; True |] [| </a:t>
+            </a:r>
+            <a:r>
+              <a:rPr lang="en-US" altLang="ja-JP" dirty="0" err="1"/>
+              <a:t>const</a:t>
+            </a:r>
+            <a:r>
+              <a:rPr lang="en-US" altLang="ja-JP" dirty="0"/>
+              <a:t> True |])</a:t>
+            </a:r>
+          </a:p>
+          <a:p>
+            <a:r>
+              <a:rPr lang="en-US" altLang="ja-JP" dirty="0"/>
+              <a:t>        ==&gt; $(update [p| _:</a:t>
+            </a:r>
+            <a:r>
+              <a:rPr lang="en-US" altLang="ja-JP" dirty="0" err="1"/>
+              <a:t>xs</a:t>
+            </a:r>
+            <a:r>
+              <a:rPr lang="en-US" altLang="ja-JP" dirty="0"/>
+              <a:t> |] [p| </a:t>
+            </a:r>
+            <a:r>
+              <a:rPr lang="en-US" altLang="ja-JP" dirty="0" err="1"/>
+              <a:t>xs</a:t>
+            </a:r>
+            <a:r>
+              <a:rPr lang="en-US" altLang="ja-JP" dirty="0"/>
+              <a:t> |] [d| </a:t>
+            </a:r>
+            <a:r>
+              <a:rPr lang="en-US" altLang="ja-JP" dirty="0" err="1"/>
+              <a:t>xs</a:t>
+            </a:r>
+            <a:r>
+              <a:rPr lang="en-US" altLang="ja-JP" dirty="0"/>
+              <a:t> = </a:t>
+            </a:r>
+            <a:r>
+              <a:rPr lang="en-US" altLang="ja-JP" dirty="0" err="1"/>
+              <a:t>relAlign</a:t>
+            </a:r>
+            <a:r>
+              <a:rPr lang="en-US" altLang="ja-JP" dirty="0"/>
               <a:t> p </a:t>
             </a:r>
             <a:r>
-              <a:rPr lang="en-US" altLang="ja-JP" dirty="0"/>
-              <a:t>(c v) : </a:t>
-            </a:r>
-            <a:r>
-              <a:rPr lang="en-US" altLang="ja-JP" dirty="0" err="1"/>
-              <a:t>ss</a:t>
-            </a:r>
-            <a:endParaRPr lang="en-US" altLang="ja-JP" dirty="0"/>
-          </a:p>
-          <a:p>
-            <a:r>
-              <a:rPr lang="en-US" altLang="ja-JP" dirty="0"/>
-              <a:t>  ]</a:t>
+              <a:rPr lang="en-US" altLang="ja-JP" dirty="0" err="1"/>
+              <a:t>ks</a:t>
+            </a:r>
+            <a:r>
+              <a:rPr lang="en-US" altLang="ja-JP" dirty="0"/>
+              <a:t> </a:t>
+            </a:r>
+            <a:r>
+              <a:rPr lang="en-US" altLang="ja-JP" dirty="0" err="1"/>
+              <a:t>kv</a:t>
+            </a:r>
+            <a:r>
+              <a:rPr lang="en-US" altLang="ja-JP" dirty="0"/>
+              <a:t> b c h </a:t>
+            </a:r>
+            <a:r>
+              <a:rPr lang="en-US" altLang="ja-JP" dirty="0" err="1"/>
+              <a:t>fd</a:t>
+            </a:r>
+            <a:r>
+              <a:rPr lang="en-US" altLang="ja-JP" dirty="0"/>
+              <a:t> |])</a:t>
+            </a:r>
+          </a:p>
+          <a:p>
+            <a:r>
+              <a:rPr lang="en-US" altLang="ja-JP" dirty="0"/>
+              <a:t>     ]</a:t>
+            </a:r>
+          </a:p>
+          <a:p>
+            <a:r>
+              <a:rPr lang="en-US" altLang="ja-JP" dirty="0" smtClean="0"/>
+              <a:t>     </a:t>
+            </a:r>
+            <a:r>
+              <a:rPr lang="is-IS" altLang="ja-JP" dirty="0" smtClean="0"/>
+              <a:t>…</a:t>
+            </a:r>
+          </a:p>
+          <a:p>
+            <a:r>
+              <a:rPr lang="en-US" altLang="ja-JP" dirty="0" smtClean="0"/>
+              <a:t>]</a:t>
             </a:r>
             <a:endParaRPr lang="ja-JP" altLang="en-US" dirty="0"/>
           </a:p>
@@ -24198,101 +24690,69 @@
       </p:sp>
       <p:sp>
         <p:nvSpPr>
-          <p:cNvPr id="6" name="円形吹き出し 5"/>
-          <p:cNvSpPr/>
+          <p:cNvPr id="6" name="テキスト ボックス 5"/>
+          <p:cNvSpPr txBox="1"/>
           <p:nvPr/>
         </p:nvSpPr>
-        <p:spPr bwMode="auto">
+        <p:spPr>
           <a:xfrm>
-            <a:off x="5796136" y="1268760"/>
-            <a:ext cx="3168352" cy="1800200"/>
+            <a:off x="1033463" y="5374957"/>
+            <a:ext cx="6878806" cy="646331"/>
           </a:xfrm>
-          <a:prstGeom prst="wedgeEllipseCallout">
-            <a:avLst>
-              <a:gd name="adj1" fmla="val -119050"/>
-              <a:gd name="adj2" fmla="val 187586"/>
-            </a:avLst>
+          <a:prstGeom prst="rect">
+            <a:avLst/>
           </a:prstGeom>
+          <a:noFill/>
           <a:ln>
             <a:solidFill>
-              <a:schemeClr val="accent1"/>
+              <a:srgbClr val="00CC99"/>
             </a:solidFill>
-            <a:headEnd type="none" w="med" len="med"/>
-            <a:tailEnd type="none" w="med" len="med"/>
           </a:ln>
         </p:spPr>
-        <p:style>
-          <a:lnRef idx="1">
-            <a:schemeClr val="accent3"/>
-          </a:lnRef>
-          <a:fillRef idx="2">
-            <a:schemeClr val="accent3"/>
-          </a:fillRef>
-          <a:effectRef idx="1">
-            <a:schemeClr val="accent3"/>
-          </a:effectRef>
-          <a:fontRef idx="minor">
-            <a:schemeClr val="dk1"/>
-          </a:fontRef>
-        </p:style>
-        <p:txBody>
-          <a:bodyPr vert="horz" wrap="square" lIns="91440" tIns="45720" rIns="91440" bIns="45720" numCol="1" rtlCol="0" anchor="t" anchorCtr="0" compatLnSpc="1">
-            <a:prstTxWarp prst="textNoShape">
-              <a:avLst/>
-            </a:prstTxWarp>
+        <p:txBody>
+          <a:bodyPr wrap="none" rtlCol="0">
+            <a:spAutoFit/>
           </a:bodyPr>
           <a:lstStyle/>
           <a:p>
-            <a:pPr marL="0" marR="0" indent="0" algn="l" defTabSz="914400" rtl="0" eaLnBrk="1" fontAlgn="base" latinLnBrk="0" hangingPunct="1">
-              <a:lnSpc>
-                <a:spcPct val="100000"/>
-              </a:lnSpc>
-              <a:spcBef>
-                <a:spcPct val="0"/>
-              </a:spcBef>
-              <a:spcAft>
-                <a:spcPct val="0"/>
-              </a:spcAft>
-              <a:buClrTx/>
-              <a:buSzTx/>
-              <a:buFontTx/>
-              <a:buNone/>
-              <a:tabLst/>
-            </a:pPr>
-            <a:r>
-              <a:rPr kumimoji="1" lang="en-US" altLang="ja-JP" sz="2000" b="0" i="0" u="none" strike="noStrike" cap="none" normalizeH="0" baseline="0" dirty="0" smtClean="0">
-                <a:ln>
-                  <a:noFill/>
-                </a:ln>
-                <a:solidFill>
-                  <a:schemeClr val="tx1"/>
-                </a:solidFill>
-                <a:effectLst/>
-                <a:latin typeface="Arial" pitchFamily="-111" charset="0"/>
-                <a:ea typeface="ＭＳ Ｐゴシック" pitchFamily="-111" charset="-128"/>
-                <a:cs typeface="ＭＳ Ｐゴシック" pitchFamily="-111" charset="-128"/>
-              </a:rPr>
-              <a:t>Guarantee the new source elements satisfying p.</a:t>
-            </a:r>
-            <a:endParaRPr kumimoji="1" lang="ja-JP" altLang="en-US" sz="2000" b="0" i="0" u="none" strike="noStrike" cap="none" normalizeH="0" baseline="0" dirty="0" smtClean="0">
-              <a:ln>
-                <a:noFill/>
-              </a:ln>
-              <a:solidFill>
-                <a:schemeClr val="tx1"/>
-              </a:solidFill>
-              <a:effectLst/>
-              <a:latin typeface="Arial" pitchFamily="-111" charset="0"/>
-              <a:ea typeface="ＭＳ Ｐゴシック" pitchFamily="-111" charset="-128"/>
-              <a:cs typeface="ＭＳ Ｐゴシック" pitchFamily="-111" charset="-128"/>
-            </a:endParaRPr>
+            <a:r>
+              <a:rPr lang="en-US" altLang="ja-JP" dirty="0" smtClean="0"/>
+              <a:t>Perform </a:t>
+            </a:r>
+            <a:r>
+              <a:rPr lang="en-US" altLang="ja-JP" dirty="0" err="1" smtClean="0"/>
+              <a:t>fd</a:t>
+            </a:r>
+            <a:r>
+              <a:rPr lang="en-US" altLang="ja-JP" dirty="0" smtClean="0"/>
+              <a:t> on</a:t>
+            </a:r>
+            <a:r>
+              <a:rPr kumimoji="1" lang="en-US" altLang="ja-JP" dirty="0" smtClean="0"/>
+              <a:t> those source elements that does not satisfy p or </a:t>
+            </a:r>
+          </a:p>
+          <a:p>
+            <a:r>
+              <a:rPr kumimoji="1" lang="en-US" altLang="ja-JP" dirty="0" smtClean="0"/>
+              <a:t>has no </a:t>
+            </a:r>
+            <a:r>
+              <a:rPr lang="en-US" altLang="ja-JP" dirty="0"/>
+              <a:t>m</a:t>
+            </a:r>
+            <a:r>
+              <a:rPr lang="en-US" altLang="ja-JP" dirty="0" smtClean="0"/>
+              <a:t>atching element in the view.</a:t>
+            </a:r>
+            <a:endParaRPr kumimoji="1" lang="ja-JP" altLang="en-US" dirty="0"/>
           </a:p>
         </p:txBody>
       </p:sp>
     </p:spTree>
     <p:extLst>
       <p:ext uri="{BB962C8B-B14F-4D97-AF65-F5344CB8AC3E}">
-        <p14:creationId xmlns:p14="http://schemas.microsoft.com/office/powerpoint/2010/main" val="2568127772"/>
+        <p14:creationId xmlns:p14="http://schemas.microsoft.com/office/powerpoint/2010/main" val="821532049"/>
       </p:ext>
     </p:extLst>
   </p:cSld>
@@ -24343,35 +24803,11 @@
           <a:p>
             <a:r>
               <a:rPr kumimoji="1" lang="en-US" altLang="ja-JP" dirty="0" smtClean="0"/>
-              <a:t>From</a:t>
-            </a:r>
-            <a:r>
-              <a:rPr kumimoji="1" lang="ja-JP" altLang="en-US" dirty="0" smtClean="0"/>
-              <a:t> </a:t>
+              <a:t>Use of </a:t>
             </a:r>
             <a:r>
               <a:rPr kumimoji="1" lang="en-US" altLang="ja-JP" dirty="0" err="1" smtClean="0"/>
-              <a:t>pAlign</a:t>
-            </a:r>
-            <a:r>
-              <a:rPr kumimoji="1" lang="ja-JP" altLang="en-US" dirty="0" smtClean="0"/>
-              <a:t> </a:t>
-            </a:r>
-            <a:r>
-              <a:rPr kumimoji="1" lang="en-US" altLang="ja-JP" dirty="0" smtClean="0"/>
-              <a:t>to</a:t>
-            </a:r>
-            <a:r>
-              <a:rPr kumimoji="1" lang="ja-JP" altLang="en-US" dirty="0" smtClean="0"/>
-              <a:t> </a:t>
-            </a:r>
-            <a:r>
-              <a:rPr lang="ja-JP" altLang="ja-JP" dirty="0" smtClean="0"/>
-              <a:t>r</a:t>
-            </a:r>
-            <a:r>
-              <a:rPr lang="en-US" altLang="ja-JP" dirty="0" err="1" smtClean="0"/>
-              <a:t>elAlign</a:t>
+              <a:t>relAlign</a:t>
             </a:r>
             <a:endParaRPr kumimoji="1" lang="ja-JP" altLang="en-US" dirty="0"/>
           </a:p>
@@ -24409,12 +24845,17 @@
         </p:nvSpPr>
         <p:spPr>
           <a:xfrm>
-            <a:off x="446541" y="1196752"/>
-            <a:ext cx="8460432" cy="4247317"/>
+            <a:off x="685800" y="2492896"/>
+            <a:ext cx="7848872" cy="3139321"/>
           </a:xfrm>
           <a:prstGeom prst="rect">
             <a:avLst/>
           </a:prstGeom>
+          <a:ln>
+            <a:solidFill>
+              <a:srgbClr val="FF6600"/>
+            </a:solidFill>
+          </a:ln>
         </p:spPr>
         <p:txBody>
           <a:bodyPr wrap="square">
@@ -24423,36 +24864,97 @@
           <a:lstStyle/>
           <a:p>
             <a:r>
+              <a:rPr lang="en-US" altLang="ja-JP" dirty="0"/>
+              <a:t>u0 :: </a:t>
+            </a:r>
+            <a:r>
+              <a:rPr lang="en-US" altLang="ja-JP" dirty="0" err="1"/>
+              <a:t>RType</a:t>
+            </a:r>
+            <a:r>
+              <a:rPr lang="en-US" altLang="ja-JP" dirty="0"/>
+              <a:t> -&gt; (Record -&gt; Record) -&gt; </a:t>
+            </a:r>
+            <a:r>
+              <a:rPr lang="en-US" altLang="ja-JP" dirty="0" err="1"/>
+              <a:t>BiGUL</a:t>
+            </a:r>
+            <a:r>
+              <a:rPr lang="en-US" altLang="ja-JP" dirty="0"/>
+              <a:t> [Record] [Record]</a:t>
+            </a:r>
+          </a:p>
+          <a:p>
+            <a:r>
+              <a:rPr lang="en-US" altLang="ja-JP" dirty="0"/>
+              <a:t>u0 d =</a:t>
+            </a:r>
+          </a:p>
+          <a:p>
+            <a:r>
+              <a:rPr lang="en-US" altLang="ja-JP" dirty="0"/>
+              <a:t>  </a:t>
+            </a:r>
+            <a:r>
               <a:rPr lang="en-US" altLang="ja-JP" dirty="0" err="1"/>
               <a:t>relAlign</a:t>
             </a:r>
-            <a:r>
-              <a:rPr lang="en-US" altLang="ja-JP" dirty="0"/>
-              <a:t> :</a:t>
-            </a:r>
-            <a:r>
-              <a:rPr lang="en-US" altLang="ja-JP" sz="1400" dirty="0"/>
-              <a:t>: </a:t>
-            </a:r>
-            <a:r>
-              <a:rPr lang="en-US" altLang="ja-JP" sz="1400" dirty="0" smtClean="0"/>
-              <a:t> </a:t>
-            </a:r>
-            <a:r>
-              <a:rPr lang="is-IS" altLang="ja-JP" sz="1400" dirty="0" smtClean="0"/>
-              <a:t>…</a:t>
-            </a:r>
-            <a:r>
-              <a:rPr lang="en-US" altLang="ja-JP" dirty="0" smtClean="0"/>
-              <a:t> -</a:t>
-            </a:r>
-            <a:r>
-              <a:rPr lang="en-US" altLang="ja-JP" dirty="0" smtClean="0">
-                <a:solidFill>
-                  <a:srgbClr val="FF6600"/>
-                </a:solidFill>
-              </a:rPr>
-              <a:t>&gt; </a:t>
+            <a:endParaRPr lang="en-US" altLang="ja-JP" dirty="0"/>
+          </a:p>
+          <a:p>
+            <a:r>
+              <a:rPr lang="en-US" altLang="ja-JP" dirty="0"/>
+              <a:t>    (\r -&gt; (r !! 4) &gt; </a:t>
+            </a:r>
+            <a:r>
+              <a:rPr lang="en-US" altLang="ja-JP" dirty="0" err="1"/>
+              <a:t>RInt</a:t>
+            </a:r>
+            <a:r>
+              <a:rPr lang="en-US" altLang="ja-JP" dirty="0"/>
+              <a:t> 2)</a:t>
+            </a:r>
+          </a:p>
+          <a:p>
+            <a:r>
+              <a:rPr lang="en-US" altLang="ja-JP" dirty="0"/>
+              <a:t>    (\s -&gt; (s !! 0, s!!3))</a:t>
+            </a:r>
+          </a:p>
+          <a:p>
+            <a:r>
+              <a:rPr lang="en-US" altLang="ja-JP" dirty="0"/>
+              <a:t>    (\v -&gt; (v !! 0, v !! 2))</a:t>
+            </a:r>
+          </a:p>
+          <a:p>
+            <a:r>
+              <a:rPr lang="en-US" altLang="ja-JP" dirty="0"/>
+              <a:t>    $(update [p| (t: _: r: a: q: [])|]</a:t>
+            </a:r>
+          </a:p>
+          <a:p>
+            <a:r>
+              <a:rPr lang="en-US" altLang="ja-JP" dirty="0"/>
+              <a:t>             [p| (t: r: a: q: []) |]</a:t>
+            </a:r>
+          </a:p>
+          <a:p>
+            <a:r>
+              <a:rPr lang="en-US" altLang="ja-JP" dirty="0"/>
+              <a:t>             [d| t = Replace; r = Replace; a = Replace; q = Replace |])</a:t>
+            </a:r>
+          </a:p>
+          <a:p>
+            <a:r>
+              <a:rPr lang="en-US" altLang="ja-JP" dirty="0"/>
+              <a:t>    (\(t: r: a: q: []) -&gt; (t: d: r: a: q: []))</a:t>
+            </a:r>
+          </a:p>
+          <a:p>
+            <a:r>
+              <a:rPr lang="en-US" altLang="ja-JP" dirty="0"/>
+              <a:t>   </a:t>
             </a:r>
             <a:r>
               <a:rPr lang="en-US" altLang="ja-JP" dirty="0">
@@ -24460,113 +24962,15 @@
                   <a:srgbClr val="FF6600"/>
                 </a:solidFill>
               </a:rPr>
-              <a:t>(s -&gt; s) {- dependency maintaining function -}</a:t>
-            </a:r>
-          </a:p>
-          <a:p>
-            <a:r>
-              <a:rPr lang="en-US" altLang="ja-JP" dirty="0"/>
-              <a:t>            -&gt; </a:t>
-            </a:r>
-            <a:r>
-              <a:rPr lang="en-US" altLang="ja-JP" dirty="0" err="1"/>
-              <a:t>BiGUL</a:t>
-            </a:r>
-            <a:r>
-              <a:rPr lang="en-US" altLang="ja-JP" dirty="0"/>
-              <a:t> [s] [v]</a:t>
-            </a:r>
-          </a:p>
-          <a:p>
-            <a:r>
-              <a:rPr lang="en-US" altLang="ja-JP" dirty="0" err="1"/>
-              <a:t>relAlign</a:t>
-            </a:r>
-            <a:r>
-              <a:rPr lang="en-US" altLang="ja-JP" dirty="0"/>
-              <a:t> p </a:t>
-            </a:r>
-            <a:r>
-              <a:rPr lang="en-US" altLang="ja-JP" dirty="0" err="1"/>
-              <a:t>ks</a:t>
-            </a:r>
-            <a:r>
-              <a:rPr lang="en-US" altLang="ja-JP" dirty="0"/>
-              <a:t> </a:t>
-            </a:r>
-            <a:r>
-              <a:rPr lang="en-US" altLang="ja-JP" dirty="0" err="1"/>
-              <a:t>kv</a:t>
-            </a:r>
-            <a:r>
-              <a:rPr lang="en-US" altLang="ja-JP" dirty="0"/>
-              <a:t> b c h </a:t>
-            </a:r>
-            <a:r>
-              <a:rPr lang="en-US" altLang="ja-JP" dirty="0" err="1"/>
-              <a:t>fd</a:t>
-            </a:r>
-            <a:r>
-              <a:rPr lang="en-US" altLang="ja-JP" dirty="0"/>
-              <a:t> = Case</a:t>
-            </a:r>
-          </a:p>
-          <a:p>
-            <a:r>
-              <a:rPr lang="en-US" altLang="ja-JP" dirty="0"/>
-              <a:t>  </a:t>
-            </a:r>
-            <a:r>
-              <a:rPr lang="en-US" altLang="ja-JP" dirty="0" smtClean="0"/>
-              <a:t>[</a:t>
-            </a:r>
-            <a:r>
-              <a:rPr lang="ja-JP" altLang="en-US" dirty="0" smtClean="0"/>
-              <a:t> </a:t>
-            </a:r>
-            <a:r>
-              <a:rPr lang="is-IS" altLang="ja-JP" dirty="0" smtClean="0"/>
-              <a:t>…</a:t>
-            </a:r>
-          </a:p>
-          <a:p>
-            <a:r>
-              <a:rPr lang="ja-JP" altLang="ja-JP" sz="1400" dirty="0"/>
-              <a:t> </a:t>
-            </a:r>
-            <a:r>
-              <a:rPr lang="ja-JP" altLang="en-US" sz="1400" dirty="0" smtClean="0"/>
-              <a:t>   </a:t>
-            </a:r>
-            <a:r>
-              <a:rPr lang="en-US" altLang="ja-JP" sz="1400" dirty="0" smtClean="0"/>
-              <a:t>, </a:t>
-            </a:r>
-            <a:r>
-              <a:rPr lang="en-US" altLang="ja-JP" dirty="0"/>
-              <a:t>$(adaptive [| \(</a:t>
-            </a:r>
-            <a:r>
-              <a:rPr lang="en-US" altLang="ja-JP" dirty="0" err="1"/>
-              <a:t>s:ss</a:t>
-            </a:r>
-            <a:r>
-              <a:rPr lang="en-US" altLang="ja-JP" dirty="0"/>
-              <a:t>) v -&gt; p s &amp;&amp; null v|])</a:t>
-            </a:r>
-          </a:p>
-          <a:p>
-            <a:r>
-              <a:rPr lang="en-US" altLang="ja-JP" dirty="0"/>
-              <a:t>    ==&gt; \(</a:t>
-            </a:r>
-            <a:r>
-              <a:rPr lang="en-US" altLang="ja-JP" dirty="0" err="1"/>
-              <a:t>s:ss</a:t>
-            </a:r>
-            <a:r>
-              <a:rPr lang="en-US" altLang="ja-JP" dirty="0"/>
-              <a:t>) v -&gt; </a:t>
+              <a:t> (\</a:t>
+            </a:r>
+            <a:r>
+              <a:rPr lang="en-US" altLang="ja-JP" dirty="0" err="1">
+                <a:solidFill>
+                  <a:srgbClr val="FF6600"/>
+                </a:solidFill>
+              </a:rPr>
+              <a:t>rs</a:t>
             </a:r>
             <a:r>
               <a:rPr lang="en-US" altLang="ja-JP" dirty="0">
@@ -24574,281 +24978,13 @@
                   <a:srgbClr val="FF6600"/>
                 </a:solidFill>
               </a:rPr>
-              <a:t>maybe [] ((:[]) . </a:t>
-            </a:r>
-            <a:r>
-              <a:rPr lang="en-US" altLang="ja-JP" dirty="0" err="1">
-                <a:solidFill>
-                  <a:srgbClr val="FF6600"/>
-                </a:solidFill>
-              </a:rPr>
-              <a:t>filterCheck</a:t>
-            </a:r>
-            <a:r>
-              <a:rPr lang="en-US" altLang="ja-JP" dirty="0">
-                <a:solidFill>
-                  <a:srgbClr val="FF6600"/>
-                </a:solidFill>
-              </a:rPr>
-              <a:t> p . </a:t>
-            </a:r>
-            <a:r>
-              <a:rPr lang="en-US" altLang="ja-JP" dirty="0" err="1">
-                <a:solidFill>
-                  <a:srgbClr val="FF6600"/>
-                </a:solidFill>
-              </a:rPr>
-              <a:t>fd</a:t>
-            </a:r>
-            <a:r>
-              <a:rPr lang="en-US" altLang="ja-JP" dirty="0">
-                <a:solidFill>
-                  <a:srgbClr val="FF6600"/>
-                </a:solidFill>
-              </a:rPr>
-              <a:t>) (h s) </a:t>
-            </a:r>
-            <a:r>
-              <a:rPr lang="en-US" altLang="ja-JP" dirty="0"/>
-              <a:t>++ </a:t>
-            </a:r>
-            <a:r>
-              <a:rPr lang="en-US" altLang="ja-JP" dirty="0" err="1"/>
-              <a:t>ss</a:t>
-            </a:r>
-            <a:endParaRPr lang="en-US" altLang="ja-JP" dirty="0"/>
-          </a:p>
-          <a:p>
-            <a:r>
-              <a:rPr lang="en-US" altLang="ja-JP" dirty="0"/>
-              <a:t>  , $(normal [| \(</a:t>
-            </a:r>
-            <a:r>
-              <a:rPr lang="en-US" altLang="ja-JP" dirty="0" err="1"/>
-              <a:t>s:ss</a:t>
-            </a:r>
-            <a:r>
-              <a:rPr lang="en-US" altLang="ja-JP" dirty="0"/>
-              <a:t>) v -&gt; not (p s) |] [| \(</a:t>
-            </a:r>
-            <a:r>
-              <a:rPr lang="en-US" altLang="ja-JP" dirty="0" err="1"/>
-              <a:t>s:ss</a:t>
-            </a:r>
-            <a:r>
-              <a:rPr lang="en-US" altLang="ja-JP" dirty="0"/>
-              <a:t>) -&gt; not (p s) |])</a:t>
-            </a:r>
-          </a:p>
-          <a:p>
-            <a:r>
-              <a:rPr lang="en-US" altLang="ja-JP" dirty="0"/>
-              <a:t>    ==&gt; Case</a:t>
-            </a:r>
-          </a:p>
-          <a:p>
-            <a:r>
-              <a:rPr lang="en-US" altLang="ja-JP" dirty="0"/>
-              <a:t>     [ $(adaptive [| \(s:_) _ -&gt; </a:t>
-            </a:r>
-            <a:r>
-              <a:rPr lang="en-US" altLang="ja-JP" dirty="0" err="1">
-                <a:solidFill>
-                  <a:srgbClr val="FF6600"/>
-                </a:solidFill>
-              </a:rPr>
-              <a:t>fd</a:t>
-            </a:r>
-            <a:r>
-              <a:rPr lang="en-US" altLang="ja-JP" dirty="0">
-                <a:solidFill>
-                  <a:srgbClr val="FF6600"/>
-                </a:solidFill>
-              </a:rPr>
-              <a:t> s /= s </a:t>
-            </a:r>
-            <a:r>
-              <a:rPr lang="en-US" altLang="ja-JP" dirty="0"/>
-              <a:t>|])</a:t>
-            </a:r>
-          </a:p>
-          <a:p>
-            <a:r>
-              <a:rPr lang="en-US" altLang="ja-JP" dirty="0"/>
-              <a:t>        ==&gt; \(</a:t>
-            </a:r>
-            <a:r>
-              <a:rPr lang="en-US" altLang="ja-JP" dirty="0" err="1"/>
-              <a:t>s:ss</a:t>
-            </a:r>
-            <a:r>
-              <a:rPr lang="en-US" altLang="ja-JP" dirty="0"/>
-              <a:t>) _ -</a:t>
-            </a:r>
-            <a:r>
-              <a:rPr lang="en-US" altLang="ja-JP" dirty="0">
-                <a:solidFill>
-                  <a:srgbClr val="FF6600"/>
-                </a:solidFill>
-              </a:rPr>
-              <a:t>&gt; </a:t>
-            </a:r>
-            <a:r>
-              <a:rPr lang="en-US" altLang="ja-JP" dirty="0" err="1">
-                <a:solidFill>
-                  <a:srgbClr val="FF6600"/>
-                </a:solidFill>
-              </a:rPr>
-              <a:t>filterCheck</a:t>
-            </a:r>
-            <a:r>
-              <a:rPr lang="en-US" altLang="ja-JP" dirty="0">
-                <a:solidFill>
-                  <a:srgbClr val="FF6600"/>
-                </a:solidFill>
-              </a:rPr>
-              <a:t> (</a:t>
-            </a:r>
-            <a:r>
-              <a:rPr lang="en-US" altLang="ja-JP" dirty="0" err="1">
-                <a:solidFill>
-                  <a:srgbClr val="FF6600"/>
-                </a:solidFill>
-              </a:rPr>
-              <a:t>not.p</a:t>
-            </a:r>
-            <a:r>
-              <a:rPr lang="en-US" altLang="ja-JP" dirty="0">
-                <a:solidFill>
-                  <a:srgbClr val="FF6600"/>
-                </a:solidFill>
-              </a:rPr>
-              <a:t>) (</a:t>
-            </a:r>
-            <a:r>
-              <a:rPr lang="en-US" altLang="ja-JP" dirty="0" err="1">
-                <a:solidFill>
-                  <a:srgbClr val="FF6600"/>
-                </a:solidFill>
-              </a:rPr>
-              <a:t>fd</a:t>
-            </a:r>
-            <a:r>
-              <a:rPr lang="en-US" altLang="ja-JP" dirty="0">
-                <a:solidFill>
-                  <a:srgbClr val="FF6600"/>
-                </a:solidFill>
-              </a:rPr>
-              <a:t> s) </a:t>
-            </a:r>
-            <a:r>
-              <a:rPr lang="en-US" altLang="ja-JP" dirty="0"/>
-              <a:t>: </a:t>
-            </a:r>
-            <a:r>
-              <a:rPr lang="en-US" altLang="ja-JP" dirty="0" err="1"/>
-              <a:t>ss</a:t>
-            </a:r>
-            <a:endParaRPr lang="en-US" altLang="ja-JP" dirty="0"/>
-          </a:p>
-          <a:p>
-            <a:r>
-              <a:rPr lang="en-US" altLang="ja-JP" dirty="0"/>
-              <a:t>     , $(normal [|\_ _ -&gt; True |] [| </a:t>
-            </a:r>
-            <a:r>
-              <a:rPr lang="en-US" altLang="ja-JP" dirty="0" err="1"/>
-              <a:t>const</a:t>
-            </a:r>
-            <a:r>
-              <a:rPr lang="en-US" altLang="ja-JP" dirty="0"/>
-              <a:t> True |])</a:t>
-            </a:r>
-          </a:p>
-          <a:p>
-            <a:r>
-              <a:rPr lang="en-US" altLang="ja-JP" dirty="0"/>
-              <a:t>        ==&gt; $(update [p| _:</a:t>
-            </a:r>
-            <a:r>
-              <a:rPr lang="en-US" altLang="ja-JP" dirty="0" err="1"/>
-              <a:t>xs</a:t>
-            </a:r>
-            <a:r>
-              <a:rPr lang="en-US" altLang="ja-JP" dirty="0"/>
-              <a:t> |] [p| </a:t>
-            </a:r>
-            <a:r>
-              <a:rPr lang="en-US" altLang="ja-JP" dirty="0" err="1"/>
-              <a:t>xs</a:t>
-            </a:r>
-            <a:r>
-              <a:rPr lang="en-US" altLang="ja-JP" dirty="0"/>
-              <a:t> |] [d| </a:t>
-            </a:r>
-            <a:r>
-              <a:rPr lang="en-US" altLang="ja-JP" dirty="0" err="1"/>
-              <a:t>xs</a:t>
-            </a:r>
-            <a:r>
-              <a:rPr lang="en-US" altLang="ja-JP" dirty="0"/>
-              <a:t> = </a:t>
-            </a:r>
-            <a:r>
-              <a:rPr lang="en-US" altLang="ja-JP" dirty="0" err="1"/>
-              <a:t>relAlign</a:t>
-            </a:r>
-            <a:r>
-              <a:rPr lang="en-US" altLang="ja-JP" dirty="0"/>
-              <a:t> p </a:t>
-            </a:r>
-            <a:r>
-              <a:rPr lang="en-US" altLang="ja-JP" dirty="0" err="1"/>
-              <a:t>ks</a:t>
-            </a:r>
-            <a:r>
-              <a:rPr lang="en-US" altLang="ja-JP" dirty="0"/>
-              <a:t> </a:t>
-            </a:r>
-            <a:r>
-              <a:rPr lang="en-US" altLang="ja-JP" dirty="0" err="1"/>
-              <a:t>kv</a:t>
-            </a:r>
-            <a:r>
-              <a:rPr lang="en-US" altLang="ja-JP" dirty="0"/>
-              <a:t> b c h </a:t>
-            </a:r>
-            <a:r>
-              <a:rPr lang="en-US" altLang="ja-JP" dirty="0" err="1"/>
-              <a:t>fd</a:t>
-            </a:r>
-            <a:r>
-              <a:rPr lang="en-US" altLang="ja-JP" dirty="0"/>
-              <a:t> |])</a:t>
-            </a:r>
-          </a:p>
-          <a:p>
-            <a:r>
-              <a:rPr lang="en-US" altLang="ja-JP" dirty="0"/>
-              <a:t>     ]</a:t>
-            </a:r>
-          </a:p>
-          <a:p>
-            <a:r>
-              <a:rPr lang="en-US" altLang="ja-JP" dirty="0" smtClean="0"/>
-              <a:t>     </a:t>
-            </a:r>
-            <a:r>
-              <a:rPr lang="is-IS" altLang="ja-JP" dirty="0" smtClean="0"/>
-              <a:t>…</a:t>
-            </a:r>
-          </a:p>
-          <a:p>
-            <a:r>
-              <a:rPr lang="en-US" altLang="ja-JP" dirty="0" smtClean="0"/>
-              <a:t>]</a:t>
-            </a:r>
-            <a:endParaRPr lang="ja-JP" altLang="en-US" dirty="0"/>
+              <a:t> -&gt; Nothing)</a:t>
+            </a:r>
+            <a:endParaRPr lang="ja-JP" altLang="en-US" dirty="0">
+              <a:solidFill>
+                <a:srgbClr val="FF6600"/>
+              </a:solidFill>
+            </a:endParaRPr>
           </a:p>
         </p:txBody>
       </p:sp>
@@ -24860,18 +24996,13 @@
         </p:nvSpPr>
         <p:spPr>
           <a:xfrm>
-            <a:off x="1033463" y="5374957"/>
-            <a:ext cx="6878806" cy="646331"/>
+            <a:off x="685800" y="1556792"/>
+            <a:ext cx="6933512" cy="646331"/>
           </a:xfrm>
           <a:prstGeom prst="rect">
             <a:avLst/>
           </a:prstGeom>
           <a:noFill/>
-          <a:ln>
-            <a:solidFill>
-              <a:srgbClr val="00CC99"/>
-            </a:solidFill>
-          </a:ln>
         </p:spPr>
         <p:txBody>
           <a:bodyPr wrap="none" rtlCol="0">
@@ -24880,43 +25011,27 @@
           <a:lstStyle/>
           <a:p>
             <a:r>
-              <a:rPr lang="en-US" altLang="ja-JP" dirty="0" smtClean="0"/>
-              <a:t>Perform </a:t>
-            </a:r>
-            <a:r>
-              <a:rPr lang="en-US" altLang="ja-JP" dirty="0" err="1" smtClean="0"/>
-              <a:t>fd</a:t>
-            </a:r>
-            <a:r>
-              <a:rPr lang="en-US" altLang="ja-JP" dirty="0" smtClean="0"/>
-              <a:t> on</a:t>
-            </a:r>
-            <a:r>
               <a:rPr kumimoji="1" lang="en-US" altLang="ja-JP" dirty="0" smtClean="0"/>
-              <a:t> those source elements that does not satisfy p or </a:t>
-            </a:r>
-          </a:p>
-          <a:p>
-            <a:r>
-              <a:rPr kumimoji="1" lang="en-US" altLang="ja-JP" dirty="0" smtClean="0"/>
-              <a:t>has no </a:t>
-            </a:r>
-            <a:r>
-              <a:rPr lang="en-US" altLang="ja-JP" dirty="0"/>
-              <a:t>m</a:t>
-            </a:r>
-            <a:r>
-              <a:rPr lang="en-US" altLang="ja-JP" dirty="0" smtClean="0"/>
-              <a:t>atching element in the view.</a:t>
-            </a:r>
-            <a:endParaRPr kumimoji="1" lang="ja-JP" altLang="en-US" dirty="0"/>
+              <a:t>Define an update policy: if an element is removed from the view,</a:t>
+            </a:r>
+            <a:r>
+              <a:rPr lang="en-US" altLang="en-US" dirty="0" smtClean="0"/>
+              <a:t> </a:t>
+            </a:r>
+          </a:p>
+          <a:p>
+            <a:r>
+              <a:rPr lang="en-US" altLang="en-US" dirty="0" smtClean="0"/>
+              <a:t>the corresponding source elements should be removed. </a:t>
+            </a:r>
+            <a:endParaRPr kumimoji="1" lang="en-US" altLang="ja-JP" dirty="0" smtClean="0"/>
           </a:p>
         </p:txBody>
       </p:sp>
     </p:spTree>
     <p:extLst>
       <p:ext uri="{BB962C8B-B14F-4D97-AF65-F5344CB8AC3E}">
-        <p14:creationId xmlns:p14="http://schemas.microsoft.com/office/powerpoint/2010/main" val="821532049"/>
+        <p14:creationId xmlns:p14="http://schemas.microsoft.com/office/powerpoint/2010/main" val="3935496562"/>
       </p:ext>
     </p:extLst>
   </p:cSld>
@@ -24965,15 +25080,7 @@
           <a:bodyPr/>
           <a:lstStyle/>
           <a:p>
-            <a:r>
-              <a:rPr kumimoji="1" lang="en-US" altLang="ja-JP" dirty="0" smtClean="0"/>
-              <a:t>Use of </a:t>
-            </a:r>
-            <a:r>
-              <a:rPr kumimoji="1" lang="en-US" altLang="ja-JP" dirty="0" err="1" smtClean="0"/>
-              <a:t>relAlign</a:t>
-            </a:r>
-            <a:endParaRPr kumimoji="1" lang="ja-JP" altLang="en-US" dirty="0"/>
+            <a:endParaRPr kumimoji="1" lang="ja-JP" altLang="en-US"/>
           </a:p>
         </p:txBody>
       </p:sp>
@@ -25009,8 +25116,276 @@
         </p:nvSpPr>
         <p:spPr>
           <a:xfrm>
-            <a:off x="685800" y="2492896"/>
-            <a:ext cx="7848872" cy="3139321"/>
+            <a:off x="685800" y="2131115"/>
+            <a:ext cx="7498977" cy="1477328"/>
+          </a:xfrm>
+          <a:prstGeom prst="rect">
+            <a:avLst/>
+          </a:prstGeom>
+          <a:ln>
+            <a:solidFill>
+              <a:schemeClr val="accent1"/>
+            </a:solidFill>
+          </a:ln>
+        </p:spPr>
+        <p:txBody>
+          <a:bodyPr wrap="square">
+            <a:spAutoFit/>
+          </a:bodyPr>
+          <a:lstStyle/>
+          <a:p>
+            <a:r>
+              <a:rPr lang="en-US" altLang="ja-JP" dirty="0"/>
+              <a:t>*</a:t>
+            </a:r>
+            <a:r>
+              <a:rPr lang="en-US" altLang="ja-JP" dirty="0" err="1"/>
+              <a:t>Brul</a:t>
+            </a:r>
+            <a:r>
+              <a:rPr lang="en-US" altLang="ja-JP" dirty="0"/>
+              <a:t>&gt; get (u0 (</a:t>
+            </a:r>
+            <a:r>
+              <a:rPr lang="en-US" altLang="ja-JP" dirty="0" err="1"/>
+              <a:t>RInt</a:t>
+            </a:r>
+            <a:r>
+              <a:rPr lang="en-US" altLang="ja-JP" dirty="0"/>
+              <a:t> (-1)) id) s</a:t>
+            </a:r>
+          </a:p>
+          <a:p>
+            <a:r>
+              <a:rPr lang="en-US" altLang="ja-JP" dirty="0"/>
+              <a:t>Just</a:t>
+            </a:r>
+          </a:p>
+          <a:p>
+            <a:r>
+              <a:rPr lang="en-US" altLang="ja-JP" dirty="0"/>
+              <a:t>[[</a:t>
+            </a:r>
+            <a:r>
+              <a:rPr lang="en-US" altLang="ja-JP" dirty="0" err="1"/>
+              <a:t>RString</a:t>
+            </a:r>
+            <a:r>
+              <a:rPr lang="en-US" altLang="ja-JP" dirty="0"/>
+              <a:t> "Lullaby",</a:t>
+            </a:r>
+            <a:r>
+              <a:rPr lang="en-US" altLang="ja-JP" dirty="0" err="1"/>
+              <a:t>RInt</a:t>
+            </a:r>
+            <a:r>
+              <a:rPr lang="en-US" altLang="ja-JP" dirty="0"/>
+              <a:t> 3,RString "Show",</a:t>
+            </a:r>
+            <a:r>
+              <a:rPr lang="en-US" altLang="ja-JP" dirty="0" err="1"/>
+              <a:t>RInt</a:t>
+            </a:r>
+            <a:r>
+              <a:rPr lang="en-US" altLang="ja-JP" dirty="0"/>
+              <a:t> 3],</a:t>
+            </a:r>
+          </a:p>
+          <a:p>
+            <a:r>
+              <a:rPr lang="en-US" altLang="ja-JP" dirty="0"/>
+              <a:t>[</a:t>
+            </a:r>
+            <a:r>
+              <a:rPr lang="en-US" altLang="ja-JP" dirty="0" err="1"/>
+              <a:t>RString</a:t>
+            </a:r>
+            <a:r>
+              <a:rPr lang="en-US" altLang="ja-JP" dirty="0"/>
+              <a:t> "</a:t>
+            </a:r>
+            <a:r>
+              <a:rPr lang="en-US" altLang="ja-JP" dirty="0" err="1"/>
+              <a:t>Lovesong</a:t>
+            </a:r>
+            <a:r>
+              <a:rPr lang="en-US" altLang="ja-JP" dirty="0"/>
+              <a:t>",</a:t>
+            </a:r>
+            <a:r>
+              <a:rPr lang="en-US" altLang="ja-JP" dirty="0" err="1"/>
+              <a:t>RInt</a:t>
+            </a:r>
+            <a:r>
+              <a:rPr lang="en-US" altLang="ja-JP" dirty="0"/>
+              <a:t> 5,RString "Disintegration",</a:t>
+            </a:r>
+            <a:r>
+              <a:rPr lang="en-US" altLang="ja-JP" dirty="0" err="1"/>
+              <a:t>RInt</a:t>
+            </a:r>
+            <a:r>
+              <a:rPr lang="en-US" altLang="ja-JP" dirty="0"/>
+              <a:t> 4],</a:t>
+            </a:r>
+          </a:p>
+          <a:p>
+            <a:r>
+              <a:rPr lang="en-US" altLang="ja-JP" dirty="0"/>
+              <a:t>[</a:t>
+            </a:r>
+            <a:r>
+              <a:rPr lang="en-US" altLang="ja-JP" dirty="0" err="1">
+                <a:solidFill>
+                  <a:srgbClr val="FF6600"/>
+                </a:solidFill>
+              </a:rPr>
+              <a:t>RString</a:t>
+            </a:r>
+            <a:r>
+              <a:rPr lang="en-US" altLang="ja-JP" dirty="0">
+                <a:solidFill>
+                  <a:srgbClr val="FF6600"/>
+                </a:solidFill>
+              </a:rPr>
+              <a:t> "Trust",</a:t>
+            </a:r>
+            <a:r>
+              <a:rPr lang="en-US" altLang="ja-JP" dirty="0" err="1">
+                <a:solidFill>
+                  <a:srgbClr val="FF6600"/>
+                </a:solidFill>
+              </a:rPr>
+              <a:t>RInt</a:t>
+            </a:r>
+            <a:r>
+              <a:rPr lang="en-US" altLang="ja-JP" dirty="0">
+                <a:solidFill>
+                  <a:srgbClr val="FF6600"/>
+                </a:solidFill>
+              </a:rPr>
+              <a:t> 4,RString "Wish",</a:t>
+            </a:r>
+            <a:r>
+              <a:rPr lang="en-US" altLang="ja-JP" dirty="0" err="1">
+                <a:solidFill>
+                  <a:srgbClr val="FF6600"/>
+                </a:solidFill>
+              </a:rPr>
+              <a:t>RInt</a:t>
+            </a:r>
+            <a:r>
+              <a:rPr lang="en-US" altLang="ja-JP" dirty="0">
+                <a:solidFill>
+                  <a:srgbClr val="FF6600"/>
+                </a:solidFill>
+              </a:rPr>
+              <a:t> 5]]</a:t>
+            </a:r>
+            <a:endParaRPr lang="ja-JP" altLang="en-US" dirty="0">
+              <a:solidFill>
+                <a:srgbClr val="FF6600"/>
+              </a:solidFill>
+            </a:endParaRPr>
+          </a:p>
+        </p:txBody>
+      </p:sp>
+      <p:sp>
+        <p:nvSpPr>
+          <p:cNvPr id="6" name="テキスト ボックス 5"/>
+          <p:cNvSpPr txBox="1"/>
+          <p:nvPr/>
+        </p:nvSpPr>
+        <p:spPr>
+          <a:xfrm>
+            <a:off x="685800" y="1484784"/>
+            <a:ext cx="3946790" cy="646331"/>
+          </a:xfrm>
+          <a:prstGeom prst="rect">
+            <a:avLst/>
+          </a:prstGeom>
+          <a:noFill/>
+        </p:spPr>
+        <p:txBody>
+          <a:bodyPr wrap="none" rtlCol="0">
+            <a:spAutoFit/>
+          </a:bodyPr>
+          <a:lstStyle/>
+          <a:p>
+            <a:r>
+              <a:rPr lang="en-US" altLang="ja-JP" dirty="0" smtClean="0"/>
+              <a:t>Testing</a:t>
+            </a:r>
+            <a:r>
+              <a:rPr lang="ja-JP" altLang="en-US" dirty="0" smtClean="0"/>
+              <a:t> </a:t>
+            </a:r>
+            <a:r>
+              <a:rPr lang="en-US" altLang="ja-JP" dirty="0" smtClean="0"/>
+              <a:t>the</a:t>
+            </a:r>
+            <a:r>
+              <a:rPr lang="ja-JP" altLang="en-US" dirty="0" smtClean="0"/>
+              <a:t> </a:t>
+            </a:r>
+            <a:r>
+              <a:rPr lang="en-US" altLang="ja-JP" dirty="0" smtClean="0"/>
+              <a:t>forward</a:t>
+            </a:r>
+            <a:r>
+              <a:rPr lang="ja-JP" altLang="en-US" dirty="0" smtClean="0"/>
+              <a:t> </a:t>
+            </a:r>
+            <a:r>
+              <a:rPr lang="en-US" altLang="ja-JP" dirty="0" smtClean="0"/>
+              <a:t>transformation:</a:t>
+            </a:r>
+          </a:p>
+          <a:p>
+            <a:endParaRPr kumimoji="1" lang="ja-JP" altLang="en-US" dirty="0"/>
+          </a:p>
+        </p:txBody>
+      </p:sp>
+      <p:sp>
+        <p:nvSpPr>
+          <p:cNvPr id="7" name="テキスト ボックス 6"/>
+          <p:cNvSpPr txBox="1"/>
+          <p:nvPr/>
+        </p:nvSpPr>
+        <p:spPr>
+          <a:xfrm>
+            <a:off x="717852" y="3964414"/>
+            <a:ext cx="4099060" cy="369332"/>
+          </a:xfrm>
+          <a:prstGeom prst="rect">
+            <a:avLst/>
+          </a:prstGeom>
+          <a:noFill/>
+        </p:spPr>
+        <p:txBody>
+          <a:bodyPr wrap="none" rtlCol="0">
+            <a:spAutoFit/>
+          </a:bodyPr>
+          <a:lstStyle/>
+          <a:p>
+            <a:r>
+              <a:rPr kumimoji="1" lang="en-US" altLang="ja-JP" dirty="0" smtClean="0"/>
+              <a:t>Suppose that the view is changed to:</a:t>
+            </a:r>
+            <a:endParaRPr kumimoji="1" lang="ja-JP" altLang="en-US" dirty="0"/>
+          </a:p>
+        </p:txBody>
+      </p:sp>
+      <p:sp>
+        <p:nvSpPr>
+          <p:cNvPr id="8" name="正方形/長方形 7"/>
+          <p:cNvSpPr/>
+          <p:nvPr/>
+        </p:nvSpPr>
+        <p:spPr>
+          <a:xfrm>
+            <a:off x="725859" y="4581128"/>
+            <a:ext cx="7458918" cy="923330"/>
           </a:xfrm>
           <a:prstGeom prst="rect">
             <a:avLst/>
@@ -25029,46 +25404,15 @@
           <a:p>
             <a:r>
               <a:rPr lang="en-US" altLang="ja-JP" dirty="0"/>
-              <a:t>u0 :: </a:t>
-            </a:r>
-            <a:r>
-              <a:rPr lang="en-US" altLang="ja-JP" dirty="0" err="1"/>
-              <a:t>RType</a:t>
-            </a:r>
-            <a:r>
-              <a:rPr lang="en-US" altLang="ja-JP" dirty="0"/>
-              <a:t> -&gt; (Record -&gt; Record) -&gt; </a:t>
-            </a:r>
-            <a:r>
-              <a:rPr lang="en-US" altLang="ja-JP" dirty="0" err="1"/>
-              <a:t>BiGUL</a:t>
-            </a:r>
-            <a:r>
-              <a:rPr lang="en-US" altLang="ja-JP" dirty="0"/>
-              <a:t> [Record] [Record]</a:t>
-            </a:r>
-          </a:p>
-          <a:p>
-            <a:r>
-              <a:rPr lang="en-US" altLang="ja-JP" dirty="0"/>
-              <a:t>u0 d =</a:t>
-            </a:r>
-          </a:p>
-          <a:p>
-            <a:r>
-              <a:rPr lang="en-US" altLang="ja-JP" dirty="0"/>
-              <a:t>  </a:t>
-            </a:r>
-            <a:r>
-              <a:rPr lang="en-US" altLang="ja-JP" dirty="0" err="1"/>
-              <a:t>relAlign</a:t>
-            </a:r>
-            <a:endParaRPr lang="en-US" altLang="ja-JP" dirty="0"/>
-          </a:p>
-          <a:p>
-            <a:r>
-              <a:rPr lang="en-US" altLang="ja-JP" dirty="0"/>
-              <a:t>    (\r -&gt; (r !! 4) &gt; </a:t>
+              <a:t>v =  [ [</a:t>
+            </a:r>
+            <a:r>
+              <a:rPr lang="en-US" altLang="ja-JP" dirty="0" err="1"/>
+              <a:t>RString</a:t>
+            </a:r>
+            <a:r>
+              <a:rPr lang="en-US" altLang="ja-JP" dirty="0"/>
+              <a:t> "Lullaby" , </a:t>
             </a:r>
             <a:r>
               <a:rPr lang="en-US" altLang="ja-JP" dirty="0" err="1"/>
@@ -25076,49 +25420,7 @@
             </a:r>
             <a:r>
               <a:rPr lang="en-US" altLang="ja-JP" dirty="0"/>
-              <a:t> 2)</a:t>
-            </a:r>
-          </a:p>
-          <a:p>
-            <a:r>
-              <a:rPr lang="en-US" altLang="ja-JP" dirty="0"/>
-              <a:t>    (\s -&gt; (s !! 0, s!!3))</a:t>
-            </a:r>
-          </a:p>
-          <a:p>
-            <a:r>
-              <a:rPr lang="en-US" altLang="ja-JP" dirty="0"/>
-              <a:t>    (\v -&gt; (v !! 0, v !! 2))</a:t>
-            </a:r>
-          </a:p>
-          <a:p>
-            <a:r>
-              <a:rPr lang="en-US" altLang="ja-JP" dirty="0"/>
-              <a:t>    $(update [p| (t: _: r: a: q: [])|]</a:t>
-            </a:r>
-          </a:p>
-          <a:p>
-            <a:r>
-              <a:rPr lang="en-US" altLang="ja-JP" dirty="0"/>
-              <a:t>             [p| (t: r: a: q: []) |]</a:t>
-            </a:r>
-          </a:p>
-          <a:p>
-            <a:r>
-              <a:rPr lang="en-US" altLang="ja-JP" dirty="0"/>
-              <a:t>             [d| t = Replace; r = Replace; a = Replace; q = Replace |])</a:t>
-            </a:r>
-          </a:p>
-          <a:p>
-            <a:r>
-              <a:rPr lang="en-US" altLang="ja-JP" dirty="0"/>
-              <a:t>    (\(t: r: a: q: []) -&gt; (t: d: r: a: q: []))</a:t>
-            </a:r>
-          </a:p>
-          <a:p>
-            <a:r>
-              <a:rPr lang="en-US" altLang="ja-JP" dirty="0"/>
-              <a:t>   </a:t>
+              <a:t> </a:t>
             </a:r>
             <a:r>
               <a:rPr lang="en-US" altLang="ja-JP" dirty="0">
@@ -25126,15 +25428,73 @@
                   <a:srgbClr val="FF6600"/>
                 </a:solidFill>
               </a:rPr>
-              <a:t> (\</a:t>
-            </a:r>
-            <a:r>
-              <a:rPr lang="en-US" altLang="ja-JP" dirty="0" err="1">
-                <a:solidFill>
-                  <a:srgbClr val="FF6600"/>
-                </a:solidFill>
-              </a:rPr>
-              <a:t>rs</a:t>
+              <a:t>4</a:t>
+            </a:r>
+            <a:r>
+              <a:rPr lang="en-US" altLang="ja-JP" dirty="0"/>
+              <a:t>, </a:t>
+            </a:r>
+            <a:r>
+              <a:rPr lang="en-US" altLang="ja-JP" dirty="0" err="1"/>
+              <a:t>RString</a:t>
+            </a:r>
+            <a:r>
+              <a:rPr lang="en-US" altLang="ja-JP" dirty="0"/>
+              <a:t> "Show"  , </a:t>
+            </a:r>
+            <a:r>
+              <a:rPr lang="en-US" altLang="ja-JP" dirty="0" err="1"/>
+              <a:t>RInt</a:t>
+            </a:r>
+            <a:r>
+              <a:rPr lang="en-US" altLang="ja-JP" dirty="0"/>
+              <a:t> 3]</a:t>
+            </a:r>
+          </a:p>
+          <a:p>
+            <a:r>
+              <a:rPr lang="en-US" altLang="ja-JP" dirty="0"/>
+              <a:t>     , [</a:t>
+            </a:r>
+            <a:r>
+              <a:rPr lang="en-US" altLang="ja-JP" dirty="0" err="1"/>
+              <a:t>RString</a:t>
+            </a:r>
+            <a:r>
+              <a:rPr lang="en-US" altLang="ja-JP" dirty="0"/>
+              <a:t> "</a:t>
+            </a:r>
+            <a:r>
+              <a:rPr lang="en-US" altLang="ja-JP" dirty="0" err="1"/>
+              <a:t>Lovesong</a:t>
+            </a:r>
+            <a:r>
+              <a:rPr lang="en-US" altLang="ja-JP" dirty="0"/>
+              <a:t>", </a:t>
+            </a:r>
+            <a:r>
+              <a:rPr lang="en-US" altLang="ja-JP" dirty="0" err="1"/>
+              <a:t>RInt</a:t>
+            </a:r>
+            <a:r>
+              <a:rPr lang="en-US" altLang="ja-JP" dirty="0"/>
+              <a:t> 5, </a:t>
+            </a:r>
+            <a:r>
+              <a:rPr lang="en-US" altLang="ja-JP" dirty="0" err="1"/>
+              <a:t>RString</a:t>
+            </a:r>
+            <a:r>
+              <a:rPr lang="en-US" altLang="ja-JP" dirty="0"/>
+              <a:t> "Disintegration" , </a:t>
+            </a:r>
+            <a:r>
+              <a:rPr lang="en-US" altLang="ja-JP" dirty="0" err="1"/>
+              <a:t>RInt</a:t>
+            </a:r>
+            <a:r>
+              <a:rPr lang="en-US" altLang="ja-JP" dirty="0"/>
+              <a:t> </a:t>
             </a:r>
             <a:r>
               <a:rPr lang="en-US" altLang="ja-JP" dirty="0">
@@ -25142,60 +25502,26 @@
                   <a:srgbClr val="FF6600"/>
                 </a:solidFill>
               </a:rPr>
-              <a:t> -&gt; Nothing)</a:t>
-            </a:r>
-            <a:endParaRPr lang="ja-JP" altLang="en-US" dirty="0">
-              <a:solidFill>
-                <a:srgbClr val="FF6600"/>
-              </a:solidFill>
-            </a:endParaRPr>
-          </a:p>
-        </p:txBody>
-      </p:sp>
-      <p:sp>
-        <p:nvSpPr>
-          <p:cNvPr id="6" name="テキスト ボックス 5"/>
-          <p:cNvSpPr txBox="1"/>
-          <p:nvPr/>
-        </p:nvSpPr>
-        <p:spPr>
-          <a:xfrm>
-            <a:off x="685800" y="1556792"/>
-            <a:ext cx="6933512" cy="646331"/>
-          </a:xfrm>
-          <a:prstGeom prst="rect">
-            <a:avLst/>
-          </a:prstGeom>
-          <a:noFill/>
-        </p:spPr>
-        <p:txBody>
-          <a:bodyPr wrap="none" rtlCol="0">
-            <a:spAutoFit/>
-          </a:bodyPr>
-          <a:lstStyle/>
-          <a:p>
-            <a:r>
-              <a:rPr kumimoji="1" lang="en-US" altLang="ja-JP" dirty="0" smtClean="0"/>
-              <a:t>Define an update policy: if an element is removed from the view,</a:t>
-            </a:r>
-            <a:r>
-              <a:rPr lang="en-US" altLang="en-US" dirty="0" smtClean="0"/>
-              <a:t> </a:t>
-            </a:r>
-          </a:p>
-          <a:p>
-            <a:r>
-              <a:rPr lang="en-US" altLang="en-US" dirty="0" smtClean="0"/>
-              <a:t>the corresponding source elements should be removed. </a:t>
-            </a:r>
-            <a:endParaRPr kumimoji="1" lang="en-US" altLang="ja-JP" dirty="0" smtClean="0"/>
+              <a:t>7</a:t>
+            </a:r>
+            <a:r>
+              <a:rPr lang="en-US" altLang="ja-JP" dirty="0"/>
+              <a:t>]</a:t>
+            </a:r>
+          </a:p>
+          <a:p>
+            <a:r>
+              <a:rPr lang="en-US" altLang="ja-JP" dirty="0"/>
+              <a:t>     ]</a:t>
+            </a:r>
+            <a:endParaRPr lang="ja-JP" altLang="en-US" dirty="0"/>
           </a:p>
         </p:txBody>
       </p:sp>
     </p:spTree>
     <p:extLst>
       <p:ext uri="{BB962C8B-B14F-4D97-AF65-F5344CB8AC3E}">
-        <p14:creationId xmlns:p14="http://schemas.microsoft.com/office/powerpoint/2010/main" val="3935496562"/>
+        <p14:creationId xmlns:p14="http://schemas.microsoft.com/office/powerpoint/2010/main" val="3584509778"/>
       </p:ext>
     </p:extLst>
   </p:cSld>
@@ -25274,14 +25600,70 @@
       </p:sp>
       <p:sp>
         <p:nvSpPr>
-          <p:cNvPr id="5" name="正方形/長方形 4"/>
+          <p:cNvPr id="6" name="テキスト ボックス 5"/>
+          <p:cNvSpPr txBox="1"/>
+          <p:nvPr/>
+        </p:nvSpPr>
+        <p:spPr>
+          <a:xfrm>
+            <a:off x="685800" y="1484784"/>
+            <a:ext cx="4102123" cy="646331"/>
+          </a:xfrm>
+          <a:prstGeom prst="rect">
+            <a:avLst/>
+          </a:prstGeom>
+          <a:noFill/>
+        </p:spPr>
+        <p:txBody>
+          <a:bodyPr wrap="none" rtlCol="0">
+            <a:spAutoFit/>
+          </a:bodyPr>
+          <a:lstStyle/>
+          <a:p>
+            <a:r>
+              <a:rPr lang="en-US" altLang="ja-JP" dirty="0" smtClean="0"/>
+              <a:t>Testing</a:t>
+            </a:r>
+            <a:r>
+              <a:rPr lang="ja-JP" altLang="en-US" dirty="0" smtClean="0"/>
+              <a:t> </a:t>
+            </a:r>
+            <a:r>
+              <a:rPr lang="en-US" altLang="ja-JP" dirty="0" smtClean="0"/>
+              <a:t>the</a:t>
+            </a:r>
+            <a:r>
+              <a:rPr lang="ja-JP" altLang="en-US" dirty="0" smtClean="0"/>
+              <a:t> </a:t>
+            </a:r>
+            <a:r>
+              <a:rPr lang="en-US" altLang="ja-JP" dirty="0" smtClean="0"/>
+              <a:t>backward</a:t>
+            </a:r>
+            <a:r>
+              <a:rPr lang="ja-JP" altLang="en-US" dirty="0" smtClean="0"/>
+              <a:t> </a:t>
+            </a:r>
+            <a:r>
+              <a:rPr lang="en-US" altLang="ja-JP" dirty="0" smtClean="0"/>
+              <a:t>transformation:</a:t>
+            </a:r>
+          </a:p>
+          <a:p>
+            <a:endParaRPr kumimoji="1" lang="ja-JP" altLang="en-US" dirty="0"/>
+          </a:p>
+        </p:txBody>
+      </p:sp>
+      <p:sp>
+        <p:nvSpPr>
+          <p:cNvPr id="3" name="正方形/長方形 2"/>
           <p:cNvSpPr/>
           <p:nvPr/>
         </p:nvSpPr>
         <p:spPr>
           <a:xfrm>
-            <a:off x="685800" y="2131115"/>
-            <a:ext cx="7498977" cy="1477328"/>
+            <a:off x="683568" y="2132856"/>
+            <a:ext cx="7808337" cy="1754327"/>
           </a:xfrm>
           <a:prstGeom prst="rect">
             <a:avLst/>
@@ -25308,7 +25690,7 @@
             </a:r>
             <a:r>
               <a:rPr lang="en-US" altLang="ja-JP" dirty="0"/>
-              <a:t>&gt; get (u0 (</a:t>
+              <a:t>&gt; put (u0 (</a:t>
             </a:r>
             <a:r>
               <a:rPr lang="en-US" altLang="ja-JP" dirty="0" err="1"/>
@@ -25316,7 +25698,39 @@
             </a:r>
             <a:r>
               <a:rPr lang="en-US" altLang="ja-JP" dirty="0"/>
-              <a:t> (-1)) id) s</a:t>
+              <a:t> (-1)) (</a:t>
+            </a:r>
+            <a:r>
+              <a:rPr lang="en-US" altLang="ja-JP" dirty="0" err="1"/>
+              <a:t>fdFun</a:t>
+            </a:r>
+            <a:r>
+              <a:rPr lang="en-US" altLang="ja-JP" dirty="0"/>
+              <a:t> </a:t>
+            </a:r>
+            <a:r>
+              <a:rPr lang="en-US" altLang="ja-JP" dirty="0" err="1"/>
+              <a:t>sfdMap</a:t>
+            </a:r>
+            <a:r>
+              <a:rPr lang="en-US" altLang="ja-JP" dirty="0"/>
+              <a:t> </a:t>
+            </a:r>
+            <a:r>
+              <a:rPr lang="en-US" altLang="ja-JP" dirty="0" err="1"/>
+              <a:t>vfdMap</a:t>
+            </a:r>
+            <a:r>
+              <a:rPr lang="en-US" altLang="ja-JP" dirty="0"/>
+              <a:t> </a:t>
+            </a:r>
+            <a:r>
+              <a:rPr lang="en-US" altLang="ja-JP" dirty="0" err="1"/>
+              <a:t>svMap</a:t>
+            </a:r>
+            <a:r>
+              <a:rPr lang="en-US" altLang="ja-JP" dirty="0"/>
+              <a:t> v)) s v</a:t>
             </a:r>
           </a:p>
           <a:p>
@@ -25344,247 +25758,7 @@
             </a:r>
             <a:r>
               <a:rPr lang="en-US" altLang="ja-JP" dirty="0"/>
-              <a:t> 3,RString "Show",</a:t>
-            </a:r>
-            <a:r>
-              <a:rPr lang="en-US" altLang="ja-JP" dirty="0" err="1"/>
-              <a:t>RInt</a:t>
-            </a:r>
-            <a:r>
-              <a:rPr lang="en-US" altLang="ja-JP" dirty="0"/>
-              <a:t> 3],</a:t>
-            </a:r>
-          </a:p>
-          <a:p>
-            <a:r>
-              <a:rPr lang="en-US" altLang="ja-JP" dirty="0"/>
-              <a:t>[</a:t>
-            </a:r>
-            <a:r>
-              <a:rPr lang="en-US" altLang="ja-JP" dirty="0" err="1"/>
-              <a:t>RString</a:t>
-            </a:r>
-            <a:r>
-              <a:rPr lang="en-US" altLang="ja-JP" dirty="0"/>
-              <a:t> "</a:t>
-            </a:r>
-            <a:r>
-              <a:rPr lang="en-US" altLang="ja-JP" dirty="0" err="1"/>
-              <a:t>Lovesong</a:t>
-            </a:r>
-            <a:r>
-              <a:rPr lang="en-US" altLang="ja-JP" dirty="0"/>
-              <a:t>",</a:t>
-            </a:r>
-            <a:r>
-              <a:rPr lang="en-US" altLang="ja-JP" dirty="0" err="1"/>
-              <a:t>RInt</a:t>
-            </a:r>
-            <a:r>
-              <a:rPr lang="en-US" altLang="ja-JP" dirty="0"/>
-              <a:t> 5,RString "Disintegration",</a:t>
-            </a:r>
-            <a:r>
-              <a:rPr lang="en-US" altLang="ja-JP" dirty="0" err="1"/>
-              <a:t>RInt</a:t>
-            </a:r>
-            <a:r>
-              <a:rPr lang="en-US" altLang="ja-JP" dirty="0"/>
-              <a:t> 4],</a:t>
-            </a:r>
-          </a:p>
-          <a:p>
-            <a:r>
-              <a:rPr lang="en-US" altLang="ja-JP" dirty="0"/>
-              <a:t>[</a:t>
-            </a:r>
-            <a:r>
-              <a:rPr lang="en-US" altLang="ja-JP" dirty="0" err="1">
-                <a:solidFill>
-                  <a:srgbClr val="FF6600"/>
-                </a:solidFill>
-              </a:rPr>
-              <a:t>RString</a:t>
-            </a:r>
-            <a:r>
-              <a:rPr lang="en-US" altLang="ja-JP" dirty="0">
-                <a:solidFill>
-                  <a:srgbClr val="FF6600"/>
-                </a:solidFill>
-              </a:rPr>
-              <a:t> "Trust",</a:t>
-            </a:r>
-            <a:r>
-              <a:rPr lang="en-US" altLang="ja-JP" dirty="0" err="1">
-                <a:solidFill>
-                  <a:srgbClr val="FF6600"/>
-                </a:solidFill>
-              </a:rPr>
-              <a:t>RInt</a:t>
-            </a:r>
-            <a:r>
-              <a:rPr lang="en-US" altLang="ja-JP" dirty="0">
-                <a:solidFill>
-                  <a:srgbClr val="FF6600"/>
-                </a:solidFill>
-              </a:rPr>
-              <a:t> 4,RString "Wish",</a:t>
-            </a:r>
-            <a:r>
-              <a:rPr lang="en-US" altLang="ja-JP" dirty="0" err="1">
-                <a:solidFill>
-                  <a:srgbClr val="FF6600"/>
-                </a:solidFill>
-              </a:rPr>
-              <a:t>RInt</a:t>
-            </a:r>
-            <a:r>
-              <a:rPr lang="en-US" altLang="ja-JP" dirty="0">
-                <a:solidFill>
-                  <a:srgbClr val="FF6600"/>
-                </a:solidFill>
-              </a:rPr>
-              <a:t> 5]]</a:t>
-            </a:r>
-            <a:endParaRPr lang="ja-JP" altLang="en-US" dirty="0">
-              <a:solidFill>
-                <a:srgbClr val="FF6600"/>
-              </a:solidFill>
-            </a:endParaRPr>
-          </a:p>
-        </p:txBody>
-      </p:sp>
-      <p:sp>
-        <p:nvSpPr>
-          <p:cNvPr id="6" name="テキスト ボックス 5"/>
-          <p:cNvSpPr txBox="1"/>
-          <p:nvPr/>
-        </p:nvSpPr>
-        <p:spPr>
-          <a:xfrm>
-            <a:off x="685800" y="1484784"/>
-            <a:ext cx="3946790" cy="646331"/>
-          </a:xfrm>
-          <a:prstGeom prst="rect">
-            <a:avLst/>
-          </a:prstGeom>
-          <a:noFill/>
-        </p:spPr>
-        <p:txBody>
-          <a:bodyPr wrap="none" rtlCol="0">
-            <a:spAutoFit/>
-          </a:bodyPr>
-          <a:lstStyle/>
-          <a:p>
-            <a:r>
-              <a:rPr lang="en-US" altLang="ja-JP" dirty="0" smtClean="0"/>
-              <a:t>Testing</a:t>
-            </a:r>
-            <a:r>
-              <a:rPr lang="ja-JP" altLang="en-US" dirty="0" smtClean="0"/>
-              <a:t> </a:t>
-            </a:r>
-            <a:r>
-              <a:rPr lang="en-US" altLang="ja-JP" dirty="0" smtClean="0"/>
-              <a:t>the</a:t>
-            </a:r>
-            <a:r>
-              <a:rPr lang="ja-JP" altLang="en-US" dirty="0" smtClean="0"/>
-              <a:t> </a:t>
-            </a:r>
-            <a:r>
-              <a:rPr lang="en-US" altLang="ja-JP" dirty="0" smtClean="0"/>
-              <a:t>forward</a:t>
-            </a:r>
-            <a:r>
-              <a:rPr lang="ja-JP" altLang="en-US" dirty="0" smtClean="0"/>
-              <a:t> </a:t>
-            </a:r>
-            <a:r>
-              <a:rPr lang="en-US" altLang="ja-JP" dirty="0" smtClean="0"/>
-              <a:t>transformation:</a:t>
-            </a:r>
-          </a:p>
-          <a:p>
-            <a:endParaRPr kumimoji="1" lang="ja-JP" altLang="en-US" dirty="0"/>
-          </a:p>
-        </p:txBody>
-      </p:sp>
-      <p:sp>
-        <p:nvSpPr>
-          <p:cNvPr id="7" name="テキスト ボックス 6"/>
-          <p:cNvSpPr txBox="1"/>
-          <p:nvPr/>
-        </p:nvSpPr>
-        <p:spPr>
-          <a:xfrm>
-            <a:off x="717852" y="3964414"/>
-            <a:ext cx="4099060" cy="369332"/>
-          </a:xfrm>
-          <a:prstGeom prst="rect">
-            <a:avLst/>
-          </a:prstGeom>
-          <a:noFill/>
-        </p:spPr>
-        <p:txBody>
-          <a:bodyPr wrap="none" rtlCol="0">
-            <a:spAutoFit/>
-          </a:bodyPr>
-          <a:lstStyle/>
-          <a:p>
-            <a:r>
-              <a:rPr kumimoji="1" lang="en-US" altLang="ja-JP" dirty="0" smtClean="0"/>
-              <a:t>Suppose that the view is changed to:</a:t>
-            </a:r>
-            <a:endParaRPr kumimoji="1" lang="ja-JP" altLang="en-US" dirty="0"/>
-          </a:p>
-        </p:txBody>
-      </p:sp>
-      <p:sp>
-        <p:nvSpPr>
-          <p:cNvPr id="8" name="正方形/長方形 7"/>
-          <p:cNvSpPr/>
-          <p:nvPr/>
-        </p:nvSpPr>
-        <p:spPr>
-          <a:xfrm>
-            <a:off x="725859" y="4581128"/>
-            <a:ext cx="7458918" cy="923330"/>
-          </a:xfrm>
-          <a:prstGeom prst="rect">
-            <a:avLst/>
-          </a:prstGeom>
-          <a:ln>
-            <a:solidFill>
-              <a:srgbClr val="FF6600"/>
-            </a:solidFill>
-          </a:ln>
-        </p:spPr>
-        <p:txBody>
-          <a:bodyPr wrap="square">
-            <a:spAutoFit/>
-          </a:bodyPr>
-          <a:lstStyle/>
-          <a:p>
-            <a:r>
-              <a:rPr lang="en-US" altLang="ja-JP" dirty="0"/>
-              <a:t>v =  [ [</a:t>
-            </a:r>
-            <a:r>
-              <a:rPr lang="en-US" altLang="ja-JP" dirty="0" err="1"/>
-              <a:t>RString</a:t>
-            </a:r>
-            <a:r>
-              <a:rPr lang="en-US" altLang="ja-JP" dirty="0"/>
-              <a:t> "Lullaby" , </a:t>
-            </a:r>
-            <a:r>
-              <a:rPr lang="en-US" altLang="ja-JP" dirty="0" err="1"/>
-              <a:t>RInt</a:t>
-            </a:r>
-            <a:r>
-              <a:rPr lang="en-US" altLang="ja-JP" dirty="0"/>
-              <a:t> </a:t>
+              <a:t> 1989,RInt </a:t>
             </a:r>
             <a:r>
               <a:rPr lang="en-US" altLang="ja-JP" dirty="0">
@@ -25596,7 +25770,21 @@
             </a:r>
             <a:r>
               <a:rPr lang="en-US" altLang="ja-JP" dirty="0"/>
-              <a:t>, </a:t>
+              <a:t>,RString "Galore",</a:t>
+            </a:r>
+            <a:r>
+              <a:rPr lang="en-US" altLang="ja-JP" dirty="0" err="1"/>
+              <a:t>RInt</a:t>
+            </a:r>
+            <a:r>
+              <a:rPr lang="en-US" altLang="ja-JP" dirty="0"/>
+              <a:t> 1],</a:t>
+            </a:r>
+          </a:p>
+          <a:p>
+            <a:r>
+              <a:rPr lang="en-US" altLang="ja-JP" dirty="0"/>
+              <a:t>[</a:t>
             </a:r>
             <a:r>
               <a:rPr lang="en-US" altLang="ja-JP" dirty="0" err="1"/>
@@ -25604,7 +25792,7 @@
             </a:r>
             <a:r>
               <a:rPr lang="en-US" altLang="ja-JP" dirty="0"/>
-              <a:t> "Show"  , </a:t>
+              <a:t> "Lullaby",</a:t>
             </a:r>
             <a:r>
               <a:rPr lang="en-US" altLang="ja-JP" dirty="0" err="1"/>
@@ -25612,53 +25800,7 @@
             </a:r>
             <a:r>
               <a:rPr lang="en-US" altLang="ja-JP" dirty="0"/>
-              <a:t> 3]</a:t>
-            </a:r>
-          </a:p>
-          <a:p>
-            <a:r>
-              <a:rPr lang="en-US" altLang="ja-JP" dirty="0"/>
-              <a:t>     , [</a:t>
-            </a:r>
-            <a:r>
-              <a:rPr lang="en-US" altLang="ja-JP" dirty="0" err="1"/>
-              <a:t>RString</a:t>
-            </a:r>
-            <a:r>
-              <a:rPr lang="en-US" altLang="ja-JP" dirty="0"/>
-              <a:t> "</a:t>
-            </a:r>
-            <a:r>
-              <a:rPr lang="en-US" altLang="ja-JP" dirty="0" err="1"/>
-              <a:t>Lovesong</a:t>
-            </a:r>
-            <a:r>
-              <a:rPr lang="en-US" altLang="ja-JP" dirty="0"/>
-              <a:t>", </a:t>
-            </a:r>
-            <a:r>
-              <a:rPr lang="en-US" altLang="ja-JP" dirty="0" err="1"/>
-              <a:t>RInt</a:t>
-            </a:r>
-            <a:r>
-              <a:rPr lang="en-US" altLang="ja-JP" dirty="0"/>
-              <a:t> 5, </a:t>
-            </a:r>
-            <a:r>
-              <a:rPr lang="en-US" altLang="ja-JP" dirty="0" err="1"/>
-              <a:t>RString</a:t>
-            </a:r>
-            <a:r>
-              <a:rPr lang="en-US" altLang="ja-JP" dirty="0"/>
-              <a:t> "Disintegration" , </a:t>
-            </a:r>
-            <a:r>
-              <a:rPr lang="en-US" altLang="ja-JP" dirty="0" err="1"/>
-              <a:t>RInt</a:t>
-            </a:r>
-            <a:r>
-              <a:rPr lang="en-US" altLang="ja-JP" dirty="0"/>
-              <a:t> </a:t>
+              <a:t> 1989,RInt </a:t>
             </a:r>
             <a:r>
               <a:rPr lang="en-US" altLang="ja-JP" dirty="0">
@@ -25666,17 +25808,95 @@
                   <a:srgbClr val="FF6600"/>
                 </a:solidFill>
               </a:rPr>
-              <a:t>7</a:t>
-            </a:r>
-            <a:r>
-              <a:rPr lang="en-US" altLang="ja-JP" dirty="0"/>
-              <a:t>]</a:t>
-            </a:r>
-          </a:p>
-          <a:p>
-            <a:r>
-              <a:rPr lang="en-US" altLang="ja-JP" dirty="0"/>
-              <a:t>     ]</a:t>
+              <a:t>4</a:t>
+            </a:r>
+            <a:r>
+              <a:rPr lang="en-US" altLang="ja-JP" dirty="0"/>
+              <a:t>,RString "Show",</a:t>
+            </a:r>
+            <a:r>
+              <a:rPr lang="en-US" altLang="ja-JP" dirty="0" err="1"/>
+              <a:t>RInt</a:t>
+            </a:r>
+            <a:r>
+              <a:rPr lang="en-US" altLang="ja-JP" dirty="0"/>
+              <a:t> 3],</a:t>
+            </a:r>
+          </a:p>
+          <a:p>
+            <a:r>
+              <a:rPr lang="en-US" altLang="ja-JP" dirty="0"/>
+              <a:t>[</a:t>
+            </a:r>
+            <a:r>
+              <a:rPr lang="en-US" altLang="ja-JP" dirty="0" err="1"/>
+              <a:t>RString</a:t>
+            </a:r>
+            <a:r>
+              <a:rPr lang="en-US" altLang="ja-JP" dirty="0"/>
+              <a:t> "</a:t>
+            </a:r>
+            <a:r>
+              <a:rPr lang="en-US" altLang="ja-JP" dirty="0" err="1"/>
+              <a:t>Lovesong</a:t>
+            </a:r>
+            <a:r>
+              <a:rPr lang="en-US" altLang="ja-JP" dirty="0"/>
+              <a:t>",</a:t>
+            </a:r>
+            <a:r>
+              <a:rPr lang="en-US" altLang="ja-JP" dirty="0" err="1"/>
+              <a:t>RInt</a:t>
+            </a:r>
+            <a:r>
+              <a:rPr lang="en-US" altLang="ja-JP" dirty="0"/>
+              <a:t> 1989,RInt 5,RString "Galore",</a:t>
+            </a:r>
+            <a:r>
+              <a:rPr lang="en-US" altLang="ja-JP" dirty="0" err="1"/>
+              <a:t>RInt</a:t>
+            </a:r>
+            <a:r>
+              <a:rPr lang="en-US" altLang="ja-JP" dirty="0"/>
+              <a:t> 1],</a:t>
+            </a:r>
+          </a:p>
+          <a:p>
+            <a:r>
+              <a:rPr lang="en-US" altLang="ja-JP" dirty="0"/>
+              <a:t>[</a:t>
+            </a:r>
+            <a:r>
+              <a:rPr lang="en-US" altLang="ja-JP" dirty="0" err="1"/>
+              <a:t>RString</a:t>
+            </a:r>
+            <a:r>
+              <a:rPr lang="en-US" altLang="ja-JP" dirty="0"/>
+              <a:t> "</a:t>
+            </a:r>
+            <a:r>
+              <a:rPr lang="en-US" altLang="ja-JP" dirty="0" err="1"/>
+              <a:t>Lovesong</a:t>
+            </a:r>
+            <a:r>
+              <a:rPr lang="en-US" altLang="ja-JP" dirty="0"/>
+              <a:t>",</a:t>
+            </a:r>
+            <a:r>
+              <a:rPr lang="en-US" altLang="ja-JP" dirty="0" err="1"/>
+              <a:t>RInt</a:t>
+            </a:r>
+            <a:r>
+              <a:rPr lang="en-US" altLang="ja-JP" dirty="0"/>
+              <a:t> 1989,RInt 5,RString "Disintegration",</a:t>
+            </a:r>
+            <a:r>
+              <a:rPr lang="en-US" altLang="ja-JP" dirty="0" err="1"/>
+              <a:t>RInt</a:t>
+            </a:r>
+            <a:r>
+              <a:rPr lang="en-US" altLang="ja-JP" dirty="0"/>
+              <a:t> 7]]</a:t>
             </a:r>
             <a:endParaRPr lang="ja-JP" altLang="en-US" dirty="0"/>
           </a:p>
@@ -25685,7 +25905,7 @@
     </p:spTree>
     <p:extLst>
       <p:ext uri="{BB962C8B-B14F-4D97-AF65-F5344CB8AC3E}">
-        <p14:creationId xmlns:p14="http://schemas.microsoft.com/office/powerpoint/2010/main" val="3584509778"/>
+        <p14:creationId xmlns:p14="http://schemas.microsoft.com/office/powerpoint/2010/main" val="2198470690"/>
       </p:ext>
     </p:extLst>
   </p:cSld>
@@ -25764,14 +25984,173 @@
       </p:sp>
       <p:sp>
         <p:nvSpPr>
+          <p:cNvPr id="5" name="正方形/長方形 4"/>
+          <p:cNvSpPr/>
+          <p:nvPr/>
+        </p:nvSpPr>
+        <p:spPr>
+          <a:xfrm>
+            <a:off x="685800" y="2492896"/>
+            <a:ext cx="7848872" cy="3139321"/>
+          </a:xfrm>
+          <a:prstGeom prst="rect">
+            <a:avLst/>
+          </a:prstGeom>
+          <a:ln>
+            <a:solidFill>
+              <a:srgbClr val="FF6600"/>
+            </a:solidFill>
+          </a:ln>
+        </p:spPr>
+        <p:txBody>
+          <a:bodyPr wrap="square">
+            <a:spAutoFit/>
+          </a:bodyPr>
+          <a:lstStyle/>
+          <a:p>
+            <a:r>
+              <a:rPr lang="en-US" altLang="ja-JP" dirty="0"/>
+              <a:t>u0 :: </a:t>
+            </a:r>
+            <a:r>
+              <a:rPr lang="en-US" altLang="ja-JP" dirty="0" err="1"/>
+              <a:t>RType</a:t>
+            </a:r>
+            <a:r>
+              <a:rPr lang="en-US" altLang="ja-JP" dirty="0"/>
+              <a:t> -&gt; (Record -&gt; Record) -&gt; </a:t>
+            </a:r>
+            <a:r>
+              <a:rPr lang="en-US" altLang="ja-JP" dirty="0" err="1"/>
+              <a:t>BiGUL</a:t>
+            </a:r>
+            <a:r>
+              <a:rPr lang="en-US" altLang="ja-JP" dirty="0"/>
+              <a:t> [Record] [Record]</a:t>
+            </a:r>
+          </a:p>
+          <a:p>
+            <a:r>
+              <a:rPr lang="en-US" altLang="ja-JP" dirty="0"/>
+              <a:t>u0 d =</a:t>
+            </a:r>
+          </a:p>
+          <a:p>
+            <a:r>
+              <a:rPr lang="en-US" altLang="ja-JP" dirty="0"/>
+              <a:t>  </a:t>
+            </a:r>
+            <a:r>
+              <a:rPr lang="en-US" altLang="ja-JP" dirty="0" err="1"/>
+              <a:t>relAlign</a:t>
+            </a:r>
+            <a:endParaRPr lang="en-US" altLang="ja-JP" dirty="0"/>
+          </a:p>
+          <a:p>
+            <a:r>
+              <a:rPr lang="en-US" altLang="ja-JP" dirty="0"/>
+              <a:t>    (\r -&gt; (r !! 4) &gt; </a:t>
+            </a:r>
+            <a:r>
+              <a:rPr lang="en-US" altLang="ja-JP" dirty="0" err="1"/>
+              <a:t>RInt</a:t>
+            </a:r>
+            <a:r>
+              <a:rPr lang="en-US" altLang="ja-JP" dirty="0"/>
+              <a:t> 2)</a:t>
+            </a:r>
+          </a:p>
+          <a:p>
+            <a:r>
+              <a:rPr lang="en-US" altLang="ja-JP" dirty="0"/>
+              <a:t>    (\s -&gt; (s !! 0, s!!3))</a:t>
+            </a:r>
+          </a:p>
+          <a:p>
+            <a:r>
+              <a:rPr lang="en-US" altLang="ja-JP" dirty="0"/>
+              <a:t>    (\v -&gt; (v !! 0, v !! 2))</a:t>
+            </a:r>
+          </a:p>
+          <a:p>
+            <a:r>
+              <a:rPr lang="en-US" altLang="ja-JP" dirty="0"/>
+              <a:t>    $(update [p| (t: _: r: a: q: [])|]</a:t>
+            </a:r>
+          </a:p>
+          <a:p>
+            <a:r>
+              <a:rPr lang="en-US" altLang="ja-JP" dirty="0"/>
+              <a:t>             [p| (t: r: a: q: []) |]</a:t>
+            </a:r>
+          </a:p>
+          <a:p>
+            <a:r>
+              <a:rPr lang="en-US" altLang="ja-JP" dirty="0"/>
+              <a:t>             [d| t = Replace; r = Replace; a = Replace; q = Replace |])</a:t>
+            </a:r>
+          </a:p>
+          <a:p>
+            <a:r>
+              <a:rPr lang="en-US" altLang="ja-JP" dirty="0"/>
+              <a:t>    (\(t: r: a: q: []) -&gt; (t: d: r: a: q: []))</a:t>
+            </a:r>
+          </a:p>
+          <a:p>
+            <a:r>
+              <a:rPr lang="en-US" altLang="ja-JP" dirty="0"/>
+              <a:t>   </a:t>
+            </a:r>
+            <a:r>
+              <a:rPr lang="en-US" altLang="ja-JP" dirty="0">
+                <a:solidFill>
+                  <a:srgbClr val="FF6600"/>
+                </a:solidFill>
+              </a:rPr>
+              <a:t>(\(t: d: r: a: _: []) -&gt; Just (t: d: r: a: </a:t>
+            </a:r>
+            <a:r>
+              <a:rPr lang="en-US" altLang="ja-JP" dirty="0" err="1" smtClean="0">
+                <a:solidFill>
+                  <a:srgbClr val="FF6600"/>
+                </a:solidFill>
+              </a:rPr>
+              <a:t>Rint</a:t>
+            </a:r>
+            <a:r>
+              <a:rPr lang="en-US" altLang="ja-JP" dirty="0" smtClean="0">
+                <a:solidFill>
+                  <a:srgbClr val="FF6600"/>
+                </a:solidFill>
+              </a:rPr>
+              <a:t> 0:</a:t>
+            </a:r>
+            <a:r>
+              <a:rPr lang="en-US" altLang="ja-JP" dirty="0">
+                <a:solidFill>
+                  <a:srgbClr val="FF6600"/>
+                </a:solidFill>
+              </a:rPr>
+              <a:t>[]))</a:t>
+            </a:r>
+            <a:endParaRPr lang="ja-JP" altLang="en-US" dirty="0">
+              <a:solidFill>
+                <a:srgbClr val="FF6600"/>
+              </a:solidFill>
+            </a:endParaRPr>
+          </a:p>
+        </p:txBody>
+      </p:sp>
+      <p:sp>
+        <p:nvSpPr>
           <p:cNvPr id="6" name="テキスト ボックス 5"/>
           <p:cNvSpPr txBox="1"/>
           <p:nvPr/>
         </p:nvSpPr>
         <p:spPr>
           <a:xfrm>
-            <a:off x="685800" y="1484784"/>
-            <a:ext cx="4102123" cy="646331"/>
+            <a:off x="685800" y="1556792"/>
+            <a:ext cx="7313038" cy="646331"/>
           </a:xfrm>
           <a:prstGeom prst="rect">
             <a:avLst/>
@@ -25785,291 +26164,27 @@
           <a:lstStyle/>
           <a:p>
             <a:r>
-              <a:rPr lang="en-US" altLang="ja-JP" dirty="0" smtClean="0"/>
-              <a:t>Testing</a:t>
-            </a:r>
-            <a:r>
-              <a:rPr lang="ja-JP" altLang="en-US" dirty="0" smtClean="0"/>
+              <a:rPr kumimoji="1" lang="en-US" altLang="ja-JP" dirty="0" smtClean="0"/>
+              <a:t>Define a new update policy: if an element is removed from the view,</a:t>
+            </a:r>
+            <a:r>
+              <a:rPr lang="en-US" altLang="en-US" dirty="0" smtClean="0"/>
               <a:t> </a:t>
             </a:r>
-            <a:r>
-              <a:rPr lang="en-US" altLang="ja-JP" dirty="0" smtClean="0"/>
-              <a:t>the</a:t>
-            </a:r>
-            <a:r>
-              <a:rPr lang="ja-JP" altLang="en-US" dirty="0" smtClean="0"/>
-              <a:t> </a:t>
-            </a:r>
-            <a:r>
-              <a:rPr lang="en-US" altLang="ja-JP" dirty="0" smtClean="0"/>
-              <a:t>backward</a:t>
-            </a:r>
-            <a:r>
-              <a:rPr lang="ja-JP" altLang="en-US" dirty="0" smtClean="0"/>
-              <a:t> </a:t>
-            </a:r>
-            <a:r>
-              <a:rPr lang="en-US" altLang="ja-JP" dirty="0" smtClean="0"/>
-              <a:t>transformation:</a:t>
-            </a:r>
-          </a:p>
-          <a:p>
-            <a:endParaRPr kumimoji="1" lang="ja-JP" altLang="en-US" dirty="0"/>
-          </a:p>
-        </p:txBody>
-      </p:sp>
-      <p:sp>
-        <p:nvSpPr>
-          <p:cNvPr id="3" name="正方形/長方形 2"/>
-          <p:cNvSpPr/>
-          <p:nvPr/>
-        </p:nvSpPr>
-        <p:spPr>
-          <a:xfrm>
-            <a:off x="683568" y="2132856"/>
-            <a:ext cx="7808337" cy="1754327"/>
-          </a:xfrm>
-          <a:prstGeom prst="rect">
-            <a:avLst/>
-          </a:prstGeom>
-          <a:ln>
-            <a:solidFill>
-              <a:schemeClr val="accent1"/>
-            </a:solidFill>
-          </a:ln>
-        </p:spPr>
-        <p:txBody>
-          <a:bodyPr wrap="square">
-            <a:spAutoFit/>
-          </a:bodyPr>
-          <a:lstStyle/>
-          <a:p>
-            <a:r>
-              <a:rPr lang="en-US" altLang="ja-JP" dirty="0"/>
-              <a:t>*</a:t>
-            </a:r>
-            <a:r>
-              <a:rPr lang="en-US" altLang="ja-JP" dirty="0" err="1"/>
-              <a:t>Brul</a:t>
-            </a:r>
-            <a:r>
-              <a:rPr lang="en-US" altLang="ja-JP" dirty="0"/>
-              <a:t>&gt; put (u0 (</a:t>
-            </a:r>
-            <a:r>
-              <a:rPr lang="en-US" altLang="ja-JP" dirty="0" err="1"/>
-              <a:t>RInt</a:t>
-            </a:r>
-            <a:r>
-              <a:rPr lang="en-US" altLang="ja-JP" dirty="0"/>
-              <a:t> (-1)) (</a:t>
-            </a:r>
-            <a:r>
-              <a:rPr lang="en-US" altLang="ja-JP" dirty="0" err="1"/>
-              <a:t>fdFun</a:t>
-            </a:r>
-            <a:r>
-              <a:rPr lang="en-US" altLang="ja-JP" dirty="0"/>
-              <a:t> </a:t>
-            </a:r>
-            <a:r>
-              <a:rPr lang="en-US" altLang="ja-JP" dirty="0" err="1"/>
-              <a:t>sfdMap</a:t>
-            </a:r>
-            <a:r>
-              <a:rPr lang="en-US" altLang="ja-JP" dirty="0"/>
-              <a:t> </a:t>
-            </a:r>
-            <a:r>
-              <a:rPr lang="en-US" altLang="ja-JP" dirty="0" err="1"/>
-              <a:t>vfdMap</a:t>
-            </a:r>
-            <a:r>
-              <a:rPr lang="en-US" altLang="ja-JP" dirty="0"/>
-              <a:t> </a:t>
-            </a:r>
-            <a:r>
-              <a:rPr lang="en-US" altLang="ja-JP" dirty="0" err="1"/>
-              <a:t>svMap</a:t>
-            </a:r>
-            <a:r>
-              <a:rPr lang="en-US" altLang="ja-JP" dirty="0"/>
-              <a:t> v)) s v</a:t>
-            </a:r>
-          </a:p>
-          <a:p>
-            <a:r>
-              <a:rPr lang="en-US" altLang="ja-JP" dirty="0"/>
-              <a:t>Just</a:t>
-            </a:r>
-          </a:p>
-          <a:p>
-            <a:r>
-              <a:rPr lang="en-US" altLang="ja-JP" dirty="0"/>
-              <a:t>[[</a:t>
-            </a:r>
-            <a:r>
-              <a:rPr lang="en-US" altLang="ja-JP" dirty="0" err="1"/>
-              <a:t>RString</a:t>
-            </a:r>
-            <a:r>
-              <a:rPr lang="en-US" altLang="ja-JP" dirty="0"/>
-              <a:t> "Lullaby",</a:t>
-            </a:r>
-            <a:r>
-              <a:rPr lang="en-US" altLang="ja-JP" dirty="0" err="1"/>
-              <a:t>RInt</a:t>
-            </a:r>
-            <a:r>
-              <a:rPr lang="en-US" altLang="ja-JP" dirty="0"/>
-              <a:t> 1989,RInt </a:t>
-            </a:r>
-            <a:r>
-              <a:rPr lang="en-US" altLang="ja-JP" dirty="0">
-                <a:solidFill>
-                  <a:srgbClr val="FF6600"/>
-                </a:solidFill>
-              </a:rPr>
-              <a:t>4</a:t>
-            </a:r>
-            <a:r>
-              <a:rPr lang="en-US" altLang="ja-JP" dirty="0"/>
-              <a:t>,RString "Galore",</a:t>
-            </a:r>
-            <a:r>
-              <a:rPr lang="en-US" altLang="ja-JP" dirty="0" err="1"/>
-              <a:t>RInt</a:t>
-            </a:r>
-            <a:r>
-              <a:rPr lang="en-US" altLang="ja-JP" dirty="0"/>
-              <a:t> 1],</a:t>
-            </a:r>
-          </a:p>
-          <a:p>
-            <a:r>
-              <a:rPr lang="en-US" altLang="ja-JP" dirty="0"/>
-              <a:t>[</a:t>
-            </a:r>
-            <a:r>
-              <a:rPr lang="en-US" altLang="ja-JP" dirty="0" err="1"/>
-              <a:t>RString</a:t>
-            </a:r>
-            <a:r>
-              <a:rPr lang="en-US" altLang="ja-JP" dirty="0"/>
-              <a:t> "Lullaby",</a:t>
-            </a:r>
-            <a:r>
-              <a:rPr lang="en-US" altLang="ja-JP" dirty="0" err="1"/>
-              <a:t>RInt</a:t>
-            </a:r>
-            <a:r>
-              <a:rPr lang="en-US" altLang="ja-JP" dirty="0"/>
-              <a:t> 1989,RInt </a:t>
-            </a:r>
-            <a:r>
-              <a:rPr lang="en-US" altLang="ja-JP" dirty="0">
-                <a:solidFill>
-                  <a:srgbClr val="FF6600"/>
-                </a:solidFill>
-              </a:rPr>
-              <a:t>4</a:t>
-            </a:r>
-            <a:r>
-              <a:rPr lang="en-US" altLang="ja-JP" dirty="0"/>
-              <a:t>,RString "Show",</a:t>
-            </a:r>
-            <a:r>
-              <a:rPr lang="en-US" altLang="ja-JP" dirty="0" err="1"/>
-              <a:t>RInt</a:t>
-            </a:r>
-            <a:r>
-              <a:rPr lang="en-US" altLang="ja-JP" dirty="0"/>
-              <a:t> 3],</a:t>
-            </a:r>
-          </a:p>
-          <a:p>
-            <a:r>
-              <a:rPr lang="en-US" altLang="ja-JP" dirty="0"/>
-              <a:t>[</a:t>
-            </a:r>
-            <a:r>
-              <a:rPr lang="en-US" altLang="ja-JP" dirty="0" err="1"/>
-              <a:t>RString</a:t>
-            </a:r>
-            <a:r>
-              <a:rPr lang="en-US" altLang="ja-JP" dirty="0"/>
-              <a:t> "</a:t>
-            </a:r>
-            <a:r>
-              <a:rPr lang="en-US" altLang="ja-JP" dirty="0" err="1"/>
-              <a:t>Lovesong</a:t>
-            </a:r>
-            <a:r>
-              <a:rPr lang="en-US" altLang="ja-JP" dirty="0"/>
-              <a:t>",</a:t>
-            </a:r>
-            <a:r>
-              <a:rPr lang="en-US" altLang="ja-JP" dirty="0" err="1"/>
-              <a:t>RInt</a:t>
-            </a:r>
-            <a:r>
-              <a:rPr lang="en-US" altLang="ja-JP" dirty="0"/>
-              <a:t> 1989,RInt 5,RString "Galore",</a:t>
-            </a:r>
-            <a:r>
-              <a:rPr lang="en-US" altLang="ja-JP" dirty="0" err="1"/>
-              <a:t>RInt</a:t>
-            </a:r>
-            <a:r>
-              <a:rPr lang="en-US" altLang="ja-JP" dirty="0"/>
-              <a:t> 1],</a:t>
-            </a:r>
-          </a:p>
-          <a:p>
-            <a:r>
-              <a:rPr lang="en-US" altLang="ja-JP" dirty="0"/>
-              <a:t>[</a:t>
-            </a:r>
-            <a:r>
-              <a:rPr lang="en-US" altLang="ja-JP" dirty="0" err="1"/>
-              <a:t>RString</a:t>
-            </a:r>
-            <a:r>
-              <a:rPr lang="en-US" altLang="ja-JP" dirty="0"/>
-              <a:t> "</a:t>
-            </a:r>
-            <a:r>
-              <a:rPr lang="en-US" altLang="ja-JP" dirty="0" err="1"/>
-              <a:t>Lovesong</a:t>
-            </a:r>
-            <a:r>
-              <a:rPr lang="en-US" altLang="ja-JP" dirty="0"/>
-              <a:t>",</a:t>
-            </a:r>
-            <a:r>
-              <a:rPr lang="en-US" altLang="ja-JP" dirty="0" err="1"/>
-              <a:t>RInt</a:t>
-            </a:r>
-            <a:r>
-              <a:rPr lang="en-US" altLang="ja-JP" dirty="0"/>
-              <a:t> 1989,RInt 5,RString "Disintegration",</a:t>
-            </a:r>
-            <a:r>
-              <a:rPr lang="en-US" altLang="ja-JP" dirty="0" err="1"/>
-              <a:t>RInt</a:t>
-            </a:r>
-            <a:r>
-              <a:rPr lang="en-US" altLang="ja-JP" dirty="0"/>
-              <a:t> 7]]</a:t>
-            </a:r>
-            <a:endParaRPr lang="ja-JP" altLang="en-US" dirty="0"/>
+          </a:p>
+          <a:p>
+            <a:r>
+              <a:rPr lang="en-US" altLang="en-US" dirty="0" smtClean="0"/>
+              <a:t>the corresponding source elements will have quantity 0. </a:t>
+            </a:r>
+            <a:endParaRPr kumimoji="1" lang="en-US" altLang="ja-JP" dirty="0" smtClean="0"/>
           </a:p>
         </p:txBody>
       </p:sp>
     </p:spTree>
     <p:extLst>
       <p:ext uri="{BB962C8B-B14F-4D97-AF65-F5344CB8AC3E}">
-        <p14:creationId xmlns:p14="http://schemas.microsoft.com/office/powerpoint/2010/main" val="2198470690"/>
+        <p14:creationId xmlns:p14="http://schemas.microsoft.com/office/powerpoint/2010/main" val="2138873971"/>
       </p:ext>
     </p:extLst>
   </p:cSld>
@@ -26118,7 +26233,126 @@
           <a:bodyPr/>
           <a:lstStyle/>
           <a:p>
-            <a:endParaRPr kumimoji="1" lang="ja-JP" altLang="en-US"/>
+            <a:r>
+              <a:rPr kumimoji="1" lang="en-US" altLang="ja-JP" dirty="0" smtClean="0"/>
+              <a:t>Summary</a:t>
+            </a:r>
+            <a:endParaRPr kumimoji="1" lang="ja-JP" altLang="en-US" dirty="0"/>
+          </a:p>
+        </p:txBody>
+      </p:sp>
+      <p:sp>
+        <p:nvSpPr>
+          <p:cNvPr id="3" name="コンテンツ プレースホルダー 2"/>
+          <p:cNvSpPr>
+            <a:spLocks noGrp="1"/>
+          </p:cNvSpPr>
+          <p:nvPr>
+            <p:ph idx="1"/>
+          </p:nvPr>
+        </p:nvSpPr>
+        <p:spPr/>
+        <p:txBody>
+          <a:bodyPr/>
+          <a:lstStyle/>
+          <a:p>
+            <a:r>
+              <a:rPr kumimoji="1" lang="en-US" altLang="ja-JP" dirty="0" err="1" smtClean="0"/>
+              <a:t>Putback</a:t>
+            </a:r>
+            <a:r>
+              <a:rPr kumimoji="1" lang="en-US" altLang="ja-JP" dirty="0" smtClean="0"/>
+              <a:t>-based programming </a:t>
+            </a:r>
+            <a:r>
+              <a:rPr lang="en-US" altLang="ja-JP" dirty="0" smtClean="0"/>
+              <a:t>is</a:t>
+            </a:r>
+            <a:r>
+              <a:rPr kumimoji="1" lang="en-US" altLang="ja-JP" dirty="0" smtClean="0"/>
+              <a:t> fun and not that difficult.</a:t>
+            </a:r>
+          </a:p>
+          <a:p>
+            <a:endParaRPr kumimoji="1" lang="en-US" altLang="ja-JP" dirty="0" smtClean="0"/>
+          </a:p>
+          <a:p>
+            <a:r>
+              <a:rPr lang="en-US" altLang="ja-JP" dirty="0" err="1" smtClean="0"/>
+              <a:t>Putback</a:t>
+            </a:r>
+            <a:r>
+              <a:rPr lang="en-US" altLang="ja-JP" dirty="0" smtClean="0"/>
+              <a:t>-based BX can be served as the basis for developing various domain specific BX languages.</a:t>
+            </a:r>
+          </a:p>
+          <a:p>
+            <a:pPr lvl="1"/>
+            <a:r>
+              <a:rPr lang="en-US" altLang="ja-JP" dirty="0" err="1" smtClean="0"/>
+              <a:t>BiYacc</a:t>
+            </a:r>
+            <a:r>
+              <a:rPr lang="en-US" altLang="ja-JP" dirty="0" smtClean="0"/>
+              <a:t>/</a:t>
+            </a:r>
+            <a:r>
+              <a:rPr lang="en-US" altLang="ja-JP" dirty="0" err="1" smtClean="0"/>
+              <a:t>BiFluX</a:t>
+            </a:r>
+            <a:r>
+              <a:rPr lang="en-US" altLang="ja-JP" dirty="0" smtClean="0"/>
+              <a:t>/</a:t>
+            </a:r>
+            <a:r>
+              <a:rPr lang="en-US" altLang="ja-JP" dirty="0" err="1" smtClean="0"/>
+              <a:t>Brul</a:t>
+            </a:r>
+            <a:r>
+              <a:rPr lang="en-US" altLang="ja-JP" dirty="0"/>
+              <a:t> </a:t>
+            </a:r>
+            <a:r>
+              <a:rPr lang="is-IS" altLang="ja-JP" dirty="0" smtClean="0"/>
+              <a:t>…</a:t>
+            </a:r>
+            <a:endParaRPr lang="en-US" altLang="ja-JP" dirty="0"/>
+          </a:p>
+          <a:p>
+            <a:pPr marL="0" indent="0">
+              <a:buNone/>
+            </a:pPr>
+            <a:endParaRPr kumimoji="1" lang="en-US" altLang="ja-JP" dirty="0"/>
+          </a:p>
+          <a:p>
+            <a:r>
+              <a:rPr lang="en-US" altLang="ja-JP" dirty="0" err="1" smtClean="0"/>
+              <a:t>Putback</a:t>
+            </a:r>
+            <a:r>
+              <a:rPr lang="en-US" altLang="ja-JP" dirty="0" smtClean="0"/>
+              <a:t>-based BX is promising to be used to develop BIG BX systems:</a:t>
+            </a:r>
+          </a:p>
+          <a:p>
+            <a:pPr lvl="1"/>
+            <a:r>
+              <a:rPr kumimoji="1" lang="en-US" altLang="ja-JP" dirty="0" err="1" smtClean="0"/>
+              <a:t>Bidirectionalization</a:t>
+            </a:r>
+            <a:r>
+              <a:rPr kumimoji="1" lang="en-US" altLang="ja-JP" dirty="0" smtClean="0"/>
+              <a:t> of </a:t>
+            </a:r>
+            <a:r>
+              <a:rPr kumimoji="1" lang="en-US" altLang="ja-JP" dirty="0" err="1" smtClean="0"/>
+              <a:t>pandoc</a:t>
+            </a:r>
+            <a:r>
+              <a:rPr kumimoji="1" lang="en-US" altLang="ja-JP" dirty="0" smtClean="0"/>
+              <a:t> is ongoing</a:t>
+            </a:r>
+            <a:endParaRPr kumimoji="1" lang="ja-JP" altLang="en-US" dirty="0"/>
           </a:p>
         </p:txBody>
       </p:sp>
@@ -26146,222 +26380,197 @@
           </a:p>
         </p:txBody>
       </p:sp>
-      <p:sp>
-        <p:nvSpPr>
-          <p:cNvPr id="5" name="正方形/長方形 4"/>
-          <p:cNvSpPr/>
-          <p:nvPr/>
-        </p:nvSpPr>
-        <p:spPr>
-          <a:xfrm>
-            <a:off x="685800" y="2492896"/>
-            <a:ext cx="7848872" cy="3139321"/>
-          </a:xfrm>
-          <a:prstGeom prst="rect">
-            <a:avLst/>
-          </a:prstGeom>
-          <a:ln>
-            <a:solidFill>
-              <a:srgbClr val="FF6600"/>
-            </a:solidFill>
-          </a:ln>
-        </p:spPr>
-        <p:txBody>
-          <a:bodyPr wrap="square">
-            <a:spAutoFit/>
-          </a:bodyPr>
-          <a:lstStyle/>
-          <a:p>
-            <a:r>
-              <a:rPr lang="en-US" altLang="ja-JP" dirty="0"/>
-              <a:t>u0 :: </a:t>
-            </a:r>
-            <a:r>
-              <a:rPr lang="en-US" altLang="ja-JP" dirty="0" err="1"/>
-              <a:t>RType</a:t>
-            </a:r>
-            <a:r>
-              <a:rPr lang="en-US" altLang="ja-JP" dirty="0"/>
-              <a:t> -&gt; (Record -&gt; Record) -&gt; </a:t>
-            </a:r>
-            <a:r>
-              <a:rPr lang="en-US" altLang="ja-JP" dirty="0" err="1"/>
-              <a:t>BiGUL</a:t>
-            </a:r>
-            <a:r>
-              <a:rPr lang="en-US" altLang="ja-JP" dirty="0"/>
-              <a:t> [Record] [Record]</a:t>
-            </a:r>
-          </a:p>
-          <a:p>
-            <a:r>
-              <a:rPr lang="en-US" altLang="ja-JP" dirty="0"/>
-              <a:t>u0 d =</a:t>
-            </a:r>
-          </a:p>
-          <a:p>
-            <a:r>
-              <a:rPr lang="en-US" altLang="ja-JP" dirty="0"/>
-              <a:t>  </a:t>
-            </a:r>
-            <a:r>
-              <a:rPr lang="en-US" altLang="ja-JP" dirty="0" err="1"/>
-              <a:t>relAlign</a:t>
-            </a:r>
-            <a:endParaRPr lang="en-US" altLang="ja-JP" dirty="0"/>
-          </a:p>
-          <a:p>
-            <a:r>
-              <a:rPr lang="en-US" altLang="ja-JP" dirty="0"/>
-              <a:t>    (\r -&gt; (r !! 4) &gt; </a:t>
-            </a:r>
-            <a:r>
-              <a:rPr lang="en-US" altLang="ja-JP" dirty="0" err="1"/>
-              <a:t>RInt</a:t>
-            </a:r>
-            <a:r>
-              <a:rPr lang="en-US" altLang="ja-JP" dirty="0"/>
-              <a:t> 2)</a:t>
-            </a:r>
-          </a:p>
-          <a:p>
-            <a:r>
-              <a:rPr lang="en-US" altLang="ja-JP" dirty="0"/>
-              <a:t>    (\s -&gt; (s !! 0, s!!3))</a:t>
-            </a:r>
-          </a:p>
-          <a:p>
-            <a:r>
-              <a:rPr lang="en-US" altLang="ja-JP" dirty="0"/>
-              <a:t>    (\v -&gt; (v !! 0, v !! 2))</a:t>
-            </a:r>
-          </a:p>
-          <a:p>
-            <a:r>
-              <a:rPr lang="en-US" altLang="ja-JP" dirty="0"/>
-              <a:t>    $(update [p| (t: _: r: a: q: [])|]</a:t>
-            </a:r>
-          </a:p>
-          <a:p>
-            <a:r>
-              <a:rPr lang="en-US" altLang="ja-JP" dirty="0"/>
-              <a:t>             [p| (t: r: a: q: []) |]</a:t>
-            </a:r>
-          </a:p>
-          <a:p>
-            <a:r>
-              <a:rPr lang="en-US" altLang="ja-JP" dirty="0"/>
-              <a:t>             [d| t = Replace; r = Replace; a = Replace; q = Replace |])</a:t>
-            </a:r>
-          </a:p>
-          <a:p>
-            <a:r>
-              <a:rPr lang="en-US" altLang="ja-JP" dirty="0"/>
-              <a:t>    (\(t: r: a: q: []) -&gt; (t: d: r: a: q: []))</a:t>
-            </a:r>
-          </a:p>
-          <a:p>
-            <a:r>
-              <a:rPr lang="en-US" altLang="ja-JP" dirty="0"/>
-              <a:t>   </a:t>
-            </a:r>
-            <a:r>
-              <a:rPr lang="en-US" altLang="ja-JP" dirty="0">
-                <a:solidFill>
-                  <a:srgbClr val="FF6600"/>
-                </a:solidFill>
-              </a:rPr>
-              <a:t>(\(t: d: r: a: _: []) -&gt; Just (t: d: r: a: </a:t>
-            </a:r>
-            <a:r>
-              <a:rPr lang="en-US" altLang="ja-JP" dirty="0" err="1" smtClean="0">
-                <a:solidFill>
-                  <a:srgbClr val="FF6600"/>
-                </a:solidFill>
-              </a:rPr>
-              <a:t>Rint</a:t>
-            </a:r>
-            <a:r>
-              <a:rPr lang="en-US" altLang="ja-JP" dirty="0" smtClean="0">
-                <a:solidFill>
-                  <a:srgbClr val="FF6600"/>
-                </a:solidFill>
-              </a:rPr>
-              <a:t> 0:</a:t>
-            </a:r>
-            <a:r>
-              <a:rPr lang="en-US" altLang="ja-JP" dirty="0">
-                <a:solidFill>
-                  <a:srgbClr val="FF6600"/>
-                </a:solidFill>
-              </a:rPr>
-              <a:t>[]))</a:t>
-            </a:r>
-            <a:endParaRPr lang="ja-JP" altLang="en-US" dirty="0">
-              <a:solidFill>
-                <a:srgbClr val="FF6600"/>
-              </a:solidFill>
-            </a:endParaRPr>
-          </a:p>
-        </p:txBody>
-      </p:sp>
-      <p:sp>
-        <p:nvSpPr>
-          <p:cNvPr id="6" name="テキスト ボックス 5"/>
-          <p:cNvSpPr txBox="1"/>
-          <p:nvPr/>
-        </p:nvSpPr>
-        <p:spPr>
-          <a:xfrm>
-            <a:off x="685800" y="1556792"/>
-            <a:ext cx="7313038" cy="646331"/>
-          </a:xfrm>
-          <a:prstGeom prst="rect">
-            <a:avLst/>
-          </a:prstGeom>
-          <a:noFill/>
-        </p:spPr>
-        <p:txBody>
-          <a:bodyPr wrap="none" rtlCol="0">
-            <a:spAutoFit/>
-          </a:bodyPr>
-          <a:lstStyle/>
-          <a:p>
-            <a:r>
-              <a:rPr kumimoji="1" lang="en-US" altLang="ja-JP" dirty="0" smtClean="0"/>
-              <a:t>Define a new update policy: if an element is removed from the view,</a:t>
-            </a:r>
-            <a:r>
-              <a:rPr lang="en-US" altLang="en-US" dirty="0" smtClean="0"/>
-              <a:t> </a:t>
-            </a:r>
-          </a:p>
-          <a:p>
-            <a:r>
-              <a:rPr lang="en-US" altLang="en-US" dirty="0" smtClean="0"/>
-              <a:t>the corresponding source elements will have quantity 0. </a:t>
-            </a:r>
-            <a:endParaRPr kumimoji="1" lang="en-US" altLang="ja-JP" dirty="0" smtClean="0"/>
-          </a:p>
-        </p:txBody>
-      </p:sp>
     </p:spTree>
     <p:extLst>
       <p:ext uri="{BB962C8B-B14F-4D97-AF65-F5344CB8AC3E}">
-        <p14:creationId xmlns:p14="http://schemas.microsoft.com/office/powerpoint/2010/main" val="2138873971"/>
+        <p14:creationId xmlns:p14="http://schemas.microsoft.com/office/powerpoint/2010/main" val="885165633"/>
       </p:ext>
     </p:extLst>
   </p:cSld>
   <p:clrMapOvr>
     <a:masterClrMapping/>
   </p:clrMapOvr>
-  <p:timing>
-    <p:tnLst>
-      <p:par>
-        <p:cTn xmlns:p14="http://schemas.microsoft.com/office/powerpoint/2010/main" id="1" dur="indefinite" restart="never" nodeType="tmRoot"/>
-      </p:par>
-    </p:tnLst>
-  </p:timing>
+</p:sld>
+</file>
+
+<file path=ppt/slides/slide59.xml><?xml version="1.0" encoding="utf-8"?>
+<p:sld xmlns:a="http://schemas.openxmlformats.org/drawingml/2006/main" xmlns:r="http://schemas.openxmlformats.org/officeDocument/2006/relationships" xmlns:p="http://schemas.openxmlformats.org/presentationml/2006/main">
+  <p:cSld>
+    <p:spTree>
+      <p:nvGrpSpPr>
+        <p:cNvPr id="1" name=""/>
+        <p:cNvGrpSpPr/>
+        <p:nvPr/>
+      </p:nvGrpSpPr>
+      <p:grpSpPr>
+        <a:xfrm>
+          <a:off x="0" y="0"/>
+          <a:ext cx="0" cy="0"/>
+          <a:chOff x="0" y="0"/>
+          <a:chExt cx="0" cy="0"/>
+        </a:xfrm>
+      </p:grpSpPr>
+      <p:sp>
+        <p:nvSpPr>
+          <p:cNvPr id="2" name="タイトル 1"/>
+          <p:cNvSpPr>
+            <a:spLocks noGrp="1"/>
+          </p:cNvSpPr>
+          <p:nvPr>
+            <p:ph type="title"/>
+          </p:nvPr>
+        </p:nvSpPr>
+        <p:spPr/>
+        <p:txBody>
+          <a:bodyPr/>
+          <a:lstStyle/>
+          <a:p>
+            <a:r>
+              <a:rPr kumimoji="1" lang="en-US" altLang="ja-JP" dirty="0" smtClean="0"/>
+              <a:t>Future Work</a:t>
+            </a:r>
+            <a:endParaRPr kumimoji="1" lang="ja-JP" altLang="en-US" dirty="0"/>
+          </a:p>
+        </p:txBody>
+      </p:sp>
+      <p:sp>
+        <p:nvSpPr>
+          <p:cNvPr id="3" name="コンテンツ プレースホルダー 2"/>
+          <p:cNvSpPr>
+            <a:spLocks noGrp="1"/>
+          </p:cNvSpPr>
+          <p:nvPr>
+            <p:ph idx="1"/>
+          </p:nvPr>
+        </p:nvSpPr>
+        <p:spPr/>
+        <p:txBody>
+          <a:bodyPr/>
+          <a:lstStyle/>
+          <a:p>
+            <a:r>
+              <a:rPr lang="en-US" altLang="ja-JP" dirty="0" smtClean="0"/>
+              <a:t>Adding effects to </a:t>
+            </a:r>
+            <a:r>
+              <a:rPr lang="en-US" altLang="ja-JP" dirty="0" err="1" smtClean="0"/>
+              <a:t>BiGUL</a:t>
+            </a:r>
+            <a:endParaRPr lang="en-US" altLang="ja-JP" dirty="0" smtClean="0"/>
+          </a:p>
+          <a:p>
+            <a:endParaRPr lang="en-US" altLang="ja-JP" dirty="0"/>
+          </a:p>
+          <a:p>
+            <a:r>
+              <a:rPr lang="en-US" altLang="ja-JP" dirty="0" err="1" smtClean="0"/>
+              <a:t>BiGUL</a:t>
+            </a:r>
+            <a:r>
+              <a:rPr lang="en-US" altLang="ja-JP" dirty="0" smtClean="0"/>
+              <a:t> for graphs (</a:t>
+            </a:r>
+            <a:r>
+              <a:rPr lang="en-US" altLang="ja-JP" dirty="0" err="1" smtClean="0"/>
+              <a:t>GRoundTram</a:t>
+            </a:r>
+            <a:r>
+              <a:rPr lang="en-US" altLang="ja-JP" dirty="0" smtClean="0"/>
+              <a:t> </a:t>
+            </a:r>
+            <a:r>
+              <a:rPr lang="is-IS" altLang="ja-JP" dirty="0" smtClean="0"/>
+              <a:t>…)</a:t>
+            </a:r>
+            <a:endParaRPr lang="en-US" altLang="ja-JP" dirty="0" smtClean="0"/>
+          </a:p>
+          <a:p>
+            <a:pPr marL="0" indent="0">
+              <a:buNone/>
+            </a:pPr>
+            <a:endParaRPr lang="en-US" altLang="ja-JP" dirty="0" smtClean="0"/>
+          </a:p>
+          <a:p>
+            <a:r>
+              <a:rPr lang="en-US" altLang="ja-JP" dirty="0" smtClean="0"/>
+              <a:t>Static analysis (</a:t>
+            </a:r>
+            <a:r>
+              <a:rPr lang="en-US" altLang="ja-JP" dirty="0" err="1"/>
+              <a:t>v</a:t>
+            </a:r>
+            <a:r>
+              <a:rPr lang="en-US" altLang="ja-JP" dirty="0" err="1" smtClean="0"/>
+              <a:t>alidatity</a:t>
+            </a:r>
+            <a:r>
+              <a:rPr lang="en-US" altLang="ja-JP" dirty="0" smtClean="0"/>
+              <a:t> checking) of </a:t>
+            </a:r>
+            <a:r>
+              <a:rPr lang="en-US" altLang="ja-JP" dirty="0" err="1" smtClean="0"/>
+              <a:t>BiGUL</a:t>
+            </a:r>
+            <a:r>
+              <a:rPr lang="en-US" altLang="ja-JP" dirty="0" smtClean="0"/>
+              <a:t> programs</a:t>
+            </a:r>
+          </a:p>
+          <a:p>
+            <a:endParaRPr kumimoji="1" lang="en-US" altLang="ja-JP" dirty="0"/>
+          </a:p>
+          <a:p>
+            <a:r>
+              <a:rPr lang="en-US" altLang="ja-JP" dirty="0" err="1" smtClean="0"/>
+              <a:t>Putback</a:t>
+            </a:r>
+            <a:r>
+              <a:rPr lang="en-US" altLang="ja-JP" dirty="0" smtClean="0"/>
+              <a:t>-based bidirectional computing machine and compilation</a:t>
+            </a:r>
+          </a:p>
+          <a:p>
+            <a:endParaRPr kumimoji="1" lang="en-US" altLang="ja-JP" dirty="0"/>
+          </a:p>
+          <a:p>
+            <a:endParaRPr kumimoji="1" lang="ja-JP" altLang="en-US" dirty="0"/>
+          </a:p>
+        </p:txBody>
+      </p:sp>
+      <p:sp>
+        <p:nvSpPr>
+          <p:cNvPr id="4" name="スライド番号プレースホルダー 3"/>
+          <p:cNvSpPr>
+            <a:spLocks noGrp="1"/>
+          </p:cNvSpPr>
+          <p:nvPr>
+            <p:ph type="sldNum" sz="quarter" idx="11"/>
+          </p:nvPr>
+        </p:nvSpPr>
+        <p:spPr/>
+        <p:txBody>
+          <a:bodyPr/>
+          <a:lstStyle/>
+          <a:p>
+            <a:fld id="{F96F1464-7F58-8745-A325-E585E650CEFA}" type="slidenum">
+              <a:rPr lang="ja-JP" altLang="en-US" smtClean="0"/>
+              <a:pPr/>
+              <a:t>59</a:t>
+            </a:fld>
+            <a:endParaRPr lang="ja-JP" altLang="en-US"/>
+          </a:p>
+        </p:txBody>
+      </p:sp>
+    </p:spTree>
+    <p:extLst>
+      <p:ext uri="{BB962C8B-B14F-4D97-AF65-F5344CB8AC3E}">
+        <p14:creationId xmlns:p14="http://schemas.microsoft.com/office/powerpoint/2010/main" val="2246801805"/>
+      </p:ext>
+    </p:extLst>
+  </p:cSld>
+  <p:clrMapOvr>
+    <a:masterClrMapping/>
+  </p:clrMapOvr>
 </p:sld>
 </file>
 

--- a/SummerSchool16/slides/hu.pptx
+++ b/SummerSchool16/slides/hu.pptx
@@ -5,10 +5,10 @@
     <p:sldMasterId id="2147485124" r:id="rId1"/>
   </p:sldMasterIdLst>
   <p:notesMasterIdLst>
-    <p:notesMasterId r:id="rId61"/>
+    <p:notesMasterId r:id="rId66"/>
   </p:notesMasterIdLst>
   <p:handoutMasterIdLst>
-    <p:handoutMasterId r:id="rId62"/>
+    <p:handoutMasterId r:id="rId67"/>
   </p:handoutMasterIdLst>
   <p:sldIdLst>
     <p:sldId id="559" r:id="rId2"/>
@@ -50,26 +50,31 @@
     <p:sldId id="675" r:id="rId38"/>
     <p:sldId id="676" r:id="rId39"/>
     <p:sldId id="677" r:id="rId40"/>
-    <p:sldId id="678" r:id="rId41"/>
-    <p:sldId id="679" r:id="rId42"/>
-    <p:sldId id="680" r:id="rId43"/>
-    <p:sldId id="682" r:id="rId44"/>
-    <p:sldId id="683" r:id="rId45"/>
-    <p:sldId id="684" r:id="rId46"/>
-    <p:sldId id="685" r:id="rId47"/>
-    <p:sldId id="686" r:id="rId48"/>
-    <p:sldId id="687" r:id="rId49"/>
-    <p:sldId id="688" r:id="rId50"/>
-    <p:sldId id="689" r:id="rId51"/>
-    <p:sldId id="690" r:id="rId52"/>
-    <p:sldId id="691" r:id="rId53"/>
-    <p:sldId id="692" r:id="rId54"/>
-    <p:sldId id="693" r:id="rId55"/>
-    <p:sldId id="694" r:id="rId56"/>
-    <p:sldId id="695" r:id="rId57"/>
-    <p:sldId id="696" r:id="rId58"/>
-    <p:sldId id="697" r:id="rId59"/>
-    <p:sldId id="698" r:id="rId60"/>
+    <p:sldId id="699" r:id="rId41"/>
+    <p:sldId id="678" r:id="rId42"/>
+    <p:sldId id="700" r:id="rId43"/>
+    <p:sldId id="702" r:id="rId44"/>
+    <p:sldId id="703" r:id="rId45"/>
+    <p:sldId id="701" r:id="rId46"/>
+    <p:sldId id="679" r:id="rId47"/>
+    <p:sldId id="680" r:id="rId48"/>
+    <p:sldId id="682" r:id="rId49"/>
+    <p:sldId id="683" r:id="rId50"/>
+    <p:sldId id="684" r:id="rId51"/>
+    <p:sldId id="685" r:id="rId52"/>
+    <p:sldId id="686" r:id="rId53"/>
+    <p:sldId id="687" r:id="rId54"/>
+    <p:sldId id="688" r:id="rId55"/>
+    <p:sldId id="689" r:id="rId56"/>
+    <p:sldId id="690" r:id="rId57"/>
+    <p:sldId id="691" r:id="rId58"/>
+    <p:sldId id="692" r:id="rId59"/>
+    <p:sldId id="693" r:id="rId60"/>
+    <p:sldId id="694" r:id="rId61"/>
+    <p:sldId id="695" r:id="rId62"/>
+    <p:sldId id="696" r:id="rId63"/>
+    <p:sldId id="697" r:id="rId64"/>
+    <p:sldId id="698" r:id="rId65"/>
   </p:sldIdLst>
   <p:sldSz cx="9144000" cy="6858000" type="screen4x3"/>
   <p:notesSz cx="6858000" cy="9144000"/>
@@ -254,7 +259,7 @@
             <a:fld id="{13E93697-C8A9-9B49-BE2A-924B569EB904}" type="datetimeFigureOut">
               <a:rPr lang="ja-JP" altLang="en-US" smtClean="0"/>
               <a:pPr/>
-              <a:t>16/07/27</a:t>
+              <a:t>16/07/28</a:t>
             </a:fld>
             <a:endParaRPr lang="ja-JP" altLang="en-US"/>
           </a:p>
@@ -422,7 +427,7 @@
             <a:fld id="{56DBB2EE-6F08-0F40-84F7-F95277EBA770}" type="datetimeFigureOut">
               <a:rPr lang="ja-JP" altLang="en-US" smtClean="0"/>
               <a:pPr/>
-              <a:t>16/07/27</a:t>
+              <a:t>16/07/28</a:t>
             </a:fld>
             <a:endParaRPr lang="ja-JP" altLang="en-US"/>
           </a:p>
@@ -17914,7 +17919,7 @@
         <p:spPr>
           <a:xfrm>
             <a:off x="827584" y="1556792"/>
-            <a:ext cx="7886539" cy="3785652"/>
+            <a:ext cx="6835745" cy="707886"/>
           </a:xfrm>
           <a:prstGeom prst="rect">
             <a:avLst/>
@@ -17938,9 +17943,21 @@
             </a:r>
             <a:r>
               <a:rPr lang="en-US" altLang="ja-JP" sz="2000" dirty="0"/>
-              <a:t> :: (Show a, Show b) </a:t>
-            </a:r>
-            <a:endParaRPr lang="en-US" altLang="ja-JP" sz="2000" dirty="0" smtClean="0"/>
+              <a:t> :: </a:t>
+            </a:r>
+            <a:r>
+              <a:rPr lang="en-US" altLang="ja-JP" sz="2000" dirty="0">
+                <a:solidFill>
+                  <a:srgbClr val="BFBFBF"/>
+                </a:solidFill>
+              </a:rPr>
+              <a:t>(Show a, Show b) </a:t>
+            </a:r>
+            <a:endParaRPr lang="en-US" altLang="ja-JP" sz="2000" dirty="0" smtClean="0">
+              <a:solidFill>
+                <a:srgbClr val="BFBFBF"/>
+              </a:solidFill>
+            </a:endParaRPr>
           </a:p>
           <a:p>
             <a:r>
@@ -17981,249 +17998,20 @@
             </a:r>
             <a:r>
               <a:rPr lang="en-US" altLang="ja-JP" sz="2000" dirty="0"/>
-              <a:t> ([a], b) b</a:t>
-            </a:r>
-          </a:p>
-          <a:p>
-            <a:r>
-              <a:rPr lang="en-US" altLang="ja-JP" sz="2000" dirty="0" err="1"/>
-              <a:t>lensFoldr</a:t>
-            </a:r>
-            <a:r>
-              <a:rPr lang="en-US" altLang="ja-JP" sz="2000" dirty="0"/>
-              <a:t> </a:t>
-            </a:r>
-            <a:r>
-              <a:rPr lang="en-US" altLang="ja-JP" sz="2000" dirty="0" err="1"/>
-              <a:t>bx</a:t>
-            </a:r>
-            <a:r>
-              <a:rPr lang="en-US" altLang="ja-JP" sz="2000" dirty="0"/>
-              <a:t> </a:t>
-            </a:r>
-            <a:r>
-              <a:rPr lang="en-US" altLang="ja-JP" sz="2000" dirty="0" err="1"/>
-              <a:t>pv</a:t>
-            </a:r>
-            <a:r>
-              <a:rPr lang="en-US" altLang="ja-JP" sz="2000" dirty="0"/>
-              <a:t> =</a:t>
-            </a:r>
-          </a:p>
-          <a:p>
-            <a:r>
-              <a:rPr lang="en-US" altLang="ja-JP" sz="2000" dirty="0"/>
-              <a:t>  Case  [  $(adaptive [| \</a:t>
+              <a:t> ([a], b) </a:t>
             </a:r>
             <a:r>
               <a:rPr lang="en-US" altLang="ja-JP" sz="2000" dirty="0" smtClean="0"/>
-              <a:t>(s,</a:t>
-            </a:r>
-            <a:r>
-              <a:rPr lang="en-US" altLang="ja-JP" sz="2000" dirty="0"/>
-              <a:t>?</a:t>
-            </a:r>
-            <a:r>
-              <a:rPr lang="en-US" altLang="ja-JP" sz="2000" dirty="0" smtClean="0"/>
-              <a:t>) </a:t>
-            </a:r>
-            <a:r>
-              <a:rPr lang="en-US" altLang="ja-JP" sz="2000" dirty="0"/>
-              <a:t>v -&gt; </a:t>
-            </a:r>
-            <a:r>
-              <a:rPr lang="en-US" altLang="ja-JP" sz="2000" dirty="0" err="1"/>
-              <a:t>pv</a:t>
-            </a:r>
-            <a:r>
-              <a:rPr lang="en-US" altLang="ja-JP" sz="2000" dirty="0"/>
-              <a:t> v &amp;&amp; length </a:t>
-            </a:r>
-            <a:r>
-              <a:rPr lang="en-US" altLang="ja-JP" sz="2000" dirty="0" smtClean="0"/>
-              <a:t>s </a:t>
-            </a:r>
-            <a:r>
-              <a:rPr lang="en-US" altLang="ja-JP" sz="2000" dirty="0"/>
-              <a:t>/= 0 |]) </a:t>
-            </a:r>
-          </a:p>
-          <a:p>
-            <a:r>
-              <a:rPr lang="en-US" altLang="ja-JP" sz="2000" dirty="0"/>
-              <a:t>             ==&gt; \</a:t>
-            </a:r>
-            <a:r>
-              <a:rPr lang="en-US" altLang="ja-JP" sz="2000" dirty="0" smtClean="0"/>
-              <a:t>(</a:t>
-            </a:r>
-            <a:r>
-              <a:rPr lang="en-US" altLang="ja-JP" sz="2000" dirty="0" err="1"/>
-              <a:t>s</a:t>
-            </a:r>
-            <a:r>
-              <a:rPr lang="en-US" altLang="ja-JP" sz="2000" dirty="0" err="1" smtClean="0"/>
-              <a:t>,</a:t>
-            </a:r>
-            <a:r>
-              <a:rPr lang="en-US" altLang="ja-JP" sz="2000" dirty="0" err="1"/>
-              <a:t>y</a:t>
-            </a:r>
-            <a:r>
-              <a:rPr lang="en-US" altLang="ja-JP" sz="2000" dirty="0"/>
-              <a:t>) </a:t>
-            </a:r>
-            <a:r>
-              <a:rPr lang="en-US" altLang="ja-JP" sz="2000" dirty="0" smtClean="0"/>
-              <a:t>_ </a:t>
-            </a:r>
-            <a:r>
-              <a:rPr lang="en-US" altLang="ja-JP" sz="2000" dirty="0"/>
-              <a:t>-&gt; ([],y)</a:t>
-            </a:r>
-          </a:p>
-          <a:p>
-            <a:r>
-              <a:rPr lang="en-US" altLang="ja-JP" sz="2000" dirty="0"/>
-              <a:t>        </a:t>
-            </a:r>
-            <a:r>
-              <a:rPr lang="en-US" altLang="ja-JP" sz="2000" dirty="0" smtClean="0"/>
-              <a:t> ,  </a:t>
-            </a:r>
-            <a:r>
-              <a:rPr lang="en-US" altLang="ja-JP" sz="2000" dirty="0"/>
-              <a:t>$(normal [| \(s,_) v -&gt; null s |] [| \(s,_) -&gt; null s |]) </a:t>
-            </a:r>
-          </a:p>
-          <a:p>
-            <a:r>
-              <a:rPr lang="en-US" altLang="ja-JP" sz="2000" dirty="0"/>
-              <a:t>             ==&gt; $(</a:t>
-            </a:r>
-            <a:r>
-              <a:rPr lang="en-US" altLang="ja-JP" sz="2000" dirty="0" err="1"/>
-              <a:t>rearrV</a:t>
-            </a:r>
-            <a:r>
-              <a:rPr lang="en-US" altLang="ja-JP" sz="2000" dirty="0"/>
-              <a:t> [| \v -&gt; ((),v) |]) $</a:t>
-            </a:r>
-          </a:p>
-          <a:p>
-            <a:r>
-              <a:rPr lang="en-US" altLang="ja-JP" sz="2000" dirty="0"/>
-              <a:t>                    $(update [p| (_, v) |] [p| ((),v ) |] [d| v = Replace |])</a:t>
-            </a:r>
-          </a:p>
-          <a:p>
-            <a:r>
-              <a:rPr lang="en-US" altLang="ja-JP" sz="2000" dirty="0"/>
-              <a:t>        </a:t>
-            </a:r>
-            <a:r>
-              <a:rPr lang="en-US" altLang="ja-JP" sz="2000" dirty="0" smtClean="0"/>
-              <a:t> ,  </a:t>
-            </a:r>
-            <a:r>
-              <a:rPr lang="en-US" altLang="ja-JP" sz="2000" dirty="0"/>
-              <a:t>$(</a:t>
-            </a:r>
-            <a:r>
-              <a:rPr lang="en-US" altLang="ja-JP" sz="2000" dirty="0" err="1"/>
-              <a:t>normalSV</a:t>
-            </a:r>
-            <a:r>
-              <a:rPr lang="en-US" altLang="ja-JP" sz="2000" dirty="0"/>
-              <a:t> [p| _ |] [p| _ |] [| \(s,_) -&gt; not (null s) |])</a:t>
-            </a:r>
-          </a:p>
-          <a:p>
-            <a:r>
-              <a:rPr lang="en-US" altLang="ja-JP" sz="2000" dirty="0"/>
-              <a:t>             ==&gt; $(</a:t>
-            </a:r>
-            <a:r>
-              <a:rPr lang="en-US" altLang="ja-JP" sz="2000" dirty="0" err="1"/>
-              <a:t>rearrS</a:t>
-            </a:r>
-            <a:r>
-              <a:rPr lang="en-US" altLang="ja-JP" sz="2000" dirty="0"/>
-              <a:t> [| \((</a:t>
-            </a:r>
-            <a:r>
-              <a:rPr lang="en-US" altLang="ja-JP" sz="2000" dirty="0" err="1"/>
-              <a:t>x:xs</a:t>
-            </a:r>
-            <a:r>
-              <a:rPr lang="en-US" altLang="ja-JP" sz="2000" dirty="0"/>
-              <a:t>), e) -&gt; (x, (</a:t>
-            </a:r>
-            <a:r>
-              <a:rPr lang="en-US" altLang="ja-JP" sz="2000" dirty="0" err="1"/>
-              <a:t>xs,e</a:t>
-            </a:r>
-            <a:r>
-              <a:rPr lang="en-US" altLang="ja-JP" sz="2000" dirty="0"/>
-              <a:t>))  |])</a:t>
-            </a:r>
-          </a:p>
-          <a:p>
-            <a:r>
-              <a:rPr lang="en-US" altLang="ja-JP" sz="2000" dirty="0"/>
-              <a:t>            </a:t>
-            </a:r>
-            <a:r>
-              <a:rPr lang="en-US" altLang="ja-JP" sz="2000" dirty="0" smtClean="0"/>
-              <a:t>        </a:t>
-            </a:r>
-            <a:r>
-              <a:rPr lang="en-US" altLang="ja-JP" sz="2000" dirty="0"/>
-              <a:t>(Replace `Prod` </a:t>
-            </a:r>
-            <a:r>
-              <a:rPr lang="en-US" altLang="ja-JP" sz="2000" dirty="0" err="1"/>
-              <a:t>lensFoldr</a:t>
-            </a:r>
-            <a:r>
-              <a:rPr lang="en-US" altLang="ja-JP" sz="2000" dirty="0"/>
-              <a:t> </a:t>
-            </a:r>
-            <a:r>
-              <a:rPr lang="en-US" altLang="ja-JP" sz="2000" dirty="0" err="1"/>
-              <a:t>bx</a:t>
-            </a:r>
-            <a:r>
-              <a:rPr lang="en-US" altLang="ja-JP" sz="2000" dirty="0"/>
-              <a:t> </a:t>
-            </a:r>
-            <a:r>
-              <a:rPr lang="en-US" altLang="ja-JP" sz="2000" dirty="0" err="1"/>
-              <a:t>pv</a:t>
-            </a:r>
-            <a:r>
-              <a:rPr lang="en-US" altLang="ja-JP" sz="2000" dirty="0"/>
-              <a:t>) `Compose` </a:t>
-            </a:r>
-            <a:r>
-              <a:rPr lang="en-US" altLang="ja-JP" sz="2000" dirty="0" err="1"/>
-              <a:t>bx</a:t>
+              <a:t>b</a:t>
             </a:r>
             <a:endParaRPr lang="en-US" altLang="ja-JP" sz="2000" dirty="0"/>
-          </a:p>
-          <a:p>
-            <a:r>
-              <a:rPr lang="en-US" altLang="ja-JP" sz="2000" dirty="0"/>
-              <a:t>        ]</a:t>
-            </a:r>
-            <a:endParaRPr kumimoji="1" lang="ja-JP" altLang="en-US" sz="2000" dirty="0"/>
           </a:p>
         </p:txBody>
       </p:sp>
     </p:spTree>
     <p:extLst>
       <p:ext uri="{BB962C8B-B14F-4D97-AF65-F5344CB8AC3E}">
-        <p14:creationId xmlns:p14="http://schemas.microsoft.com/office/powerpoint/2010/main" val="3303347013"/>
+        <p14:creationId xmlns:p14="http://schemas.microsoft.com/office/powerpoint/2010/main" val="3673483237"/>
       </p:ext>
     </p:extLst>
   </p:cSld>
@@ -18274,7 +18062,7 @@
           <a:p>
             <a:r>
               <a:rPr kumimoji="1" lang="en-US" altLang="ja-JP" dirty="0" err="1" smtClean="0"/>
-              <a:t>lensMap</a:t>
+              <a:t>lensFoldr</a:t>
             </a:r>
             <a:endParaRPr kumimoji="1" lang="ja-JP" altLang="en-US" dirty="0"/>
           </a:p>
@@ -18306,18 +18094,19 @@
       </p:sp>
       <p:sp>
         <p:nvSpPr>
-          <p:cNvPr id="5" name="正方形/長方形 4"/>
-          <p:cNvSpPr/>
+          <p:cNvPr id="5" name="テキスト ボックス 4"/>
+          <p:cNvSpPr txBox="1"/>
           <p:nvPr/>
         </p:nvSpPr>
         <p:spPr>
           <a:xfrm>
-            <a:off x="1033463" y="1556792"/>
-            <a:ext cx="6931638" cy="1631216"/>
+            <a:off x="827584" y="1556792"/>
+            <a:ext cx="7362279" cy="4093428"/>
           </a:xfrm>
           <a:prstGeom prst="rect">
             <a:avLst/>
           </a:prstGeom>
+          <a:noFill/>
           <a:ln>
             <a:solidFill>
               <a:srgbClr val="FF6600"/>
@@ -18325,20 +18114,32 @@
           </a:ln>
         </p:spPr>
         <p:txBody>
-          <a:bodyPr wrap="square">
+          <a:bodyPr wrap="none" rtlCol="0">
             <a:spAutoFit/>
           </a:bodyPr>
           <a:lstStyle/>
           <a:p>
             <a:r>
               <a:rPr lang="en-US" altLang="ja-JP" sz="2000" dirty="0" err="1"/>
-              <a:t>lensMap</a:t>
+              <a:t>lensFoldr</a:t>
             </a:r>
             <a:r>
               <a:rPr lang="en-US" altLang="ja-JP" sz="2000" dirty="0"/>
-              <a:t> :: (Show a, Show b) </a:t>
-            </a:r>
-            <a:endParaRPr lang="en-US" altLang="ja-JP" sz="2000" dirty="0" smtClean="0"/>
+              <a:t> :: </a:t>
+            </a:r>
+            <a:r>
+              <a:rPr lang="en-US" altLang="ja-JP" sz="2000" dirty="0">
+                <a:solidFill>
+                  <a:srgbClr val="BFBFBF"/>
+                </a:solidFill>
+              </a:rPr>
+              <a:t>(Show a, Show b) </a:t>
+            </a:r>
+            <a:endParaRPr lang="en-US" altLang="ja-JP" sz="2000" dirty="0" smtClean="0">
+              <a:solidFill>
+                <a:srgbClr val="BFBFBF"/>
+              </a:solidFill>
+            </a:endParaRPr>
           </a:p>
           <a:p>
             <a:r>
@@ -18347,33 +18148,45 @@
             </a:r>
             <a:r>
               <a:rPr lang="en-US" altLang="ja-JP" sz="2000" dirty="0" smtClean="0"/>
-              <a:t>         =</a:t>
+              <a:t>          =</a:t>
             </a:r>
             <a:r>
               <a:rPr lang="en-US" altLang="ja-JP" sz="2000" dirty="0"/>
               <a:t>&gt; </a:t>
             </a:r>
             <a:r>
+              <a:rPr lang="en-US" altLang="ja-JP" sz="2000" dirty="0" err="1" smtClean="0"/>
+              <a:t>BiGUL</a:t>
+            </a:r>
+            <a:r>
+              <a:rPr lang="en-US" altLang="ja-JP" sz="2000" dirty="0" smtClean="0"/>
+              <a:t> </a:t>
+            </a:r>
+            <a:r>
+              <a:rPr lang="en-US" altLang="ja-JP" sz="2000" dirty="0"/>
+              <a:t>(a, b) b -&gt; (b-&gt;</a:t>
+            </a:r>
+            <a:r>
+              <a:rPr lang="en-US" altLang="ja-JP" sz="2000" dirty="0" err="1"/>
+              <a:t>Bool</a:t>
+            </a:r>
+            <a:r>
+              <a:rPr lang="en-US" altLang="ja-JP" sz="2000" dirty="0"/>
+              <a:t>) -&gt; </a:t>
+            </a:r>
+            <a:r>
               <a:rPr lang="en-US" altLang="ja-JP" sz="2000" dirty="0" err="1"/>
               <a:t>BiGUL</a:t>
             </a:r>
             <a:r>
               <a:rPr lang="en-US" altLang="ja-JP" sz="2000" dirty="0"/>
-              <a:t> a b -&gt; </a:t>
-            </a:r>
+              <a:t> ([a], b) b</a:t>
+            </a:r>
+          </a:p>
+          <a:p>
             <a:r>
               <a:rPr lang="en-US" altLang="ja-JP" sz="2000" dirty="0" err="1"/>
-              <a:t>BiGUL</a:t>
-            </a:r>
-            <a:r>
-              <a:rPr lang="en-US" altLang="ja-JP" sz="2000" dirty="0"/>
-              <a:t> ([a],[b]) [b]</a:t>
-            </a:r>
-          </a:p>
-          <a:p>
-            <a:r>
-              <a:rPr lang="en-US" altLang="ja-JP" sz="2000" dirty="0" err="1"/>
-              <a:t>lensMap</a:t>
+              <a:t>lensFoldr</a:t>
             </a:r>
             <a:r>
               <a:rPr lang="en-US" altLang="ja-JP" sz="2000" dirty="0"/>
@@ -18385,84 +18198,104 @@
             </a:r>
             <a:r>
               <a:rPr lang="en-US" altLang="ja-JP" sz="2000" dirty="0"/>
-              <a:t> =  </a:t>
+              <a:t> </a:t>
             </a:r>
             <a:r>
               <a:rPr lang="en-US" altLang="ja-JP" sz="2000" dirty="0" err="1"/>
-              <a:t>lensFoldr</a:t>
+              <a:t>pv</a:t>
             </a:r>
             <a:r>
               <a:rPr lang="en-US" altLang="ja-JP" sz="2000" dirty="0"/>
-              <a:t> </a:t>
-            </a:r>
-            <a:r>
-              <a:rPr lang="en-US" altLang="ja-JP" sz="2000" dirty="0" err="1"/>
-              <a:t>bx</a:t>
-            </a:r>
+              <a:t> =</a:t>
+            </a:r>
+          </a:p>
+          <a:p>
             <a:r>
               <a:rPr lang="en-US" altLang="ja-JP" sz="2000" dirty="0"/>
-              <a:t>' null</a:t>
-            </a:r>
+              <a:t>  Case  [  </a:t>
+            </a:r>
+            <a:endParaRPr lang="en-US" altLang="ja-JP" sz="2000" dirty="0" smtClean="0"/>
+          </a:p>
+          <a:p>
+            <a:endParaRPr lang="en-US" altLang="ja-JP" sz="2000" dirty="0"/>
+          </a:p>
+          <a:p>
+            <a:endParaRPr lang="en-US" altLang="ja-JP" sz="2000" dirty="0"/>
           </a:p>
           <a:p>
             <a:r>
               <a:rPr lang="en-US" altLang="ja-JP" sz="2000" dirty="0"/>
-              <a:t>   where  </a:t>
-            </a:r>
-            <a:r>
-              <a:rPr lang="en-US" altLang="ja-JP" sz="2000" dirty="0" err="1"/>
-              <a:t>bx</a:t>
+              <a:t>        </a:t>
+            </a:r>
+            <a:r>
+              <a:rPr lang="en-US" altLang="ja-JP" sz="2000" dirty="0" smtClean="0"/>
+              <a:t> ,  </a:t>
             </a:r>
             <a:r>
               <a:rPr lang="en-US" altLang="ja-JP" sz="2000" dirty="0"/>
-              <a:t>' =  $(</a:t>
-            </a:r>
-            <a:r>
-              <a:rPr lang="en-US" altLang="ja-JP" sz="2000" dirty="0" err="1"/>
-              <a:t>rearrV</a:t>
-            </a:r>
-            <a:r>
-              <a:rPr lang="en-US" altLang="ja-JP" sz="2000" dirty="0"/>
-              <a:t> [| \(</a:t>
-            </a:r>
-            <a:r>
-              <a:rPr lang="en-US" altLang="ja-JP" sz="2000" dirty="0" err="1"/>
-              <a:t>v:vs</a:t>
-            </a:r>
-            <a:r>
-              <a:rPr lang="en-US" altLang="ja-JP" sz="2000" dirty="0"/>
-              <a:t>) -&gt; (</a:t>
-            </a:r>
-            <a:r>
-              <a:rPr lang="en-US" altLang="ja-JP" sz="2000" dirty="0" err="1"/>
-              <a:t>v,vs</a:t>
-            </a:r>
-            <a:r>
-              <a:rPr lang="en-US" altLang="ja-JP" sz="2000" dirty="0"/>
-              <a:t>) |]) $</a:t>
-            </a:r>
-          </a:p>
-          <a:p>
-            <a:r>
-              <a:rPr lang="en-US" altLang="ja-JP" sz="2000" dirty="0"/>
-              <a:t>                    </a:t>
-            </a:r>
-            <a:r>
-              <a:rPr lang="en-US" altLang="ja-JP" sz="2000" dirty="0" err="1"/>
-              <a:t>bx</a:t>
-            </a:r>
-            <a:r>
-              <a:rPr lang="en-US" altLang="ja-JP" sz="2000" dirty="0"/>
-              <a:t> `Prod` Replace</a:t>
-            </a:r>
-            <a:endParaRPr lang="ja-JP" altLang="en-US" sz="2000" dirty="0"/>
+              <a:t>$(normal [| \(s,_) v -&gt; null s |] </a:t>
+            </a:r>
+            <a:r>
+              <a:rPr lang="en-US" altLang="ja-JP" sz="2000" dirty="0">
+                <a:solidFill>
+                  <a:schemeClr val="bg1">
+                    <a:lumMod val="75000"/>
+                  </a:schemeClr>
+                </a:solidFill>
+              </a:rPr>
+              <a:t>[| \(s,_) -&gt; null s |]) </a:t>
+            </a:r>
+          </a:p>
+          <a:p>
+            <a:endParaRPr lang="en-US" altLang="ja-JP" sz="2000" dirty="0" smtClean="0"/>
+          </a:p>
+          <a:p>
+            <a:r>
+              <a:rPr lang="en-US" altLang="ja-JP" sz="2000" dirty="0" smtClean="0"/>
+              <a:t>            </a:t>
+            </a:r>
+          </a:p>
+          <a:p>
+            <a:r>
+              <a:rPr lang="en-US" altLang="ja-JP" sz="2000" dirty="0" smtClean="0"/>
+              <a:t>         ,  $(</a:t>
+            </a:r>
+            <a:r>
+              <a:rPr lang="en-US" altLang="ja-JP" sz="2000" dirty="0" err="1" smtClean="0"/>
+              <a:t>normalSV</a:t>
+            </a:r>
+            <a:r>
+              <a:rPr lang="en-US" altLang="ja-JP" sz="2000" dirty="0" smtClean="0"/>
+              <a:t> [p| _ |] [p| _ |] </a:t>
+            </a:r>
+            <a:r>
+              <a:rPr lang="en-US" altLang="ja-JP" sz="2000" dirty="0" smtClean="0">
+                <a:solidFill>
+                  <a:srgbClr val="BFBFBF"/>
+                </a:solidFill>
+              </a:rPr>
+              <a:t>[| \(s,_) -&gt; not (null s) |])</a:t>
+            </a:r>
+          </a:p>
+          <a:p>
+            <a:endParaRPr lang="en-US" altLang="ja-JP" sz="2000" dirty="0" smtClean="0"/>
+          </a:p>
+          <a:p>
+            <a:endParaRPr lang="en-US" altLang="ja-JP" sz="2000" dirty="0"/>
+          </a:p>
+          <a:p>
+            <a:r>
+              <a:rPr lang="en-US" altLang="ja-JP" sz="2000" dirty="0" smtClean="0"/>
+              <a:t>]</a:t>
+            </a:r>
+            <a:endParaRPr kumimoji="1" lang="ja-JP" altLang="en-US" sz="2000" dirty="0"/>
           </a:p>
         </p:txBody>
       </p:sp>
     </p:spTree>
     <p:extLst>
       <p:ext uri="{BB962C8B-B14F-4D97-AF65-F5344CB8AC3E}">
-        <p14:creationId xmlns:p14="http://schemas.microsoft.com/office/powerpoint/2010/main" val="1409970756"/>
+        <p14:creationId xmlns:p14="http://schemas.microsoft.com/office/powerpoint/2010/main" val="3303347013"/>
       </p:ext>
     </p:extLst>
   </p:cSld>
@@ -18513,7 +18346,7 @@
           <a:p>
             <a:r>
               <a:rPr kumimoji="1" lang="en-US" altLang="ja-JP" dirty="0" err="1" smtClean="0"/>
-              <a:t>LensReverse</a:t>
+              <a:t>lensFoldr</a:t>
             </a:r>
             <a:endParaRPr kumimoji="1" lang="ja-JP" altLang="en-US" dirty="0"/>
           </a:p>
@@ -18551,8 +18384,8 @@
         </p:nvSpPr>
         <p:spPr>
           <a:xfrm>
-            <a:off x="251520" y="2905591"/>
-            <a:ext cx="8769244" cy="2554545"/>
+            <a:off x="827584" y="1556792"/>
+            <a:ext cx="7410466" cy="4093428"/>
           </a:xfrm>
           <a:prstGeom prst="rect">
             <a:avLst/>
@@ -18572,6 +18405,1923 @@
           <a:p>
             <a:r>
               <a:rPr lang="en-US" altLang="ja-JP" sz="2000" dirty="0" err="1"/>
+              <a:t>lensFoldr</a:t>
+            </a:r>
+            <a:r>
+              <a:rPr lang="en-US" altLang="ja-JP" sz="2000" dirty="0"/>
+              <a:t> :: </a:t>
+            </a:r>
+            <a:r>
+              <a:rPr lang="en-US" altLang="ja-JP" sz="2000" dirty="0">
+                <a:solidFill>
+                  <a:srgbClr val="BFBFBF"/>
+                </a:solidFill>
+              </a:rPr>
+              <a:t>(Show a, Show b) </a:t>
+            </a:r>
+            <a:endParaRPr lang="en-US" altLang="ja-JP" sz="2000" dirty="0" smtClean="0">
+              <a:solidFill>
+                <a:srgbClr val="BFBFBF"/>
+              </a:solidFill>
+            </a:endParaRPr>
+          </a:p>
+          <a:p>
+            <a:r>
+              <a:rPr lang="en-US" altLang="ja-JP" sz="2000" dirty="0"/>
+              <a:t> </a:t>
+            </a:r>
+            <a:r>
+              <a:rPr lang="en-US" altLang="ja-JP" sz="2000" dirty="0" smtClean="0"/>
+              <a:t>          =</a:t>
+            </a:r>
+            <a:r>
+              <a:rPr lang="en-US" altLang="ja-JP" sz="2000" dirty="0"/>
+              <a:t>&gt; </a:t>
+            </a:r>
+            <a:r>
+              <a:rPr lang="en-US" altLang="ja-JP" sz="2000" dirty="0" err="1" smtClean="0"/>
+              <a:t>BiGUL</a:t>
+            </a:r>
+            <a:r>
+              <a:rPr lang="en-US" altLang="ja-JP" sz="2000" dirty="0" smtClean="0"/>
+              <a:t> </a:t>
+            </a:r>
+            <a:r>
+              <a:rPr lang="en-US" altLang="ja-JP" sz="2000" dirty="0"/>
+              <a:t>(a, b) b -&gt; (b-&gt;</a:t>
+            </a:r>
+            <a:r>
+              <a:rPr lang="en-US" altLang="ja-JP" sz="2000" dirty="0" err="1"/>
+              <a:t>Bool</a:t>
+            </a:r>
+            <a:r>
+              <a:rPr lang="en-US" altLang="ja-JP" sz="2000" dirty="0"/>
+              <a:t>) -&gt; </a:t>
+            </a:r>
+            <a:r>
+              <a:rPr lang="en-US" altLang="ja-JP" sz="2000" dirty="0" err="1"/>
+              <a:t>BiGUL</a:t>
+            </a:r>
+            <a:r>
+              <a:rPr lang="en-US" altLang="ja-JP" sz="2000" dirty="0"/>
+              <a:t> ([a], b) b</a:t>
+            </a:r>
+          </a:p>
+          <a:p>
+            <a:r>
+              <a:rPr lang="en-US" altLang="ja-JP" sz="2000" dirty="0" err="1"/>
+              <a:t>lensFoldr</a:t>
+            </a:r>
+            <a:r>
+              <a:rPr lang="en-US" altLang="ja-JP" sz="2000" dirty="0"/>
+              <a:t> </a:t>
+            </a:r>
+            <a:r>
+              <a:rPr lang="en-US" altLang="ja-JP" sz="2000" dirty="0" err="1"/>
+              <a:t>bx</a:t>
+            </a:r>
+            <a:r>
+              <a:rPr lang="en-US" altLang="ja-JP" sz="2000" dirty="0"/>
+              <a:t> </a:t>
+            </a:r>
+            <a:r>
+              <a:rPr lang="en-US" altLang="ja-JP" sz="2000" dirty="0" err="1"/>
+              <a:t>pv</a:t>
+            </a:r>
+            <a:r>
+              <a:rPr lang="en-US" altLang="ja-JP" sz="2000" dirty="0"/>
+              <a:t> =</a:t>
+            </a:r>
+          </a:p>
+          <a:p>
+            <a:r>
+              <a:rPr lang="en-US" altLang="ja-JP" sz="2000" dirty="0"/>
+              <a:t>  Case  [  $(adaptive [| \</a:t>
+            </a:r>
+            <a:r>
+              <a:rPr lang="en-US" altLang="ja-JP" sz="2000" dirty="0" smtClean="0"/>
+              <a:t>(s,</a:t>
+            </a:r>
+            <a:r>
+              <a:rPr lang="en-US" altLang="ja-JP" sz="2000" dirty="0"/>
+              <a:t>?</a:t>
+            </a:r>
+            <a:r>
+              <a:rPr lang="en-US" altLang="ja-JP" sz="2000" dirty="0" smtClean="0"/>
+              <a:t>) </a:t>
+            </a:r>
+            <a:r>
+              <a:rPr lang="en-US" altLang="ja-JP" sz="2000" dirty="0"/>
+              <a:t>v -&gt; </a:t>
+            </a:r>
+            <a:r>
+              <a:rPr lang="en-US" altLang="ja-JP" sz="2000" dirty="0" err="1"/>
+              <a:t>pv</a:t>
+            </a:r>
+            <a:r>
+              <a:rPr lang="en-US" altLang="ja-JP" sz="2000" dirty="0"/>
+              <a:t> v &amp;&amp; length </a:t>
+            </a:r>
+            <a:r>
+              <a:rPr lang="en-US" altLang="ja-JP" sz="2000" dirty="0" smtClean="0"/>
+              <a:t>s </a:t>
+            </a:r>
+            <a:r>
+              <a:rPr lang="en-US" altLang="ja-JP" sz="2000" dirty="0"/>
+              <a:t>/= 0 |]) </a:t>
+            </a:r>
+          </a:p>
+          <a:p>
+            <a:r>
+              <a:rPr lang="en-US" altLang="ja-JP" sz="2000" dirty="0"/>
+              <a:t>             ==&gt; \</a:t>
+            </a:r>
+            <a:r>
+              <a:rPr lang="en-US" altLang="ja-JP" sz="2000" dirty="0" smtClean="0"/>
+              <a:t>(</a:t>
+            </a:r>
+            <a:r>
+              <a:rPr lang="en-US" altLang="ja-JP" sz="2000" dirty="0" err="1"/>
+              <a:t>s</a:t>
+            </a:r>
+            <a:r>
+              <a:rPr lang="en-US" altLang="ja-JP" sz="2000" dirty="0" err="1" smtClean="0"/>
+              <a:t>,</a:t>
+            </a:r>
+            <a:r>
+              <a:rPr lang="en-US" altLang="ja-JP" sz="2000" dirty="0" err="1"/>
+              <a:t>y</a:t>
+            </a:r>
+            <a:r>
+              <a:rPr lang="en-US" altLang="ja-JP" sz="2000" dirty="0"/>
+              <a:t>) </a:t>
+            </a:r>
+            <a:r>
+              <a:rPr lang="en-US" altLang="ja-JP" sz="2000" dirty="0" smtClean="0"/>
+              <a:t>_ </a:t>
+            </a:r>
+            <a:r>
+              <a:rPr lang="en-US" altLang="ja-JP" sz="2000" dirty="0"/>
+              <a:t>-&gt; ([],y</a:t>
+            </a:r>
+            <a:r>
+              <a:rPr lang="en-US" altLang="ja-JP" sz="2000" dirty="0" smtClean="0"/>
+              <a:t>)</a:t>
+            </a:r>
+          </a:p>
+          <a:p>
+            <a:endParaRPr lang="en-US" altLang="ja-JP" sz="2000" dirty="0"/>
+          </a:p>
+          <a:p>
+            <a:r>
+              <a:rPr lang="en-US" altLang="ja-JP" sz="2000" dirty="0"/>
+              <a:t>        </a:t>
+            </a:r>
+            <a:r>
+              <a:rPr lang="en-US" altLang="ja-JP" sz="2000" dirty="0" smtClean="0"/>
+              <a:t> ,  </a:t>
+            </a:r>
+            <a:r>
+              <a:rPr lang="en-US" altLang="ja-JP" sz="2000" dirty="0"/>
+              <a:t>$(normal [| \(s,_) v -&gt; null s |] </a:t>
+            </a:r>
+            <a:r>
+              <a:rPr lang="en-US" altLang="ja-JP" sz="2000" dirty="0">
+                <a:solidFill>
+                  <a:schemeClr val="bg1">
+                    <a:lumMod val="75000"/>
+                  </a:schemeClr>
+                </a:solidFill>
+              </a:rPr>
+              <a:t>[| \(s,_) -&gt; null s |]) </a:t>
+            </a:r>
+          </a:p>
+          <a:p>
+            <a:r>
+              <a:rPr lang="en-US" altLang="ja-JP" sz="2000" dirty="0"/>
+              <a:t>             ==&gt; </a:t>
+            </a:r>
+            <a:r>
+              <a:rPr lang="en-US" altLang="ja-JP" sz="2000" dirty="0" smtClean="0"/>
+              <a:t>$</a:t>
+            </a:r>
+            <a:r>
+              <a:rPr lang="en-US" altLang="ja-JP" sz="2000" dirty="0"/>
+              <a:t>(update [p| (_, v) |] [p| </a:t>
+            </a:r>
+            <a:r>
+              <a:rPr lang="en-US" altLang="ja-JP" sz="2000" dirty="0" smtClean="0"/>
+              <a:t>v </a:t>
+            </a:r>
+            <a:r>
+              <a:rPr lang="en-US" altLang="ja-JP" sz="2000" dirty="0"/>
+              <a:t>|] [d| v = Replace |])</a:t>
+            </a:r>
+          </a:p>
+          <a:p>
+            <a:endParaRPr lang="en-US" altLang="ja-JP" sz="2000" dirty="0" smtClean="0"/>
+          </a:p>
+          <a:p>
+            <a:r>
+              <a:rPr lang="en-US" altLang="ja-JP" sz="2000" dirty="0" smtClean="0"/>
+              <a:t>         </a:t>
+            </a:r>
+            <a:r>
+              <a:rPr lang="en-US" altLang="ja-JP" sz="2000" dirty="0" smtClean="0"/>
+              <a:t>,  </a:t>
+            </a:r>
+            <a:r>
+              <a:rPr lang="en-US" altLang="ja-JP" sz="2000" dirty="0"/>
+              <a:t>$(</a:t>
+            </a:r>
+            <a:r>
+              <a:rPr lang="en-US" altLang="ja-JP" sz="2000" dirty="0" err="1"/>
+              <a:t>normalSV</a:t>
+            </a:r>
+            <a:r>
+              <a:rPr lang="en-US" altLang="ja-JP" sz="2000" dirty="0"/>
+              <a:t> [p| _ |] [p| _ |] </a:t>
+            </a:r>
+            <a:r>
+              <a:rPr lang="en-US" altLang="ja-JP" sz="2000" dirty="0">
+                <a:solidFill>
+                  <a:srgbClr val="BFBFBF"/>
+                </a:solidFill>
+              </a:rPr>
+              <a:t>[| \(s,_) -&gt; not (null s) |])</a:t>
+            </a:r>
+          </a:p>
+          <a:p>
+            <a:r>
+              <a:rPr lang="en-US" altLang="ja-JP" sz="2000" dirty="0"/>
+              <a:t>             ==&gt; $(</a:t>
+            </a:r>
+            <a:r>
+              <a:rPr lang="en-US" altLang="ja-JP" sz="2000" dirty="0" err="1"/>
+              <a:t>rearrS</a:t>
+            </a:r>
+            <a:r>
+              <a:rPr lang="en-US" altLang="ja-JP" sz="2000" dirty="0"/>
+              <a:t> [| \((</a:t>
+            </a:r>
+            <a:r>
+              <a:rPr lang="en-US" altLang="ja-JP" sz="2000" dirty="0" err="1"/>
+              <a:t>x:xs</a:t>
+            </a:r>
+            <a:r>
+              <a:rPr lang="en-US" altLang="ja-JP" sz="2000" dirty="0"/>
+              <a:t>), e) -&gt; (x, (</a:t>
+            </a:r>
+            <a:r>
+              <a:rPr lang="en-US" altLang="ja-JP" sz="2000" dirty="0" err="1"/>
+              <a:t>xs,e</a:t>
+            </a:r>
+            <a:r>
+              <a:rPr lang="en-US" altLang="ja-JP" sz="2000" dirty="0"/>
+              <a:t>))  |])</a:t>
+            </a:r>
+          </a:p>
+          <a:p>
+            <a:r>
+              <a:rPr lang="en-US" altLang="ja-JP" sz="2000" dirty="0"/>
+              <a:t>            </a:t>
+            </a:r>
+            <a:r>
+              <a:rPr lang="en-US" altLang="ja-JP" sz="2000" dirty="0" smtClean="0"/>
+              <a:t>        </a:t>
+            </a:r>
+            <a:r>
+              <a:rPr lang="en-US" altLang="ja-JP" sz="2000" dirty="0"/>
+              <a:t>(Replace `Prod` </a:t>
+            </a:r>
+            <a:r>
+              <a:rPr lang="en-US" altLang="ja-JP" sz="2000" dirty="0" err="1"/>
+              <a:t>lensFoldr</a:t>
+            </a:r>
+            <a:r>
+              <a:rPr lang="en-US" altLang="ja-JP" sz="2000" dirty="0"/>
+              <a:t> </a:t>
+            </a:r>
+            <a:r>
+              <a:rPr lang="en-US" altLang="ja-JP" sz="2000" dirty="0" err="1"/>
+              <a:t>bx</a:t>
+            </a:r>
+            <a:r>
+              <a:rPr lang="en-US" altLang="ja-JP" sz="2000" dirty="0"/>
+              <a:t> </a:t>
+            </a:r>
+            <a:r>
+              <a:rPr lang="en-US" altLang="ja-JP" sz="2000" dirty="0" err="1"/>
+              <a:t>pv</a:t>
+            </a:r>
+            <a:r>
+              <a:rPr lang="en-US" altLang="ja-JP" sz="2000" dirty="0"/>
+              <a:t>) `Compose` </a:t>
+            </a:r>
+            <a:r>
+              <a:rPr lang="en-US" altLang="ja-JP" sz="2000" dirty="0" err="1"/>
+              <a:t>bx</a:t>
+            </a:r>
+            <a:endParaRPr lang="en-US" altLang="ja-JP" sz="2000" dirty="0"/>
+          </a:p>
+          <a:p>
+            <a:r>
+              <a:rPr lang="en-US" altLang="ja-JP" sz="2000" dirty="0"/>
+              <a:t>        ]</a:t>
+            </a:r>
+            <a:endParaRPr kumimoji="1" lang="ja-JP" altLang="en-US" sz="2000" dirty="0"/>
+          </a:p>
+        </p:txBody>
+      </p:sp>
+    </p:spTree>
+    <p:extLst>
+      <p:ext uri="{BB962C8B-B14F-4D97-AF65-F5344CB8AC3E}">
+        <p14:creationId xmlns:p14="http://schemas.microsoft.com/office/powerpoint/2010/main" val="1467243109"/>
+      </p:ext>
+    </p:extLst>
+  </p:cSld>
+  <p:clrMapOvr>
+    <a:masterClrMapping/>
+  </p:clrMapOvr>
+  <p:timing>
+    <p:tnLst>
+      <p:par>
+        <p:cTn xmlns:p14="http://schemas.microsoft.com/office/powerpoint/2010/main" id="1" dur="indefinite" restart="never" nodeType="tmRoot"/>
+      </p:par>
+    </p:tnLst>
+  </p:timing>
+</p:sld>
+</file>
+
+<file path=ppt/slides/slide43.xml><?xml version="1.0" encoding="utf-8"?>
+<p:sld xmlns:a="http://schemas.openxmlformats.org/drawingml/2006/main" xmlns:r="http://schemas.openxmlformats.org/officeDocument/2006/relationships" xmlns:p="http://schemas.openxmlformats.org/presentationml/2006/main">
+  <p:cSld>
+    <p:spTree>
+      <p:nvGrpSpPr>
+        <p:cNvPr id="1" name=""/>
+        <p:cNvGrpSpPr/>
+        <p:nvPr/>
+      </p:nvGrpSpPr>
+      <p:grpSpPr>
+        <a:xfrm>
+          <a:off x="0" y="0"/>
+          <a:ext cx="0" cy="0"/>
+          <a:chOff x="0" y="0"/>
+          <a:chExt cx="0" cy="0"/>
+        </a:xfrm>
+      </p:grpSpPr>
+      <p:sp>
+        <p:nvSpPr>
+          <p:cNvPr id="2" name="タイトル 1"/>
+          <p:cNvSpPr>
+            <a:spLocks noGrp="1"/>
+          </p:cNvSpPr>
+          <p:nvPr>
+            <p:ph type="title"/>
+          </p:nvPr>
+        </p:nvSpPr>
+        <p:spPr/>
+        <p:txBody>
+          <a:bodyPr/>
+          <a:lstStyle/>
+          <a:p>
+            <a:r>
+              <a:rPr kumimoji="1" lang="en-US" altLang="ja-JP" dirty="0" err="1" smtClean="0"/>
+              <a:t>lensFoldr</a:t>
+            </a:r>
+            <a:endParaRPr kumimoji="1" lang="ja-JP" altLang="en-US" dirty="0"/>
+          </a:p>
+        </p:txBody>
+      </p:sp>
+      <p:sp>
+        <p:nvSpPr>
+          <p:cNvPr id="4" name="スライド番号プレースホルダー 3"/>
+          <p:cNvSpPr>
+            <a:spLocks noGrp="1"/>
+          </p:cNvSpPr>
+          <p:nvPr>
+            <p:ph type="sldNum" sz="quarter" idx="11"/>
+          </p:nvPr>
+        </p:nvSpPr>
+        <p:spPr/>
+        <p:txBody>
+          <a:bodyPr/>
+          <a:lstStyle/>
+          <a:p>
+            <a:fld id="{F96F1464-7F58-8745-A325-E585E650CEFA}" type="slidenum">
+              <a:rPr lang="ja-JP" altLang="en-US" smtClean="0"/>
+              <a:pPr/>
+              <a:t>43</a:t>
+            </a:fld>
+            <a:endParaRPr lang="ja-JP" altLang="en-US"/>
+          </a:p>
+        </p:txBody>
+      </p:sp>
+      <p:sp>
+        <p:nvSpPr>
+          <p:cNvPr id="5" name="テキスト ボックス 4"/>
+          <p:cNvSpPr txBox="1"/>
+          <p:nvPr/>
+        </p:nvSpPr>
+        <p:spPr>
+          <a:xfrm>
+            <a:off x="827584" y="1556792"/>
+            <a:ext cx="7362279" cy="4093428"/>
+          </a:xfrm>
+          <a:prstGeom prst="rect">
+            <a:avLst/>
+          </a:prstGeom>
+          <a:noFill/>
+          <a:ln>
+            <a:solidFill>
+              <a:srgbClr val="FF6600"/>
+            </a:solidFill>
+          </a:ln>
+        </p:spPr>
+        <p:txBody>
+          <a:bodyPr wrap="none" rtlCol="0">
+            <a:spAutoFit/>
+          </a:bodyPr>
+          <a:lstStyle/>
+          <a:p>
+            <a:r>
+              <a:rPr lang="en-US" altLang="ja-JP" sz="2000" dirty="0" err="1"/>
+              <a:t>lensFoldr</a:t>
+            </a:r>
+            <a:r>
+              <a:rPr lang="en-US" altLang="ja-JP" sz="2000" dirty="0"/>
+              <a:t> :: </a:t>
+            </a:r>
+            <a:r>
+              <a:rPr lang="en-US" altLang="ja-JP" sz="2000" dirty="0">
+                <a:solidFill>
+                  <a:srgbClr val="BFBFBF"/>
+                </a:solidFill>
+              </a:rPr>
+              <a:t>(Show a, Show b) </a:t>
+            </a:r>
+            <a:endParaRPr lang="en-US" altLang="ja-JP" sz="2000" dirty="0" smtClean="0">
+              <a:solidFill>
+                <a:srgbClr val="BFBFBF"/>
+              </a:solidFill>
+            </a:endParaRPr>
+          </a:p>
+          <a:p>
+            <a:r>
+              <a:rPr lang="en-US" altLang="ja-JP" sz="2000" dirty="0"/>
+              <a:t> </a:t>
+            </a:r>
+            <a:r>
+              <a:rPr lang="en-US" altLang="ja-JP" sz="2000" dirty="0" smtClean="0"/>
+              <a:t>          =</a:t>
+            </a:r>
+            <a:r>
+              <a:rPr lang="en-US" altLang="ja-JP" sz="2000" dirty="0"/>
+              <a:t>&gt; </a:t>
+            </a:r>
+            <a:r>
+              <a:rPr lang="en-US" altLang="ja-JP" sz="2000" dirty="0" err="1" smtClean="0"/>
+              <a:t>BiGUL</a:t>
+            </a:r>
+            <a:r>
+              <a:rPr lang="en-US" altLang="ja-JP" sz="2000" dirty="0" smtClean="0"/>
+              <a:t> </a:t>
+            </a:r>
+            <a:r>
+              <a:rPr lang="en-US" altLang="ja-JP" sz="2000" dirty="0"/>
+              <a:t>(a, b) b -&gt; (b-&gt;</a:t>
+            </a:r>
+            <a:r>
+              <a:rPr lang="en-US" altLang="ja-JP" sz="2000" dirty="0" err="1"/>
+              <a:t>Bool</a:t>
+            </a:r>
+            <a:r>
+              <a:rPr lang="en-US" altLang="ja-JP" sz="2000" dirty="0"/>
+              <a:t>) -&gt; </a:t>
+            </a:r>
+            <a:r>
+              <a:rPr lang="en-US" altLang="ja-JP" sz="2000" dirty="0" err="1"/>
+              <a:t>BiGUL</a:t>
+            </a:r>
+            <a:r>
+              <a:rPr lang="en-US" altLang="ja-JP" sz="2000" dirty="0"/>
+              <a:t> ([a], b) b</a:t>
+            </a:r>
+          </a:p>
+          <a:p>
+            <a:r>
+              <a:rPr lang="en-US" altLang="ja-JP" sz="2000" dirty="0" err="1"/>
+              <a:t>lensFoldr</a:t>
+            </a:r>
+            <a:r>
+              <a:rPr lang="en-US" altLang="ja-JP" sz="2000" dirty="0"/>
+              <a:t> </a:t>
+            </a:r>
+            <a:r>
+              <a:rPr lang="en-US" altLang="ja-JP" sz="2000" dirty="0" err="1"/>
+              <a:t>bx</a:t>
+            </a:r>
+            <a:r>
+              <a:rPr lang="en-US" altLang="ja-JP" sz="2000" dirty="0"/>
+              <a:t> </a:t>
+            </a:r>
+            <a:r>
+              <a:rPr lang="en-US" altLang="ja-JP" sz="2000" dirty="0" err="1"/>
+              <a:t>pv</a:t>
+            </a:r>
+            <a:r>
+              <a:rPr lang="en-US" altLang="ja-JP" sz="2000" dirty="0"/>
+              <a:t> =</a:t>
+            </a:r>
+          </a:p>
+          <a:p>
+            <a:r>
+              <a:rPr lang="en-US" altLang="ja-JP" sz="2000" dirty="0"/>
+              <a:t>  Case  [  </a:t>
+            </a:r>
+            <a:endParaRPr lang="en-US" altLang="ja-JP" sz="2000" dirty="0" smtClean="0"/>
+          </a:p>
+          <a:p>
+            <a:endParaRPr lang="en-US" altLang="ja-JP" sz="2000" dirty="0"/>
+          </a:p>
+          <a:p>
+            <a:endParaRPr lang="en-US" altLang="ja-JP" sz="2000" dirty="0"/>
+          </a:p>
+          <a:p>
+            <a:r>
+              <a:rPr lang="en-US" altLang="ja-JP" sz="2000" dirty="0"/>
+              <a:t>        </a:t>
+            </a:r>
+            <a:r>
+              <a:rPr lang="en-US" altLang="ja-JP" sz="2000" dirty="0" smtClean="0"/>
+              <a:t> ,  </a:t>
+            </a:r>
+            <a:r>
+              <a:rPr lang="en-US" altLang="ja-JP" sz="2000" dirty="0"/>
+              <a:t>$(normal [| \(s,_) v -&gt; null s |] </a:t>
+            </a:r>
+            <a:r>
+              <a:rPr lang="en-US" altLang="ja-JP" sz="2000" dirty="0">
+                <a:solidFill>
+                  <a:schemeClr val="bg1">
+                    <a:lumMod val="75000"/>
+                  </a:schemeClr>
+                </a:solidFill>
+              </a:rPr>
+              <a:t>[| \(s,_) -&gt; null s |]) </a:t>
+            </a:r>
+          </a:p>
+          <a:p>
+            <a:r>
+              <a:rPr lang="en-US" altLang="ja-JP" sz="2000" dirty="0"/>
+              <a:t>             ==&gt; </a:t>
+            </a:r>
+            <a:r>
+              <a:rPr lang="en-US" altLang="ja-JP" sz="2000" dirty="0" smtClean="0"/>
+              <a:t>$</a:t>
+            </a:r>
+            <a:r>
+              <a:rPr lang="en-US" altLang="ja-JP" sz="2000" dirty="0"/>
+              <a:t>(update [p| (_, v) |] [p| </a:t>
+            </a:r>
+            <a:r>
+              <a:rPr lang="en-US" altLang="ja-JP" sz="2000" dirty="0" smtClean="0"/>
+              <a:t>v </a:t>
+            </a:r>
+            <a:r>
+              <a:rPr lang="en-US" altLang="ja-JP" sz="2000" dirty="0"/>
+              <a:t>|] [d| v = Replace |])</a:t>
+            </a:r>
+          </a:p>
+          <a:p>
+            <a:endParaRPr lang="en-US" altLang="ja-JP" sz="2000" dirty="0" smtClean="0"/>
+          </a:p>
+          <a:p>
+            <a:r>
+              <a:rPr lang="en-US" altLang="ja-JP" sz="2000" dirty="0" smtClean="0"/>
+              <a:t>         </a:t>
+            </a:r>
+            <a:r>
+              <a:rPr lang="en-US" altLang="ja-JP" sz="2000" dirty="0" smtClean="0"/>
+              <a:t>,  </a:t>
+            </a:r>
+            <a:r>
+              <a:rPr lang="en-US" altLang="ja-JP" sz="2000" dirty="0"/>
+              <a:t>$(</a:t>
+            </a:r>
+            <a:r>
+              <a:rPr lang="en-US" altLang="ja-JP" sz="2000" dirty="0" err="1"/>
+              <a:t>normalSV</a:t>
+            </a:r>
+            <a:r>
+              <a:rPr lang="en-US" altLang="ja-JP" sz="2000" dirty="0"/>
+              <a:t> [p| _ |] [p| _ |] </a:t>
+            </a:r>
+            <a:r>
+              <a:rPr lang="en-US" altLang="ja-JP" sz="2000" dirty="0">
+                <a:solidFill>
+                  <a:srgbClr val="BFBFBF"/>
+                </a:solidFill>
+              </a:rPr>
+              <a:t>[| \(s,_) -&gt; not (null s) |])</a:t>
+            </a:r>
+          </a:p>
+          <a:p>
+            <a:endParaRPr lang="en-US" altLang="ja-JP" sz="2000" dirty="0" smtClean="0"/>
+          </a:p>
+          <a:p>
+            <a:endParaRPr lang="en-US" altLang="ja-JP" sz="2000" dirty="0"/>
+          </a:p>
+          <a:p>
+            <a:r>
+              <a:rPr lang="en-US" altLang="ja-JP" sz="2000" dirty="0" smtClean="0"/>
+              <a:t>]</a:t>
+            </a:r>
+            <a:endParaRPr kumimoji="1" lang="ja-JP" altLang="en-US" sz="2000" dirty="0"/>
+          </a:p>
+        </p:txBody>
+      </p:sp>
+    </p:spTree>
+    <p:extLst>
+      <p:ext uri="{BB962C8B-B14F-4D97-AF65-F5344CB8AC3E}">
+        <p14:creationId xmlns:p14="http://schemas.microsoft.com/office/powerpoint/2010/main" val="526950990"/>
+      </p:ext>
+    </p:extLst>
+  </p:cSld>
+  <p:clrMapOvr>
+    <a:masterClrMapping/>
+  </p:clrMapOvr>
+  <p:timing>
+    <p:tnLst>
+      <p:par>
+        <p:cTn xmlns:p14="http://schemas.microsoft.com/office/powerpoint/2010/main" id="1" dur="indefinite" restart="never" nodeType="tmRoot"/>
+      </p:par>
+    </p:tnLst>
+  </p:timing>
+</p:sld>
+</file>
+
+<file path=ppt/slides/slide44.xml><?xml version="1.0" encoding="utf-8"?>
+<p:sld xmlns:a="http://schemas.openxmlformats.org/drawingml/2006/main" xmlns:r="http://schemas.openxmlformats.org/officeDocument/2006/relationships" xmlns:p="http://schemas.openxmlformats.org/presentationml/2006/main">
+  <p:cSld>
+    <p:spTree>
+      <p:nvGrpSpPr>
+        <p:cNvPr id="1" name=""/>
+        <p:cNvGrpSpPr/>
+        <p:nvPr/>
+      </p:nvGrpSpPr>
+      <p:grpSpPr>
+        <a:xfrm>
+          <a:off x="0" y="0"/>
+          <a:ext cx="0" cy="0"/>
+          <a:chOff x="0" y="0"/>
+          <a:chExt cx="0" cy="0"/>
+        </a:xfrm>
+      </p:grpSpPr>
+      <p:sp>
+        <p:nvSpPr>
+          <p:cNvPr id="2" name="タイトル 1"/>
+          <p:cNvSpPr>
+            <a:spLocks noGrp="1"/>
+          </p:cNvSpPr>
+          <p:nvPr>
+            <p:ph type="title"/>
+          </p:nvPr>
+        </p:nvSpPr>
+        <p:spPr/>
+        <p:txBody>
+          <a:bodyPr/>
+          <a:lstStyle/>
+          <a:p>
+            <a:r>
+              <a:rPr kumimoji="1" lang="en-US" altLang="ja-JP" dirty="0" err="1" smtClean="0"/>
+              <a:t>lensFoldr</a:t>
+            </a:r>
+            <a:endParaRPr kumimoji="1" lang="ja-JP" altLang="en-US" dirty="0"/>
+          </a:p>
+        </p:txBody>
+      </p:sp>
+      <p:sp>
+        <p:nvSpPr>
+          <p:cNvPr id="4" name="スライド番号プレースホルダー 3"/>
+          <p:cNvSpPr>
+            <a:spLocks noGrp="1"/>
+          </p:cNvSpPr>
+          <p:nvPr>
+            <p:ph type="sldNum" sz="quarter" idx="11"/>
+          </p:nvPr>
+        </p:nvSpPr>
+        <p:spPr/>
+        <p:txBody>
+          <a:bodyPr/>
+          <a:lstStyle/>
+          <a:p>
+            <a:fld id="{F96F1464-7F58-8745-A325-E585E650CEFA}" type="slidenum">
+              <a:rPr lang="ja-JP" altLang="en-US" smtClean="0"/>
+              <a:pPr/>
+              <a:t>44</a:t>
+            </a:fld>
+            <a:endParaRPr lang="ja-JP" altLang="en-US"/>
+          </a:p>
+        </p:txBody>
+      </p:sp>
+      <p:sp>
+        <p:nvSpPr>
+          <p:cNvPr id="5" name="テキスト ボックス 4"/>
+          <p:cNvSpPr txBox="1"/>
+          <p:nvPr/>
+        </p:nvSpPr>
+        <p:spPr>
+          <a:xfrm>
+            <a:off x="827584" y="1556792"/>
+            <a:ext cx="7410466" cy="4093428"/>
+          </a:xfrm>
+          <a:prstGeom prst="rect">
+            <a:avLst/>
+          </a:prstGeom>
+          <a:noFill/>
+          <a:ln>
+            <a:solidFill>
+              <a:srgbClr val="FF6600"/>
+            </a:solidFill>
+          </a:ln>
+        </p:spPr>
+        <p:txBody>
+          <a:bodyPr wrap="none" rtlCol="0">
+            <a:spAutoFit/>
+          </a:bodyPr>
+          <a:lstStyle/>
+          <a:p>
+            <a:r>
+              <a:rPr lang="en-US" altLang="ja-JP" sz="2000" dirty="0" err="1"/>
+              <a:t>lensFoldr</a:t>
+            </a:r>
+            <a:r>
+              <a:rPr lang="en-US" altLang="ja-JP" sz="2000" dirty="0"/>
+              <a:t> :: </a:t>
+            </a:r>
+            <a:r>
+              <a:rPr lang="en-US" altLang="ja-JP" sz="2000" dirty="0">
+                <a:solidFill>
+                  <a:srgbClr val="BFBFBF"/>
+                </a:solidFill>
+              </a:rPr>
+              <a:t>(Show a, Show b) </a:t>
+            </a:r>
+            <a:endParaRPr lang="en-US" altLang="ja-JP" sz="2000" dirty="0" smtClean="0">
+              <a:solidFill>
+                <a:srgbClr val="BFBFBF"/>
+              </a:solidFill>
+            </a:endParaRPr>
+          </a:p>
+          <a:p>
+            <a:r>
+              <a:rPr lang="en-US" altLang="ja-JP" sz="2000" dirty="0"/>
+              <a:t> </a:t>
+            </a:r>
+            <a:r>
+              <a:rPr lang="en-US" altLang="ja-JP" sz="2000" dirty="0" smtClean="0"/>
+              <a:t>          =</a:t>
+            </a:r>
+            <a:r>
+              <a:rPr lang="en-US" altLang="ja-JP" sz="2000" dirty="0"/>
+              <a:t>&gt; </a:t>
+            </a:r>
+            <a:r>
+              <a:rPr lang="en-US" altLang="ja-JP" sz="2000" dirty="0" err="1" smtClean="0"/>
+              <a:t>BiGUL</a:t>
+            </a:r>
+            <a:r>
+              <a:rPr lang="en-US" altLang="ja-JP" sz="2000" dirty="0" smtClean="0"/>
+              <a:t> </a:t>
+            </a:r>
+            <a:r>
+              <a:rPr lang="en-US" altLang="ja-JP" sz="2000" dirty="0"/>
+              <a:t>(a, b) b -&gt; (b-&gt;</a:t>
+            </a:r>
+            <a:r>
+              <a:rPr lang="en-US" altLang="ja-JP" sz="2000" dirty="0" err="1"/>
+              <a:t>Bool</a:t>
+            </a:r>
+            <a:r>
+              <a:rPr lang="en-US" altLang="ja-JP" sz="2000" dirty="0"/>
+              <a:t>) -&gt; </a:t>
+            </a:r>
+            <a:r>
+              <a:rPr lang="en-US" altLang="ja-JP" sz="2000" dirty="0" err="1"/>
+              <a:t>BiGUL</a:t>
+            </a:r>
+            <a:r>
+              <a:rPr lang="en-US" altLang="ja-JP" sz="2000" dirty="0"/>
+              <a:t> ([a], b) b</a:t>
+            </a:r>
+          </a:p>
+          <a:p>
+            <a:r>
+              <a:rPr lang="en-US" altLang="ja-JP" sz="2000" dirty="0" err="1"/>
+              <a:t>lensFoldr</a:t>
+            </a:r>
+            <a:r>
+              <a:rPr lang="en-US" altLang="ja-JP" sz="2000" dirty="0"/>
+              <a:t> </a:t>
+            </a:r>
+            <a:r>
+              <a:rPr lang="en-US" altLang="ja-JP" sz="2000" dirty="0" err="1"/>
+              <a:t>bx</a:t>
+            </a:r>
+            <a:r>
+              <a:rPr lang="en-US" altLang="ja-JP" sz="2000" dirty="0"/>
+              <a:t> </a:t>
+            </a:r>
+            <a:r>
+              <a:rPr lang="en-US" altLang="ja-JP" sz="2000" dirty="0" err="1"/>
+              <a:t>pv</a:t>
+            </a:r>
+            <a:r>
+              <a:rPr lang="en-US" altLang="ja-JP" sz="2000" dirty="0"/>
+              <a:t> =</a:t>
+            </a:r>
+          </a:p>
+          <a:p>
+            <a:r>
+              <a:rPr lang="en-US" altLang="ja-JP" sz="2000" dirty="0"/>
+              <a:t>  </a:t>
+            </a:r>
+            <a:r>
+              <a:rPr lang="en-US" altLang="ja-JP" sz="2000" dirty="0" smtClean="0"/>
+              <a:t>Case</a:t>
+            </a:r>
+          </a:p>
+          <a:p>
+            <a:endParaRPr lang="en-US" altLang="ja-JP" sz="2000" dirty="0"/>
+          </a:p>
+          <a:p>
+            <a:endParaRPr lang="en-US" altLang="ja-JP" sz="2000" dirty="0"/>
+          </a:p>
+          <a:p>
+            <a:r>
+              <a:rPr lang="en-US" altLang="ja-JP" sz="2000" dirty="0"/>
+              <a:t>        </a:t>
+            </a:r>
+            <a:r>
+              <a:rPr lang="en-US" altLang="ja-JP" sz="2000" dirty="0" smtClean="0"/>
+              <a:t> ,  </a:t>
+            </a:r>
+            <a:r>
+              <a:rPr lang="en-US" altLang="ja-JP" sz="2000" dirty="0"/>
+              <a:t>$(normal [| \(s,_) v -&gt; null s |] </a:t>
+            </a:r>
+            <a:r>
+              <a:rPr lang="en-US" altLang="ja-JP" sz="2000" dirty="0">
+                <a:solidFill>
+                  <a:schemeClr val="bg1">
+                    <a:lumMod val="75000"/>
+                  </a:schemeClr>
+                </a:solidFill>
+              </a:rPr>
+              <a:t>[| \(s,_) -&gt; null s |]) </a:t>
+            </a:r>
+          </a:p>
+          <a:p>
+            <a:r>
+              <a:rPr lang="en-US" altLang="ja-JP" sz="2000" dirty="0"/>
+              <a:t>             ==&gt; </a:t>
+            </a:r>
+            <a:r>
+              <a:rPr lang="en-US" altLang="ja-JP" sz="2000" dirty="0" smtClean="0"/>
+              <a:t>$</a:t>
+            </a:r>
+            <a:r>
+              <a:rPr lang="en-US" altLang="ja-JP" sz="2000" dirty="0"/>
+              <a:t>(update [p| (_, v) |] [p| </a:t>
+            </a:r>
+            <a:r>
+              <a:rPr lang="en-US" altLang="ja-JP" sz="2000" dirty="0" smtClean="0"/>
+              <a:t>v </a:t>
+            </a:r>
+            <a:r>
+              <a:rPr lang="en-US" altLang="ja-JP" sz="2000" dirty="0"/>
+              <a:t>|] [d| v = Replace |])</a:t>
+            </a:r>
+          </a:p>
+          <a:p>
+            <a:endParaRPr lang="en-US" altLang="ja-JP" sz="2000" dirty="0" smtClean="0"/>
+          </a:p>
+          <a:p>
+            <a:r>
+              <a:rPr lang="en-US" altLang="ja-JP" sz="2000" dirty="0" smtClean="0"/>
+              <a:t>         </a:t>
+            </a:r>
+            <a:r>
+              <a:rPr lang="en-US" altLang="ja-JP" sz="2000" dirty="0" smtClean="0"/>
+              <a:t>,  </a:t>
+            </a:r>
+            <a:r>
+              <a:rPr lang="en-US" altLang="ja-JP" sz="2000" dirty="0"/>
+              <a:t>$(</a:t>
+            </a:r>
+            <a:r>
+              <a:rPr lang="en-US" altLang="ja-JP" sz="2000" dirty="0" err="1"/>
+              <a:t>normalSV</a:t>
+            </a:r>
+            <a:r>
+              <a:rPr lang="en-US" altLang="ja-JP" sz="2000" dirty="0"/>
+              <a:t> [p| _ |] [p| _ |] </a:t>
+            </a:r>
+            <a:r>
+              <a:rPr lang="en-US" altLang="ja-JP" sz="2000" dirty="0">
+                <a:solidFill>
+                  <a:srgbClr val="BFBFBF"/>
+                </a:solidFill>
+              </a:rPr>
+              <a:t>[| \(s,_) -&gt; not (null s) |])</a:t>
+            </a:r>
+          </a:p>
+          <a:p>
+            <a:r>
+              <a:rPr lang="en-US" altLang="ja-JP" sz="2000" dirty="0"/>
+              <a:t>             ==&gt; $(</a:t>
+            </a:r>
+            <a:r>
+              <a:rPr lang="en-US" altLang="ja-JP" sz="2000" dirty="0" err="1"/>
+              <a:t>rearrS</a:t>
+            </a:r>
+            <a:r>
+              <a:rPr lang="en-US" altLang="ja-JP" sz="2000" dirty="0"/>
+              <a:t> [| \((</a:t>
+            </a:r>
+            <a:r>
+              <a:rPr lang="en-US" altLang="ja-JP" sz="2000" dirty="0" err="1"/>
+              <a:t>x:xs</a:t>
+            </a:r>
+            <a:r>
+              <a:rPr lang="en-US" altLang="ja-JP" sz="2000" dirty="0"/>
+              <a:t>), e) -&gt; (x, (</a:t>
+            </a:r>
+            <a:r>
+              <a:rPr lang="en-US" altLang="ja-JP" sz="2000" dirty="0" err="1"/>
+              <a:t>xs,e</a:t>
+            </a:r>
+            <a:r>
+              <a:rPr lang="en-US" altLang="ja-JP" sz="2000" dirty="0"/>
+              <a:t>))  |])</a:t>
+            </a:r>
+          </a:p>
+          <a:p>
+            <a:r>
+              <a:rPr lang="en-US" altLang="ja-JP" sz="2000" dirty="0"/>
+              <a:t>            </a:t>
+            </a:r>
+            <a:r>
+              <a:rPr lang="en-US" altLang="ja-JP" sz="2000" dirty="0" smtClean="0"/>
+              <a:t>        </a:t>
+            </a:r>
+            <a:r>
+              <a:rPr lang="en-US" altLang="ja-JP" sz="2000" dirty="0"/>
+              <a:t>(Replace `Prod` </a:t>
+            </a:r>
+            <a:r>
+              <a:rPr lang="en-US" altLang="ja-JP" sz="2000" dirty="0" err="1"/>
+              <a:t>lensFoldr</a:t>
+            </a:r>
+            <a:r>
+              <a:rPr lang="en-US" altLang="ja-JP" sz="2000" dirty="0"/>
+              <a:t> </a:t>
+            </a:r>
+            <a:r>
+              <a:rPr lang="en-US" altLang="ja-JP" sz="2000" dirty="0" err="1"/>
+              <a:t>bx</a:t>
+            </a:r>
+            <a:r>
+              <a:rPr lang="en-US" altLang="ja-JP" sz="2000" dirty="0"/>
+              <a:t> </a:t>
+            </a:r>
+            <a:r>
+              <a:rPr lang="en-US" altLang="ja-JP" sz="2000" dirty="0" err="1"/>
+              <a:t>pv</a:t>
+            </a:r>
+            <a:r>
+              <a:rPr lang="en-US" altLang="ja-JP" sz="2000" dirty="0"/>
+              <a:t>) `Compose` </a:t>
+            </a:r>
+            <a:r>
+              <a:rPr lang="en-US" altLang="ja-JP" sz="2000" dirty="0" err="1"/>
+              <a:t>bx</a:t>
+            </a:r>
+            <a:endParaRPr lang="en-US" altLang="ja-JP" sz="2000" dirty="0"/>
+          </a:p>
+          <a:p>
+            <a:r>
+              <a:rPr lang="en-US" altLang="ja-JP" sz="2000" dirty="0"/>
+              <a:t>        ]</a:t>
+            </a:r>
+            <a:endParaRPr kumimoji="1" lang="ja-JP" altLang="en-US" sz="2000" dirty="0"/>
+          </a:p>
+        </p:txBody>
+      </p:sp>
+    </p:spTree>
+    <p:extLst>
+      <p:ext uri="{BB962C8B-B14F-4D97-AF65-F5344CB8AC3E}">
+        <p14:creationId xmlns:p14="http://schemas.microsoft.com/office/powerpoint/2010/main" val="157416706"/>
+      </p:ext>
+    </p:extLst>
+  </p:cSld>
+  <p:clrMapOvr>
+    <a:masterClrMapping/>
+  </p:clrMapOvr>
+  <p:timing>
+    <p:tnLst>
+      <p:par>
+        <p:cTn xmlns:p14="http://schemas.microsoft.com/office/powerpoint/2010/main" id="1" dur="indefinite" restart="never" nodeType="tmRoot"/>
+      </p:par>
+    </p:tnLst>
+  </p:timing>
+</p:sld>
+</file>
+
+<file path=ppt/slides/slide45.xml><?xml version="1.0" encoding="utf-8"?>
+<p:sld xmlns:a="http://schemas.openxmlformats.org/drawingml/2006/main" xmlns:r="http://schemas.openxmlformats.org/officeDocument/2006/relationships" xmlns:p="http://schemas.openxmlformats.org/presentationml/2006/main">
+  <p:cSld>
+    <p:spTree>
+      <p:nvGrpSpPr>
+        <p:cNvPr id="1" name=""/>
+        <p:cNvGrpSpPr/>
+        <p:nvPr/>
+      </p:nvGrpSpPr>
+      <p:grpSpPr>
+        <a:xfrm>
+          <a:off x="0" y="0"/>
+          <a:ext cx="0" cy="0"/>
+          <a:chOff x="0" y="0"/>
+          <a:chExt cx="0" cy="0"/>
+        </a:xfrm>
+      </p:grpSpPr>
+      <p:sp>
+        <p:nvSpPr>
+          <p:cNvPr id="2" name="タイトル 1"/>
+          <p:cNvSpPr>
+            <a:spLocks noGrp="1"/>
+          </p:cNvSpPr>
+          <p:nvPr>
+            <p:ph type="title"/>
+          </p:nvPr>
+        </p:nvSpPr>
+        <p:spPr/>
+        <p:txBody>
+          <a:bodyPr/>
+          <a:lstStyle/>
+          <a:p>
+            <a:r>
+              <a:rPr kumimoji="1" lang="en-US" altLang="ja-JP" dirty="0" err="1" smtClean="0"/>
+              <a:t>lensFoldr</a:t>
+            </a:r>
+            <a:endParaRPr kumimoji="1" lang="ja-JP" altLang="en-US" dirty="0"/>
+          </a:p>
+        </p:txBody>
+      </p:sp>
+      <p:sp>
+        <p:nvSpPr>
+          <p:cNvPr id="4" name="スライド番号プレースホルダー 3"/>
+          <p:cNvSpPr>
+            <a:spLocks noGrp="1"/>
+          </p:cNvSpPr>
+          <p:nvPr>
+            <p:ph type="sldNum" sz="quarter" idx="11"/>
+          </p:nvPr>
+        </p:nvSpPr>
+        <p:spPr/>
+        <p:txBody>
+          <a:bodyPr/>
+          <a:lstStyle/>
+          <a:p>
+            <a:fld id="{F96F1464-7F58-8745-A325-E585E650CEFA}" type="slidenum">
+              <a:rPr lang="ja-JP" altLang="en-US" smtClean="0"/>
+              <a:pPr/>
+              <a:t>45</a:t>
+            </a:fld>
+            <a:endParaRPr lang="ja-JP" altLang="en-US"/>
+          </a:p>
+        </p:txBody>
+      </p:sp>
+      <p:sp>
+        <p:nvSpPr>
+          <p:cNvPr id="5" name="テキスト ボックス 4"/>
+          <p:cNvSpPr txBox="1"/>
+          <p:nvPr/>
+        </p:nvSpPr>
+        <p:spPr>
+          <a:xfrm>
+            <a:off x="827584" y="1556792"/>
+            <a:ext cx="7410466" cy="4093428"/>
+          </a:xfrm>
+          <a:prstGeom prst="rect">
+            <a:avLst/>
+          </a:prstGeom>
+          <a:noFill/>
+          <a:ln>
+            <a:solidFill>
+              <a:srgbClr val="FF6600"/>
+            </a:solidFill>
+          </a:ln>
+        </p:spPr>
+        <p:txBody>
+          <a:bodyPr wrap="none" rtlCol="0">
+            <a:spAutoFit/>
+          </a:bodyPr>
+          <a:lstStyle/>
+          <a:p>
+            <a:r>
+              <a:rPr lang="en-US" altLang="ja-JP" sz="2000" dirty="0" err="1"/>
+              <a:t>lensFoldr</a:t>
+            </a:r>
+            <a:r>
+              <a:rPr lang="en-US" altLang="ja-JP" sz="2000" dirty="0"/>
+              <a:t> :: </a:t>
+            </a:r>
+            <a:r>
+              <a:rPr lang="en-US" altLang="ja-JP" sz="2000" dirty="0">
+                <a:solidFill>
+                  <a:srgbClr val="BFBFBF"/>
+                </a:solidFill>
+              </a:rPr>
+              <a:t>(Show a, Show b) </a:t>
+            </a:r>
+            <a:endParaRPr lang="en-US" altLang="ja-JP" sz="2000" dirty="0" smtClean="0">
+              <a:solidFill>
+                <a:srgbClr val="BFBFBF"/>
+              </a:solidFill>
+            </a:endParaRPr>
+          </a:p>
+          <a:p>
+            <a:r>
+              <a:rPr lang="en-US" altLang="ja-JP" sz="2000" dirty="0"/>
+              <a:t> </a:t>
+            </a:r>
+            <a:r>
+              <a:rPr lang="en-US" altLang="ja-JP" sz="2000" dirty="0" smtClean="0"/>
+              <a:t>          =</a:t>
+            </a:r>
+            <a:r>
+              <a:rPr lang="en-US" altLang="ja-JP" sz="2000" dirty="0"/>
+              <a:t>&gt; </a:t>
+            </a:r>
+            <a:r>
+              <a:rPr lang="en-US" altLang="ja-JP" sz="2000" dirty="0" err="1" smtClean="0"/>
+              <a:t>BiGUL</a:t>
+            </a:r>
+            <a:r>
+              <a:rPr lang="en-US" altLang="ja-JP" sz="2000" dirty="0" smtClean="0"/>
+              <a:t> </a:t>
+            </a:r>
+            <a:r>
+              <a:rPr lang="en-US" altLang="ja-JP" sz="2000" dirty="0"/>
+              <a:t>(a, b) b -&gt; (b-&gt;</a:t>
+            </a:r>
+            <a:r>
+              <a:rPr lang="en-US" altLang="ja-JP" sz="2000" dirty="0" err="1"/>
+              <a:t>Bool</a:t>
+            </a:r>
+            <a:r>
+              <a:rPr lang="en-US" altLang="ja-JP" sz="2000" dirty="0"/>
+              <a:t>) -&gt; </a:t>
+            </a:r>
+            <a:r>
+              <a:rPr lang="en-US" altLang="ja-JP" sz="2000" dirty="0" err="1"/>
+              <a:t>BiGUL</a:t>
+            </a:r>
+            <a:r>
+              <a:rPr lang="en-US" altLang="ja-JP" sz="2000" dirty="0"/>
+              <a:t> ([a], b) b</a:t>
+            </a:r>
+          </a:p>
+          <a:p>
+            <a:r>
+              <a:rPr lang="en-US" altLang="ja-JP" sz="2000" dirty="0" err="1"/>
+              <a:t>lensFoldr</a:t>
+            </a:r>
+            <a:r>
+              <a:rPr lang="en-US" altLang="ja-JP" sz="2000" dirty="0"/>
+              <a:t> </a:t>
+            </a:r>
+            <a:r>
+              <a:rPr lang="en-US" altLang="ja-JP" sz="2000" dirty="0" err="1"/>
+              <a:t>bx</a:t>
+            </a:r>
+            <a:r>
+              <a:rPr lang="en-US" altLang="ja-JP" sz="2000" dirty="0"/>
+              <a:t> </a:t>
+            </a:r>
+            <a:r>
+              <a:rPr lang="en-US" altLang="ja-JP" sz="2000" dirty="0" err="1"/>
+              <a:t>pv</a:t>
+            </a:r>
+            <a:r>
+              <a:rPr lang="en-US" altLang="ja-JP" sz="2000" dirty="0"/>
+              <a:t> =</a:t>
+            </a:r>
+          </a:p>
+          <a:p>
+            <a:r>
+              <a:rPr lang="en-US" altLang="ja-JP" sz="2000" dirty="0"/>
+              <a:t>  Case  [  $(adaptive [| \</a:t>
+            </a:r>
+            <a:r>
+              <a:rPr lang="en-US" altLang="ja-JP" sz="2000" dirty="0" smtClean="0"/>
+              <a:t>(s,</a:t>
+            </a:r>
+            <a:r>
+              <a:rPr lang="en-US" altLang="ja-JP" sz="2000" dirty="0"/>
+              <a:t>?</a:t>
+            </a:r>
+            <a:r>
+              <a:rPr lang="en-US" altLang="ja-JP" sz="2000" dirty="0" smtClean="0"/>
+              <a:t>) </a:t>
+            </a:r>
+            <a:r>
+              <a:rPr lang="en-US" altLang="ja-JP" sz="2000" dirty="0"/>
+              <a:t>v -&gt; </a:t>
+            </a:r>
+            <a:r>
+              <a:rPr lang="en-US" altLang="ja-JP" sz="2000" dirty="0" err="1"/>
+              <a:t>pv</a:t>
+            </a:r>
+            <a:r>
+              <a:rPr lang="en-US" altLang="ja-JP" sz="2000" dirty="0"/>
+              <a:t> v &amp;&amp; length </a:t>
+            </a:r>
+            <a:r>
+              <a:rPr lang="en-US" altLang="ja-JP" sz="2000" dirty="0" smtClean="0"/>
+              <a:t>s </a:t>
+            </a:r>
+            <a:r>
+              <a:rPr lang="en-US" altLang="ja-JP" sz="2000" dirty="0"/>
+              <a:t>/= 0 |]) </a:t>
+            </a:r>
+          </a:p>
+          <a:p>
+            <a:r>
+              <a:rPr lang="en-US" altLang="ja-JP" sz="2000" dirty="0"/>
+              <a:t>             ==&gt; \</a:t>
+            </a:r>
+            <a:r>
+              <a:rPr lang="en-US" altLang="ja-JP" sz="2000" dirty="0" smtClean="0"/>
+              <a:t>(</a:t>
+            </a:r>
+            <a:r>
+              <a:rPr lang="en-US" altLang="ja-JP" sz="2000" dirty="0" err="1"/>
+              <a:t>s</a:t>
+            </a:r>
+            <a:r>
+              <a:rPr lang="en-US" altLang="ja-JP" sz="2000" dirty="0" err="1" smtClean="0"/>
+              <a:t>,</a:t>
+            </a:r>
+            <a:r>
+              <a:rPr lang="en-US" altLang="ja-JP" sz="2000" dirty="0" err="1"/>
+              <a:t>y</a:t>
+            </a:r>
+            <a:r>
+              <a:rPr lang="en-US" altLang="ja-JP" sz="2000" dirty="0"/>
+              <a:t>) </a:t>
+            </a:r>
+            <a:r>
+              <a:rPr lang="en-US" altLang="ja-JP" sz="2000" dirty="0" smtClean="0"/>
+              <a:t>_ </a:t>
+            </a:r>
+            <a:r>
+              <a:rPr lang="en-US" altLang="ja-JP" sz="2000" dirty="0"/>
+              <a:t>-&gt; ([],y</a:t>
+            </a:r>
+            <a:r>
+              <a:rPr lang="en-US" altLang="ja-JP" sz="2000" dirty="0" smtClean="0"/>
+              <a:t>)</a:t>
+            </a:r>
+          </a:p>
+          <a:p>
+            <a:endParaRPr lang="en-US" altLang="ja-JP" sz="2000" dirty="0"/>
+          </a:p>
+          <a:p>
+            <a:r>
+              <a:rPr lang="en-US" altLang="ja-JP" sz="2000" dirty="0"/>
+              <a:t>        </a:t>
+            </a:r>
+            <a:r>
+              <a:rPr lang="en-US" altLang="ja-JP" sz="2000" dirty="0" smtClean="0"/>
+              <a:t> ,  </a:t>
+            </a:r>
+            <a:r>
+              <a:rPr lang="en-US" altLang="ja-JP" sz="2000" dirty="0"/>
+              <a:t>$(normal [| \(s,_) v -&gt; null s |] </a:t>
+            </a:r>
+            <a:r>
+              <a:rPr lang="en-US" altLang="ja-JP" sz="2000" dirty="0">
+                <a:solidFill>
+                  <a:schemeClr val="bg1">
+                    <a:lumMod val="75000"/>
+                  </a:schemeClr>
+                </a:solidFill>
+              </a:rPr>
+              <a:t>[| \(s,_) -&gt; null s |]) </a:t>
+            </a:r>
+          </a:p>
+          <a:p>
+            <a:r>
+              <a:rPr lang="en-US" altLang="ja-JP" sz="2000" dirty="0"/>
+              <a:t>             ==&gt; </a:t>
+            </a:r>
+            <a:r>
+              <a:rPr lang="en-US" altLang="ja-JP" sz="2000" dirty="0" smtClean="0"/>
+              <a:t>$</a:t>
+            </a:r>
+            <a:r>
+              <a:rPr lang="en-US" altLang="ja-JP" sz="2000" dirty="0"/>
+              <a:t>(update [p| (_, v) |] [p| </a:t>
+            </a:r>
+            <a:r>
+              <a:rPr lang="en-US" altLang="ja-JP" sz="2000" dirty="0" smtClean="0"/>
+              <a:t>v </a:t>
+            </a:r>
+            <a:r>
+              <a:rPr lang="en-US" altLang="ja-JP" sz="2000" dirty="0"/>
+              <a:t>|] [d| v = Replace |])</a:t>
+            </a:r>
+          </a:p>
+          <a:p>
+            <a:endParaRPr lang="en-US" altLang="ja-JP" sz="2000" dirty="0" smtClean="0"/>
+          </a:p>
+          <a:p>
+            <a:r>
+              <a:rPr lang="en-US" altLang="ja-JP" sz="2000" dirty="0" smtClean="0"/>
+              <a:t>         </a:t>
+            </a:r>
+            <a:r>
+              <a:rPr lang="en-US" altLang="ja-JP" sz="2000" dirty="0" smtClean="0"/>
+              <a:t>,  </a:t>
+            </a:r>
+            <a:r>
+              <a:rPr lang="en-US" altLang="ja-JP" sz="2000" dirty="0"/>
+              <a:t>$(</a:t>
+            </a:r>
+            <a:r>
+              <a:rPr lang="en-US" altLang="ja-JP" sz="2000" dirty="0" err="1"/>
+              <a:t>normalSV</a:t>
+            </a:r>
+            <a:r>
+              <a:rPr lang="en-US" altLang="ja-JP" sz="2000" dirty="0"/>
+              <a:t> [p| _ |] [p| _ |] </a:t>
+            </a:r>
+            <a:r>
+              <a:rPr lang="en-US" altLang="ja-JP" sz="2000" dirty="0">
+                <a:solidFill>
+                  <a:srgbClr val="BFBFBF"/>
+                </a:solidFill>
+              </a:rPr>
+              <a:t>[| \(s,_) -&gt; not (null s) |])</a:t>
+            </a:r>
+          </a:p>
+          <a:p>
+            <a:r>
+              <a:rPr lang="en-US" altLang="ja-JP" sz="2000" dirty="0"/>
+              <a:t>             ==&gt; $(</a:t>
+            </a:r>
+            <a:r>
+              <a:rPr lang="en-US" altLang="ja-JP" sz="2000" dirty="0" err="1"/>
+              <a:t>rearrS</a:t>
+            </a:r>
+            <a:r>
+              <a:rPr lang="en-US" altLang="ja-JP" sz="2000" dirty="0"/>
+              <a:t> [| \((</a:t>
+            </a:r>
+            <a:r>
+              <a:rPr lang="en-US" altLang="ja-JP" sz="2000" dirty="0" err="1"/>
+              <a:t>x:xs</a:t>
+            </a:r>
+            <a:r>
+              <a:rPr lang="en-US" altLang="ja-JP" sz="2000" dirty="0"/>
+              <a:t>), e) -&gt; (x, (</a:t>
+            </a:r>
+            <a:r>
+              <a:rPr lang="en-US" altLang="ja-JP" sz="2000" dirty="0" err="1"/>
+              <a:t>xs,e</a:t>
+            </a:r>
+            <a:r>
+              <a:rPr lang="en-US" altLang="ja-JP" sz="2000" dirty="0"/>
+              <a:t>))  |])</a:t>
+            </a:r>
+          </a:p>
+          <a:p>
+            <a:r>
+              <a:rPr lang="en-US" altLang="ja-JP" sz="2000" dirty="0"/>
+              <a:t>            </a:t>
+            </a:r>
+            <a:r>
+              <a:rPr lang="en-US" altLang="ja-JP" sz="2000" dirty="0" smtClean="0"/>
+              <a:t>        </a:t>
+            </a:r>
+            <a:r>
+              <a:rPr lang="en-US" altLang="ja-JP" sz="2000" dirty="0"/>
+              <a:t>(Replace `Prod` </a:t>
+            </a:r>
+            <a:r>
+              <a:rPr lang="en-US" altLang="ja-JP" sz="2000" dirty="0" err="1"/>
+              <a:t>lensFoldr</a:t>
+            </a:r>
+            <a:r>
+              <a:rPr lang="en-US" altLang="ja-JP" sz="2000" dirty="0"/>
+              <a:t> </a:t>
+            </a:r>
+            <a:r>
+              <a:rPr lang="en-US" altLang="ja-JP" sz="2000" dirty="0" err="1"/>
+              <a:t>bx</a:t>
+            </a:r>
+            <a:r>
+              <a:rPr lang="en-US" altLang="ja-JP" sz="2000" dirty="0"/>
+              <a:t> </a:t>
+            </a:r>
+            <a:r>
+              <a:rPr lang="en-US" altLang="ja-JP" sz="2000" dirty="0" err="1"/>
+              <a:t>pv</a:t>
+            </a:r>
+            <a:r>
+              <a:rPr lang="en-US" altLang="ja-JP" sz="2000" dirty="0"/>
+              <a:t>) `Compose` </a:t>
+            </a:r>
+            <a:r>
+              <a:rPr lang="en-US" altLang="ja-JP" sz="2000" dirty="0" err="1"/>
+              <a:t>bx</a:t>
+            </a:r>
+            <a:endParaRPr lang="en-US" altLang="ja-JP" sz="2000" dirty="0"/>
+          </a:p>
+          <a:p>
+            <a:r>
+              <a:rPr lang="en-US" altLang="ja-JP" sz="2000" dirty="0"/>
+              <a:t>        ]</a:t>
+            </a:r>
+            <a:endParaRPr kumimoji="1" lang="ja-JP" altLang="en-US" sz="2000" dirty="0"/>
+          </a:p>
+        </p:txBody>
+      </p:sp>
+    </p:spTree>
+    <p:extLst>
+      <p:ext uri="{BB962C8B-B14F-4D97-AF65-F5344CB8AC3E}">
+        <p14:creationId xmlns:p14="http://schemas.microsoft.com/office/powerpoint/2010/main" val="4195305908"/>
+      </p:ext>
+    </p:extLst>
+  </p:cSld>
+  <p:clrMapOvr>
+    <a:masterClrMapping/>
+  </p:clrMapOvr>
+  <p:timing>
+    <p:tnLst>
+      <p:par>
+        <p:cTn xmlns:p14="http://schemas.microsoft.com/office/powerpoint/2010/main" id="1" dur="indefinite" restart="never" nodeType="tmRoot"/>
+      </p:par>
+    </p:tnLst>
+  </p:timing>
+</p:sld>
+</file>
+
+<file path=ppt/slides/slide46.xml><?xml version="1.0" encoding="utf-8"?>
+<p:sld xmlns:a="http://schemas.openxmlformats.org/drawingml/2006/main" xmlns:r="http://schemas.openxmlformats.org/officeDocument/2006/relationships" xmlns:p="http://schemas.openxmlformats.org/presentationml/2006/main">
+  <p:cSld>
+    <p:spTree>
+      <p:nvGrpSpPr>
+        <p:cNvPr id="1" name=""/>
+        <p:cNvGrpSpPr/>
+        <p:nvPr/>
+      </p:nvGrpSpPr>
+      <p:grpSpPr>
+        <a:xfrm>
+          <a:off x="0" y="0"/>
+          <a:ext cx="0" cy="0"/>
+          <a:chOff x="0" y="0"/>
+          <a:chExt cx="0" cy="0"/>
+        </a:xfrm>
+      </p:grpSpPr>
+      <p:sp>
+        <p:nvSpPr>
+          <p:cNvPr id="2" name="タイトル 1"/>
+          <p:cNvSpPr>
+            <a:spLocks noGrp="1"/>
+          </p:cNvSpPr>
+          <p:nvPr>
+            <p:ph type="title"/>
+          </p:nvPr>
+        </p:nvSpPr>
+        <p:spPr/>
+        <p:txBody>
+          <a:bodyPr/>
+          <a:lstStyle/>
+          <a:p>
+            <a:r>
+              <a:rPr kumimoji="1" lang="en-US" altLang="ja-JP" dirty="0" err="1" smtClean="0"/>
+              <a:t>lensMap</a:t>
+            </a:r>
+            <a:endParaRPr kumimoji="1" lang="ja-JP" altLang="en-US" dirty="0"/>
+          </a:p>
+        </p:txBody>
+      </p:sp>
+      <p:sp>
+        <p:nvSpPr>
+          <p:cNvPr id="4" name="スライド番号プレースホルダー 3"/>
+          <p:cNvSpPr>
+            <a:spLocks noGrp="1"/>
+          </p:cNvSpPr>
+          <p:nvPr>
+            <p:ph type="sldNum" sz="quarter" idx="11"/>
+          </p:nvPr>
+        </p:nvSpPr>
+        <p:spPr/>
+        <p:txBody>
+          <a:bodyPr/>
+          <a:lstStyle/>
+          <a:p>
+            <a:fld id="{F96F1464-7F58-8745-A325-E585E650CEFA}" type="slidenum">
+              <a:rPr lang="ja-JP" altLang="en-US" smtClean="0"/>
+              <a:pPr/>
+              <a:t>46</a:t>
+            </a:fld>
+            <a:endParaRPr lang="ja-JP" altLang="en-US"/>
+          </a:p>
+        </p:txBody>
+      </p:sp>
+      <p:sp>
+        <p:nvSpPr>
+          <p:cNvPr id="5" name="正方形/長方形 4"/>
+          <p:cNvSpPr/>
+          <p:nvPr/>
+        </p:nvSpPr>
+        <p:spPr>
+          <a:xfrm>
+            <a:off x="323528" y="1556792"/>
+            <a:ext cx="8458200" cy="1323439"/>
+          </a:xfrm>
+          <a:prstGeom prst="rect">
+            <a:avLst/>
+          </a:prstGeom>
+          <a:ln>
+            <a:solidFill>
+              <a:srgbClr val="FF6600"/>
+            </a:solidFill>
+          </a:ln>
+        </p:spPr>
+        <p:txBody>
+          <a:bodyPr wrap="square">
+            <a:spAutoFit/>
+          </a:bodyPr>
+          <a:lstStyle/>
+          <a:p>
+            <a:r>
+              <a:rPr lang="en-US" altLang="ja-JP" sz="2000" dirty="0" err="1"/>
+              <a:t>lensMap</a:t>
+            </a:r>
+            <a:r>
+              <a:rPr lang="en-US" altLang="ja-JP" sz="2000" dirty="0"/>
+              <a:t> :: (Show a, Show b) </a:t>
+            </a:r>
+            <a:endParaRPr lang="en-US" altLang="ja-JP" sz="2000" dirty="0" smtClean="0"/>
+          </a:p>
+          <a:p>
+            <a:r>
+              <a:rPr lang="en-US" altLang="ja-JP" sz="2000" dirty="0"/>
+              <a:t> </a:t>
+            </a:r>
+            <a:r>
+              <a:rPr lang="en-US" altLang="ja-JP" sz="2000" dirty="0" smtClean="0"/>
+              <a:t>         =</a:t>
+            </a:r>
+            <a:r>
+              <a:rPr lang="en-US" altLang="ja-JP" sz="2000" dirty="0"/>
+              <a:t>&gt; </a:t>
+            </a:r>
+            <a:r>
+              <a:rPr lang="en-US" altLang="ja-JP" sz="2000" dirty="0" err="1"/>
+              <a:t>BiGUL</a:t>
+            </a:r>
+            <a:r>
+              <a:rPr lang="en-US" altLang="ja-JP" sz="2000" dirty="0"/>
+              <a:t> a b -&gt; </a:t>
+            </a:r>
+            <a:r>
+              <a:rPr lang="en-US" altLang="ja-JP" sz="2000" dirty="0" err="1"/>
+              <a:t>BiGUL</a:t>
+            </a:r>
+            <a:r>
+              <a:rPr lang="en-US" altLang="ja-JP" sz="2000" dirty="0"/>
+              <a:t> ([a],[b]) [b]</a:t>
+            </a:r>
+          </a:p>
+          <a:p>
+            <a:r>
+              <a:rPr lang="en-US" altLang="ja-JP" sz="2000" dirty="0" err="1"/>
+              <a:t>lensMap</a:t>
+            </a:r>
+            <a:r>
+              <a:rPr lang="en-US" altLang="ja-JP" sz="2000" dirty="0"/>
+              <a:t> </a:t>
+            </a:r>
+            <a:r>
+              <a:rPr lang="en-US" altLang="ja-JP" sz="2000" dirty="0" err="1"/>
+              <a:t>bx</a:t>
+            </a:r>
+            <a:r>
+              <a:rPr lang="en-US" altLang="ja-JP" sz="2000" dirty="0"/>
+              <a:t> =  </a:t>
+            </a:r>
+            <a:r>
+              <a:rPr lang="en-US" altLang="ja-JP" sz="2000" dirty="0" err="1"/>
+              <a:t>lensFoldr</a:t>
+            </a:r>
+            <a:r>
+              <a:rPr lang="en-US" altLang="ja-JP" sz="2000" dirty="0"/>
+              <a:t> </a:t>
+            </a:r>
+            <a:r>
+              <a:rPr lang="en-US" altLang="ja-JP" sz="2000" dirty="0" err="1"/>
+              <a:t>bx</a:t>
+            </a:r>
+            <a:r>
+              <a:rPr lang="en-US" altLang="ja-JP" sz="2000" dirty="0"/>
+              <a:t>' null</a:t>
+            </a:r>
+          </a:p>
+          <a:p>
+            <a:r>
+              <a:rPr lang="en-US" altLang="ja-JP" sz="2000" dirty="0"/>
+              <a:t>   where  </a:t>
+            </a:r>
+            <a:r>
+              <a:rPr lang="en-US" altLang="ja-JP" sz="2000" dirty="0" err="1" smtClean="0"/>
+              <a:t>bx</a:t>
+            </a:r>
+            <a:r>
+              <a:rPr lang="en-US" altLang="ja-JP" sz="2000" dirty="0" smtClean="0"/>
+              <a:t>‘ </a:t>
+            </a:r>
+            <a:r>
+              <a:rPr lang="en-US" altLang="ja-JP" sz="2000" dirty="0"/>
+              <a:t>=  $</a:t>
+            </a:r>
+            <a:r>
+              <a:rPr lang="en-US" altLang="ja-JP" sz="2000" dirty="0" smtClean="0"/>
+              <a:t>(</a:t>
+            </a:r>
+            <a:r>
+              <a:rPr lang="en-US" altLang="ja-JP" sz="2000" dirty="0" smtClean="0"/>
+              <a:t>update</a:t>
+            </a:r>
+            <a:r>
+              <a:rPr lang="ja-JP" altLang="en-US" sz="2000" dirty="0" smtClean="0"/>
+              <a:t> </a:t>
+            </a:r>
+            <a:r>
+              <a:rPr lang="en-US" altLang="ja-JP" sz="2000" dirty="0" smtClean="0"/>
+              <a:t>[p|</a:t>
+            </a:r>
+            <a:r>
+              <a:rPr lang="ja-JP" altLang="en-US" sz="2000" dirty="0" smtClean="0"/>
+              <a:t> </a:t>
+            </a:r>
+            <a:r>
+              <a:rPr lang="en-US" altLang="ja-JP" sz="2000" dirty="0" smtClean="0"/>
+              <a:t>(</a:t>
+            </a:r>
+            <a:r>
+              <a:rPr lang="ja-JP" altLang="ja-JP" sz="2000" dirty="0" smtClean="0"/>
+              <a:t>a</a:t>
+            </a:r>
+            <a:r>
+              <a:rPr lang="en-US" altLang="ja-JP" sz="2000" dirty="0" smtClean="0"/>
+              <a:t>,b)</a:t>
+            </a:r>
+            <a:r>
+              <a:rPr lang="ja-JP" altLang="en-US" sz="2000" dirty="0" smtClean="0"/>
+              <a:t> </a:t>
+            </a:r>
+            <a:r>
+              <a:rPr lang="en-US" altLang="ja-JP" sz="2000" dirty="0" smtClean="0"/>
+              <a:t>|]</a:t>
+            </a:r>
+            <a:r>
+              <a:rPr lang="ja-JP" altLang="en-US" sz="2000" dirty="0" smtClean="0"/>
+              <a:t> </a:t>
+            </a:r>
+            <a:r>
+              <a:rPr lang="en-US" altLang="ja-JP" sz="2000" dirty="0" smtClean="0"/>
+              <a:t>[</a:t>
+            </a:r>
+            <a:r>
+              <a:rPr lang="en-US" altLang="ja-JP" sz="2000" dirty="0"/>
+              <a:t>| </a:t>
+            </a:r>
+            <a:r>
+              <a:rPr lang="en-US" altLang="ja-JP" sz="2000" dirty="0" smtClean="0"/>
+              <a:t>(</a:t>
+            </a:r>
+            <a:r>
+              <a:rPr lang="ja-JP" altLang="ja-JP" sz="2000" dirty="0"/>
+              <a:t>a</a:t>
+            </a:r>
+            <a:r>
+              <a:rPr lang="en-US" altLang="ja-JP" sz="2000" dirty="0" smtClean="0"/>
+              <a:t>,</a:t>
+            </a:r>
+            <a:r>
+              <a:rPr lang="en-US" altLang="ja-JP" sz="2000" dirty="0" smtClean="0"/>
+              <a:t>b</a:t>
+            </a:r>
+            <a:r>
+              <a:rPr lang="en-US" altLang="ja-JP" sz="2000" dirty="0" smtClean="0"/>
+              <a:t>) </a:t>
+            </a:r>
+            <a:r>
+              <a:rPr lang="en-US" altLang="ja-JP" sz="2000" dirty="0"/>
+              <a:t>|</a:t>
+            </a:r>
+            <a:r>
+              <a:rPr lang="en-US" altLang="ja-JP" sz="2000" dirty="0" smtClean="0"/>
+              <a:t>]</a:t>
+            </a:r>
+            <a:r>
+              <a:rPr lang="ja-JP" altLang="en-US" sz="2000" dirty="0" smtClean="0"/>
+              <a:t> </a:t>
+            </a:r>
+            <a:r>
+              <a:rPr lang="en-US" altLang="ja-JP" sz="2000" dirty="0" smtClean="0"/>
+              <a:t>[d|</a:t>
+            </a:r>
+            <a:r>
+              <a:rPr lang="ja-JP" altLang="en-US" sz="2000" dirty="0" smtClean="0"/>
+              <a:t> </a:t>
+            </a:r>
+            <a:r>
+              <a:rPr lang="en-US" altLang="ja-JP" sz="2000" dirty="0" smtClean="0"/>
+              <a:t>a</a:t>
+            </a:r>
+            <a:r>
+              <a:rPr lang="ja-JP" altLang="en-US" sz="2000" dirty="0" smtClean="0"/>
+              <a:t> </a:t>
+            </a:r>
+            <a:r>
+              <a:rPr lang="en-US" altLang="ja-JP" sz="2000" dirty="0" smtClean="0"/>
+              <a:t>=</a:t>
+            </a:r>
+            <a:r>
+              <a:rPr lang="ja-JP" altLang="en-US" sz="2000" dirty="0" smtClean="0"/>
+              <a:t> </a:t>
+            </a:r>
+            <a:r>
+              <a:rPr lang="en-US" altLang="ja-JP" sz="2000" dirty="0" err="1" smtClean="0"/>
+              <a:t>bx</a:t>
+            </a:r>
+            <a:r>
+              <a:rPr lang="ja-JP" altLang="ja-JP" sz="2000" dirty="0" smtClean="0"/>
+              <a:t>;</a:t>
+            </a:r>
+            <a:r>
+              <a:rPr lang="ja-JP" altLang="en-US" sz="2000" dirty="0" smtClean="0"/>
+              <a:t> </a:t>
+            </a:r>
+            <a:r>
+              <a:rPr lang="en-US" altLang="ja-JP" sz="2000" dirty="0" smtClean="0"/>
+              <a:t>b</a:t>
+            </a:r>
+            <a:r>
+              <a:rPr lang="ja-JP" altLang="en-US" sz="2000" dirty="0" smtClean="0"/>
+              <a:t> </a:t>
+            </a:r>
+            <a:r>
+              <a:rPr lang="en-US" altLang="ja-JP" sz="2000" dirty="0" smtClean="0"/>
+              <a:t>=</a:t>
+            </a:r>
+            <a:r>
+              <a:rPr lang="ja-JP" altLang="en-US" sz="2000" dirty="0" smtClean="0"/>
+              <a:t> </a:t>
+            </a:r>
+            <a:r>
+              <a:rPr lang="en-US" altLang="ja-JP" sz="2000" dirty="0" smtClean="0"/>
+              <a:t>Replace</a:t>
+            </a:r>
+            <a:r>
+              <a:rPr lang="en-US" altLang="ja-JP" sz="2000" dirty="0" smtClean="0"/>
+              <a:t>) $</a:t>
+            </a:r>
+            <a:endParaRPr lang="en-US" altLang="ja-JP" sz="2000" dirty="0"/>
+          </a:p>
+        </p:txBody>
+      </p:sp>
+    </p:spTree>
+    <p:extLst>
+      <p:ext uri="{BB962C8B-B14F-4D97-AF65-F5344CB8AC3E}">
+        <p14:creationId xmlns:p14="http://schemas.microsoft.com/office/powerpoint/2010/main" val="1409970756"/>
+      </p:ext>
+    </p:extLst>
+  </p:cSld>
+  <p:clrMapOvr>
+    <a:masterClrMapping/>
+  </p:clrMapOvr>
+  <p:timing>
+    <p:tnLst>
+      <p:par>
+        <p:cTn xmlns:p14="http://schemas.microsoft.com/office/powerpoint/2010/main" id="1" dur="indefinite" restart="never" nodeType="tmRoot"/>
+      </p:par>
+    </p:tnLst>
+  </p:timing>
+</p:sld>
+</file>
+
+<file path=ppt/slides/slide47.xml><?xml version="1.0" encoding="utf-8"?>
+<p:sld xmlns:a="http://schemas.openxmlformats.org/drawingml/2006/main" xmlns:r="http://schemas.openxmlformats.org/officeDocument/2006/relationships" xmlns:p="http://schemas.openxmlformats.org/presentationml/2006/main">
+  <p:cSld>
+    <p:spTree>
+      <p:nvGrpSpPr>
+        <p:cNvPr id="1" name=""/>
+        <p:cNvGrpSpPr/>
+        <p:nvPr/>
+      </p:nvGrpSpPr>
+      <p:grpSpPr>
+        <a:xfrm>
+          <a:off x="0" y="0"/>
+          <a:ext cx="0" cy="0"/>
+          <a:chOff x="0" y="0"/>
+          <a:chExt cx="0" cy="0"/>
+        </a:xfrm>
+      </p:grpSpPr>
+      <p:sp>
+        <p:nvSpPr>
+          <p:cNvPr id="2" name="タイトル 1"/>
+          <p:cNvSpPr>
+            <a:spLocks noGrp="1"/>
+          </p:cNvSpPr>
+          <p:nvPr>
+            <p:ph type="title"/>
+          </p:nvPr>
+        </p:nvSpPr>
+        <p:spPr/>
+        <p:txBody>
+          <a:bodyPr/>
+          <a:lstStyle/>
+          <a:p>
+            <a:r>
+              <a:rPr kumimoji="1" lang="en-US" altLang="ja-JP" dirty="0" err="1" smtClean="0"/>
+              <a:t>LensReverse</a:t>
+            </a:r>
+            <a:endParaRPr kumimoji="1" lang="ja-JP" altLang="en-US" dirty="0"/>
+          </a:p>
+        </p:txBody>
+      </p:sp>
+      <p:sp>
+        <p:nvSpPr>
+          <p:cNvPr id="4" name="スライド番号プレースホルダー 3"/>
+          <p:cNvSpPr>
+            <a:spLocks noGrp="1"/>
+          </p:cNvSpPr>
+          <p:nvPr>
+            <p:ph type="sldNum" sz="quarter" idx="11"/>
+          </p:nvPr>
+        </p:nvSpPr>
+        <p:spPr/>
+        <p:txBody>
+          <a:bodyPr/>
+          <a:lstStyle/>
+          <a:p>
+            <a:fld id="{F96F1464-7F58-8745-A325-E585E650CEFA}" type="slidenum">
+              <a:rPr lang="ja-JP" altLang="en-US" smtClean="0"/>
+              <a:pPr/>
+              <a:t>47</a:t>
+            </a:fld>
+            <a:endParaRPr lang="ja-JP" altLang="en-US"/>
+          </a:p>
+        </p:txBody>
+      </p:sp>
+      <p:sp>
+        <p:nvSpPr>
+          <p:cNvPr id="5" name="テキスト ボックス 4"/>
+          <p:cNvSpPr txBox="1"/>
+          <p:nvPr/>
+        </p:nvSpPr>
+        <p:spPr>
+          <a:xfrm>
+            <a:off x="131256" y="2905591"/>
+            <a:ext cx="8905240" cy="2862322"/>
+          </a:xfrm>
+          <a:prstGeom prst="rect">
+            <a:avLst/>
+          </a:prstGeom>
+          <a:noFill/>
+          <a:ln>
+            <a:solidFill>
+              <a:srgbClr val="FF6600"/>
+            </a:solidFill>
+          </a:ln>
+        </p:spPr>
+        <p:txBody>
+          <a:bodyPr wrap="none" rtlCol="0">
+            <a:spAutoFit/>
+          </a:bodyPr>
+          <a:lstStyle/>
+          <a:p>
+            <a:r>
+              <a:rPr lang="en-US" altLang="ja-JP" sz="2000" dirty="0" err="1"/>
               <a:t>lensReverse</a:t>
             </a:r>
             <a:r>
@@ -18638,8 +20388,15 @@
             </a:r>
             <a:r>
               <a:rPr lang="en-US" altLang="ja-JP" sz="2000" dirty="0"/>
-              <a:t>==&gt; \s v -&gt; v</a:t>
-            </a:r>
+              <a:t>==&gt; \s v -&gt; </a:t>
+            </a:r>
+            <a:r>
+              <a:rPr lang="en-US" altLang="ja-JP" sz="2000" dirty="0" smtClean="0"/>
+              <a:t>v</a:t>
+            </a:r>
+          </a:p>
+          <a:p>
+            <a:endParaRPr lang="en-US" altLang="ja-JP" sz="2000" dirty="0"/>
           </a:p>
           <a:p>
             <a:r>
@@ -18892,7 +20649,7 @@
 </p:sld>
 </file>
 
-<file path=ppt/slides/slide43.xml><?xml version="1.0" encoding="utf-8"?>
+<file path=ppt/slides/slide48.xml><?xml version="1.0" encoding="utf-8"?>
 <p:sld xmlns:a="http://schemas.openxmlformats.org/drawingml/2006/main" xmlns:r="http://schemas.openxmlformats.org/officeDocument/2006/relationships" xmlns:p="http://schemas.openxmlformats.org/presentationml/2006/main">
   <p:cSld>
     <p:spTree>
@@ -18977,7 +20734,7 @@
             <a:fld id="{EA7C8D44-3667-46F6-9772-CC52308E2A7F}" type="slidenum">
               <a:rPr kumimoji="0" lang="en-US" smtClean="0"/>
               <a:pPr/>
-              <a:t>43</a:t>
+              <a:t>48</a:t>
             </a:fld>
             <a:endParaRPr kumimoji="0" lang="en-US" dirty="0"/>
           </a:p>
@@ -19003,7 +20760,7 @@
 </p:sld>
 </file>
 
-<file path=ppt/slides/slide44.xml><?xml version="1.0" encoding="utf-8"?>
+<file path=ppt/slides/slide49.xml><?xml version="1.0" encoding="utf-8"?>
 <p:sld xmlns:a="http://schemas.openxmlformats.org/drawingml/2006/main" xmlns:r="http://schemas.openxmlformats.org/officeDocument/2006/relationships" xmlns:p="http://schemas.openxmlformats.org/presentationml/2006/main">
   <p:cSld>
     <p:spTree>
@@ -19069,7 +20826,7 @@
             <a:fld id="{F96F1464-7F58-8745-A325-E585E650CEFA}" type="slidenum">
               <a:rPr lang="ja-JP" altLang="en-US" smtClean="0"/>
               <a:pPr/>
-              <a:t>44</a:t>
+              <a:t>49</a:t>
             </a:fld>
             <a:endParaRPr lang="ja-JP" altLang="en-US"/>
           </a:p>
@@ -19620,7 +21377,7 @@
 </p:sld>
 </file>
 
-<file path=ppt/slides/slide45.xml><?xml version="1.0" encoding="utf-8"?>
+<file path=ppt/slides/slide5.xml><?xml version="1.0" encoding="utf-8"?>
 <p:sld xmlns:a="http://schemas.openxmlformats.org/drawingml/2006/main" xmlns:r="http://schemas.openxmlformats.org/officeDocument/2006/relationships" xmlns:p="http://schemas.openxmlformats.org/presentationml/2006/main">
   <p:cSld>
     <p:spTree>
@@ -19639,6 +21396,236 @@
       </p:grpSpPr>
       <p:sp>
         <p:nvSpPr>
+          <p:cNvPr id="3" name="タイトル 2"/>
+          <p:cNvSpPr>
+            <a:spLocks noGrp="1"/>
+          </p:cNvSpPr>
+          <p:nvPr>
+            <p:ph type="title"/>
+          </p:nvPr>
+        </p:nvSpPr>
+        <p:spPr>
+          <a:xfrm>
+            <a:off x="457200" y="479425"/>
+            <a:ext cx="6211888" cy="511175"/>
+          </a:xfrm>
+        </p:spPr>
+        <p:txBody>
+          <a:bodyPr>
+            <a:noAutofit/>
+          </a:bodyPr>
+          <a:lstStyle/>
+          <a:p>
+            <a:r>
+              <a:rPr lang="en-US" altLang="ja-JP" dirty="0" smtClean="0"/>
+              <a:t>Roundtrip Properties</a:t>
+            </a:r>
+            <a:endParaRPr lang="ja-JP" altLang="en-US" dirty="0"/>
+          </a:p>
+        </p:txBody>
+      </p:sp>
+      <p:sp>
+        <p:nvSpPr>
+          <p:cNvPr id="13" name="スライド番号プレースホルダ 12"/>
+          <p:cNvSpPr>
+            <a:spLocks noGrp="1"/>
+          </p:cNvSpPr>
+          <p:nvPr>
+            <p:ph type="sldNum" sz="quarter" idx="11"/>
+          </p:nvPr>
+        </p:nvSpPr>
+        <p:spPr/>
+        <p:txBody>
+          <a:bodyPr/>
+          <a:lstStyle/>
+          <a:p>
+            <a:fld id="{F96F1464-7F58-8745-A325-E585E650CEFA}" type="slidenum">
+              <a:rPr lang="ja-JP" altLang="en-US" smtClean="0"/>
+              <a:pPr/>
+              <a:t>5</a:t>
+            </a:fld>
+            <a:endParaRPr lang="ja-JP" altLang="en-US"/>
+          </a:p>
+        </p:txBody>
+      </p:sp>
+      <p:pic>
+        <p:nvPicPr>
+          <p:cNvPr id="11" name="図 10"/>
+          <p:cNvPicPr>
+            <a:picLocks noChangeAspect="1"/>
+          </p:cNvPicPr>
+          <p:nvPr/>
+        </p:nvPicPr>
+        <p:blipFill>
+          <a:blip r:embed="rId2"/>
+          <a:stretch>
+            <a:fillRect/>
+          </a:stretch>
+        </p:blipFill>
+        <p:spPr>
+          <a:xfrm>
+            <a:off x="497836" y="1766214"/>
+            <a:ext cx="4226564" cy="3948786"/>
+          </a:xfrm>
+          <a:prstGeom prst="rect">
+            <a:avLst/>
+          </a:prstGeom>
+          <a:ln w="25400">
+            <a:solidFill>
+              <a:schemeClr val="accent5"/>
+            </a:solidFill>
+          </a:ln>
+        </p:spPr>
+      </p:pic>
+      <p:sp>
+        <p:nvSpPr>
+          <p:cNvPr id="16" name="正方形/長方形 15"/>
+          <p:cNvSpPr/>
+          <p:nvPr/>
+        </p:nvSpPr>
+        <p:spPr>
+          <a:xfrm>
+            <a:off x="5251648" y="2367136"/>
+            <a:ext cx="3352800" cy="2141984"/>
+          </a:xfrm>
+          <a:prstGeom prst="rect">
+            <a:avLst/>
+          </a:prstGeom>
+          <a:noFill/>
+          <a:ln w="38100" cmpd="sng"/>
+        </p:spPr>
+        <p:style>
+          <a:lnRef idx="1">
+            <a:schemeClr val="accent1"/>
+          </a:lnRef>
+          <a:fillRef idx="3">
+            <a:schemeClr val="accent1"/>
+          </a:fillRef>
+          <a:effectRef idx="2">
+            <a:schemeClr val="accent1"/>
+          </a:effectRef>
+          <a:fontRef idx="minor">
+            <a:schemeClr val="lt1"/>
+          </a:fontRef>
+        </p:style>
+        <p:txBody>
+          <a:bodyPr rtlCol="0" anchor="ctr"/>
+          <a:lstStyle/>
+          <a:p>
+            <a:r>
+              <a:rPr kumimoji="1" lang="en-US" altLang="ja-JP" dirty="0" smtClean="0">
+                <a:solidFill>
+                  <a:schemeClr val="tx1"/>
+                </a:solidFill>
+              </a:rPr>
+              <a:t>Get-Put: </a:t>
+            </a:r>
+          </a:p>
+          <a:p>
+            <a:pPr algn="ctr"/>
+            <a:r>
+              <a:rPr lang="en-US" altLang="ja-JP" dirty="0">
+                <a:solidFill>
+                  <a:schemeClr val="tx1"/>
+                </a:solidFill>
+              </a:rPr>
+              <a:t>p</a:t>
+            </a:r>
+            <a:r>
+              <a:rPr lang="en-US" altLang="ja-JP" dirty="0" smtClean="0">
+                <a:solidFill>
+                  <a:schemeClr val="tx1"/>
+                </a:solidFill>
+              </a:rPr>
+              <a:t>ut s (get s) = s</a:t>
+            </a:r>
+          </a:p>
+          <a:p>
+            <a:pPr algn="ctr"/>
+            <a:endParaRPr lang="en-US" altLang="ja-JP" dirty="0" smtClean="0">
+              <a:solidFill>
+                <a:schemeClr val="tx1"/>
+              </a:solidFill>
+            </a:endParaRPr>
+          </a:p>
+          <a:p>
+            <a:r>
+              <a:rPr kumimoji="1" lang="en-US" altLang="ja-JP" dirty="0" smtClean="0">
+                <a:solidFill>
+                  <a:schemeClr val="tx1"/>
+                </a:solidFill>
+              </a:rPr>
+              <a:t>Put-Get:</a:t>
+            </a:r>
+          </a:p>
+          <a:p>
+            <a:pPr algn="ctr"/>
+            <a:r>
+              <a:rPr lang="en-US" altLang="ja-JP" dirty="0" smtClean="0">
+                <a:solidFill>
+                  <a:schemeClr val="tx1"/>
+                </a:solidFill>
+              </a:rPr>
+              <a:t>get (put s</a:t>
+            </a:r>
+            <a:r>
+              <a:rPr lang="en-US" altLang="ja-JP" dirty="0">
+                <a:solidFill>
+                  <a:schemeClr val="tx1"/>
+                </a:solidFill>
+              </a:rPr>
+              <a:t> </a:t>
+            </a:r>
+            <a:r>
+              <a:rPr lang="en-US" altLang="ja-JP" dirty="0" smtClean="0">
+                <a:solidFill>
+                  <a:schemeClr val="tx1"/>
+                </a:solidFill>
+              </a:rPr>
+              <a:t>t) = t</a:t>
+            </a:r>
+          </a:p>
+        </p:txBody>
+      </p:sp>
+    </p:spTree>
+    <p:extLst>
+      <p:ext uri="{BB962C8B-B14F-4D97-AF65-F5344CB8AC3E}">
+        <p14:creationId xmlns:p14="http://schemas.microsoft.com/office/powerpoint/2010/main" val="629128324"/>
+      </p:ext>
+    </p:extLst>
+  </p:cSld>
+  <p:clrMapOvr>
+    <a:masterClrMapping/>
+  </p:clrMapOvr>
+  <p:timing>
+    <p:tnLst>
+      <p:par>
+        <p:cTn xmlns:p14="http://schemas.microsoft.com/office/powerpoint/2010/main" id="1" dur="indefinite" restart="never" nodeType="tmRoot"/>
+      </p:par>
+    </p:tnLst>
+  </p:timing>
+</p:sld>
+</file>
+
+<file path=ppt/slides/slide50.xml><?xml version="1.0" encoding="utf-8"?>
+<p:sld xmlns:a="http://schemas.openxmlformats.org/drawingml/2006/main" xmlns:r="http://schemas.openxmlformats.org/officeDocument/2006/relationships" xmlns:p="http://schemas.openxmlformats.org/presentationml/2006/main">
+  <p:cSld>
+    <p:spTree>
+      <p:nvGrpSpPr>
+        <p:cNvPr id="1" name=""/>
+        <p:cNvGrpSpPr/>
+        <p:nvPr/>
+      </p:nvGrpSpPr>
+      <p:grpSpPr>
+        <a:xfrm>
+          <a:off x="0" y="0"/>
+          <a:ext cx="0" cy="0"/>
+          <a:chOff x="0" y="0"/>
+          <a:chExt cx="0" cy="0"/>
+        </a:xfrm>
+      </p:grpSpPr>
+      <p:sp>
+        <p:nvSpPr>
           <p:cNvPr id="2" name="タイトル 1"/>
           <p:cNvSpPr>
             <a:spLocks noGrp="1"/>
@@ -19772,7 +21759,7 @@
             <a:fld id="{F96F1464-7F58-8745-A325-E585E650CEFA}" type="slidenum">
               <a:rPr lang="ja-JP" altLang="en-US" smtClean="0"/>
               <a:pPr/>
-              <a:t>45</a:t>
+              <a:t>50</a:t>
             </a:fld>
             <a:endParaRPr lang="ja-JP" altLang="en-US"/>
           </a:p>
@@ -19912,7 +21899,7 @@
 </p:sld>
 </file>
 
-<file path=ppt/slides/slide46.xml><?xml version="1.0" encoding="utf-8"?>
+<file path=ppt/slides/slide51.xml><?xml version="1.0" encoding="utf-8"?>
 <p:sld xmlns:a="http://schemas.openxmlformats.org/drawingml/2006/main" xmlns:r="http://schemas.openxmlformats.org/officeDocument/2006/relationships" xmlns:p="http://schemas.openxmlformats.org/presentationml/2006/main">
   <p:cSld>
     <p:spTree>
@@ -19970,7 +21957,7 @@
             <a:fld id="{F96F1464-7F58-8745-A325-E585E650CEFA}" type="slidenum">
               <a:rPr lang="ja-JP" altLang="en-US" smtClean="0"/>
               <a:pPr/>
-              <a:t>46</a:t>
+              <a:t>51</a:t>
             </a:fld>
             <a:endParaRPr lang="ja-JP" altLang="en-US"/>
           </a:p>
@@ -20453,7 +22440,7 @@
 </p:sld>
 </file>
 
-<file path=ppt/slides/slide47.xml><?xml version="1.0" encoding="utf-8"?>
+<file path=ppt/slides/slide52.xml><?xml version="1.0" encoding="utf-8"?>
 <p:sld xmlns:a="http://schemas.openxmlformats.org/drawingml/2006/main" xmlns:r="http://schemas.openxmlformats.org/officeDocument/2006/relationships" xmlns:p="http://schemas.openxmlformats.org/presentationml/2006/main">
   <p:cSld>
     <p:spTree>
@@ -20519,7 +22506,7 @@
             <a:fld id="{F96F1464-7F58-8745-A325-E585E650CEFA}" type="slidenum">
               <a:rPr lang="ja-JP" altLang="en-US" smtClean="0"/>
               <a:pPr/>
-              <a:t>47</a:t>
+              <a:t>52</a:t>
             </a:fld>
             <a:endParaRPr lang="ja-JP" altLang="en-US"/>
           </a:p>
@@ -20717,7 +22704,7 @@
 </p:sld>
 </file>
 
-<file path=ppt/slides/slide48.xml><?xml version="1.0" encoding="utf-8"?>
+<file path=ppt/slides/slide53.xml><?xml version="1.0" encoding="utf-8"?>
 <p:sld xmlns:a="http://schemas.openxmlformats.org/drawingml/2006/main" xmlns:r="http://schemas.openxmlformats.org/officeDocument/2006/relationships" xmlns:p="http://schemas.openxmlformats.org/presentationml/2006/main">
   <p:cSld>
     <p:spTree>
@@ -20870,7 +22857,7 @@
             <a:fld id="{F96F1464-7F58-8745-A325-E585E650CEFA}" type="slidenum">
               <a:rPr lang="ja-JP" altLang="en-US" smtClean="0"/>
               <a:pPr/>
-              <a:t>48</a:t>
+              <a:t>53</a:t>
             </a:fld>
             <a:endParaRPr lang="ja-JP" altLang="en-US"/>
           </a:p>
@@ -21040,7 +23027,7 @@
 </p:sld>
 </file>
 
-<file path=ppt/slides/slide49.xml><?xml version="1.0" encoding="utf-8"?>
+<file path=ppt/slides/slide54.xml><?xml version="1.0" encoding="utf-8"?>
 <p:sld xmlns:a="http://schemas.openxmlformats.org/drawingml/2006/main" xmlns:r="http://schemas.openxmlformats.org/officeDocument/2006/relationships" xmlns:p="http://schemas.openxmlformats.org/presentationml/2006/main">
   <p:cSld>
     <p:spTree>
@@ -21102,7 +23089,7 @@
             <a:fld id="{F96F1464-7F58-8745-A325-E585E650CEFA}" type="slidenum">
               <a:rPr lang="ja-JP" altLang="en-US" smtClean="0"/>
               <a:pPr/>
-              <a:t>49</a:t>
+              <a:t>54</a:t>
             </a:fld>
             <a:endParaRPr lang="ja-JP" altLang="en-US"/>
           </a:p>
@@ -21519,7 +23506,7 @@
 </p:sld>
 </file>
 
-<file path=ppt/slides/slide5.xml><?xml version="1.0" encoding="utf-8"?>
+<file path=ppt/slides/slide55.xml><?xml version="1.0" encoding="utf-8"?>
 <p:sld xmlns:a="http://schemas.openxmlformats.org/drawingml/2006/main" xmlns:r="http://schemas.openxmlformats.org/officeDocument/2006/relationships" xmlns:p="http://schemas.openxmlformats.org/presentationml/2006/main">
   <p:cSld>
     <p:spTree>
@@ -21538,236 +23525,6 @@
       </p:grpSpPr>
       <p:sp>
         <p:nvSpPr>
-          <p:cNvPr id="3" name="タイトル 2"/>
-          <p:cNvSpPr>
-            <a:spLocks noGrp="1"/>
-          </p:cNvSpPr>
-          <p:nvPr>
-            <p:ph type="title"/>
-          </p:nvPr>
-        </p:nvSpPr>
-        <p:spPr>
-          <a:xfrm>
-            <a:off x="457200" y="479425"/>
-            <a:ext cx="6211888" cy="511175"/>
-          </a:xfrm>
-        </p:spPr>
-        <p:txBody>
-          <a:bodyPr>
-            <a:noAutofit/>
-          </a:bodyPr>
-          <a:lstStyle/>
-          <a:p>
-            <a:r>
-              <a:rPr lang="en-US" altLang="ja-JP" dirty="0" smtClean="0"/>
-              <a:t>Roundtrip Properties</a:t>
-            </a:r>
-            <a:endParaRPr lang="ja-JP" altLang="en-US" dirty="0"/>
-          </a:p>
-        </p:txBody>
-      </p:sp>
-      <p:sp>
-        <p:nvSpPr>
-          <p:cNvPr id="13" name="スライド番号プレースホルダ 12"/>
-          <p:cNvSpPr>
-            <a:spLocks noGrp="1"/>
-          </p:cNvSpPr>
-          <p:nvPr>
-            <p:ph type="sldNum" sz="quarter" idx="11"/>
-          </p:nvPr>
-        </p:nvSpPr>
-        <p:spPr/>
-        <p:txBody>
-          <a:bodyPr/>
-          <a:lstStyle/>
-          <a:p>
-            <a:fld id="{F96F1464-7F58-8745-A325-E585E650CEFA}" type="slidenum">
-              <a:rPr lang="ja-JP" altLang="en-US" smtClean="0"/>
-              <a:pPr/>
-              <a:t>5</a:t>
-            </a:fld>
-            <a:endParaRPr lang="ja-JP" altLang="en-US"/>
-          </a:p>
-        </p:txBody>
-      </p:sp>
-      <p:pic>
-        <p:nvPicPr>
-          <p:cNvPr id="11" name="図 10"/>
-          <p:cNvPicPr>
-            <a:picLocks noChangeAspect="1"/>
-          </p:cNvPicPr>
-          <p:nvPr/>
-        </p:nvPicPr>
-        <p:blipFill>
-          <a:blip r:embed="rId2"/>
-          <a:stretch>
-            <a:fillRect/>
-          </a:stretch>
-        </p:blipFill>
-        <p:spPr>
-          <a:xfrm>
-            <a:off x="497836" y="1766214"/>
-            <a:ext cx="4226564" cy="3948786"/>
-          </a:xfrm>
-          <a:prstGeom prst="rect">
-            <a:avLst/>
-          </a:prstGeom>
-          <a:ln w="25400">
-            <a:solidFill>
-              <a:schemeClr val="accent5"/>
-            </a:solidFill>
-          </a:ln>
-        </p:spPr>
-      </p:pic>
-      <p:sp>
-        <p:nvSpPr>
-          <p:cNvPr id="16" name="正方形/長方形 15"/>
-          <p:cNvSpPr/>
-          <p:nvPr/>
-        </p:nvSpPr>
-        <p:spPr>
-          <a:xfrm>
-            <a:off x="5251648" y="2367136"/>
-            <a:ext cx="3352800" cy="2141984"/>
-          </a:xfrm>
-          <a:prstGeom prst="rect">
-            <a:avLst/>
-          </a:prstGeom>
-          <a:noFill/>
-          <a:ln w="38100" cmpd="sng"/>
-        </p:spPr>
-        <p:style>
-          <a:lnRef idx="1">
-            <a:schemeClr val="accent1"/>
-          </a:lnRef>
-          <a:fillRef idx="3">
-            <a:schemeClr val="accent1"/>
-          </a:fillRef>
-          <a:effectRef idx="2">
-            <a:schemeClr val="accent1"/>
-          </a:effectRef>
-          <a:fontRef idx="minor">
-            <a:schemeClr val="lt1"/>
-          </a:fontRef>
-        </p:style>
-        <p:txBody>
-          <a:bodyPr rtlCol="0" anchor="ctr"/>
-          <a:lstStyle/>
-          <a:p>
-            <a:r>
-              <a:rPr kumimoji="1" lang="en-US" altLang="ja-JP" dirty="0" smtClean="0">
-                <a:solidFill>
-                  <a:schemeClr val="tx1"/>
-                </a:solidFill>
-              </a:rPr>
-              <a:t>Get-Put: </a:t>
-            </a:r>
-          </a:p>
-          <a:p>
-            <a:pPr algn="ctr"/>
-            <a:r>
-              <a:rPr lang="en-US" altLang="ja-JP" dirty="0">
-                <a:solidFill>
-                  <a:schemeClr val="tx1"/>
-                </a:solidFill>
-              </a:rPr>
-              <a:t>p</a:t>
-            </a:r>
-            <a:r>
-              <a:rPr lang="en-US" altLang="ja-JP" dirty="0" smtClean="0">
-                <a:solidFill>
-                  <a:schemeClr val="tx1"/>
-                </a:solidFill>
-              </a:rPr>
-              <a:t>ut s (get s) = s</a:t>
-            </a:r>
-          </a:p>
-          <a:p>
-            <a:pPr algn="ctr"/>
-            <a:endParaRPr lang="en-US" altLang="ja-JP" dirty="0" smtClean="0">
-              <a:solidFill>
-                <a:schemeClr val="tx1"/>
-              </a:solidFill>
-            </a:endParaRPr>
-          </a:p>
-          <a:p>
-            <a:r>
-              <a:rPr kumimoji="1" lang="en-US" altLang="ja-JP" dirty="0" smtClean="0">
-                <a:solidFill>
-                  <a:schemeClr val="tx1"/>
-                </a:solidFill>
-              </a:rPr>
-              <a:t>Put-Get:</a:t>
-            </a:r>
-          </a:p>
-          <a:p>
-            <a:pPr algn="ctr"/>
-            <a:r>
-              <a:rPr lang="en-US" altLang="ja-JP" dirty="0" smtClean="0">
-                <a:solidFill>
-                  <a:schemeClr val="tx1"/>
-                </a:solidFill>
-              </a:rPr>
-              <a:t>get (put s</a:t>
-            </a:r>
-            <a:r>
-              <a:rPr lang="en-US" altLang="ja-JP" dirty="0">
-                <a:solidFill>
-                  <a:schemeClr val="tx1"/>
-                </a:solidFill>
-              </a:rPr>
-              <a:t> </a:t>
-            </a:r>
-            <a:r>
-              <a:rPr lang="en-US" altLang="ja-JP" dirty="0" smtClean="0">
-                <a:solidFill>
-                  <a:schemeClr val="tx1"/>
-                </a:solidFill>
-              </a:rPr>
-              <a:t>t) = t</a:t>
-            </a:r>
-          </a:p>
-        </p:txBody>
-      </p:sp>
-    </p:spTree>
-    <p:extLst>
-      <p:ext uri="{BB962C8B-B14F-4D97-AF65-F5344CB8AC3E}">
-        <p14:creationId xmlns:p14="http://schemas.microsoft.com/office/powerpoint/2010/main" val="629128324"/>
-      </p:ext>
-    </p:extLst>
-  </p:cSld>
-  <p:clrMapOvr>
-    <a:masterClrMapping/>
-  </p:clrMapOvr>
-  <p:timing>
-    <p:tnLst>
-      <p:par>
-        <p:cTn xmlns:p14="http://schemas.microsoft.com/office/powerpoint/2010/main" id="1" dur="indefinite" restart="never" nodeType="tmRoot"/>
-      </p:par>
-    </p:tnLst>
-  </p:timing>
-</p:sld>
-</file>
-
-<file path=ppt/slides/slide50.xml><?xml version="1.0" encoding="utf-8"?>
-<p:sld xmlns:a="http://schemas.openxmlformats.org/drawingml/2006/main" xmlns:r="http://schemas.openxmlformats.org/officeDocument/2006/relationships" xmlns:p="http://schemas.openxmlformats.org/presentationml/2006/main">
-  <p:cSld>
-    <p:spTree>
-      <p:nvGrpSpPr>
-        <p:cNvPr id="1" name=""/>
-        <p:cNvGrpSpPr/>
-        <p:nvPr/>
-      </p:nvGrpSpPr>
-      <p:grpSpPr>
-        <a:xfrm>
-          <a:off x="0" y="0"/>
-          <a:ext cx="0" cy="0"/>
-          <a:chOff x="0" y="0"/>
-          <a:chExt cx="0" cy="0"/>
-        </a:xfrm>
-      </p:grpSpPr>
-      <p:sp>
-        <p:nvSpPr>
           <p:cNvPr id="2" name="タイトル 1"/>
           <p:cNvSpPr>
             <a:spLocks noGrp="1"/>
@@ -21819,7 +23576,7 @@
             <a:fld id="{F96F1464-7F58-8745-A325-E585E650CEFA}" type="slidenum">
               <a:rPr lang="ja-JP" altLang="en-US" smtClean="0"/>
               <a:pPr/>
-              <a:t>50</a:t>
+              <a:t>55</a:t>
             </a:fld>
             <a:endParaRPr lang="ja-JP" altLang="en-US"/>
           </a:p>
@@ -22493,7 +24250,7 @@
 </p:sld>
 </file>
 
-<file path=ppt/slides/slide51.xml><?xml version="1.0" encoding="utf-8"?>
+<file path=ppt/slides/slide56.xml><?xml version="1.0" encoding="utf-8"?>
 <p:sld xmlns:a="http://schemas.openxmlformats.org/drawingml/2006/main" xmlns:r="http://schemas.openxmlformats.org/officeDocument/2006/relationships" xmlns:p="http://schemas.openxmlformats.org/presentationml/2006/main">
   <p:cSld>
     <p:spTree>
@@ -22563,7 +24320,7 @@
             <a:fld id="{F96F1464-7F58-8745-A325-E585E650CEFA}" type="slidenum">
               <a:rPr lang="ja-JP" altLang="en-US" smtClean="0"/>
               <a:pPr/>
-              <a:t>51</a:t>
+              <a:t>56</a:t>
             </a:fld>
             <a:endParaRPr lang="ja-JP" altLang="en-US"/>
           </a:p>
@@ -23425,7 +25182,7 @@
 </p:sld>
 </file>
 
-<file path=ppt/slides/slide52.xml><?xml version="1.0" encoding="utf-8"?>
+<file path=ppt/slides/slide57.xml><?xml version="1.0" encoding="utf-8"?>
 <p:sld xmlns:a="http://schemas.openxmlformats.org/drawingml/2006/main" xmlns:r="http://schemas.openxmlformats.org/officeDocument/2006/relationships" xmlns:p="http://schemas.openxmlformats.org/presentationml/2006/main">
   <p:cSld>
     <p:spTree>
@@ -23495,7 +25252,7 @@
             <a:fld id="{F96F1464-7F58-8745-A325-E585E650CEFA}" type="slidenum">
               <a:rPr lang="ja-JP" altLang="en-US" smtClean="0"/>
               <a:pPr/>
-              <a:t>52</a:t>
+              <a:t>57</a:t>
             </a:fld>
             <a:endParaRPr lang="ja-JP" altLang="en-US"/>
           </a:p>
@@ -24145,7 +25902,7 @@
 </p:sld>
 </file>
 
-<file path=ppt/slides/slide53.xml><?xml version="1.0" encoding="utf-8"?>
+<file path=ppt/slides/slide58.xml><?xml version="1.0" encoding="utf-8"?>
 <p:sld xmlns:a="http://schemas.openxmlformats.org/drawingml/2006/main" xmlns:r="http://schemas.openxmlformats.org/officeDocument/2006/relationships" xmlns:p="http://schemas.openxmlformats.org/presentationml/2006/main">
   <p:cSld>
     <p:spTree>
@@ -24231,7 +25988,7 @@
             <a:fld id="{F96F1464-7F58-8745-A325-E585E650CEFA}" type="slidenum">
               <a:rPr lang="ja-JP" altLang="en-US" smtClean="0"/>
               <a:pPr/>
-              <a:t>53</a:t>
+              <a:t>58</a:t>
             </a:fld>
             <a:endParaRPr lang="ja-JP" altLang="en-US"/>
           </a:p>
@@ -24769,7 +26526,7 @@
 </p:sld>
 </file>
 
-<file path=ppt/slides/slide54.xml><?xml version="1.0" encoding="utf-8"?>
+<file path=ppt/slides/slide59.xml><?xml version="1.0" encoding="utf-8"?>
 <p:sld xmlns:a="http://schemas.openxmlformats.org/drawingml/2006/main" xmlns:r="http://schemas.openxmlformats.org/officeDocument/2006/relationships" xmlns:p="http://schemas.openxmlformats.org/presentationml/2006/main">
   <p:cSld>
     <p:spTree>
@@ -24831,7 +26588,7 @@
             <a:fld id="{F96F1464-7F58-8745-A325-E585E650CEFA}" type="slidenum">
               <a:rPr lang="ja-JP" altLang="en-US" smtClean="0"/>
               <a:pPr/>
-              <a:t>54</a:t>
+              <a:t>59</a:t>
             </a:fld>
             <a:endParaRPr lang="ja-JP" altLang="en-US"/>
           </a:p>
@@ -25045,1532 +26802,6 @@
       </p:par>
     </p:tnLst>
   </p:timing>
-</p:sld>
-</file>
-
-<file path=ppt/slides/slide55.xml><?xml version="1.0" encoding="utf-8"?>
-<p:sld xmlns:a="http://schemas.openxmlformats.org/drawingml/2006/main" xmlns:r="http://schemas.openxmlformats.org/officeDocument/2006/relationships" xmlns:p="http://schemas.openxmlformats.org/presentationml/2006/main">
-  <p:cSld>
-    <p:spTree>
-      <p:nvGrpSpPr>
-        <p:cNvPr id="1" name=""/>
-        <p:cNvGrpSpPr/>
-        <p:nvPr/>
-      </p:nvGrpSpPr>
-      <p:grpSpPr>
-        <a:xfrm>
-          <a:off x="0" y="0"/>
-          <a:ext cx="0" cy="0"/>
-          <a:chOff x="0" y="0"/>
-          <a:chExt cx="0" cy="0"/>
-        </a:xfrm>
-      </p:grpSpPr>
-      <p:sp>
-        <p:nvSpPr>
-          <p:cNvPr id="2" name="タイトル 1"/>
-          <p:cNvSpPr>
-            <a:spLocks noGrp="1"/>
-          </p:cNvSpPr>
-          <p:nvPr>
-            <p:ph type="title"/>
-          </p:nvPr>
-        </p:nvSpPr>
-        <p:spPr/>
-        <p:txBody>
-          <a:bodyPr/>
-          <a:lstStyle/>
-          <a:p>
-            <a:endParaRPr kumimoji="1" lang="ja-JP" altLang="en-US"/>
-          </a:p>
-        </p:txBody>
-      </p:sp>
-      <p:sp>
-        <p:nvSpPr>
-          <p:cNvPr id="4" name="スライド番号プレースホルダー 3"/>
-          <p:cNvSpPr>
-            <a:spLocks noGrp="1"/>
-          </p:cNvSpPr>
-          <p:nvPr>
-            <p:ph type="sldNum" sz="quarter" idx="11"/>
-          </p:nvPr>
-        </p:nvSpPr>
-        <p:spPr/>
-        <p:txBody>
-          <a:bodyPr/>
-          <a:lstStyle/>
-          <a:p>
-            <a:fld id="{F96F1464-7F58-8745-A325-E585E650CEFA}" type="slidenum">
-              <a:rPr lang="ja-JP" altLang="en-US" smtClean="0"/>
-              <a:pPr/>
-              <a:t>55</a:t>
-            </a:fld>
-            <a:endParaRPr lang="ja-JP" altLang="en-US"/>
-          </a:p>
-        </p:txBody>
-      </p:sp>
-      <p:sp>
-        <p:nvSpPr>
-          <p:cNvPr id="5" name="正方形/長方形 4"/>
-          <p:cNvSpPr/>
-          <p:nvPr/>
-        </p:nvSpPr>
-        <p:spPr>
-          <a:xfrm>
-            <a:off x="685800" y="2131115"/>
-            <a:ext cx="7498977" cy="1477328"/>
-          </a:xfrm>
-          <a:prstGeom prst="rect">
-            <a:avLst/>
-          </a:prstGeom>
-          <a:ln>
-            <a:solidFill>
-              <a:schemeClr val="accent1"/>
-            </a:solidFill>
-          </a:ln>
-        </p:spPr>
-        <p:txBody>
-          <a:bodyPr wrap="square">
-            <a:spAutoFit/>
-          </a:bodyPr>
-          <a:lstStyle/>
-          <a:p>
-            <a:r>
-              <a:rPr lang="en-US" altLang="ja-JP" dirty="0"/>
-              <a:t>*</a:t>
-            </a:r>
-            <a:r>
-              <a:rPr lang="en-US" altLang="ja-JP" dirty="0" err="1"/>
-              <a:t>Brul</a:t>
-            </a:r>
-            <a:r>
-              <a:rPr lang="en-US" altLang="ja-JP" dirty="0"/>
-              <a:t>&gt; get (u0 (</a:t>
-            </a:r>
-            <a:r>
-              <a:rPr lang="en-US" altLang="ja-JP" dirty="0" err="1"/>
-              <a:t>RInt</a:t>
-            </a:r>
-            <a:r>
-              <a:rPr lang="en-US" altLang="ja-JP" dirty="0"/>
-              <a:t> (-1)) id) s</a:t>
-            </a:r>
-          </a:p>
-          <a:p>
-            <a:r>
-              <a:rPr lang="en-US" altLang="ja-JP" dirty="0"/>
-              <a:t>Just</a:t>
-            </a:r>
-          </a:p>
-          <a:p>
-            <a:r>
-              <a:rPr lang="en-US" altLang="ja-JP" dirty="0"/>
-              <a:t>[[</a:t>
-            </a:r>
-            <a:r>
-              <a:rPr lang="en-US" altLang="ja-JP" dirty="0" err="1"/>
-              <a:t>RString</a:t>
-            </a:r>
-            <a:r>
-              <a:rPr lang="en-US" altLang="ja-JP" dirty="0"/>
-              <a:t> "Lullaby",</a:t>
-            </a:r>
-            <a:r>
-              <a:rPr lang="en-US" altLang="ja-JP" dirty="0" err="1"/>
-              <a:t>RInt</a:t>
-            </a:r>
-            <a:r>
-              <a:rPr lang="en-US" altLang="ja-JP" dirty="0"/>
-              <a:t> 3,RString "Show",</a:t>
-            </a:r>
-            <a:r>
-              <a:rPr lang="en-US" altLang="ja-JP" dirty="0" err="1"/>
-              <a:t>RInt</a:t>
-            </a:r>
-            <a:r>
-              <a:rPr lang="en-US" altLang="ja-JP" dirty="0"/>
-              <a:t> 3],</a:t>
-            </a:r>
-          </a:p>
-          <a:p>
-            <a:r>
-              <a:rPr lang="en-US" altLang="ja-JP" dirty="0"/>
-              <a:t>[</a:t>
-            </a:r>
-            <a:r>
-              <a:rPr lang="en-US" altLang="ja-JP" dirty="0" err="1"/>
-              <a:t>RString</a:t>
-            </a:r>
-            <a:r>
-              <a:rPr lang="en-US" altLang="ja-JP" dirty="0"/>
-              <a:t> "</a:t>
-            </a:r>
-            <a:r>
-              <a:rPr lang="en-US" altLang="ja-JP" dirty="0" err="1"/>
-              <a:t>Lovesong</a:t>
-            </a:r>
-            <a:r>
-              <a:rPr lang="en-US" altLang="ja-JP" dirty="0"/>
-              <a:t>",</a:t>
-            </a:r>
-            <a:r>
-              <a:rPr lang="en-US" altLang="ja-JP" dirty="0" err="1"/>
-              <a:t>RInt</a:t>
-            </a:r>
-            <a:r>
-              <a:rPr lang="en-US" altLang="ja-JP" dirty="0"/>
-              <a:t> 5,RString "Disintegration",</a:t>
-            </a:r>
-            <a:r>
-              <a:rPr lang="en-US" altLang="ja-JP" dirty="0" err="1"/>
-              <a:t>RInt</a:t>
-            </a:r>
-            <a:r>
-              <a:rPr lang="en-US" altLang="ja-JP" dirty="0"/>
-              <a:t> 4],</a:t>
-            </a:r>
-          </a:p>
-          <a:p>
-            <a:r>
-              <a:rPr lang="en-US" altLang="ja-JP" dirty="0"/>
-              <a:t>[</a:t>
-            </a:r>
-            <a:r>
-              <a:rPr lang="en-US" altLang="ja-JP" dirty="0" err="1">
-                <a:solidFill>
-                  <a:srgbClr val="FF6600"/>
-                </a:solidFill>
-              </a:rPr>
-              <a:t>RString</a:t>
-            </a:r>
-            <a:r>
-              <a:rPr lang="en-US" altLang="ja-JP" dirty="0">
-                <a:solidFill>
-                  <a:srgbClr val="FF6600"/>
-                </a:solidFill>
-              </a:rPr>
-              <a:t> "Trust",</a:t>
-            </a:r>
-            <a:r>
-              <a:rPr lang="en-US" altLang="ja-JP" dirty="0" err="1">
-                <a:solidFill>
-                  <a:srgbClr val="FF6600"/>
-                </a:solidFill>
-              </a:rPr>
-              <a:t>RInt</a:t>
-            </a:r>
-            <a:r>
-              <a:rPr lang="en-US" altLang="ja-JP" dirty="0">
-                <a:solidFill>
-                  <a:srgbClr val="FF6600"/>
-                </a:solidFill>
-              </a:rPr>
-              <a:t> 4,RString "Wish",</a:t>
-            </a:r>
-            <a:r>
-              <a:rPr lang="en-US" altLang="ja-JP" dirty="0" err="1">
-                <a:solidFill>
-                  <a:srgbClr val="FF6600"/>
-                </a:solidFill>
-              </a:rPr>
-              <a:t>RInt</a:t>
-            </a:r>
-            <a:r>
-              <a:rPr lang="en-US" altLang="ja-JP" dirty="0">
-                <a:solidFill>
-                  <a:srgbClr val="FF6600"/>
-                </a:solidFill>
-              </a:rPr>
-              <a:t> 5]]</a:t>
-            </a:r>
-            <a:endParaRPr lang="ja-JP" altLang="en-US" dirty="0">
-              <a:solidFill>
-                <a:srgbClr val="FF6600"/>
-              </a:solidFill>
-            </a:endParaRPr>
-          </a:p>
-        </p:txBody>
-      </p:sp>
-      <p:sp>
-        <p:nvSpPr>
-          <p:cNvPr id="6" name="テキスト ボックス 5"/>
-          <p:cNvSpPr txBox="1"/>
-          <p:nvPr/>
-        </p:nvSpPr>
-        <p:spPr>
-          <a:xfrm>
-            <a:off x="685800" y="1484784"/>
-            <a:ext cx="3946790" cy="646331"/>
-          </a:xfrm>
-          <a:prstGeom prst="rect">
-            <a:avLst/>
-          </a:prstGeom>
-          <a:noFill/>
-        </p:spPr>
-        <p:txBody>
-          <a:bodyPr wrap="none" rtlCol="0">
-            <a:spAutoFit/>
-          </a:bodyPr>
-          <a:lstStyle/>
-          <a:p>
-            <a:r>
-              <a:rPr lang="en-US" altLang="ja-JP" dirty="0" smtClean="0"/>
-              <a:t>Testing</a:t>
-            </a:r>
-            <a:r>
-              <a:rPr lang="ja-JP" altLang="en-US" dirty="0" smtClean="0"/>
-              <a:t> </a:t>
-            </a:r>
-            <a:r>
-              <a:rPr lang="en-US" altLang="ja-JP" dirty="0" smtClean="0"/>
-              <a:t>the</a:t>
-            </a:r>
-            <a:r>
-              <a:rPr lang="ja-JP" altLang="en-US" dirty="0" smtClean="0"/>
-              <a:t> </a:t>
-            </a:r>
-            <a:r>
-              <a:rPr lang="en-US" altLang="ja-JP" dirty="0" smtClean="0"/>
-              <a:t>forward</a:t>
-            </a:r>
-            <a:r>
-              <a:rPr lang="ja-JP" altLang="en-US" dirty="0" smtClean="0"/>
-              <a:t> </a:t>
-            </a:r>
-            <a:r>
-              <a:rPr lang="en-US" altLang="ja-JP" dirty="0" smtClean="0"/>
-              <a:t>transformation:</a:t>
-            </a:r>
-          </a:p>
-          <a:p>
-            <a:endParaRPr kumimoji="1" lang="ja-JP" altLang="en-US" dirty="0"/>
-          </a:p>
-        </p:txBody>
-      </p:sp>
-      <p:sp>
-        <p:nvSpPr>
-          <p:cNvPr id="7" name="テキスト ボックス 6"/>
-          <p:cNvSpPr txBox="1"/>
-          <p:nvPr/>
-        </p:nvSpPr>
-        <p:spPr>
-          <a:xfrm>
-            <a:off x="717852" y="3964414"/>
-            <a:ext cx="4099060" cy="369332"/>
-          </a:xfrm>
-          <a:prstGeom prst="rect">
-            <a:avLst/>
-          </a:prstGeom>
-          <a:noFill/>
-        </p:spPr>
-        <p:txBody>
-          <a:bodyPr wrap="none" rtlCol="0">
-            <a:spAutoFit/>
-          </a:bodyPr>
-          <a:lstStyle/>
-          <a:p>
-            <a:r>
-              <a:rPr kumimoji="1" lang="en-US" altLang="ja-JP" dirty="0" smtClean="0"/>
-              <a:t>Suppose that the view is changed to:</a:t>
-            </a:r>
-            <a:endParaRPr kumimoji="1" lang="ja-JP" altLang="en-US" dirty="0"/>
-          </a:p>
-        </p:txBody>
-      </p:sp>
-      <p:sp>
-        <p:nvSpPr>
-          <p:cNvPr id="8" name="正方形/長方形 7"/>
-          <p:cNvSpPr/>
-          <p:nvPr/>
-        </p:nvSpPr>
-        <p:spPr>
-          <a:xfrm>
-            <a:off x="725859" y="4581128"/>
-            <a:ext cx="7458918" cy="923330"/>
-          </a:xfrm>
-          <a:prstGeom prst="rect">
-            <a:avLst/>
-          </a:prstGeom>
-          <a:ln>
-            <a:solidFill>
-              <a:srgbClr val="FF6600"/>
-            </a:solidFill>
-          </a:ln>
-        </p:spPr>
-        <p:txBody>
-          <a:bodyPr wrap="square">
-            <a:spAutoFit/>
-          </a:bodyPr>
-          <a:lstStyle/>
-          <a:p>
-            <a:r>
-              <a:rPr lang="en-US" altLang="ja-JP" dirty="0"/>
-              <a:t>v =  [ [</a:t>
-            </a:r>
-            <a:r>
-              <a:rPr lang="en-US" altLang="ja-JP" dirty="0" err="1"/>
-              <a:t>RString</a:t>
-            </a:r>
-            <a:r>
-              <a:rPr lang="en-US" altLang="ja-JP" dirty="0"/>
-              <a:t> "Lullaby" , </a:t>
-            </a:r>
-            <a:r>
-              <a:rPr lang="en-US" altLang="ja-JP" dirty="0" err="1"/>
-              <a:t>RInt</a:t>
-            </a:r>
-            <a:r>
-              <a:rPr lang="en-US" altLang="ja-JP" dirty="0"/>
-              <a:t> </a:t>
-            </a:r>
-            <a:r>
-              <a:rPr lang="en-US" altLang="ja-JP" dirty="0">
-                <a:solidFill>
-                  <a:srgbClr val="FF6600"/>
-                </a:solidFill>
-              </a:rPr>
-              <a:t>4</a:t>
-            </a:r>
-            <a:r>
-              <a:rPr lang="en-US" altLang="ja-JP" dirty="0"/>
-              <a:t>, </a:t>
-            </a:r>
-            <a:r>
-              <a:rPr lang="en-US" altLang="ja-JP" dirty="0" err="1"/>
-              <a:t>RString</a:t>
-            </a:r>
-            <a:r>
-              <a:rPr lang="en-US" altLang="ja-JP" dirty="0"/>
-              <a:t> "Show"  , </a:t>
-            </a:r>
-            <a:r>
-              <a:rPr lang="en-US" altLang="ja-JP" dirty="0" err="1"/>
-              <a:t>RInt</a:t>
-            </a:r>
-            <a:r>
-              <a:rPr lang="en-US" altLang="ja-JP" dirty="0"/>
-              <a:t> 3]</a:t>
-            </a:r>
-          </a:p>
-          <a:p>
-            <a:r>
-              <a:rPr lang="en-US" altLang="ja-JP" dirty="0"/>
-              <a:t>     , [</a:t>
-            </a:r>
-            <a:r>
-              <a:rPr lang="en-US" altLang="ja-JP" dirty="0" err="1"/>
-              <a:t>RString</a:t>
-            </a:r>
-            <a:r>
-              <a:rPr lang="en-US" altLang="ja-JP" dirty="0"/>
-              <a:t> "</a:t>
-            </a:r>
-            <a:r>
-              <a:rPr lang="en-US" altLang="ja-JP" dirty="0" err="1"/>
-              <a:t>Lovesong</a:t>
-            </a:r>
-            <a:r>
-              <a:rPr lang="en-US" altLang="ja-JP" dirty="0"/>
-              <a:t>", </a:t>
-            </a:r>
-            <a:r>
-              <a:rPr lang="en-US" altLang="ja-JP" dirty="0" err="1"/>
-              <a:t>RInt</a:t>
-            </a:r>
-            <a:r>
-              <a:rPr lang="en-US" altLang="ja-JP" dirty="0"/>
-              <a:t> 5, </a:t>
-            </a:r>
-            <a:r>
-              <a:rPr lang="en-US" altLang="ja-JP" dirty="0" err="1"/>
-              <a:t>RString</a:t>
-            </a:r>
-            <a:r>
-              <a:rPr lang="en-US" altLang="ja-JP" dirty="0"/>
-              <a:t> "Disintegration" , </a:t>
-            </a:r>
-            <a:r>
-              <a:rPr lang="en-US" altLang="ja-JP" dirty="0" err="1"/>
-              <a:t>RInt</a:t>
-            </a:r>
-            <a:r>
-              <a:rPr lang="en-US" altLang="ja-JP" dirty="0"/>
-              <a:t> </a:t>
-            </a:r>
-            <a:r>
-              <a:rPr lang="en-US" altLang="ja-JP" dirty="0">
-                <a:solidFill>
-                  <a:srgbClr val="FF6600"/>
-                </a:solidFill>
-              </a:rPr>
-              <a:t>7</a:t>
-            </a:r>
-            <a:r>
-              <a:rPr lang="en-US" altLang="ja-JP" dirty="0"/>
-              <a:t>]</a:t>
-            </a:r>
-          </a:p>
-          <a:p>
-            <a:r>
-              <a:rPr lang="en-US" altLang="ja-JP" dirty="0"/>
-              <a:t>     ]</a:t>
-            </a:r>
-            <a:endParaRPr lang="ja-JP" altLang="en-US" dirty="0"/>
-          </a:p>
-        </p:txBody>
-      </p:sp>
-    </p:spTree>
-    <p:extLst>
-      <p:ext uri="{BB962C8B-B14F-4D97-AF65-F5344CB8AC3E}">
-        <p14:creationId xmlns:p14="http://schemas.microsoft.com/office/powerpoint/2010/main" val="3584509778"/>
-      </p:ext>
-    </p:extLst>
-  </p:cSld>
-  <p:clrMapOvr>
-    <a:masterClrMapping/>
-  </p:clrMapOvr>
-  <p:timing>
-    <p:tnLst>
-      <p:par>
-        <p:cTn xmlns:p14="http://schemas.microsoft.com/office/powerpoint/2010/main" id="1" dur="indefinite" restart="never" nodeType="tmRoot"/>
-      </p:par>
-    </p:tnLst>
-  </p:timing>
-</p:sld>
-</file>
-
-<file path=ppt/slides/slide56.xml><?xml version="1.0" encoding="utf-8"?>
-<p:sld xmlns:a="http://schemas.openxmlformats.org/drawingml/2006/main" xmlns:r="http://schemas.openxmlformats.org/officeDocument/2006/relationships" xmlns:p="http://schemas.openxmlformats.org/presentationml/2006/main">
-  <p:cSld>
-    <p:spTree>
-      <p:nvGrpSpPr>
-        <p:cNvPr id="1" name=""/>
-        <p:cNvGrpSpPr/>
-        <p:nvPr/>
-      </p:nvGrpSpPr>
-      <p:grpSpPr>
-        <a:xfrm>
-          <a:off x="0" y="0"/>
-          <a:ext cx="0" cy="0"/>
-          <a:chOff x="0" y="0"/>
-          <a:chExt cx="0" cy="0"/>
-        </a:xfrm>
-      </p:grpSpPr>
-      <p:sp>
-        <p:nvSpPr>
-          <p:cNvPr id="2" name="タイトル 1"/>
-          <p:cNvSpPr>
-            <a:spLocks noGrp="1"/>
-          </p:cNvSpPr>
-          <p:nvPr>
-            <p:ph type="title"/>
-          </p:nvPr>
-        </p:nvSpPr>
-        <p:spPr/>
-        <p:txBody>
-          <a:bodyPr/>
-          <a:lstStyle/>
-          <a:p>
-            <a:endParaRPr kumimoji="1" lang="ja-JP" altLang="en-US"/>
-          </a:p>
-        </p:txBody>
-      </p:sp>
-      <p:sp>
-        <p:nvSpPr>
-          <p:cNvPr id="4" name="スライド番号プレースホルダー 3"/>
-          <p:cNvSpPr>
-            <a:spLocks noGrp="1"/>
-          </p:cNvSpPr>
-          <p:nvPr>
-            <p:ph type="sldNum" sz="quarter" idx="11"/>
-          </p:nvPr>
-        </p:nvSpPr>
-        <p:spPr/>
-        <p:txBody>
-          <a:bodyPr/>
-          <a:lstStyle/>
-          <a:p>
-            <a:fld id="{F96F1464-7F58-8745-A325-E585E650CEFA}" type="slidenum">
-              <a:rPr lang="ja-JP" altLang="en-US" smtClean="0"/>
-              <a:pPr/>
-              <a:t>56</a:t>
-            </a:fld>
-            <a:endParaRPr lang="ja-JP" altLang="en-US"/>
-          </a:p>
-        </p:txBody>
-      </p:sp>
-      <p:sp>
-        <p:nvSpPr>
-          <p:cNvPr id="6" name="テキスト ボックス 5"/>
-          <p:cNvSpPr txBox="1"/>
-          <p:nvPr/>
-        </p:nvSpPr>
-        <p:spPr>
-          <a:xfrm>
-            <a:off x="685800" y="1484784"/>
-            <a:ext cx="4102123" cy="646331"/>
-          </a:xfrm>
-          <a:prstGeom prst="rect">
-            <a:avLst/>
-          </a:prstGeom>
-          <a:noFill/>
-        </p:spPr>
-        <p:txBody>
-          <a:bodyPr wrap="none" rtlCol="0">
-            <a:spAutoFit/>
-          </a:bodyPr>
-          <a:lstStyle/>
-          <a:p>
-            <a:r>
-              <a:rPr lang="en-US" altLang="ja-JP" dirty="0" smtClean="0"/>
-              <a:t>Testing</a:t>
-            </a:r>
-            <a:r>
-              <a:rPr lang="ja-JP" altLang="en-US" dirty="0" smtClean="0"/>
-              <a:t> </a:t>
-            </a:r>
-            <a:r>
-              <a:rPr lang="en-US" altLang="ja-JP" dirty="0" smtClean="0"/>
-              <a:t>the</a:t>
-            </a:r>
-            <a:r>
-              <a:rPr lang="ja-JP" altLang="en-US" dirty="0" smtClean="0"/>
-              <a:t> </a:t>
-            </a:r>
-            <a:r>
-              <a:rPr lang="en-US" altLang="ja-JP" dirty="0" smtClean="0"/>
-              <a:t>backward</a:t>
-            </a:r>
-            <a:r>
-              <a:rPr lang="ja-JP" altLang="en-US" dirty="0" smtClean="0"/>
-              <a:t> </a:t>
-            </a:r>
-            <a:r>
-              <a:rPr lang="en-US" altLang="ja-JP" dirty="0" smtClean="0"/>
-              <a:t>transformation:</a:t>
-            </a:r>
-          </a:p>
-          <a:p>
-            <a:endParaRPr kumimoji="1" lang="ja-JP" altLang="en-US" dirty="0"/>
-          </a:p>
-        </p:txBody>
-      </p:sp>
-      <p:sp>
-        <p:nvSpPr>
-          <p:cNvPr id="3" name="正方形/長方形 2"/>
-          <p:cNvSpPr/>
-          <p:nvPr/>
-        </p:nvSpPr>
-        <p:spPr>
-          <a:xfrm>
-            <a:off x="683568" y="2132856"/>
-            <a:ext cx="7808337" cy="1754327"/>
-          </a:xfrm>
-          <a:prstGeom prst="rect">
-            <a:avLst/>
-          </a:prstGeom>
-          <a:ln>
-            <a:solidFill>
-              <a:schemeClr val="accent1"/>
-            </a:solidFill>
-          </a:ln>
-        </p:spPr>
-        <p:txBody>
-          <a:bodyPr wrap="square">
-            <a:spAutoFit/>
-          </a:bodyPr>
-          <a:lstStyle/>
-          <a:p>
-            <a:r>
-              <a:rPr lang="en-US" altLang="ja-JP" dirty="0"/>
-              <a:t>*</a:t>
-            </a:r>
-            <a:r>
-              <a:rPr lang="en-US" altLang="ja-JP" dirty="0" err="1"/>
-              <a:t>Brul</a:t>
-            </a:r>
-            <a:r>
-              <a:rPr lang="en-US" altLang="ja-JP" dirty="0"/>
-              <a:t>&gt; put (u0 (</a:t>
-            </a:r>
-            <a:r>
-              <a:rPr lang="en-US" altLang="ja-JP" dirty="0" err="1"/>
-              <a:t>RInt</a:t>
-            </a:r>
-            <a:r>
-              <a:rPr lang="en-US" altLang="ja-JP" dirty="0"/>
-              <a:t> (-1)) (</a:t>
-            </a:r>
-            <a:r>
-              <a:rPr lang="en-US" altLang="ja-JP" dirty="0" err="1"/>
-              <a:t>fdFun</a:t>
-            </a:r>
-            <a:r>
-              <a:rPr lang="en-US" altLang="ja-JP" dirty="0"/>
-              <a:t> </a:t>
-            </a:r>
-            <a:r>
-              <a:rPr lang="en-US" altLang="ja-JP" dirty="0" err="1"/>
-              <a:t>sfdMap</a:t>
-            </a:r>
-            <a:r>
-              <a:rPr lang="en-US" altLang="ja-JP" dirty="0"/>
-              <a:t> </a:t>
-            </a:r>
-            <a:r>
-              <a:rPr lang="en-US" altLang="ja-JP" dirty="0" err="1"/>
-              <a:t>vfdMap</a:t>
-            </a:r>
-            <a:r>
-              <a:rPr lang="en-US" altLang="ja-JP" dirty="0"/>
-              <a:t> </a:t>
-            </a:r>
-            <a:r>
-              <a:rPr lang="en-US" altLang="ja-JP" dirty="0" err="1"/>
-              <a:t>svMap</a:t>
-            </a:r>
-            <a:r>
-              <a:rPr lang="en-US" altLang="ja-JP" dirty="0"/>
-              <a:t> v)) s v</a:t>
-            </a:r>
-          </a:p>
-          <a:p>
-            <a:r>
-              <a:rPr lang="en-US" altLang="ja-JP" dirty="0"/>
-              <a:t>Just</a:t>
-            </a:r>
-          </a:p>
-          <a:p>
-            <a:r>
-              <a:rPr lang="en-US" altLang="ja-JP" dirty="0"/>
-              <a:t>[[</a:t>
-            </a:r>
-            <a:r>
-              <a:rPr lang="en-US" altLang="ja-JP" dirty="0" err="1"/>
-              <a:t>RString</a:t>
-            </a:r>
-            <a:r>
-              <a:rPr lang="en-US" altLang="ja-JP" dirty="0"/>
-              <a:t> "Lullaby",</a:t>
-            </a:r>
-            <a:r>
-              <a:rPr lang="en-US" altLang="ja-JP" dirty="0" err="1"/>
-              <a:t>RInt</a:t>
-            </a:r>
-            <a:r>
-              <a:rPr lang="en-US" altLang="ja-JP" dirty="0"/>
-              <a:t> 1989,RInt </a:t>
-            </a:r>
-            <a:r>
-              <a:rPr lang="en-US" altLang="ja-JP" dirty="0">
-                <a:solidFill>
-                  <a:srgbClr val="FF6600"/>
-                </a:solidFill>
-              </a:rPr>
-              <a:t>4</a:t>
-            </a:r>
-            <a:r>
-              <a:rPr lang="en-US" altLang="ja-JP" dirty="0"/>
-              <a:t>,RString "Galore",</a:t>
-            </a:r>
-            <a:r>
-              <a:rPr lang="en-US" altLang="ja-JP" dirty="0" err="1"/>
-              <a:t>RInt</a:t>
-            </a:r>
-            <a:r>
-              <a:rPr lang="en-US" altLang="ja-JP" dirty="0"/>
-              <a:t> 1],</a:t>
-            </a:r>
-          </a:p>
-          <a:p>
-            <a:r>
-              <a:rPr lang="en-US" altLang="ja-JP" dirty="0"/>
-              <a:t>[</a:t>
-            </a:r>
-            <a:r>
-              <a:rPr lang="en-US" altLang="ja-JP" dirty="0" err="1"/>
-              <a:t>RString</a:t>
-            </a:r>
-            <a:r>
-              <a:rPr lang="en-US" altLang="ja-JP" dirty="0"/>
-              <a:t> "Lullaby",</a:t>
-            </a:r>
-            <a:r>
-              <a:rPr lang="en-US" altLang="ja-JP" dirty="0" err="1"/>
-              <a:t>RInt</a:t>
-            </a:r>
-            <a:r>
-              <a:rPr lang="en-US" altLang="ja-JP" dirty="0"/>
-              <a:t> 1989,RInt </a:t>
-            </a:r>
-            <a:r>
-              <a:rPr lang="en-US" altLang="ja-JP" dirty="0">
-                <a:solidFill>
-                  <a:srgbClr val="FF6600"/>
-                </a:solidFill>
-              </a:rPr>
-              <a:t>4</a:t>
-            </a:r>
-            <a:r>
-              <a:rPr lang="en-US" altLang="ja-JP" dirty="0"/>
-              <a:t>,RString "Show",</a:t>
-            </a:r>
-            <a:r>
-              <a:rPr lang="en-US" altLang="ja-JP" dirty="0" err="1"/>
-              <a:t>RInt</a:t>
-            </a:r>
-            <a:r>
-              <a:rPr lang="en-US" altLang="ja-JP" dirty="0"/>
-              <a:t> 3],</a:t>
-            </a:r>
-          </a:p>
-          <a:p>
-            <a:r>
-              <a:rPr lang="en-US" altLang="ja-JP" dirty="0"/>
-              <a:t>[</a:t>
-            </a:r>
-            <a:r>
-              <a:rPr lang="en-US" altLang="ja-JP" dirty="0" err="1"/>
-              <a:t>RString</a:t>
-            </a:r>
-            <a:r>
-              <a:rPr lang="en-US" altLang="ja-JP" dirty="0"/>
-              <a:t> "</a:t>
-            </a:r>
-            <a:r>
-              <a:rPr lang="en-US" altLang="ja-JP" dirty="0" err="1"/>
-              <a:t>Lovesong</a:t>
-            </a:r>
-            <a:r>
-              <a:rPr lang="en-US" altLang="ja-JP" dirty="0"/>
-              <a:t>",</a:t>
-            </a:r>
-            <a:r>
-              <a:rPr lang="en-US" altLang="ja-JP" dirty="0" err="1"/>
-              <a:t>RInt</a:t>
-            </a:r>
-            <a:r>
-              <a:rPr lang="en-US" altLang="ja-JP" dirty="0"/>
-              <a:t> 1989,RInt 5,RString "Galore",</a:t>
-            </a:r>
-            <a:r>
-              <a:rPr lang="en-US" altLang="ja-JP" dirty="0" err="1"/>
-              <a:t>RInt</a:t>
-            </a:r>
-            <a:r>
-              <a:rPr lang="en-US" altLang="ja-JP" dirty="0"/>
-              <a:t> 1],</a:t>
-            </a:r>
-          </a:p>
-          <a:p>
-            <a:r>
-              <a:rPr lang="en-US" altLang="ja-JP" dirty="0"/>
-              <a:t>[</a:t>
-            </a:r>
-            <a:r>
-              <a:rPr lang="en-US" altLang="ja-JP" dirty="0" err="1"/>
-              <a:t>RString</a:t>
-            </a:r>
-            <a:r>
-              <a:rPr lang="en-US" altLang="ja-JP" dirty="0"/>
-              <a:t> "</a:t>
-            </a:r>
-            <a:r>
-              <a:rPr lang="en-US" altLang="ja-JP" dirty="0" err="1"/>
-              <a:t>Lovesong</a:t>
-            </a:r>
-            <a:r>
-              <a:rPr lang="en-US" altLang="ja-JP" dirty="0"/>
-              <a:t>",</a:t>
-            </a:r>
-            <a:r>
-              <a:rPr lang="en-US" altLang="ja-JP" dirty="0" err="1"/>
-              <a:t>RInt</a:t>
-            </a:r>
-            <a:r>
-              <a:rPr lang="en-US" altLang="ja-JP" dirty="0"/>
-              <a:t> 1989,RInt 5,RString "Disintegration",</a:t>
-            </a:r>
-            <a:r>
-              <a:rPr lang="en-US" altLang="ja-JP" dirty="0" err="1"/>
-              <a:t>RInt</a:t>
-            </a:r>
-            <a:r>
-              <a:rPr lang="en-US" altLang="ja-JP" dirty="0"/>
-              <a:t> 7]]</a:t>
-            </a:r>
-            <a:endParaRPr lang="ja-JP" altLang="en-US" dirty="0"/>
-          </a:p>
-        </p:txBody>
-      </p:sp>
-    </p:spTree>
-    <p:extLst>
-      <p:ext uri="{BB962C8B-B14F-4D97-AF65-F5344CB8AC3E}">
-        <p14:creationId xmlns:p14="http://schemas.microsoft.com/office/powerpoint/2010/main" val="2198470690"/>
-      </p:ext>
-    </p:extLst>
-  </p:cSld>
-  <p:clrMapOvr>
-    <a:masterClrMapping/>
-  </p:clrMapOvr>
-  <p:timing>
-    <p:tnLst>
-      <p:par>
-        <p:cTn xmlns:p14="http://schemas.microsoft.com/office/powerpoint/2010/main" id="1" dur="indefinite" restart="never" nodeType="tmRoot"/>
-      </p:par>
-    </p:tnLst>
-  </p:timing>
-</p:sld>
-</file>
-
-<file path=ppt/slides/slide57.xml><?xml version="1.0" encoding="utf-8"?>
-<p:sld xmlns:a="http://schemas.openxmlformats.org/drawingml/2006/main" xmlns:r="http://schemas.openxmlformats.org/officeDocument/2006/relationships" xmlns:p="http://schemas.openxmlformats.org/presentationml/2006/main">
-  <p:cSld>
-    <p:spTree>
-      <p:nvGrpSpPr>
-        <p:cNvPr id="1" name=""/>
-        <p:cNvGrpSpPr/>
-        <p:nvPr/>
-      </p:nvGrpSpPr>
-      <p:grpSpPr>
-        <a:xfrm>
-          <a:off x="0" y="0"/>
-          <a:ext cx="0" cy="0"/>
-          <a:chOff x="0" y="0"/>
-          <a:chExt cx="0" cy="0"/>
-        </a:xfrm>
-      </p:grpSpPr>
-      <p:sp>
-        <p:nvSpPr>
-          <p:cNvPr id="2" name="タイトル 1"/>
-          <p:cNvSpPr>
-            <a:spLocks noGrp="1"/>
-          </p:cNvSpPr>
-          <p:nvPr>
-            <p:ph type="title"/>
-          </p:nvPr>
-        </p:nvSpPr>
-        <p:spPr/>
-        <p:txBody>
-          <a:bodyPr/>
-          <a:lstStyle/>
-          <a:p>
-            <a:endParaRPr kumimoji="1" lang="ja-JP" altLang="en-US"/>
-          </a:p>
-        </p:txBody>
-      </p:sp>
-      <p:sp>
-        <p:nvSpPr>
-          <p:cNvPr id="4" name="スライド番号プレースホルダー 3"/>
-          <p:cNvSpPr>
-            <a:spLocks noGrp="1"/>
-          </p:cNvSpPr>
-          <p:nvPr>
-            <p:ph type="sldNum" sz="quarter" idx="11"/>
-          </p:nvPr>
-        </p:nvSpPr>
-        <p:spPr/>
-        <p:txBody>
-          <a:bodyPr/>
-          <a:lstStyle/>
-          <a:p>
-            <a:fld id="{F96F1464-7F58-8745-A325-E585E650CEFA}" type="slidenum">
-              <a:rPr lang="ja-JP" altLang="en-US" smtClean="0"/>
-              <a:pPr/>
-              <a:t>57</a:t>
-            </a:fld>
-            <a:endParaRPr lang="ja-JP" altLang="en-US"/>
-          </a:p>
-        </p:txBody>
-      </p:sp>
-      <p:sp>
-        <p:nvSpPr>
-          <p:cNvPr id="5" name="正方形/長方形 4"/>
-          <p:cNvSpPr/>
-          <p:nvPr/>
-        </p:nvSpPr>
-        <p:spPr>
-          <a:xfrm>
-            <a:off x="685800" y="2492896"/>
-            <a:ext cx="7848872" cy="3139321"/>
-          </a:xfrm>
-          <a:prstGeom prst="rect">
-            <a:avLst/>
-          </a:prstGeom>
-          <a:ln>
-            <a:solidFill>
-              <a:srgbClr val="FF6600"/>
-            </a:solidFill>
-          </a:ln>
-        </p:spPr>
-        <p:txBody>
-          <a:bodyPr wrap="square">
-            <a:spAutoFit/>
-          </a:bodyPr>
-          <a:lstStyle/>
-          <a:p>
-            <a:r>
-              <a:rPr lang="en-US" altLang="ja-JP" dirty="0"/>
-              <a:t>u0 :: </a:t>
-            </a:r>
-            <a:r>
-              <a:rPr lang="en-US" altLang="ja-JP" dirty="0" err="1"/>
-              <a:t>RType</a:t>
-            </a:r>
-            <a:r>
-              <a:rPr lang="en-US" altLang="ja-JP" dirty="0"/>
-              <a:t> -&gt; (Record -&gt; Record) -&gt; </a:t>
-            </a:r>
-            <a:r>
-              <a:rPr lang="en-US" altLang="ja-JP" dirty="0" err="1"/>
-              <a:t>BiGUL</a:t>
-            </a:r>
-            <a:r>
-              <a:rPr lang="en-US" altLang="ja-JP" dirty="0"/>
-              <a:t> [Record] [Record]</a:t>
-            </a:r>
-          </a:p>
-          <a:p>
-            <a:r>
-              <a:rPr lang="en-US" altLang="ja-JP" dirty="0"/>
-              <a:t>u0 d =</a:t>
-            </a:r>
-          </a:p>
-          <a:p>
-            <a:r>
-              <a:rPr lang="en-US" altLang="ja-JP" dirty="0"/>
-              <a:t>  </a:t>
-            </a:r>
-            <a:r>
-              <a:rPr lang="en-US" altLang="ja-JP" dirty="0" err="1"/>
-              <a:t>relAlign</a:t>
-            </a:r>
-            <a:endParaRPr lang="en-US" altLang="ja-JP" dirty="0"/>
-          </a:p>
-          <a:p>
-            <a:r>
-              <a:rPr lang="en-US" altLang="ja-JP" dirty="0"/>
-              <a:t>    (\r -&gt; (r !! 4) &gt; </a:t>
-            </a:r>
-            <a:r>
-              <a:rPr lang="en-US" altLang="ja-JP" dirty="0" err="1"/>
-              <a:t>RInt</a:t>
-            </a:r>
-            <a:r>
-              <a:rPr lang="en-US" altLang="ja-JP" dirty="0"/>
-              <a:t> 2)</a:t>
-            </a:r>
-          </a:p>
-          <a:p>
-            <a:r>
-              <a:rPr lang="en-US" altLang="ja-JP" dirty="0"/>
-              <a:t>    (\s -&gt; (s !! 0, s!!3))</a:t>
-            </a:r>
-          </a:p>
-          <a:p>
-            <a:r>
-              <a:rPr lang="en-US" altLang="ja-JP" dirty="0"/>
-              <a:t>    (\v -&gt; (v !! 0, v !! 2))</a:t>
-            </a:r>
-          </a:p>
-          <a:p>
-            <a:r>
-              <a:rPr lang="en-US" altLang="ja-JP" dirty="0"/>
-              <a:t>    $(update [p| (t: _: r: a: q: [])|]</a:t>
-            </a:r>
-          </a:p>
-          <a:p>
-            <a:r>
-              <a:rPr lang="en-US" altLang="ja-JP" dirty="0"/>
-              <a:t>             [p| (t: r: a: q: []) |]</a:t>
-            </a:r>
-          </a:p>
-          <a:p>
-            <a:r>
-              <a:rPr lang="en-US" altLang="ja-JP" dirty="0"/>
-              <a:t>             [d| t = Replace; r = Replace; a = Replace; q = Replace |])</a:t>
-            </a:r>
-          </a:p>
-          <a:p>
-            <a:r>
-              <a:rPr lang="en-US" altLang="ja-JP" dirty="0"/>
-              <a:t>    (\(t: r: a: q: []) -&gt; (t: d: r: a: q: []))</a:t>
-            </a:r>
-          </a:p>
-          <a:p>
-            <a:r>
-              <a:rPr lang="en-US" altLang="ja-JP" dirty="0"/>
-              <a:t>   </a:t>
-            </a:r>
-            <a:r>
-              <a:rPr lang="en-US" altLang="ja-JP" dirty="0">
-                <a:solidFill>
-                  <a:srgbClr val="FF6600"/>
-                </a:solidFill>
-              </a:rPr>
-              <a:t>(\(t: d: r: a: _: []) -&gt; Just (t: d: r: a: </a:t>
-            </a:r>
-            <a:r>
-              <a:rPr lang="en-US" altLang="ja-JP" dirty="0" err="1" smtClean="0">
-                <a:solidFill>
-                  <a:srgbClr val="FF6600"/>
-                </a:solidFill>
-              </a:rPr>
-              <a:t>Rint</a:t>
-            </a:r>
-            <a:r>
-              <a:rPr lang="en-US" altLang="ja-JP" dirty="0" smtClean="0">
-                <a:solidFill>
-                  <a:srgbClr val="FF6600"/>
-                </a:solidFill>
-              </a:rPr>
-              <a:t> 0:</a:t>
-            </a:r>
-            <a:r>
-              <a:rPr lang="en-US" altLang="ja-JP" dirty="0">
-                <a:solidFill>
-                  <a:srgbClr val="FF6600"/>
-                </a:solidFill>
-              </a:rPr>
-              <a:t>[]))</a:t>
-            </a:r>
-            <a:endParaRPr lang="ja-JP" altLang="en-US" dirty="0">
-              <a:solidFill>
-                <a:srgbClr val="FF6600"/>
-              </a:solidFill>
-            </a:endParaRPr>
-          </a:p>
-        </p:txBody>
-      </p:sp>
-      <p:sp>
-        <p:nvSpPr>
-          <p:cNvPr id="6" name="テキスト ボックス 5"/>
-          <p:cNvSpPr txBox="1"/>
-          <p:nvPr/>
-        </p:nvSpPr>
-        <p:spPr>
-          <a:xfrm>
-            <a:off x="685800" y="1556792"/>
-            <a:ext cx="7313038" cy="646331"/>
-          </a:xfrm>
-          <a:prstGeom prst="rect">
-            <a:avLst/>
-          </a:prstGeom>
-          <a:noFill/>
-        </p:spPr>
-        <p:txBody>
-          <a:bodyPr wrap="none" rtlCol="0">
-            <a:spAutoFit/>
-          </a:bodyPr>
-          <a:lstStyle/>
-          <a:p>
-            <a:r>
-              <a:rPr kumimoji="1" lang="en-US" altLang="ja-JP" dirty="0" smtClean="0"/>
-              <a:t>Define a new update policy: if an element is removed from the view,</a:t>
-            </a:r>
-            <a:r>
-              <a:rPr lang="en-US" altLang="en-US" dirty="0" smtClean="0"/>
-              <a:t> </a:t>
-            </a:r>
-          </a:p>
-          <a:p>
-            <a:r>
-              <a:rPr lang="en-US" altLang="en-US" dirty="0" smtClean="0"/>
-              <a:t>the corresponding source elements will have quantity 0. </a:t>
-            </a:r>
-            <a:endParaRPr kumimoji="1" lang="en-US" altLang="ja-JP" dirty="0" smtClean="0"/>
-          </a:p>
-        </p:txBody>
-      </p:sp>
-    </p:spTree>
-    <p:extLst>
-      <p:ext uri="{BB962C8B-B14F-4D97-AF65-F5344CB8AC3E}">
-        <p14:creationId xmlns:p14="http://schemas.microsoft.com/office/powerpoint/2010/main" val="2138873971"/>
-      </p:ext>
-    </p:extLst>
-  </p:cSld>
-  <p:clrMapOvr>
-    <a:masterClrMapping/>
-  </p:clrMapOvr>
-  <p:timing>
-    <p:tnLst>
-      <p:par>
-        <p:cTn xmlns:p14="http://schemas.microsoft.com/office/powerpoint/2010/main" id="1" dur="indefinite" restart="never" nodeType="tmRoot"/>
-      </p:par>
-    </p:tnLst>
-  </p:timing>
-</p:sld>
-</file>
-
-<file path=ppt/slides/slide58.xml><?xml version="1.0" encoding="utf-8"?>
-<p:sld xmlns:a="http://schemas.openxmlformats.org/drawingml/2006/main" xmlns:r="http://schemas.openxmlformats.org/officeDocument/2006/relationships" xmlns:p="http://schemas.openxmlformats.org/presentationml/2006/main">
-  <p:cSld>
-    <p:spTree>
-      <p:nvGrpSpPr>
-        <p:cNvPr id="1" name=""/>
-        <p:cNvGrpSpPr/>
-        <p:nvPr/>
-      </p:nvGrpSpPr>
-      <p:grpSpPr>
-        <a:xfrm>
-          <a:off x="0" y="0"/>
-          <a:ext cx="0" cy="0"/>
-          <a:chOff x="0" y="0"/>
-          <a:chExt cx="0" cy="0"/>
-        </a:xfrm>
-      </p:grpSpPr>
-      <p:sp>
-        <p:nvSpPr>
-          <p:cNvPr id="2" name="タイトル 1"/>
-          <p:cNvSpPr>
-            <a:spLocks noGrp="1"/>
-          </p:cNvSpPr>
-          <p:nvPr>
-            <p:ph type="title"/>
-          </p:nvPr>
-        </p:nvSpPr>
-        <p:spPr/>
-        <p:txBody>
-          <a:bodyPr/>
-          <a:lstStyle/>
-          <a:p>
-            <a:r>
-              <a:rPr kumimoji="1" lang="en-US" altLang="ja-JP" dirty="0" smtClean="0"/>
-              <a:t>Summary</a:t>
-            </a:r>
-            <a:endParaRPr kumimoji="1" lang="ja-JP" altLang="en-US" dirty="0"/>
-          </a:p>
-        </p:txBody>
-      </p:sp>
-      <p:sp>
-        <p:nvSpPr>
-          <p:cNvPr id="3" name="コンテンツ プレースホルダー 2"/>
-          <p:cNvSpPr>
-            <a:spLocks noGrp="1"/>
-          </p:cNvSpPr>
-          <p:nvPr>
-            <p:ph idx="1"/>
-          </p:nvPr>
-        </p:nvSpPr>
-        <p:spPr/>
-        <p:txBody>
-          <a:bodyPr/>
-          <a:lstStyle/>
-          <a:p>
-            <a:r>
-              <a:rPr kumimoji="1" lang="en-US" altLang="ja-JP" dirty="0" err="1" smtClean="0"/>
-              <a:t>Putback</a:t>
-            </a:r>
-            <a:r>
-              <a:rPr kumimoji="1" lang="en-US" altLang="ja-JP" dirty="0" smtClean="0"/>
-              <a:t>-based programming </a:t>
-            </a:r>
-            <a:r>
-              <a:rPr lang="en-US" altLang="ja-JP" dirty="0" smtClean="0"/>
-              <a:t>is</a:t>
-            </a:r>
-            <a:r>
-              <a:rPr kumimoji="1" lang="en-US" altLang="ja-JP" dirty="0" smtClean="0"/>
-              <a:t> fun and not that difficult.</a:t>
-            </a:r>
-          </a:p>
-          <a:p>
-            <a:endParaRPr kumimoji="1" lang="en-US" altLang="ja-JP" dirty="0" smtClean="0"/>
-          </a:p>
-          <a:p>
-            <a:r>
-              <a:rPr lang="en-US" altLang="ja-JP" dirty="0" err="1" smtClean="0"/>
-              <a:t>Putback</a:t>
-            </a:r>
-            <a:r>
-              <a:rPr lang="en-US" altLang="ja-JP" dirty="0" smtClean="0"/>
-              <a:t>-based BX can be served as the basis for developing various domain specific BX languages.</a:t>
-            </a:r>
-          </a:p>
-          <a:p>
-            <a:pPr lvl="1"/>
-            <a:r>
-              <a:rPr lang="en-US" altLang="ja-JP" dirty="0" err="1" smtClean="0"/>
-              <a:t>BiYacc</a:t>
-            </a:r>
-            <a:r>
-              <a:rPr lang="en-US" altLang="ja-JP" dirty="0" smtClean="0"/>
-              <a:t>/</a:t>
-            </a:r>
-            <a:r>
-              <a:rPr lang="en-US" altLang="ja-JP" dirty="0" err="1" smtClean="0"/>
-              <a:t>BiFluX</a:t>
-            </a:r>
-            <a:r>
-              <a:rPr lang="en-US" altLang="ja-JP" dirty="0" smtClean="0"/>
-              <a:t>/</a:t>
-            </a:r>
-            <a:r>
-              <a:rPr lang="en-US" altLang="ja-JP" dirty="0" err="1" smtClean="0"/>
-              <a:t>Brul</a:t>
-            </a:r>
-            <a:r>
-              <a:rPr lang="en-US" altLang="ja-JP" dirty="0"/>
-              <a:t> </a:t>
-            </a:r>
-            <a:r>
-              <a:rPr lang="is-IS" altLang="ja-JP" dirty="0" smtClean="0"/>
-              <a:t>…</a:t>
-            </a:r>
-            <a:endParaRPr lang="en-US" altLang="ja-JP" dirty="0"/>
-          </a:p>
-          <a:p>
-            <a:pPr marL="0" indent="0">
-              <a:buNone/>
-            </a:pPr>
-            <a:endParaRPr kumimoji="1" lang="en-US" altLang="ja-JP" dirty="0"/>
-          </a:p>
-          <a:p>
-            <a:r>
-              <a:rPr lang="en-US" altLang="ja-JP" dirty="0" err="1" smtClean="0"/>
-              <a:t>Putback</a:t>
-            </a:r>
-            <a:r>
-              <a:rPr lang="en-US" altLang="ja-JP" dirty="0" smtClean="0"/>
-              <a:t>-based BX is promising to be used to develop BIG BX systems:</a:t>
-            </a:r>
-          </a:p>
-          <a:p>
-            <a:pPr lvl="1"/>
-            <a:r>
-              <a:rPr kumimoji="1" lang="en-US" altLang="ja-JP" dirty="0" err="1" smtClean="0"/>
-              <a:t>Bidirectionalization</a:t>
-            </a:r>
-            <a:r>
-              <a:rPr kumimoji="1" lang="en-US" altLang="ja-JP" dirty="0" smtClean="0"/>
-              <a:t> of </a:t>
-            </a:r>
-            <a:r>
-              <a:rPr kumimoji="1" lang="en-US" altLang="ja-JP" dirty="0" err="1" smtClean="0"/>
-              <a:t>pandoc</a:t>
-            </a:r>
-            <a:r>
-              <a:rPr kumimoji="1" lang="en-US" altLang="ja-JP" dirty="0" smtClean="0"/>
-              <a:t> is ongoing</a:t>
-            </a:r>
-            <a:endParaRPr kumimoji="1" lang="ja-JP" altLang="en-US" dirty="0"/>
-          </a:p>
-        </p:txBody>
-      </p:sp>
-      <p:sp>
-        <p:nvSpPr>
-          <p:cNvPr id="4" name="スライド番号プレースホルダー 3"/>
-          <p:cNvSpPr>
-            <a:spLocks noGrp="1"/>
-          </p:cNvSpPr>
-          <p:nvPr>
-            <p:ph type="sldNum" sz="quarter" idx="11"/>
-          </p:nvPr>
-        </p:nvSpPr>
-        <p:spPr/>
-        <p:txBody>
-          <a:bodyPr/>
-          <a:lstStyle/>
-          <a:p>
-            <a:fld id="{F96F1464-7F58-8745-A325-E585E650CEFA}" type="slidenum">
-              <a:rPr lang="ja-JP" altLang="en-US" smtClean="0"/>
-              <a:pPr/>
-              <a:t>58</a:t>
-            </a:fld>
-            <a:endParaRPr lang="ja-JP" altLang="en-US"/>
-          </a:p>
-        </p:txBody>
-      </p:sp>
-    </p:spTree>
-    <p:extLst>
-      <p:ext uri="{BB962C8B-B14F-4D97-AF65-F5344CB8AC3E}">
-        <p14:creationId xmlns:p14="http://schemas.microsoft.com/office/powerpoint/2010/main" val="885165633"/>
-      </p:ext>
-    </p:extLst>
-  </p:cSld>
-  <p:clrMapOvr>
-    <a:masterClrMapping/>
-  </p:clrMapOvr>
-</p:sld>
-</file>
-
-<file path=ppt/slides/slide59.xml><?xml version="1.0" encoding="utf-8"?>
-<p:sld xmlns:a="http://schemas.openxmlformats.org/drawingml/2006/main" xmlns:r="http://schemas.openxmlformats.org/officeDocument/2006/relationships" xmlns:p="http://schemas.openxmlformats.org/presentationml/2006/main">
-  <p:cSld>
-    <p:spTree>
-      <p:nvGrpSpPr>
-        <p:cNvPr id="1" name=""/>
-        <p:cNvGrpSpPr/>
-        <p:nvPr/>
-      </p:nvGrpSpPr>
-      <p:grpSpPr>
-        <a:xfrm>
-          <a:off x="0" y="0"/>
-          <a:ext cx="0" cy="0"/>
-          <a:chOff x="0" y="0"/>
-          <a:chExt cx="0" cy="0"/>
-        </a:xfrm>
-      </p:grpSpPr>
-      <p:sp>
-        <p:nvSpPr>
-          <p:cNvPr id="2" name="タイトル 1"/>
-          <p:cNvSpPr>
-            <a:spLocks noGrp="1"/>
-          </p:cNvSpPr>
-          <p:nvPr>
-            <p:ph type="title"/>
-          </p:nvPr>
-        </p:nvSpPr>
-        <p:spPr/>
-        <p:txBody>
-          <a:bodyPr/>
-          <a:lstStyle/>
-          <a:p>
-            <a:r>
-              <a:rPr kumimoji="1" lang="en-US" altLang="ja-JP" dirty="0" smtClean="0"/>
-              <a:t>Future Work</a:t>
-            </a:r>
-            <a:endParaRPr kumimoji="1" lang="ja-JP" altLang="en-US" dirty="0"/>
-          </a:p>
-        </p:txBody>
-      </p:sp>
-      <p:sp>
-        <p:nvSpPr>
-          <p:cNvPr id="3" name="コンテンツ プレースホルダー 2"/>
-          <p:cNvSpPr>
-            <a:spLocks noGrp="1"/>
-          </p:cNvSpPr>
-          <p:nvPr>
-            <p:ph idx="1"/>
-          </p:nvPr>
-        </p:nvSpPr>
-        <p:spPr/>
-        <p:txBody>
-          <a:bodyPr/>
-          <a:lstStyle/>
-          <a:p>
-            <a:r>
-              <a:rPr lang="en-US" altLang="ja-JP" dirty="0" smtClean="0"/>
-              <a:t>Adding effects to </a:t>
-            </a:r>
-            <a:r>
-              <a:rPr lang="en-US" altLang="ja-JP" dirty="0" err="1" smtClean="0"/>
-              <a:t>BiGUL</a:t>
-            </a:r>
-            <a:endParaRPr lang="en-US" altLang="ja-JP" dirty="0" smtClean="0"/>
-          </a:p>
-          <a:p>
-            <a:endParaRPr lang="en-US" altLang="ja-JP" dirty="0"/>
-          </a:p>
-          <a:p>
-            <a:r>
-              <a:rPr lang="en-US" altLang="ja-JP" dirty="0" err="1" smtClean="0"/>
-              <a:t>BiGUL</a:t>
-            </a:r>
-            <a:r>
-              <a:rPr lang="en-US" altLang="ja-JP" dirty="0" smtClean="0"/>
-              <a:t> for graphs (</a:t>
-            </a:r>
-            <a:r>
-              <a:rPr lang="en-US" altLang="ja-JP" dirty="0" err="1" smtClean="0"/>
-              <a:t>GRoundTram</a:t>
-            </a:r>
-            <a:r>
-              <a:rPr lang="en-US" altLang="ja-JP" dirty="0" smtClean="0"/>
-              <a:t> </a:t>
-            </a:r>
-            <a:r>
-              <a:rPr lang="is-IS" altLang="ja-JP" dirty="0" smtClean="0"/>
-              <a:t>…)</a:t>
-            </a:r>
-            <a:endParaRPr lang="en-US" altLang="ja-JP" dirty="0" smtClean="0"/>
-          </a:p>
-          <a:p>
-            <a:pPr marL="0" indent="0">
-              <a:buNone/>
-            </a:pPr>
-            <a:endParaRPr lang="en-US" altLang="ja-JP" dirty="0" smtClean="0"/>
-          </a:p>
-          <a:p>
-            <a:r>
-              <a:rPr lang="en-US" altLang="ja-JP" dirty="0" smtClean="0"/>
-              <a:t>Static analysis (</a:t>
-            </a:r>
-            <a:r>
-              <a:rPr lang="en-US" altLang="ja-JP" dirty="0" err="1"/>
-              <a:t>v</a:t>
-            </a:r>
-            <a:r>
-              <a:rPr lang="en-US" altLang="ja-JP" dirty="0" err="1" smtClean="0"/>
-              <a:t>alidatity</a:t>
-            </a:r>
-            <a:r>
-              <a:rPr lang="en-US" altLang="ja-JP" dirty="0" smtClean="0"/>
-              <a:t> checking) of </a:t>
-            </a:r>
-            <a:r>
-              <a:rPr lang="en-US" altLang="ja-JP" dirty="0" err="1" smtClean="0"/>
-              <a:t>BiGUL</a:t>
-            </a:r>
-            <a:r>
-              <a:rPr lang="en-US" altLang="ja-JP" dirty="0" smtClean="0"/>
-              <a:t> programs</a:t>
-            </a:r>
-          </a:p>
-          <a:p>
-            <a:endParaRPr kumimoji="1" lang="en-US" altLang="ja-JP" dirty="0"/>
-          </a:p>
-          <a:p>
-            <a:r>
-              <a:rPr lang="en-US" altLang="ja-JP" dirty="0" err="1" smtClean="0"/>
-              <a:t>Putback</a:t>
-            </a:r>
-            <a:r>
-              <a:rPr lang="en-US" altLang="ja-JP" dirty="0" smtClean="0"/>
-              <a:t>-based bidirectional computing machine and compilation</a:t>
-            </a:r>
-          </a:p>
-          <a:p>
-            <a:endParaRPr kumimoji="1" lang="en-US" altLang="ja-JP" dirty="0"/>
-          </a:p>
-          <a:p>
-            <a:endParaRPr kumimoji="1" lang="ja-JP" altLang="en-US" dirty="0"/>
-          </a:p>
-        </p:txBody>
-      </p:sp>
-      <p:sp>
-        <p:nvSpPr>
-          <p:cNvPr id="4" name="スライド番号プレースホルダー 3"/>
-          <p:cNvSpPr>
-            <a:spLocks noGrp="1"/>
-          </p:cNvSpPr>
-          <p:nvPr>
-            <p:ph type="sldNum" sz="quarter" idx="11"/>
-          </p:nvPr>
-        </p:nvSpPr>
-        <p:spPr/>
-        <p:txBody>
-          <a:bodyPr/>
-          <a:lstStyle/>
-          <a:p>
-            <a:fld id="{F96F1464-7F58-8745-A325-E585E650CEFA}" type="slidenum">
-              <a:rPr lang="ja-JP" altLang="en-US" smtClean="0"/>
-              <a:pPr/>
-              <a:t>59</a:t>
-            </a:fld>
-            <a:endParaRPr lang="ja-JP" altLang="en-US"/>
-          </a:p>
-        </p:txBody>
-      </p:sp>
-    </p:spTree>
-    <p:extLst>
-      <p:ext uri="{BB962C8B-B14F-4D97-AF65-F5344CB8AC3E}">
-        <p14:creationId xmlns:p14="http://schemas.microsoft.com/office/powerpoint/2010/main" val="2246801805"/>
-      </p:ext>
-    </p:extLst>
-  </p:cSld>
-  <p:clrMapOvr>
-    <a:masterClrMapping/>
-  </p:clrMapOvr>
 </p:sld>
 </file>
 
@@ -26910,6 +27141,1532 @@
       </p:par>
     </p:tnLst>
   </p:timing>
+</p:sld>
+</file>
+
+<file path=ppt/slides/slide60.xml><?xml version="1.0" encoding="utf-8"?>
+<p:sld xmlns:a="http://schemas.openxmlformats.org/drawingml/2006/main" xmlns:r="http://schemas.openxmlformats.org/officeDocument/2006/relationships" xmlns:p="http://schemas.openxmlformats.org/presentationml/2006/main">
+  <p:cSld>
+    <p:spTree>
+      <p:nvGrpSpPr>
+        <p:cNvPr id="1" name=""/>
+        <p:cNvGrpSpPr/>
+        <p:nvPr/>
+      </p:nvGrpSpPr>
+      <p:grpSpPr>
+        <a:xfrm>
+          <a:off x="0" y="0"/>
+          <a:ext cx="0" cy="0"/>
+          <a:chOff x="0" y="0"/>
+          <a:chExt cx="0" cy="0"/>
+        </a:xfrm>
+      </p:grpSpPr>
+      <p:sp>
+        <p:nvSpPr>
+          <p:cNvPr id="2" name="タイトル 1"/>
+          <p:cNvSpPr>
+            <a:spLocks noGrp="1"/>
+          </p:cNvSpPr>
+          <p:nvPr>
+            <p:ph type="title"/>
+          </p:nvPr>
+        </p:nvSpPr>
+        <p:spPr/>
+        <p:txBody>
+          <a:bodyPr/>
+          <a:lstStyle/>
+          <a:p>
+            <a:endParaRPr kumimoji="1" lang="ja-JP" altLang="en-US"/>
+          </a:p>
+        </p:txBody>
+      </p:sp>
+      <p:sp>
+        <p:nvSpPr>
+          <p:cNvPr id="4" name="スライド番号プレースホルダー 3"/>
+          <p:cNvSpPr>
+            <a:spLocks noGrp="1"/>
+          </p:cNvSpPr>
+          <p:nvPr>
+            <p:ph type="sldNum" sz="quarter" idx="11"/>
+          </p:nvPr>
+        </p:nvSpPr>
+        <p:spPr/>
+        <p:txBody>
+          <a:bodyPr/>
+          <a:lstStyle/>
+          <a:p>
+            <a:fld id="{F96F1464-7F58-8745-A325-E585E650CEFA}" type="slidenum">
+              <a:rPr lang="ja-JP" altLang="en-US" smtClean="0"/>
+              <a:pPr/>
+              <a:t>60</a:t>
+            </a:fld>
+            <a:endParaRPr lang="ja-JP" altLang="en-US"/>
+          </a:p>
+        </p:txBody>
+      </p:sp>
+      <p:sp>
+        <p:nvSpPr>
+          <p:cNvPr id="5" name="正方形/長方形 4"/>
+          <p:cNvSpPr/>
+          <p:nvPr/>
+        </p:nvSpPr>
+        <p:spPr>
+          <a:xfrm>
+            <a:off x="685800" y="2131115"/>
+            <a:ext cx="7498977" cy="1477328"/>
+          </a:xfrm>
+          <a:prstGeom prst="rect">
+            <a:avLst/>
+          </a:prstGeom>
+          <a:ln>
+            <a:solidFill>
+              <a:schemeClr val="accent1"/>
+            </a:solidFill>
+          </a:ln>
+        </p:spPr>
+        <p:txBody>
+          <a:bodyPr wrap="square">
+            <a:spAutoFit/>
+          </a:bodyPr>
+          <a:lstStyle/>
+          <a:p>
+            <a:r>
+              <a:rPr lang="en-US" altLang="ja-JP" dirty="0"/>
+              <a:t>*</a:t>
+            </a:r>
+            <a:r>
+              <a:rPr lang="en-US" altLang="ja-JP" dirty="0" err="1"/>
+              <a:t>Brul</a:t>
+            </a:r>
+            <a:r>
+              <a:rPr lang="en-US" altLang="ja-JP" dirty="0"/>
+              <a:t>&gt; get (u0 (</a:t>
+            </a:r>
+            <a:r>
+              <a:rPr lang="en-US" altLang="ja-JP" dirty="0" err="1"/>
+              <a:t>RInt</a:t>
+            </a:r>
+            <a:r>
+              <a:rPr lang="en-US" altLang="ja-JP" dirty="0"/>
+              <a:t> (-1)) id) s</a:t>
+            </a:r>
+          </a:p>
+          <a:p>
+            <a:r>
+              <a:rPr lang="en-US" altLang="ja-JP" dirty="0"/>
+              <a:t>Just</a:t>
+            </a:r>
+          </a:p>
+          <a:p>
+            <a:r>
+              <a:rPr lang="en-US" altLang="ja-JP" dirty="0"/>
+              <a:t>[[</a:t>
+            </a:r>
+            <a:r>
+              <a:rPr lang="en-US" altLang="ja-JP" dirty="0" err="1"/>
+              <a:t>RString</a:t>
+            </a:r>
+            <a:r>
+              <a:rPr lang="en-US" altLang="ja-JP" dirty="0"/>
+              <a:t> "Lullaby",</a:t>
+            </a:r>
+            <a:r>
+              <a:rPr lang="en-US" altLang="ja-JP" dirty="0" err="1"/>
+              <a:t>RInt</a:t>
+            </a:r>
+            <a:r>
+              <a:rPr lang="en-US" altLang="ja-JP" dirty="0"/>
+              <a:t> 3,RString "Show",</a:t>
+            </a:r>
+            <a:r>
+              <a:rPr lang="en-US" altLang="ja-JP" dirty="0" err="1"/>
+              <a:t>RInt</a:t>
+            </a:r>
+            <a:r>
+              <a:rPr lang="en-US" altLang="ja-JP" dirty="0"/>
+              <a:t> 3],</a:t>
+            </a:r>
+          </a:p>
+          <a:p>
+            <a:r>
+              <a:rPr lang="en-US" altLang="ja-JP" dirty="0"/>
+              <a:t>[</a:t>
+            </a:r>
+            <a:r>
+              <a:rPr lang="en-US" altLang="ja-JP" dirty="0" err="1"/>
+              <a:t>RString</a:t>
+            </a:r>
+            <a:r>
+              <a:rPr lang="en-US" altLang="ja-JP" dirty="0"/>
+              <a:t> "</a:t>
+            </a:r>
+            <a:r>
+              <a:rPr lang="en-US" altLang="ja-JP" dirty="0" err="1"/>
+              <a:t>Lovesong</a:t>
+            </a:r>
+            <a:r>
+              <a:rPr lang="en-US" altLang="ja-JP" dirty="0"/>
+              <a:t>",</a:t>
+            </a:r>
+            <a:r>
+              <a:rPr lang="en-US" altLang="ja-JP" dirty="0" err="1"/>
+              <a:t>RInt</a:t>
+            </a:r>
+            <a:r>
+              <a:rPr lang="en-US" altLang="ja-JP" dirty="0"/>
+              <a:t> 5,RString "Disintegration",</a:t>
+            </a:r>
+            <a:r>
+              <a:rPr lang="en-US" altLang="ja-JP" dirty="0" err="1"/>
+              <a:t>RInt</a:t>
+            </a:r>
+            <a:r>
+              <a:rPr lang="en-US" altLang="ja-JP" dirty="0"/>
+              <a:t> 4],</a:t>
+            </a:r>
+          </a:p>
+          <a:p>
+            <a:r>
+              <a:rPr lang="en-US" altLang="ja-JP" dirty="0"/>
+              <a:t>[</a:t>
+            </a:r>
+            <a:r>
+              <a:rPr lang="en-US" altLang="ja-JP" dirty="0" err="1">
+                <a:solidFill>
+                  <a:srgbClr val="FF6600"/>
+                </a:solidFill>
+              </a:rPr>
+              <a:t>RString</a:t>
+            </a:r>
+            <a:r>
+              <a:rPr lang="en-US" altLang="ja-JP" dirty="0">
+                <a:solidFill>
+                  <a:srgbClr val="FF6600"/>
+                </a:solidFill>
+              </a:rPr>
+              <a:t> "Trust",</a:t>
+            </a:r>
+            <a:r>
+              <a:rPr lang="en-US" altLang="ja-JP" dirty="0" err="1">
+                <a:solidFill>
+                  <a:srgbClr val="FF6600"/>
+                </a:solidFill>
+              </a:rPr>
+              <a:t>RInt</a:t>
+            </a:r>
+            <a:r>
+              <a:rPr lang="en-US" altLang="ja-JP" dirty="0">
+                <a:solidFill>
+                  <a:srgbClr val="FF6600"/>
+                </a:solidFill>
+              </a:rPr>
+              <a:t> 4,RString "Wish",</a:t>
+            </a:r>
+            <a:r>
+              <a:rPr lang="en-US" altLang="ja-JP" dirty="0" err="1">
+                <a:solidFill>
+                  <a:srgbClr val="FF6600"/>
+                </a:solidFill>
+              </a:rPr>
+              <a:t>RInt</a:t>
+            </a:r>
+            <a:r>
+              <a:rPr lang="en-US" altLang="ja-JP" dirty="0">
+                <a:solidFill>
+                  <a:srgbClr val="FF6600"/>
+                </a:solidFill>
+              </a:rPr>
+              <a:t> 5]]</a:t>
+            </a:r>
+            <a:endParaRPr lang="ja-JP" altLang="en-US" dirty="0">
+              <a:solidFill>
+                <a:srgbClr val="FF6600"/>
+              </a:solidFill>
+            </a:endParaRPr>
+          </a:p>
+        </p:txBody>
+      </p:sp>
+      <p:sp>
+        <p:nvSpPr>
+          <p:cNvPr id="6" name="テキスト ボックス 5"/>
+          <p:cNvSpPr txBox="1"/>
+          <p:nvPr/>
+        </p:nvSpPr>
+        <p:spPr>
+          <a:xfrm>
+            <a:off x="685800" y="1484784"/>
+            <a:ext cx="3946790" cy="646331"/>
+          </a:xfrm>
+          <a:prstGeom prst="rect">
+            <a:avLst/>
+          </a:prstGeom>
+          <a:noFill/>
+        </p:spPr>
+        <p:txBody>
+          <a:bodyPr wrap="none" rtlCol="0">
+            <a:spAutoFit/>
+          </a:bodyPr>
+          <a:lstStyle/>
+          <a:p>
+            <a:r>
+              <a:rPr lang="en-US" altLang="ja-JP" dirty="0" smtClean="0"/>
+              <a:t>Testing</a:t>
+            </a:r>
+            <a:r>
+              <a:rPr lang="ja-JP" altLang="en-US" dirty="0" smtClean="0"/>
+              <a:t> </a:t>
+            </a:r>
+            <a:r>
+              <a:rPr lang="en-US" altLang="ja-JP" dirty="0" smtClean="0"/>
+              <a:t>the</a:t>
+            </a:r>
+            <a:r>
+              <a:rPr lang="ja-JP" altLang="en-US" dirty="0" smtClean="0"/>
+              <a:t> </a:t>
+            </a:r>
+            <a:r>
+              <a:rPr lang="en-US" altLang="ja-JP" dirty="0" smtClean="0"/>
+              <a:t>forward</a:t>
+            </a:r>
+            <a:r>
+              <a:rPr lang="ja-JP" altLang="en-US" dirty="0" smtClean="0"/>
+              <a:t> </a:t>
+            </a:r>
+            <a:r>
+              <a:rPr lang="en-US" altLang="ja-JP" dirty="0" smtClean="0"/>
+              <a:t>transformation:</a:t>
+            </a:r>
+          </a:p>
+          <a:p>
+            <a:endParaRPr kumimoji="1" lang="ja-JP" altLang="en-US" dirty="0"/>
+          </a:p>
+        </p:txBody>
+      </p:sp>
+      <p:sp>
+        <p:nvSpPr>
+          <p:cNvPr id="7" name="テキスト ボックス 6"/>
+          <p:cNvSpPr txBox="1"/>
+          <p:nvPr/>
+        </p:nvSpPr>
+        <p:spPr>
+          <a:xfrm>
+            <a:off x="717852" y="3964414"/>
+            <a:ext cx="4099060" cy="369332"/>
+          </a:xfrm>
+          <a:prstGeom prst="rect">
+            <a:avLst/>
+          </a:prstGeom>
+          <a:noFill/>
+        </p:spPr>
+        <p:txBody>
+          <a:bodyPr wrap="none" rtlCol="0">
+            <a:spAutoFit/>
+          </a:bodyPr>
+          <a:lstStyle/>
+          <a:p>
+            <a:r>
+              <a:rPr kumimoji="1" lang="en-US" altLang="ja-JP" dirty="0" smtClean="0"/>
+              <a:t>Suppose that the view is changed to:</a:t>
+            </a:r>
+            <a:endParaRPr kumimoji="1" lang="ja-JP" altLang="en-US" dirty="0"/>
+          </a:p>
+        </p:txBody>
+      </p:sp>
+      <p:sp>
+        <p:nvSpPr>
+          <p:cNvPr id="8" name="正方形/長方形 7"/>
+          <p:cNvSpPr/>
+          <p:nvPr/>
+        </p:nvSpPr>
+        <p:spPr>
+          <a:xfrm>
+            <a:off x="725859" y="4581128"/>
+            <a:ext cx="7458918" cy="923330"/>
+          </a:xfrm>
+          <a:prstGeom prst="rect">
+            <a:avLst/>
+          </a:prstGeom>
+          <a:ln>
+            <a:solidFill>
+              <a:srgbClr val="FF6600"/>
+            </a:solidFill>
+          </a:ln>
+        </p:spPr>
+        <p:txBody>
+          <a:bodyPr wrap="square">
+            <a:spAutoFit/>
+          </a:bodyPr>
+          <a:lstStyle/>
+          <a:p>
+            <a:r>
+              <a:rPr lang="en-US" altLang="ja-JP" dirty="0"/>
+              <a:t>v =  [ [</a:t>
+            </a:r>
+            <a:r>
+              <a:rPr lang="en-US" altLang="ja-JP" dirty="0" err="1"/>
+              <a:t>RString</a:t>
+            </a:r>
+            <a:r>
+              <a:rPr lang="en-US" altLang="ja-JP" dirty="0"/>
+              <a:t> "Lullaby" , </a:t>
+            </a:r>
+            <a:r>
+              <a:rPr lang="en-US" altLang="ja-JP" dirty="0" err="1"/>
+              <a:t>RInt</a:t>
+            </a:r>
+            <a:r>
+              <a:rPr lang="en-US" altLang="ja-JP" dirty="0"/>
+              <a:t> </a:t>
+            </a:r>
+            <a:r>
+              <a:rPr lang="en-US" altLang="ja-JP" dirty="0">
+                <a:solidFill>
+                  <a:srgbClr val="FF6600"/>
+                </a:solidFill>
+              </a:rPr>
+              <a:t>4</a:t>
+            </a:r>
+            <a:r>
+              <a:rPr lang="en-US" altLang="ja-JP" dirty="0"/>
+              <a:t>, </a:t>
+            </a:r>
+            <a:r>
+              <a:rPr lang="en-US" altLang="ja-JP" dirty="0" err="1"/>
+              <a:t>RString</a:t>
+            </a:r>
+            <a:r>
+              <a:rPr lang="en-US" altLang="ja-JP" dirty="0"/>
+              <a:t> "Show"  , </a:t>
+            </a:r>
+            <a:r>
+              <a:rPr lang="en-US" altLang="ja-JP" dirty="0" err="1"/>
+              <a:t>RInt</a:t>
+            </a:r>
+            <a:r>
+              <a:rPr lang="en-US" altLang="ja-JP" dirty="0"/>
+              <a:t> 3]</a:t>
+            </a:r>
+          </a:p>
+          <a:p>
+            <a:r>
+              <a:rPr lang="en-US" altLang="ja-JP" dirty="0"/>
+              <a:t>     , [</a:t>
+            </a:r>
+            <a:r>
+              <a:rPr lang="en-US" altLang="ja-JP" dirty="0" err="1"/>
+              <a:t>RString</a:t>
+            </a:r>
+            <a:r>
+              <a:rPr lang="en-US" altLang="ja-JP" dirty="0"/>
+              <a:t> "</a:t>
+            </a:r>
+            <a:r>
+              <a:rPr lang="en-US" altLang="ja-JP" dirty="0" err="1"/>
+              <a:t>Lovesong</a:t>
+            </a:r>
+            <a:r>
+              <a:rPr lang="en-US" altLang="ja-JP" dirty="0"/>
+              <a:t>", </a:t>
+            </a:r>
+            <a:r>
+              <a:rPr lang="en-US" altLang="ja-JP" dirty="0" err="1"/>
+              <a:t>RInt</a:t>
+            </a:r>
+            <a:r>
+              <a:rPr lang="en-US" altLang="ja-JP" dirty="0"/>
+              <a:t> 5, </a:t>
+            </a:r>
+            <a:r>
+              <a:rPr lang="en-US" altLang="ja-JP" dirty="0" err="1"/>
+              <a:t>RString</a:t>
+            </a:r>
+            <a:r>
+              <a:rPr lang="en-US" altLang="ja-JP" dirty="0"/>
+              <a:t> "Disintegration" , </a:t>
+            </a:r>
+            <a:r>
+              <a:rPr lang="en-US" altLang="ja-JP" dirty="0" err="1"/>
+              <a:t>RInt</a:t>
+            </a:r>
+            <a:r>
+              <a:rPr lang="en-US" altLang="ja-JP" dirty="0"/>
+              <a:t> </a:t>
+            </a:r>
+            <a:r>
+              <a:rPr lang="en-US" altLang="ja-JP" dirty="0">
+                <a:solidFill>
+                  <a:srgbClr val="FF6600"/>
+                </a:solidFill>
+              </a:rPr>
+              <a:t>7</a:t>
+            </a:r>
+            <a:r>
+              <a:rPr lang="en-US" altLang="ja-JP" dirty="0"/>
+              <a:t>]</a:t>
+            </a:r>
+          </a:p>
+          <a:p>
+            <a:r>
+              <a:rPr lang="en-US" altLang="ja-JP" dirty="0"/>
+              <a:t>     ]</a:t>
+            </a:r>
+            <a:endParaRPr lang="ja-JP" altLang="en-US" dirty="0"/>
+          </a:p>
+        </p:txBody>
+      </p:sp>
+    </p:spTree>
+    <p:extLst>
+      <p:ext uri="{BB962C8B-B14F-4D97-AF65-F5344CB8AC3E}">
+        <p14:creationId xmlns:p14="http://schemas.microsoft.com/office/powerpoint/2010/main" val="3584509778"/>
+      </p:ext>
+    </p:extLst>
+  </p:cSld>
+  <p:clrMapOvr>
+    <a:masterClrMapping/>
+  </p:clrMapOvr>
+  <p:timing>
+    <p:tnLst>
+      <p:par>
+        <p:cTn xmlns:p14="http://schemas.microsoft.com/office/powerpoint/2010/main" id="1" dur="indefinite" restart="never" nodeType="tmRoot"/>
+      </p:par>
+    </p:tnLst>
+  </p:timing>
+</p:sld>
+</file>
+
+<file path=ppt/slides/slide61.xml><?xml version="1.0" encoding="utf-8"?>
+<p:sld xmlns:a="http://schemas.openxmlformats.org/drawingml/2006/main" xmlns:r="http://schemas.openxmlformats.org/officeDocument/2006/relationships" xmlns:p="http://schemas.openxmlformats.org/presentationml/2006/main">
+  <p:cSld>
+    <p:spTree>
+      <p:nvGrpSpPr>
+        <p:cNvPr id="1" name=""/>
+        <p:cNvGrpSpPr/>
+        <p:nvPr/>
+      </p:nvGrpSpPr>
+      <p:grpSpPr>
+        <a:xfrm>
+          <a:off x="0" y="0"/>
+          <a:ext cx="0" cy="0"/>
+          <a:chOff x="0" y="0"/>
+          <a:chExt cx="0" cy="0"/>
+        </a:xfrm>
+      </p:grpSpPr>
+      <p:sp>
+        <p:nvSpPr>
+          <p:cNvPr id="2" name="タイトル 1"/>
+          <p:cNvSpPr>
+            <a:spLocks noGrp="1"/>
+          </p:cNvSpPr>
+          <p:nvPr>
+            <p:ph type="title"/>
+          </p:nvPr>
+        </p:nvSpPr>
+        <p:spPr/>
+        <p:txBody>
+          <a:bodyPr/>
+          <a:lstStyle/>
+          <a:p>
+            <a:endParaRPr kumimoji="1" lang="ja-JP" altLang="en-US"/>
+          </a:p>
+        </p:txBody>
+      </p:sp>
+      <p:sp>
+        <p:nvSpPr>
+          <p:cNvPr id="4" name="スライド番号プレースホルダー 3"/>
+          <p:cNvSpPr>
+            <a:spLocks noGrp="1"/>
+          </p:cNvSpPr>
+          <p:nvPr>
+            <p:ph type="sldNum" sz="quarter" idx="11"/>
+          </p:nvPr>
+        </p:nvSpPr>
+        <p:spPr/>
+        <p:txBody>
+          <a:bodyPr/>
+          <a:lstStyle/>
+          <a:p>
+            <a:fld id="{F96F1464-7F58-8745-A325-E585E650CEFA}" type="slidenum">
+              <a:rPr lang="ja-JP" altLang="en-US" smtClean="0"/>
+              <a:pPr/>
+              <a:t>61</a:t>
+            </a:fld>
+            <a:endParaRPr lang="ja-JP" altLang="en-US"/>
+          </a:p>
+        </p:txBody>
+      </p:sp>
+      <p:sp>
+        <p:nvSpPr>
+          <p:cNvPr id="6" name="テキスト ボックス 5"/>
+          <p:cNvSpPr txBox="1"/>
+          <p:nvPr/>
+        </p:nvSpPr>
+        <p:spPr>
+          <a:xfrm>
+            <a:off x="685800" y="1484784"/>
+            <a:ext cx="4102123" cy="646331"/>
+          </a:xfrm>
+          <a:prstGeom prst="rect">
+            <a:avLst/>
+          </a:prstGeom>
+          <a:noFill/>
+        </p:spPr>
+        <p:txBody>
+          <a:bodyPr wrap="none" rtlCol="0">
+            <a:spAutoFit/>
+          </a:bodyPr>
+          <a:lstStyle/>
+          <a:p>
+            <a:r>
+              <a:rPr lang="en-US" altLang="ja-JP" dirty="0" smtClean="0"/>
+              <a:t>Testing</a:t>
+            </a:r>
+            <a:r>
+              <a:rPr lang="ja-JP" altLang="en-US" dirty="0" smtClean="0"/>
+              <a:t> </a:t>
+            </a:r>
+            <a:r>
+              <a:rPr lang="en-US" altLang="ja-JP" dirty="0" smtClean="0"/>
+              <a:t>the</a:t>
+            </a:r>
+            <a:r>
+              <a:rPr lang="ja-JP" altLang="en-US" dirty="0" smtClean="0"/>
+              <a:t> </a:t>
+            </a:r>
+            <a:r>
+              <a:rPr lang="en-US" altLang="ja-JP" dirty="0" smtClean="0"/>
+              <a:t>backward</a:t>
+            </a:r>
+            <a:r>
+              <a:rPr lang="ja-JP" altLang="en-US" dirty="0" smtClean="0"/>
+              <a:t> </a:t>
+            </a:r>
+            <a:r>
+              <a:rPr lang="en-US" altLang="ja-JP" dirty="0" smtClean="0"/>
+              <a:t>transformation:</a:t>
+            </a:r>
+          </a:p>
+          <a:p>
+            <a:endParaRPr kumimoji="1" lang="ja-JP" altLang="en-US" dirty="0"/>
+          </a:p>
+        </p:txBody>
+      </p:sp>
+      <p:sp>
+        <p:nvSpPr>
+          <p:cNvPr id="3" name="正方形/長方形 2"/>
+          <p:cNvSpPr/>
+          <p:nvPr/>
+        </p:nvSpPr>
+        <p:spPr>
+          <a:xfrm>
+            <a:off x="683568" y="2132856"/>
+            <a:ext cx="7808337" cy="1754327"/>
+          </a:xfrm>
+          <a:prstGeom prst="rect">
+            <a:avLst/>
+          </a:prstGeom>
+          <a:ln>
+            <a:solidFill>
+              <a:schemeClr val="accent1"/>
+            </a:solidFill>
+          </a:ln>
+        </p:spPr>
+        <p:txBody>
+          <a:bodyPr wrap="square">
+            <a:spAutoFit/>
+          </a:bodyPr>
+          <a:lstStyle/>
+          <a:p>
+            <a:r>
+              <a:rPr lang="en-US" altLang="ja-JP" dirty="0"/>
+              <a:t>*</a:t>
+            </a:r>
+            <a:r>
+              <a:rPr lang="en-US" altLang="ja-JP" dirty="0" err="1"/>
+              <a:t>Brul</a:t>
+            </a:r>
+            <a:r>
+              <a:rPr lang="en-US" altLang="ja-JP" dirty="0"/>
+              <a:t>&gt; put (u0 (</a:t>
+            </a:r>
+            <a:r>
+              <a:rPr lang="en-US" altLang="ja-JP" dirty="0" err="1"/>
+              <a:t>RInt</a:t>
+            </a:r>
+            <a:r>
+              <a:rPr lang="en-US" altLang="ja-JP" dirty="0"/>
+              <a:t> (-1)) (</a:t>
+            </a:r>
+            <a:r>
+              <a:rPr lang="en-US" altLang="ja-JP" dirty="0" err="1"/>
+              <a:t>fdFun</a:t>
+            </a:r>
+            <a:r>
+              <a:rPr lang="en-US" altLang="ja-JP" dirty="0"/>
+              <a:t> </a:t>
+            </a:r>
+            <a:r>
+              <a:rPr lang="en-US" altLang="ja-JP" dirty="0" err="1"/>
+              <a:t>sfdMap</a:t>
+            </a:r>
+            <a:r>
+              <a:rPr lang="en-US" altLang="ja-JP" dirty="0"/>
+              <a:t> </a:t>
+            </a:r>
+            <a:r>
+              <a:rPr lang="en-US" altLang="ja-JP" dirty="0" err="1"/>
+              <a:t>vfdMap</a:t>
+            </a:r>
+            <a:r>
+              <a:rPr lang="en-US" altLang="ja-JP" dirty="0"/>
+              <a:t> </a:t>
+            </a:r>
+            <a:r>
+              <a:rPr lang="en-US" altLang="ja-JP" dirty="0" err="1"/>
+              <a:t>svMap</a:t>
+            </a:r>
+            <a:r>
+              <a:rPr lang="en-US" altLang="ja-JP" dirty="0"/>
+              <a:t> v)) s v</a:t>
+            </a:r>
+          </a:p>
+          <a:p>
+            <a:r>
+              <a:rPr lang="en-US" altLang="ja-JP" dirty="0"/>
+              <a:t>Just</a:t>
+            </a:r>
+          </a:p>
+          <a:p>
+            <a:r>
+              <a:rPr lang="en-US" altLang="ja-JP" dirty="0"/>
+              <a:t>[[</a:t>
+            </a:r>
+            <a:r>
+              <a:rPr lang="en-US" altLang="ja-JP" dirty="0" err="1"/>
+              <a:t>RString</a:t>
+            </a:r>
+            <a:r>
+              <a:rPr lang="en-US" altLang="ja-JP" dirty="0"/>
+              <a:t> "Lullaby",</a:t>
+            </a:r>
+            <a:r>
+              <a:rPr lang="en-US" altLang="ja-JP" dirty="0" err="1"/>
+              <a:t>RInt</a:t>
+            </a:r>
+            <a:r>
+              <a:rPr lang="en-US" altLang="ja-JP" dirty="0"/>
+              <a:t> 1989,RInt </a:t>
+            </a:r>
+            <a:r>
+              <a:rPr lang="en-US" altLang="ja-JP" dirty="0">
+                <a:solidFill>
+                  <a:srgbClr val="FF6600"/>
+                </a:solidFill>
+              </a:rPr>
+              <a:t>4</a:t>
+            </a:r>
+            <a:r>
+              <a:rPr lang="en-US" altLang="ja-JP" dirty="0"/>
+              <a:t>,RString "Galore",</a:t>
+            </a:r>
+            <a:r>
+              <a:rPr lang="en-US" altLang="ja-JP" dirty="0" err="1"/>
+              <a:t>RInt</a:t>
+            </a:r>
+            <a:r>
+              <a:rPr lang="en-US" altLang="ja-JP" dirty="0"/>
+              <a:t> 1],</a:t>
+            </a:r>
+          </a:p>
+          <a:p>
+            <a:r>
+              <a:rPr lang="en-US" altLang="ja-JP" dirty="0"/>
+              <a:t>[</a:t>
+            </a:r>
+            <a:r>
+              <a:rPr lang="en-US" altLang="ja-JP" dirty="0" err="1"/>
+              <a:t>RString</a:t>
+            </a:r>
+            <a:r>
+              <a:rPr lang="en-US" altLang="ja-JP" dirty="0"/>
+              <a:t> "Lullaby",</a:t>
+            </a:r>
+            <a:r>
+              <a:rPr lang="en-US" altLang="ja-JP" dirty="0" err="1"/>
+              <a:t>RInt</a:t>
+            </a:r>
+            <a:r>
+              <a:rPr lang="en-US" altLang="ja-JP" dirty="0"/>
+              <a:t> 1989,RInt </a:t>
+            </a:r>
+            <a:r>
+              <a:rPr lang="en-US" altLang="ja-JP" dirty="0">
+                <a:solidFill>
+                  <a:srgbClr val="FF6600"/>
+                </a:solidFill>
+              </a:rPr>
+              <a:t>4</a:t>
+            </a:r>
+            <a:r>
+              <a:rPr lang="en-US" altLang="ja-JP" dirty="0"/>
+              <a:t>,RString "Show",</a:t>
+            </a:r>
+            <a:r>
+              <a:rPr lang="en-US" altLang="ja-JP" dirty="0" err="1"/>
+              <a:t>RInt</a:t>
+            </a:r>
+            <a:r>
+              <a:rPr lang="en-US" altLang="ja-JP" dirty="0"/>
+              <a:t> 3],</a:t>
+            </a:r>
+          </a:p>
+          <a:p>
+            <a:r>
+              <a:rPr lang="en-US" altLang="ja-JP" dirty="0"/>
+              <a:t>[</a:t>
+            </a:r>
+            <a:r>
+              <a:rPr lang="en-US" altLang="ja-JP" dirty="0" err="1"/>
+              <a:t>RString</a:t>
+            </a:r>
+            <a:r>
+              <a:rPr lang="en-US" altLang="ja-JP" dirty="0"/>
+              <a:t> "</a:t>
+            </a:r>
+            <a:r>
+              <a:rPr lang="en-US" altLang="ja-JP" dirty="0" err="1"/>
+              <a:t>Lovesong</a:t>
+            </a:r>
+            <a:r>
+              <a:rPr lang="en-US" altLang="ja-JP" dirty="0"/>
+              <a:t>",</a:t>
+            </a:r>
+            <a:r>
+              <a:rPr lang="en-US" altLang="ja-JP" dirty="0" err="1"/>
+              <a:t>RInt</a:t>
+            </a:r>
+            <a:r>
+              <a:rPr lang="en-US" altLang="ja-JP" dirty="0"/>
+              <a:t> 1989,RInt 5,RString "Galore",</a:t>
+            </a:r>
+            <a:r>
+              <a:rPr lang="en-US" altLang="ja-JP" dirty="0" err="1"/>
+              <a:t>RInt</a:t>
+            </a:r>
+            <a:r>
+              <a:rPr lang="en-US" altLang="ja-JP" dirty="0"/>
+              <a:t> 1],</a:t>
+            </a:r>
+          </a:p>
+          <a:p>
+            <a:r>
+              <a:rPr lang="en-US" altLang="ja-JP" dirty="0"/>
+              <a:t>[</a:t>
+            </a:r>
+            <a:r>
+              <a:rPr lang="en-US" altLang="ja-JP" dirty="0" err="1"/>
+              <a:t>RString</a:t>
+            </a:r>
+            <a:r>
+              <a:rPr lang="en-US" altLang="ja-JP" dirty="0"/>
+              <a:t> "</a:t>
+            </a:r>
+            <a:r>
+              <a:rPr lang="en-US" altLang="ja-JP" dirty="0" err="1"/>
+              <a:t>Lovesong</a:t>
+            </a:r>
+            <a:r>
+              <a:rPr lang="en-US" altLang="ja-JP" dirty="0"/>
+              <a:t>",</a:t>
+            </a:r>
+            <a:r>
+              <a:rPr lang="en-US" altLang="ja-JP" dirty="0" err="1"/>
+              <a:t>RInt</a:t>
+            </a:r>
+            <a:r>
+              <a:rPr lang="en-US" altLang="ja-JP" dirty="0"/>
+              <a:t> 1989,RInt 5,RString "Disintegration",</a:t>
+            </a:r>
+            <a:r>
+              <a:rPr lang="en-US" altLang="ja-JP" dirty="0" err="1"/>
+              <a:t>RInt</a:t>
+            </a:r>
+            <a:r>
+              <a:rPr lang="en-US" altLang="ja-JP" dirty="0"/>
+              <a:t> 7]]</a:t>
+            </a:r>
+            <a:endParaRPr lang="ja-JP" altLang="en-US" dirty="0"/>
+          </a:p>
+        </p:txBody>
+      </p:sp>
+    </p:spTree>
+    <p:extLst>
+      <p:ext uri="{BB962C8B-B14F-4D97-AF65-F5344CB8AC3E}">
+        <p14:creationId xmlns:p14="http://schemas.microsoft.com/office/powerpoint/2010/main" val="2198470690"/>
+      </p:ext>
+    </p:extLst>
+  </p:cSld>
+  <p:clrMapOvr>
+    <a:masterClrMapping/>
+  </p:clrMapOvr>
+  <p:timing>
+    <p:tnLst>
+      <p:par>
+        <p:cTn xmlns:p14="http://schemas.microsoft.com/office/powerpoint/2010/main" id="1" dur="indefinite" restart="never" nodeType="tmRoot"/>
+      </p:par>
+    </p:tnLst>
+  </p:timing>
+</p:sld>
+</file>
+
+<file path=ppt/slides/slide62.xml><?xml version="1.0" encoding="utf-8"?>
+<p:sld xmlns:a="http://schemas.openxmlformats.org/drawingml/2006/main" xmlns:r="http://schemas.openxmlformats.org/officeDocument/2006/relationships" xmlns:p="http://schemas.openxmlformats.org/presentationml/2006/main">
+  <p:cSld>
+    <p:spTree>
+      <p:nvGrpSpPr>
+        <p:cNvPr id="1" name=""/>
+        <p:cNvGrpSpPr/>
+        <p:nvPr/>
+      </p:nvGrpSpPr>
+      <p:grpSpPr>
+        <a:xfrm>
+          <a:off x="0" y="0"/>
+          <a:ext cx="0" cy="0"/>
+          <a:chOff x="0" y="0"/>
+          <a:chExt cx="0" cy="0"/>
+        </a:xfrm>
+      </p:grpSpPr>
+      <p:sp>
+        <p:nvSpPr>
+          <p:cNvPr id="2" name="タイトル 1"/>
+          <p:cNvSpPr>
+            <a:spLocks noGrp="1"/>
+          </p:cNvSpPr>
+          <p:nvPr>
+            <p:ph type="title"/>
+          </p:nvPr>
+        </p:nvSpPr>
+        <p:spPr/>
+        <p:txBody>
+          <a:bodyPr/>
+          <a:lstStyle/>
+          <a:p>
+            <a:endParaRPr kumimoji="1" lang="ja-JP" altLang="en-US"/>
+          </a:p>
+        </p:txBody>
+      </p:sp>
+      <p:sp>
+        <p:nvSpPr>
+          <p:cNvPr id="4" name="スライド番号プレースホルダー 3"/>
+          <p:cNvSpPr>
+            <a:spLocks noGrp="1"/>
+          </p:cNvSpPr>
+          <p:nvPr>
+            <p:ph type="sldNum" sz="quarter" idx="11"/>
+          </p:nvPr>
+        </p:nvSpPr>
+        <p:spPr/>
+        <p:txBody>
+          <a:bodyPr/>
+          <a:lstStyle/>
+          <a:p>
+            <a:fld id="{F96F1464-7F58-8745-A325-E585E650CEFA}" type="slidenum">
+              <a:rPr lang="ja-JP" altLang="en-US" smtClean="0"/>
+              <a:pPr/>
+              <a:t>62</a:t>
+            </a:fld>
+            <a:endParaRPr lang="ja-JP" altLang="en-US"/>
+          </a:p>
+        </p:txBody>
+      </p:sp>
+      <p:sp>
+        <p:nvSpPr>
+          <p:cNvPr id="5" name="正方形/長方形 4"/>
+          <p:cNvSpPr/>
+          <p:nvPr/>
+        </p:nvSpPr>
+        <p:spPr>
+          <a:xfrm>
+            <a:off x="685800" y="2492896"/>
+            <a:ext cx="7848872" cy="3139321"/>
+          </a:xfrm>
+          <a:prstGeom prst="rect">
+            <a:avLst/>
+          </a:prstGeom>
+          <a:ln>
+            <a:solidFill>
+              <a:srgbClr val="FF6600"/>
+            </a:solidFill>
+          </a:ln>
+        </p:spPr>
+        <p:txBody>
+          <a:bodyPr wrap="square">
+            <a:spAutoFit/>
+          </a:bodyPr>
+          <a:lstStyle/>
+          <a:p>
+            <a:r>
+              <a:rPr lang="en-US" altLang="ja-JP" dirty="0"/>
+              <a:t>u0 :: </a:t>
+            </a:r>
+            <a:r>
+              <a:rPr lang="en-US" altLang="ja-JP" dirty="0" err="1"/>
+              <a:t>RType</a:t>
+            </a:r>
+            <a:r>
+              <a:rPr lang="en-US" altLang="ja-JP" dirty="0"/>
+              <a:t> -&gt; (Record -&gt; Record) -&gt; </a:t>
+            </a:r>
+            <a:r>
+              <a:rPr lang="en-US" altLang="ja-JP" dirty="0" err="1"/>
+              <a:t>BiGUL</a:t>
+            </a:r>
+            <a:r>
+              <a:rPr lang="en-US" altLang="ja-JP" dirty="0"/>
+              <a:t> [Record] [Record]</a:t>
+            </a:r>
+          </a:p>
+          <a:p>
+            <a:r>
+              <a:rPr lang="en-US" altLang="ja-JP" dirty="0"/>
+              <a:t>u0 d =</a:t>
+            </a:r>
+          </a:p>
+          <a:p>
+            <a:r>
+              <a:rPr lang="en-US" altLang="ja-JP" dirty="0"/>
+              <a:t>  </a:t>
+            </a:r>
+            <a:r>
+              <a:rPr lang="en-US" altLang="ja-JP" dirty="0" err="1"/>
+              <a:t>relAlign</a:t>
+            </a:r>
+            <a:endParaRPr lang="en-US" altLang="ja-JP" dirty="0"/>
+          </a:p>
+          <a:p>
+            <a:r>
+              <a:rPr lang="en-US" altLang="ja-JP" dirty="0"/>
+              <a:t>    (\r -&gt; (r !! 4) &gt; </a:t>
+            </a:r>
+            <a:r>
+              <a:rPr lang="en-US" altLang="ja-JP" dirty="0" err="1"/>
+              <a:t>RInt</a:t>
+            </a:r>
+            <a:r>
+              <a:rPr lang="en-US" altLang="ja-JP" dirty="0"/>
+              <a:t> 2)</a:t>
+            </a:r>
+          </a:p>
+          <a:p>
+            <a:r>
+              <a:rPr lang="en-US" altLang="ja-JP" dirty="0"/>
+              <a:t>    (\s -&gt; (s !! 0, s!!3))</a:t>
+            </a:r>
+          </a:p>
+          <a:p>
+            <a:r>
+              <a:rPr lang="en-US" altLang="ja-JP" dirty="0"/>
+              <a:t>    (\v -&gt; (v !! 0, v !! 2))</a:t>
+            </a:r>
+          </a:p>
+          <a:p>
+            <a:r>
+              <a:rPr lang="en-US" altLang="ja-JP" dirty="0"/>
+              <a:t>    $(update [p| (t: _: r: a: q: [])|]</a:t>
+            </a:r>
+          </a:p>
+          <a:p>
+            <a:r>
+              <a:rPr lang="en-US" altLang="ja-JP" dirty="0"/>
+              <a:t>             [p| (t: r: a: q: []) |]</a:t>
+            </a:r>
+          </a:p>
+          <a:p>
+            <a:r>
+              <a:rPr lang="en-US" altLang="ja-JP" dirty="0"/>
+              <a:t>             [d| t = Replace; r = Replace; a = Replace; q = Replace |])</a:t>
+            </a:r>
+          </a:p>
+          <a:p>
+            <a:r>
+              <a:rPr lang="en-US" altLang="ja-JP" dirty="0"/>
+              <a:t>    (\(t: r: a: q: []) -&gt; (t: d: r: a: q: []))</a:t>
+            </a:r>
+          </a:p>
+          <a:p>
+            <a:r>
+              <a:rPr lang="en-US" altLang="ja-JP" dirty="0"/>
+              <a:t>   </a:t>
+            </a:r>
+            <a:r>
+              <a:rPr lang="en-US" altLang="ja-JP" dirty="0">
+                <a:solidFill>
+                  <a:srgbClr val="FF6600"/>
+                </a:solidFill>
+              </a:rPr>
+              <a:t>(\(t: d: r: a: _: []) -&gt; Just (t: d: r: a: </a:t>
+            </a:r>
+            <a:r>
+              <a:rPr lang="en-US" altLang="ja-JP" dirty="0" err="1" smtClean="0">
+                <a:solidFill>
+                  <a:srgbClr val="FF6600"/>
+                </a:solidFill>
+              </a:rPr>
+              <a:t>Rint</a:t>
+            </a:r>
+            <a:r>
+              <a:rPr lang="en-US" altLang="ja-JP" dirty="0" smtClean="0">
+                <a:solidFill>
+                  <a:srgbClr val="FF6600"/>
+                </a:solidFill>
+              </a:rPr>
+              <a:t> 0:</a:t>
+            </a:r>
+            <a:r>
+              <a:rPr lang="en-US" altLang="ja-JP" dirty="0">
+                <a:solidFill>
+                  <a:srgbClr val="FF6600"/>
+                </a:solidFill>
+              </a:rPr>
+              <a:t>[]))</a:t>
+            </a:r>
+            <a:endParaRPr lang="ja-JP" altLang="en-US" dirty="0">
+              <a:solidFill>
+                <a:srgbClr val="FF6600"/>
+              </a:solidFill>
+            </a:endParaRPr>
+          </a:p>
+        </p:txBody>
+      </p:sp>
+      <p:sp>
+        <p:nvSpPr>
+          <p:cNvPr id="6" name="テキスト ボックス 5"/>
+          <p:cNvSpPr txBox="1"/>
+          <p:nvPr/>
+        </p:nvSpPr>
+        <p:spPr>
+          <a:xfrm>
+            <a:off x="685800" y="1556792"/>
+            <a:ext cx="7313038" cy="646331"/>
+          </a:xfrm>
+          <a:prstGeom prst="rect">
+            <a:avLst/>
+          </a:prstGeom>
+          <a:noFill/>
+        </p:spPr>
+        <p:txBody>
+          <a:bodyPr wrap="none" rtlCol="0">
+            <a:spAutoFit/>
+          </a:bodyPr>
+          <a:lstStyle/>
+          <a:p>
+            <a:r>
+              <a:rPr kumimoji="1" lang="en-US" altLang="ja-JP" dirty="0" smtClean="0"/>
+              <a:t>Define a new update policy: if an element is removed from the view,</a:t>
+            </a:r>
+            <a:r>
+              <a:rPr lang="en-US" altLang="en-US" dirty="0" smtClean="0"/>
+              <a:t> </a:t>
+            </a:r>
+          </a:p>
+          <a:p>
+            <a:r>
+              <a:rPr lang="en-US" altLang="en-US" dirty="0" smtClean="0"/>
+              <a:t>the corresponding source elements will have quantity 0. </a:t>
+            </a:r>
+            <a:endParaRPr kumimoji="1" lang="en-US" altLang="ja-JP" dirty="0" smtClean="0"/>
+          </a:p>
+        </p:txBody>
+      </p:sp>
+    </p:spTree>
+    <p:extLst>
+      <p:ext uri="{BB962C8B-B14F-4D97-AF65-F5344CB8AC3E}">
+        <p14:creationId xmlns:p14="http://schemas.microsoft.com/office/powerpoint/2010/main" val="2138873971"/>
+      </p:ext>
+    </p:extLst>
+  </p:cSld>
+  <p:clrMapOvr>
+    <a:masterClrMapping/>
+  </p:clrMapOvr>
+  <p:timing>
+    <p:tnLst>
+      <p:par>
+        <p:cTn xmlns:p14="http://schemas.microsoft.com/office/powerpoint/2010/main" id="1" dur="indefinite" restart="never" nodeType="tmRoot"/>
+      </p:par>
+    </p:tnLst>
+  </p:timing>
+</p:sld>
+</file>
+
+<file path=ppt/slides/slide63.xml><?xml version="1.0" encoding="utf-8"?>
+<p:sld xmlns:a="http://schemas.openxmlformats.org/drawingml/2006/main" xmlns:r="http://schemas.openxmlformats.org/officeDocument/2006/relationships" xmlns:p="http://schemas.openxmlformats.org/presentationml/2006/main">
+  <p:cSld>
+    <p:spTree>
+      <p:nvGrpSpPr>
+        <p:cNvPr id="1" name=""/>
+        <p:cNvGrpSpPr/>
+        <p:nvPr/>
+      </p:nvGrpSpPr>
+      <p:grpSpPr>
+        <a:xfrm>
+          <a:off x="0" y="0"/>
+          <a:ext cx="0" cy="0"/>
+          <a:chOff x="0" y="0"/>
+          <a:chExt cx="0" cy="0"/>
+        </a:xfrm>
+      </p:grpSpPr>
+      <p:sp>
+        <p:nvSpPr>
+          <p:cNvPr id="2" name="タイトル 1"/>
+          <p:cNvSpPr>
+            <a:spLocks noGrp="1"/>
+          </p:cNvSpPr>
+          <p:nvPr>
+            <p:ph type="title"/>
+          </p:nvPr>
+        </p:nvSpPr>
+        <p:spPr/>
+        <p:txBody>
+          <a:bodyPr/>
+          <a:lstStyle/>
+          <a:p>
+            <a:r>
+              <a:rPr kumimoji="1" lang="en-US" altLang="ja-JP" dirty="0" smtClean="0"/>
+              <a:t>Summary</a:t>
+            </a:r>
+            <a:endParaRPr kumimoji="1" lang="ja-JP" altLang="en-US" dirty="0"/>
+          </a:p>
+        </p:txBody>
+      </p:sp>
+      <p:sp>
+        <p:nvSpPr>
+          <p:cNvPr id="3" name="コンテンツ プレースホルダー 2"/>
+          <p:cNvSpPr>
+            <a:spLocks noGrp="1"/>
+          </p:cNvSpPr>
+          <p:nvPr>
+            <p:ph idx="1"/>
+          </p:nvPr>
+        </p:nvSpPr>
+        <p:spPr/>
+        <p:txBody>
+          <a:bodyPr/>
+          <a:lstStyle/>
+          <a:p>
+            <a:r>
+              <a:rPr kumimoji="1" lang="en-US" altLang="ja-JP" dirty="0" err="1" smtClean="0"/>
+              <a:t>Putback</a:t>
+            </a:r>
+            <a:r>
+              <a:rPr kumimoji="1" lang="en-US" altLang="ja-JP" dirty="0" smtClean="0"/>
+              <a:t>-based programming </a:t>
+            </a:r>
+            <a:r>
+              <a:rPr lang="en-US" altLang="ja-JP" dirty="0" smtClean="0"/>
+              <a:t>is</a:t>
+            </a:r>
+            <a:r>
+              <a:rPr kumimoji="1" lang="en-US" altLang="ja-JP" dirty="0" smtClean="0"/>
+              <a:t> fun and not that difficult.</a:t>
+            </a:r>
+          </a:p>
+          <a:p>
+            <a:endParaRPr kumimoji="1" lang="en-US" altLang="ja-JP" dirty="0" smtClean="0"/>
+          </a:p>
+          <a:p>
+            <a:r>
+              <a:rPr lang="en-US" altLang="ja-JP" dirty="0" err="1" smtClean="0"/>
+              <a:t>Putback</a:t>
+            </a:r>
+            <a:r>
+              <a:rPr lang="en-US" altLang="ja-JP" dirty="0" smtClean="0"/>
+              <a:t>-based BX can be served as the basis for developing various domain specific BX languages.</a:t>
+            </a:r>
+          </a:p>
+          <a:p>
+            <a:pPr lvl="1"/>
+            <a:r>
+              <a:rPr lang="en-US" altLang="ja-JP" dirty="0" err="1" smtClean="0"/>
+              <a:t>BiYacc</a:t>
+            </a:r>
+            <a:r>
+              <a:rPr lang="en-US" altLang="ja-JP" dirty="0" smtClean="0"/>
+              <a:t>/</a:t>
+            </a:r>
+            <a:r>
+              <a:rPr lang="en-US" altLang="ja-JP" dirty="0" err="1" smtClean="0"/>
+              <a:t>BiFluX</a:t>
+            </a:r>
+            <a:r>
+              <a:rPr lang="en-US" altLang="ja-JP" dirty="0" smtClean="0"/>
+              <a:t>/</a:t>
+            </a:r>
+            <a:r>
+              <a:rPr lang="en-US" altLang="ja-JP" dirty="0" err="1" smtClean="0"/>
+              <a:t>Brul</a:t>
+            </a:r>
+            <a:r>
+              <a:rPr lang="en-US" altLang="ja-JP" dirty="0"/>
+              <a:t> </a:t>
+            </a:r>
+            <a:r>
+              <a:rPr lang="is-IS" altLang="ja-JP" dirty="0" smtClean="0"/>
+              <a:t>…</a:t>
+            </a:r>
+            <a:endParaRPr lang="en-US" altLang="ja-JP" dirty="0"/>
+          </a:p>
+          <a:p>
+            <a:pPr marL="0" indent="0">
+              <a:buNone/>
+            </a:pPr>
+            <a:endParaRPr kumimoji="1" lang="en-US" altLang="ja-JP" dirty="0"/>
+          </a:p>
+          <a:p>
+            <a:r>
+              <a:rPr lang="en-US" altLang="ja-JP" dirty="0" err="1" smtClean="0"/>
+              <a:t>Putback</a:t>
+            </a:r>
+            <a:r>
+              <a:rPr lang="en-US" altLang="ja-JP" dirty="0" smtClean="0"/>
+              <a:t>-based BX is promising to be used to develop BIG BX systems:</a:t>
+            </a:r>
+          </a:p>
+          <a:p>
+            <a:pPr lvl="1"/>
+            <a:r>
+              <a:rPr kumimoji="1" lang="en-US" altLang="ja-JP" dirty="0" err="1" smtClean="0"/>
+              <a:t>Bidirectionalization</a:t>
+            </a:r>
+            <a:r>
+              <a:rPr kumimoji="1" lang="en-US" altLang="ja-JP" dirty="0" smtClean="0"/>
+              <a:t> of </a:t>
+            </a:r>
+            <a:r>
+              <a:rPr kumimoji="1" lang="en-US" altLang="ja-JP" dirty="0" err="1" smtClean="0"/>
+              <a:t>pandoc</a:t>
+            </a:r>
+            <a:r>
+              <a:rPr kumimoji="1" lang="en-US" altLang="ja-JP" dirty="0" smtClean="0"/>
+              <a:t> is ongoing</a:t>
+            </a:r>
+            <a:endParaRPr kumimoji="1" lang="ja-JP" altLang="en-US" dirty="0"/>
+          </a:p>
+        </p:txBody>
+      </p:sp>
+      <p:sp>
+        <p:nvSpPr>
+          <p:cNvPr id="4" name="スライド番号プレースホルダー 3"/>
+          <p:cNvSpPr>
+            <a:spLocks noGrp="1"/>
+          </p:cNvSpPr>
+          <p:nvPr>
+            <p:ph type="sldNum" sz="quarter" idx="11"/>
+          </p:nvPr>
+        </p:nvSpPr>
+        <p:spPr/>
+        <p:txBody>
+          <a:bodyPr/>
+          <a:lstStyle/>
+          <a:p>
+            <a:fld id="{F96F1464-7F58-8745-A325-E585E650CEFA}" type="slidenum">
+              <a:rPr lang="ja-JP" altLang="en-US" smtClean="0"/>
+              <a:pPr/>
+              <a:t>63</a:t>
+            </a:fld>
+            <a:endParaRPr lang="ja-JP" altLang="en-US"/>
+          </a:p>
+        </p:txBody>
+      </p:sp>
+    </p:spTree>
+    <p:extLst>
+      <p:ext uri="{BB962C8B-B14F-4D97-AF65-F5344CB8AC3E}">
+        <p14:creationId xmlns:p14="http://schemas.microsoft.com/office/powerpoint/2010/main" val="885165633"/>
+      </p:ext>
+    </p:extLst>
+  </p:cSld>
+  <p:clrMapOvr>
+    <a:masterClrMapping/>
+  </p:clrMapOvr>
+</p:sld>
+</file>
+
+<file path=ppt/slides/slide64.xml><?xml version="1.0" encoding="utf-8"?>
+<p:sld xmlns:a="http://schemas.openxmlformats.org/drawingml/2006/main" xmlns:r="http://schemas.openxmlformats.org/officeDocument/2006/relationships" xmlns:p="http://schemas.openxmlformats.org/presentationml/2006/main">
+  <p:cSld>
+    <p:spTree>
+      <p:nvGrpSpPr>
+        <p:cNvPr id="1" name=""/>
+        <p:cNvGrpSpPr/>
+        <p:nvPr/>
+      </p:nvGrpSpPr>
+      <p:grpSpPr>
+        <a:xfrm>
+          <a:off x="0" y="0"/>
+          <a:ext cx="0" cy="0"/>
+          <a:chOff x="0" y="0"/>
+          <a:chExt cx="0" cy="0"/>
+        </a:xfrm>
+      </p:grpSpPr>
+      <p:sp>
+        <p:nvSpPr>
+          <p:cNvPr id="2" name="タイトル 1"/>
+          <p:cNvSpPr>
+            <a:spLocks noGrp="1"/>
+          </p:cNvSpPr>
+          <p:nvPr>
+            <p:ph type="title"/>
+          </p:nvPr>
+        </p:nvSpPr>
+        <p:spPr/>
+        <p:txBody>
+          <a:bodyPr/>
+          <a:lstStyle/>
+          <a:p>
+            <a:r>
+              <a:rPr kumimoji="1" lang="en-US" altLang="ja-JP" dirty="0" smtClean="0"/>
+              <a:t>Future Work</a:t>
+            </a:r>
+            <a:endParaRPr kumimoji="1" lang="ja-JP" altLang="en-US" dirty="0"/>
+          </a:p>
+        </p:txBody>
+      </p:sp>
+      <p:sp>
+        <p:nvSpPr>
+          <p:cNvPr id="3" name="コンテンツ プレースホルダー 2"/>
+          <p:cNvSpPr>
+            <a:spLocks noGrp="1"/>
+          </p:cNvSpPr>
+          <p:nvPr>
+            <p:ph idx="1"/>
+          </p:nvPr>
+        </p:nvSpPr>
+        <p:spPr/>
+        <p:txBody>
+          <a:bodyPr/>
+          <a:lstStyle/>
+          <a:p>
+            <a:r>
+              <a:rPr lang="en-US" altLang="ja-JP" dirty="0" smtClean="0"/>
+              <a:t>Adding effects to </a:t>
+            </a:r>
+            <a:r>
+              <a:rPr lang="en-US" altLang="ja-JP" dirty="0" err="1" smtClean="0"/>
+              <a:t>BiGUL</a:t>
+            </a:r>
+            <a:endParaRPr lang="en-US" altLang="ja-JP" dirty="0" smtClean="0"/>
+          </a:p>
+          <a:p>
+            <a:endParaRPr lang="en-US" altLang="ja-JP" dirty="0"/>
+          </a:p>
+          <a:p>
+            <a:r>
+              <a:rPr lang="en-US" altLang="ja-JP" dirty="0" err="1" smtClean="0"/>
+              <a:t>BiGUL</a:t>
+            </a:r>
+            <a:r>
+              <a:rPr lang="en-US" altLang="ja-JP" dirty="0" smtClean="0"/>
+              <a:t> for graphs (</a:t>
+            </a:r>
+            <a:r>
+              <a:rPr lang="en-US" altLang="ja-JP" dirty="0" err="1" smtClean="0"/>
+              <a:t>GRoundTram</a:t>
+            </a:r>
+            <a:r>
+              <a:rPr lang="en-US" altLang="ja-JP" dirty="0" smtClean="0"/>
+              <a:t> </a:t>
+            </a:r>
+            <a:r>
+              <a:rPr lang="is-IS" altLang="ja-JP" dirty="0" smtClean="0"/>
+              <a:t>…)</a:t>
+            </a:r>
+            <a:endParaRPr lang="en-US" altLang="ja-JP" dirty="0" smtClean="0"/>
+          </a:p>
+          <a:p>
+            <a:pPr marL="0" indent="0">
+              <a:buNone/>
+            </a:pPr>
+            <a:endParaRPr lang="en-US" altLang="ja-JP" dirty="0" smtClean="0"/>
+          </a:p>
+          <a:p>
+            <a:r>
+              <a:rPr lang="en-US" altLang="ja-JP" dirty="0" smtClean="0"/>
+              <a:t>Static analysis (</a:t>
+            </a:r>
+            <a:r>
+              <a:rPr lang="en-US" altLang="ja-JP" dirty="0" err="1"/>
+              <a:t>v</a:t>
+            </a:r>
+            <a:r>
+              <a:rPr lang="en-US" altLang="ja-JP" dirty="0" err="1" smtClean="0"/>
+              <a:t>alidatity</a:t>
+            </a:r>
+            <a:r>
+              <a:rPr lang="en-US" altLang="ja-JP" dirty="0" smtClean="0"/>
+              <a:t> checking) of </a:t>
+            </a:r>
+            <a:r>
+              <a:rPr lang="en-US" altLang="ja-JP" dirty="0" err="1" smtClean="0"/>
+              <a:t>BiGUL</a:t>
+            </a:r>
+            <a:r>
+              <a:rPr lang="en-US" altLang="ja-JP" dirty="0" smtClean="0"/>
+              <a:t> programs</a:t>
+            </a:r>
+          </a:p>
+          <a:p>
+            <a:endParaRPr kumimoji="1" lang="en-US" altLang="ja-JP" dirty="0"/>
+          </a:p>
+          <a:p>
+            <a:r>
+              <a:rPr lang="en-US" altLang="ja-JP" dirty="0" err="1" smtClean="0"/>
+              <a:t>Putback</a:t>
+            </a:r>
+            <a:r>
+              <a:rPr lang="en-US" altLang="ja-JP" dirty="0" smtClean="0"/>
+              <a:t>-based bidirectional computing machine and compilation</a:t>
+            </a:r>
+          </a:p>
+          <a:p>
+            <a:endParaRPr kumimoji="1" lang="en-US" altLang="ja-JP" dirty="0"/>
+          </a:p>
+          <a:p>
+            <a:endParaRPr kumimoji="1" lang="ja-JP" altLang="en-US" dirty="0"/>
+          </a:p>
+        </p:txBody>
+      </p:sp>
+      <p:sp>
+        <p:nvSpPr>
+          <p:cNvPr id="4" name="スライド番号プレースホルダー 3"/>
+          <p:cNvSpPr>
+            <a:spLocks noGrp="1"/>
+          </p:cNvSpPr>
+          <p:nvPr>
+            <p:ph type="sldNum" sz="quarter" idx="11"/>
+          </p:nvPr>
+        </p:nvSpPr>
+        <p:spPr/>
+        <p:txBody>
+          <a:bodyPr/>
+          <a:lstStyle/>
+          <a:p>
+            <a:fld id="{F96F1464-7F58-8745-A325-E585E650CEFA}" type="slidenum">
+              <a:rPr lang="ja-JP" altLang="en-US" smtClean="0"/>
+              <a:pPr/>
+              <a:t>64</a:t>
+            </a:fld>
+            <a:endParaRPr lang="ja-JP" altLang="en-US"/>
+          </a:p>
+        </p:txBody>
+      </p:sp>
+    </p:spTree>
+    <p:extLst>
+      <p:ext uri="{BB962C8B-B14F-4D97-AF65-F5344CB8AC3E}">
+        <p14:creationId xmlns:p14="http://schemas.microsoft.com/office/powerpoint/2010/main" val="2246801805"/>
+      </p:ext>
+    </p:extLst>
+  </p:cSld>
+  <p:clrMapOvr>
+    <a:masterClrMapping/>
+  </p:clrMapOvr>
 </p:sld>
 </file>
 
